--- a/APMT_Coaching_Stow_FFF_ROBOTSS.pptx
+++ b/APMT_Coaching_Stow_FFF_ROBOTSS.pptx
@@ -21,9 +21,10 @@
     <p:sldId id="269" r:id="rId15"/>
     <p:sldId id="270" r:id="rId16"/>
     <p:sldId id="271" r:id="rId17"/>
+    <p:sldId id="272" r:id="rId18"/>
   </p:sldIdLst>
   <p:notesMasterIdLst>
-    <p:notesMasterId r:id="rId18"/>
+    <p:notesMasterId r:id="rId19"/>
   </p:notesMasterIdLst>
   <p:sldSz cx="9144000" cy="5143500"/>
   <p:notesSz cx="5143500" cy="9144000"/>
@@ -122,7 +123,7 @@
   <p:extLst>
     <p:ext uri="{521415D9-36F7-43E2-AB2F-B90AF26B5E84}">
       <p14:sectionLst xmlns:p14="http://schemas.microsoft.com/office/powerpoint/2010/main">
-        <p14:section name="Intro" id="{eae75f32-f901-7bf8-64f3-ed7f78f61b9b}">
+        <p14:section name="Intro" id="{03c4c055-ca39-53e4-7d6c-df39c4d04d3c}">
           <p14:sldIdLst>
             <p14:sldId id="256"/>
             <p14:sldId id="257"/>
@@ -130,7 +131,7 @@
             <p14:sldId id="259"/>
           </p14:sldIdLst>
         </p14:section>
-        <p14:section name="First Face Fix" id="{5a1c7c61-5b38-2e34-89f7-3cfbd445ffda}">
+        <p14:section name="First Face Fix" id="{398b268b-a1f4-d2e1-6a58-06c2c9fba9d0}">
           <p14:sldIdLst>
             <p14:sldId id="260"/>
             <p14:sldId id="261"/>
@@ -139,19 +140,20 @@
             <p14:sldId id="264"/>
           </p14:sldIdLst>
         </p14:section>
-        <p14:section name="ROBOTSS" id="{4eaea52b-80b8-a890-0919-dd2854085b74}">
+        <p14:section name="ROBOTSS" id="{0880c127-9b57-7776-301c-3b59e99bcf91}">
           <p14:sldIdLst>
             <p14:sldId id="265"/>
             <p14:sldId id="266"/>
             <p14:sldId id="267"/>
             <p14:sldId id="268"/>
             <p14:sldId id="269"/>
+            <p14:sldId id="270"/>
           </p14:sldIdLst>
         </p14:section>
-        <p14:section name="Wrap-up" id="{16d2a5ca-a0c0-70c4-d3cb-27614b62dff0}">
+        <p14:section name="Wrap-up" id="{79e0f144-1d4e-da57-8644-416b2b078c8d}">
           <p14:sldIdLst>
-            <p14:sldId id="270"/>
             <p14:sldId id="271"/>
+            <p14:sldId id="272"/>
           </p14:sldIdLst>
         </p14:section>
       </p14:sectionLst>
@@ -998,7 +1000,7 @@
           <a:p>
             <a:r>
               <a:rPr lang="en-US" dirty="0"/>
-              <a:t>T is for titles out. Books and DVDs go in with the spine facing outward, so pickers can find them straight away. The first S is stacking. Only stack items of the same ASIN, only when they have at least two flat surfaces, and always keep them below the retention bands. The last S is similar items. Never put items that look alike or have similar names in the same bin. Use the cross method instead, because the system won't always warn you on screen.</a:t>
+              <a:t>T is for titles out. Books and DVDs go in with the spine facing outward, so pickers can find them straight away. The first S is stacking. Only stack items of the same ASIN, only when they have at least two flat surfaces, and always keep them below the retention bands.</a:t>
             </a:r>
             <a:endParaRPr lang="en-US" dirty="0"/>
           </a:p>
@@ -1086,7 +1088,7 @@
           <a:p>
             <a:r>
               <a:rPr lang="en-US" dirty="0"/>
-              <a:t>So here's your shift, bin by bin. At shift start and after every break, do your one-minute First Face Fix. On every bin you touch, apply ROBOTSS. And all shift long, fix as you go. Do these three things consistently and fewer units will fall, our wAPMT will come down, and our customers get what they ordered.</a:t>
+              <a:t>The last S is similar items. Never put items that look alike, or have similar names, in the same bin, like these two cables that only differ by length. Use the cross method for similar items instead, because the system won't always warn you on screen, and the picker could grab the wrong one.</a:t>
             </a:r>
             <a:endParaRPr lang="en-US" dirty="0"/>
           </a:p>
@@ -1174,7 +1176,7 @@
           <a:p>
             <a:r>
               <a:rPr lang="en-US" dirty="0"/>
-              <a:t>Small fixes make a big impact. Thanks for watching, and thanks for looking after every bin, every time. If you have any questions, speak to your Process Guide, your Area Manager, or the ICQA team. And please take a second to rate this video.</a:t>
+              <a:t>So here's your shift, bin by bin. At shift start and after every break, do your one-minute First Face Fix. On every bin you touch, apply ROBOTSS. And all shift long, fix as you go. Do these three things consistently and fewer units will fall, our wAPMT will come down, and our customers get what they ordered.</a:t>
             </a:r>
             <a:endParaRPr lang="en-US" dirty="0"/>
           </a:p>
@@ -1198,6 +1200,94 @@
             <a:fld id="{F7021451-1387-4CA6-816F-3879F97B5CBC}" type="slidenum">
               <a:rPr lang="en-US"/>
               <a:t>16</a:t>
+            </a:fld>
+            <a:endParaRPr lang="en-US"/>
+          </a:p>
+        </p:txBody>
+      </p:sp>
+    </p:spTree>
+    <p:extLst>
+      <p:ext uri="{BB962C8B-B14F-4D97-AF65-F5344CB8AC3E}">
+        <p14:creationId xmlns:p14="http://schemas.microsoft.com/office/powerpoint/2010/main" val="1024086991"/>
+      </p:ext>
+    </p:extLst>
+  </p:cSld>
+  <p:clrMapOvr>
+    <a:masterClrMapping/>
+  </p:clrMapOvr>
+</p:notes>
+</file>
+
+<file path=ppt/notesSlides/notesSlide17.xml><?xml version="1.0" encoding="utf-8"?>
+<p:notes xmlns:a="http://schemas.openxmlformats.org/drawingml/2006/main" xmlns:r="http://schemas.openxmlformats.org/officeDocument/2006/relationships" xmlns:p="http://schemas.openxmlformats.org/presentationml/2006/main">
+  <p:cSld>
+    <p:spTree>
+      <p:nvGrpSpPr>
+        <p:cNvPr id="1" name=""/>
+        <p:cNvGrpSpPr/>
+        <p:nvPr/>
+      </p:nvGrpSpPr>
+      <p:grpSpPr>
+        <a:xfrm>
+          <a:off x="0" y="0"/>
+          <a:ext cx="0" cy="0"/>
+          <a:chOff x="0" y="0"/>
+          <a:chExt cx="0" cy="0"/>
+        </a:xfrm>
+      </p:grpSpPr>
+      <p:sp>
+        <p:nvSpPr>
+          <p:cNvPr id="2" name="Slide Image Placeholder 1"/>
+          <p:cNvSpPr>
+            <a:spLocks noGrp="1" noRot="1" noChangeAspect="1"/>
+          </p:cNvSpPr>
+          <p:nvPr>
+            <p:ph type="sldImg"/>
+          </p:nvPr>
+        </p:nvSpPr>
+        <p:spPr/>
+      </p:sp>
+      <p:sp>
+        <p:nvSpPr>
+          <p:cNvPr id="3" name="Notes Placeholder 2"/>
+          <p:cNvSpPr>
+            <a:spLocks noGrp="1"/>
+          </p:cNvSpPr>
+          <p:nvPr>
+            <p:ph type="body" idx="1"/>
+          </p:nvPr>
+        </p:nvSpPr>
+        <p:spPr/>
+        <p:txBody>
+          <a:bodyPr/>
+          <a:lstStyle/>
+          <a:p>
+            <a:r>
+              <a:rPr lang="en-US" dirty="0"/>
+              <a:t>Small fixes make a big impact. Thanks for watching, and thanks for looking after every bin, every time. If you have any questions, speak to your Process Guide, your Area Manager, or the ICQA team. And please take a second to rate this video.</a:t>
+            </a:r>
+            <a:endParaRPr lang="en-US" dirty="0"/>
+          </a:p>
+        </p:txBody>
+      </p:sp>
+      <p:sp>
+        <p:nvSpPr>
+          <p:cNvPr id="4" name="Slide Number Placeholder 3"/>
+          <p:cNvSpPr>
+            <a:spLocks noGrp="1"/>
+          </p:cNvSpPr>
+          <p:nvPr>
+            <p:ph type="sldNum" sz="quarter" idx="10"/>
+          </p:nvPr>
+        </p:nvSpPr>
+        <p:spPr/>
+        <p:txBody>
+          <a:bodyPr/>
+          <a:lstStyle/>
+          <a:p>
+            <a:fld id="{F7021451-1387-4CA6-816F-3879F97B5CBC}" type="slidenum">
+              <a:rPr lang="en-US"/>
+              <a:t>17</a:t>
             </a:fld>
             <a:endParaRPr lang="en-US"/>
           </a:p>
@@ -3727,7 +3817,7 @@
         <p:spPr>
           <a:xfrm>
             <a:off x="457200" y="1325880"/>
-            <a:ext cx="2606040" cy="3200400"/>
+            <a:ext cx="2606040" cy="3246120"/>
           </a:xfrm>
           <a:prstGeom prst="roundRect">
             <a:avLst>
@@ -3748,8 +3838,8 @@
         </p:nvSpPr>
         <p:spPr>
           <a:xfrm>
-            <a:off x="685800" y="1554480"/>
-            <a:ext cx="731520" cy="731520"/>
+            <a:off x="640080" y="1490472"/>
+            <a:ext cx="502920" cy="502920"/>
           </a:xfrm>
           <a:prstGeom prst="ellipse">
             <a:avLst/>
@@ -3768,8 +3858,8 @@
         </p:nvSpPr>
         <p:spPr>
           <a:xfrm>
-            <a:off x="685800" y="1554480"/>
-            <a:ext cx="731520" cy="731520"/>
+            <a:off x="640080" y="1490472"/>
+            <a:ext cx="502920" cy="502920"/>
           </a:xfrm>
           <a:prstGeom prst="rect">
             <a:avLst/>
@@ -3785,7 +3875,7 @@
               <a:buNone/>
             </a:pPr>
             <a:r>
-              <a:rPr lang="en-US" sz="3000" b="1" dirty="0">
+              <a:rPr lang="en-US" sz="2200" b="1" dirty="0">
                 <a:solidFill>
                   <a:schemeClr val="accent1"/>
                 </a:solidFill>
@@ -3795,7 +3885,7 @@
               </a:rPr>
               <a:t>R</a:t>
             </a:r>
-            <a:endParaRPr lang="en-US" sz="3000" dirty="0"/>
+            <a:endParaRPr lang="en-US" sz="2200" dirty="0"/>
           </a:p>
         </p:txBody>
       </p:sp>
@@ -3807,8 +3897,8 @@
         </p:nvSpPr>
         <p:spPr>
           <a:xfrm>
-            <a:off x="685800" y="2423160"/>
-            <a:ext cx="2194560" cy="411480"/>
+            <a:off x="1280160" y="1490472"/>
+            <a:ext cx="1645920" cy="502920"/>
           </a:xfrm>
           <a:prstGeom prst="rect">
             <a:avLst/>
@@ -3824,27 +3914,51 @@
               <a:buNone/>
             </a:pPr>
             <a:r>
-              <a:rPr lang="en-US" sz="1900" b="1" dirty="0">
+              <a:rPr lang="en-US" sz="1700" b="1" dirty="0">
                 <a:solidFill>
                   <a:schemeClr val="tx1"/>
                 </a:solidFill>
               </a:rPr>
               <a:t>Right bin size</a:t>
             </a:r>
-            <a:endParaRPr lang="en-US" sz="1900" dirty="0"/>
-          </a:p>
-        </p:txBody>
-      </p:sp>
-      <p:sp>
-        <p:nvSpPr>
-          <p:cNvPr id="7" name="Rule detail 1"/>
+            <a:endParaRPr lang="en-US" sz="1700" dirty="0"/>
+          </a:p>
+        </p:txBody>
+      </p:sp>
+      <p:pic>
+        <p:nvPicPr>
+          <p:cNvPr id="7" name="Rule picture 1" descr="Right bin size: wrong and right example">    </p:cNvPr>
+          <p:cNvPicPr>
+            <a:picLocks noChangeAspect="1"/>
+          </p:cNvPicPr>
+          <p:nvPr/>
+        </p:nvPicPr>
+        <p:blipFill>
+          <a:blip r:embed="rId1"/>
+          <a:stretch>
+            <a:fillRect/>
+          </a:stretch>
+        </p:blipFill>
+        <p:spPr>
+          <a:xfrm>
+            <a:off x="640080" y="2106968"/>
+            <a:ext cx="2240280" cy="998145"/>
+          </a:xfrm>
+          <a:prstGeom prst="rect">
+            <a:avLst/>
+          </a:prstGeom>
+        </p:spPr>
+      </p:pic>
+      <p:sp>
+        <p:nvSpPr>
+          <p:cNvPr id="8" name="Rule detail 1"/>
           <p:cNvSpPr txBox="1"/>
           <p:nvPr/>
         </p:nvSpPr>
         <p:spPr>
           <a:xfrm>
-            <a:off x="685800" y="2926080"/>
-            <a:ext cx="2240280" cy="1508760"/>
+            <a:off x="640080" y="3246120"/>
+            <a:ext cx="2286000" cy="1234440"/>
           </a:xfrm>
           <a:prstGeom prst="rect">
             <a:avLst/>
@@ -3858,7 +3972,7 @@
           <a:p>
             <a:pPr marL="342900" indent="-342900">
               <a:spcAft>
-                <a:spcPts val="600"/>
+                <a:spcPts val="400"/>
               </a:spcAft>
               <a:buSzPct val="100000"/>
               <a:buChar char="•"/>
@@ -3876,7 +3990,7 @@
           <a:p>
             <a:pPr marL="342900" indent="-342900">
               <a:spcAft>
-                <a:spcPts val="600"/>
+                <a:spcPts val="400"/>
               </a:spcAft>
               <a:buSzPct val="100000"/>
               <a:buChar char="•"/>
@@ -3895,14 +4009,14 @@
       </p:sp>
       <p:sp>
         <p:nvSpPr>
-          <p:cNvPr id="8" name="Rule card 2"/>
+          <p:cNvPr id="9" name="Rule card 2"/>
           <p:cNvSpPr/>
           <p:nvPr/>
         </p:nvSpPr>
         <p:spPr>
           <a:xfrm>
             <a:off x="3246120" y="1325880"/>
-            <a:ext cx="2606040" cy="3200400"/>
+            <a:ext cx="2606040" cy="3246120"/>
           </a:xfrm>
           <a:prstGeom prst="roundRect">
             <a:avLst>
@@ -3917,14 +4031,14 @@
       </p:sp>
       <p:sp>
         <p:nvSpPr>
-          <p:cNvPr id="9" name="Rule badge 2"/>
+          <p:cNvPr id="10" name="Rule badge 2"/>
           <p:cNvSpPr/>
           <p:nvPr/>
         </p:nvSpPr>
         <p:spPr>
           <a:xfrm>
-            <a:off x="3474720" y="1554480"/>
-            <a:ext cx="731520" cy="731520"/>
+            <a:off x="3429000" y="1490472"/>
+            <a:ext cx="502920" cy="502920"/>
           </a:xfrm>
           <a:prstGeom prst="ellipse">
             <a:avLst/>
@@ -3937,14 +4051,14 @@
       </p:sp>
       <p:sp>
         <p:nvSpPr>
-          <p:cNvPr id="10" name="Rule letter 2"/>
+          <p:cNvPr id="11" name="Rule letter 2"/>
           <p:cNvSpPr txBox="1"/>
           <p:nvPr/>
         </p:nvSpPr>
         <p:spPr>
           <a:xfrm>
-            <a:off x="3474720" y="1554480"/>
-            <a:ext cx="731520" cy="731520"/>
+            <a:off x="3429000" y="1490472"/>
+            <a:ext cx="502920" cy="502920"/>
           </a:xfrm>
           <a:prstGeom prst="rect">
             <a:avLst/>
@@ -3960,7 +4074,7 @@
               <a:buNone/>
             </a:pPr>
             <a:r>
-              <a:rPr lang="en-US" sz="3000" b="1" dirty="0">
+              <a:rPr lang="en-US" sz="2200" b="1" dirty="0">
                 <a:solidFill>
                   <a:schemeClr val="accent1"/>
                 </a:solidFill>
@@ -3970,20 +4084,20 @@
               </a:rPr>
               <a:t>O</a:t>
             </a:r>
-            <a:endParaRPr lang="en-US" sz="3000" dirty="0"/>
-          </a:p>
-        </p:txBody>
-      </p:sp>
-      <p:sp>
-        <p:nvSpPr>
-          <p:cNvPr id="11" name="Rule name 2"/>
+            <a:endParaRPr lang="en-US" sz="2200" dirty="0"/>
+          </a:p>
+        </p:txBody>
+      </p:sp>
+      <p:sp>
+        <p:nvSpPr>
+          <p:cNvPr id="12" name="Rule name 2"/>
           <p:cNvSpPr txBox="1"/>
           <p:nvPr/>
         </p:nvSpPr>
         <p:spPr>
           <a:xfrm>
-            <a:off x="3474720" y="2423160"/>
-            <a:ext cx="2194560" cy="411480"/>
+            <a:off x="4069080" y="1490472"/>
+            <a:ext cx="1645920" cy="502920"/>
           </a:xfrm>
           <a:prstGeom prst="rect">
             <a:avLst/>
@@ -3999,27 +4113,51 @@
               <a:buNone/>
             </a:pPr>
             <a:r>
-              <a:rPr lang="en-US" sz="1900" b="1" dirty="0">
+              <a:rPr lang="en-US" sz="1700" b="1" dirty="0">
                 <a:solidFill>
                   <a:schemeClr val="tx1"/>
                 </a:solidFill>
               </a:rPr>
               <a:t>No overhang</a:t>
             </a:r>
-            <a:endParaRPr lang="en-US" sz="1900" dirty="0"/>
-          </a:p>
-        </p:txBody>
-      </p:sp>
-      <p:sp>
-        <p:nvSpPr>
-          <p:cNvPr id="12" name="Rule detail 2"/>
+            <a:endParaRPr lang="en-US" sz="1700" dirty="0"/>
+          </a:p>
+        </p:txBody>
+      </p:sp>
+      <p:pic>
+        <p:nvPicPr>
+          <p:cNvPr id="13" name="Rule picture 2" descr="No overhang: wrong and right example">    </p:cNvPr>
+          <p:cNvPicPr>
+            <a:picLocks noChangeAspect="1"/>
+          </p:cNvPicPr>
+          <p:nvPr/>
+        </p:nvPicPr>
+        <p:blipFill>
+          <a:blip r:embed="rId2"/>
+          <a:stretch>
+            <a:fillRect/>
+          </a:stretch>
+        </p:blipFill>
+        <p:spPr>
+          <a:xfrm>
+            <a:off x="3429000" y="2143936"/>
+            <a:ext cx="2240280" cy="924208"/>
+          </a:xfrm>
+          <a:prstGeom prst="rect">
+            <a:avLst/>
+          </a:prstGeom>
+        </p:spPr>
+      </p:pic>
+      <p:sp>
+        <p:nvSpPr>
+          <p:cNvPr id="14" name="Rule detail 2"/>
           <p:cNvSpPr txBox="1"/>
           <p:nvPr/>
         </p:nvSpPr>
         <p:spPr>
           <a:xfrm>
-            <a:off x="3474720" y="2926080"/>
-            <a:ext cx="2240280" cy="1508760"/>
+            <a:off x="3429000" y="3246120"/>
+            <a:ext cx="2286000" cy="1234440"/>
           </a:xfrm>
           <a:prstGeom prst="rect">
             <a:avLst/>
@@ -4033,7 +4171,7 @@
           <a:p>
             <a:pPr marL="342900" indent="-342900">
               <a:spcAft>
-                <a:spcPts val="600"/>
+                <a:spcPts val="400"/>
               </a:spcAft>
               <a:buSzPct val="100000"/>
               <a:buChar char="•"/>
@@ -4051,7 +4189,7 @@
           <a:p>
             <a:pPr marL="342900" indent="-342900">
               <a:spcAft>
-                <a:spcPts val="600"/>
+                <a:spcPts val="400"/>
               </a:spcAft>
               <a:buSzPct val="100000"/>
               <a:buChar char="•"/>
@@ -4140,7 +4278,7 @@
         <p:spPr>
           <a:xfrm>
             <a:off x="457200" y="1325880"/>
-            <a:ext cx="2606040" cy="3200400"/>
+            <a:ext cx="2606040" cy="3246120"/>
           </a:xfrm>
           <a:prstGeom prst="roundRect">
             <a:avLst>
@@ -4161,8 +4299,8 @@
         </p:nvSpPr>
         <p:spPr>
           <a:xfrm>
-            <a:off x="685800" y="1554480"/>
-            <a:ext cx="731520" cy="731520"/>
+            <a:off x="640080" y="1490472"/>
+            <a:ext cx="502920" cy="502920"/>
           </a:xfrm>
           <a:prstGeom prst="ellipse">
             <a:avLst/>
@@ -4181,8 +4319,8 @@
         </p:nvSpPr>
         <p:spPr>
           <a:xfrm>
-            <a:off x="685800" y="1554480"/>
-            <a:ext cx="731520" cy="731520"/>
+            <a:off x="640080" y="1490472"/>
+            <a:ext cx="502920" cy="502920"/>
           </a:xfrm>
           <a:prstGeom prst="rect">
             <a:avLst/>
@@ -4198,7 +4336,7 @@
               <a:buNone/>
             </a:pPr>
             <a:r>
-              <a:rPr lang="en-US" sz="3000" b="1" dirty="0">
+              <a:rPr lang="en-US" sz="2200" b="1" dirty="0">
                 <a:solidFill>
                   <a:schemeClr val="accent1"/>
                 </a:solidFill>
@@ -4208,7 +4346,7 @@
               </a:rPr>
               <a:t>B</a:t>
             </a:r>
-            <a:endParaRPr lang="en-US" sz="3000" dirty="0"/>
+            <a:endParaRPr lang="en-US" sz="2200" dirty="0"/>
           </a:p>
         </p:txBody>
       </p:sp>
@@ -4220,8 +4358,8 @@
         </p:nvSpPr>
         <p:spPr>
           <a:xfrm>
-            <a:off x="685800" y="2423160"/>
-            <a:ext cx="2194560" cy="411480"/>
+            <a:off x="1280160" y="1490472"/>
+            <a:ext cx="1645920" cy="502920"/>
           </a:xfrm>
           <a:prstGeom prst="rect">
             <a:avLst/>
@@ -4237,27 +4375,51 @@
               <a:buNone/>
             </a:pPr>
             <a:r>
-              <a:rPr lang="en-US" sz="1900" b="1" dirty="0">
+              <a:rPr lang="en-US" sz="1700" b="1" dirty="0">
                 <a:solidFill>
                   <a:schemeClr val="tx1"/>
                 </a:solidFill>
               </a:rPr>
               <a:t>Blocking</a:t>
             </a:r>
-            <a:endParaRPr lang="en-US" sz="1900" dirty="0"/>
-          </a:p>
-        </p:txBody>
-      </p:sp>
-      <p:sp>
-        <p:nvSpPr>
-          <p:cNvPr id="7" name="Rule detail 1"/>
+            <a:endParaRPr lang="en-US" sz="1700" dirty="0"/>
+          </a:p>
+        </p:txBody>
+      </p:sp>
+      <p:pic>
+        <p:nvPicPr>
+          <p:cNvPr id="7" name="Rule picture 1" descr="Blocking: wrong and right example">    </p:cNvPr>
+          <p:cNvPicPr>
+            <a:picLocks noChangeAspect="1"/>
+          </p:cNvPicPr>
+          <p:nvPr/>
+        </p:nvPicPr>
+        <p:blipFill>
+          <a:blip r:embed="rId1"/>
+          <a:stretch>
+            <a:fillRect/>
+          </a:stretch>
+        </p:blipFill>
+        <p:spPr>
+          <a:xfrm>
+            <a:off x="640080" y="2136542"/>
+            <a:ext cx="2240280" cy="938995"/>
+          </a:xfrm>
+          <a:prstGeom prst="rect">
+            <a:avLst/>
+          </a:prstGeom>
+        </p:spPr>
+      </p:pic>
+      <p:sp>
+        <p:nvSpPr>
+          <p:cNvPr id="8" name="Rule detail 1"/>
           <p:cNvSpPr txBox="1"/>
           <p:nvPr/>
         </p:nvSpPr>
         <p:spPr>
           <a:xfrm>
-            <a:off x="685800" y="2926080"/>
-            <a:ext cx="2240280" cy="1508760"/>
+            <a:off x="640080" y="3246120"/>
+            <a:ext cx="2286000" cy="1234440"/>
           </a:xfrm>
           <a:prstGeom prst="rect">
             <a:avLst/>
@@ -4271,7 +4433,7 @@
           <a:p>
             <a:pPr marL="342900" indent="-342900">
               <a:spcAft>
-                <a:spcPts val="600"/>
+                <a:spcPts val="400"/>
               </a:spcAft>
               <a:buSzPct val="100000"/>
               <a:buChar char="•"/>
@@ -4289,7 +4451,7 @@
           <a:p>
             <a:pPr marL="342900" indent="-342900">
               <a:spcAft>
-                <a:spcPts val="600"/>
+                <a:spcPts val="400"/>
               </a:spcAft>
               <a:buSzPct val="100000"/>
               <a:buChar char="•"/>
@@ -4308,14 +4470,14 @@
       </p:sp>
       <p:sp>
         <p:nvSpPr>
-          <p:cNvPr id="8" name="Rule card 2"/>
+          <p:cNvPr id="9" name="Rule card 2"/>
           <p:cNvSpPr/>
           <p:nvPr/>
         </p:nvSpPr>
         <p:spPr>
           <a:xfrm>
             <a:off x="3246120" y="1325880"/>
-            <a:ext cx="2606040" cy="3200400"/>
+            <a:ext cx="2606040" cy="3246120"/>
           </a:xfrm>
           <a:prstGeom prst="roundRect">
             <a:avLst>
@@ -4330,14 +4492,14 @@
       </p:sp>
       <p:sp>
         <p:nvSpPr>
-          <p:cNvPr id="9" name="Rule badge 2"/>
+          <p:cNvPr id="10" name="Rule badge 2"/>
           <p:cNvSpPr/>
           <p:nvPr/>
         </p:nvSpPr>
         <p:spPr>
           <a:xfrm>
-            <a:off x="3474720" y="1554480"/>
-            <a:ext cx="731520" cy="731520"/>
+            <a:off x="3429000" y="1490472"/>
+            <a:ext cx="502920" cy="502920"/>
           </a:xfrm>
           <a:prstGeom prst="ellipse">
             <a:avLst/>
@@ -4350,14 +4512,14 @@
       </p:sp>
       <p:sp>
         <p:nvSpPr>
-          <p:cNvPr id="10" name="Rule letter 2"/>
+          <p:cNvPr id="11" name="Rule letter 2"/>
           <p:cNvSpPr txBox="1"/>
           <p:nvPr/>
         </p:nvSpPr>
         <p:spPr>
           <a:xfrm>
-            <a:off x="3474720" y="1554480"/>
-            <a:ext cx="731520" cy="731520"/>
+            <a:off x="3429000" y="1490472"/>
+            <a:ext cx="502920" cy="502920"/>
           </a:xfrm>
           <a:prstGeom prst="rect">
             <a:avLst/>
@@ -4373,7 +4535,7 @@
               <a:buNone/>
             </a:pPr>
             <a:r>
-              <a:rPr lang="en-US" sz="3000" b="1" dirty="0">
+              <a:rPr lang="en-US" sz="2200" b="1" dirty="0">
                 <a:solidFill>
                   <a:schemeClr val="accent1"/>
                 </a:solidFill>
@@ -4383,20 +4545,20 @@
               </a:rPr>
               <a:t>O</a:t>
             </a:r>
-            <a:endParaRPr lang="en-US" sz="3000" dirty="0"/>
-          </a:p>
-        </p:txBody>
-      </p:sp>
-      <p:sp>
-        <p:nvSpPr>
-          <p:cNvPr id="11" name="Rule name 2"/>
+            <a:endParaRPr lang="en-US" sz="2200" dirty="0"/>
+          </a:p>
+        </p:txBody>
+      </p:sp>
+      <p:sp>
+        <p:nvSpPr>
+          <p:cNvPr id="12" name="Rule name 2"/>
           <p:cNvSpPr txBox="1"/>
           <p:nvPr/>
         </p:nvSpPr>
         <p:spPr>
           <a:xfrm>
-            <a:off x="3474720" y="2423160"/>
-            <a:ext cx="2194560" cy="411480"/>
+            <a:off x="4069080" y="1490472"/>
+            <a:ext cx="1645920" cy="502920"/>
           </a:xfrm>
           <a:prstGeom prst="rect">
             <a:avLst/>
@@ -4412,27 +4574,51 @@
               <a:buNone/>
             </a:pPr>
             <a:r>
-              <a:rPr lang="en-US" sz="1900" b="1" dirty="0">
+              <a:rPr lang="en-US" sz="1700" b="1" dirty="0">
                 <a:solidFill>
                   <a:schemeClr val="tx1"/>
                 </a:solidFill>
               </a:rPr>
               <a:t>Overstuffing</a:t>
             </a:r>
-            <a:endParaRPr lang="en-US" sz="1900" dirty="0"/>
-          </a:p>
-        </p:txBody>
-      </p:sp>
-      <p:sp>
-        <p:nvSpPr>
-          <p:cNvPr id="12" name="Rule detail 2"/>
+            <a:endParaRPr lang="en-US" sz="1700" dirty="0"/>
+          </a:p>
+        </p:txBody>
+      </p:sp>
+      <p:pic>
+        <p:nvPicPr>
+          <p:cNvPr id="13" name="Rule picture 2" descr="Overstuffing: wrong and right example">    </p:cNvPr>
+          <p:cNvPicPr>
+            <a:picLocks noChangeAspect="1"/>
+          </p:cNvPicPr>
+          <p:nvPr/>
+        </p:nvPicPr>
+        <p:blipFill>
+          <a:blip r:embed="rId2"/>
+          <a:stretch>
+            <a:fillRect/>
+          </a:stretch>
+        </p:blipFill>
+        <p:spPr>
+          <a:xfrm>
+            <a:off x="3429000" y="2162420"/>
+            <a:ext cx="2240280" cy="887240"/>
+          </a:xfrm>
+          <a:prstGeom prst="rect">
+            <a:avLst/>
+          </a:prstGeom>
+        </p:spPr>
+      </p:pic>
+      <p:sp>
+        <p:nvSpPr>
+          <p:cNvPr id="14" name="Rule detail 2"/>
           <p:cNvSpPr txBox="1"/>
           <p:nvPr/>
         </p:nvSpPr>
         <p:spPr>
           <a:xfrm>
-            <a:off x="3474720" y="2926080"/>
-            <a:ext cx="2240280" cy="1508760"/>
+            <a:off x="3429000" y="3246120"/>
+            <a:ext cx="2286000" cy="1234440"/>
           </a:xfrm>
           <a:prstGeom prst="rect">
             <a:avLst/>
@@ -4446,7 +4632,7 @@
           <a:p>
             <a:pPr marL="342900" indent="-342900">
               <a:spcAft>
-                <a:spcPts val="600"/>
+                <a:spcPts val="400"/>
               </a:spcAft>
               <a:buSzPct val="100000"/>
               <a:buChar char="•"/>
@@ -4464,7 +4650,7 @@
           <a:p>
             <a:pPr marL="342900" indent="-342900">
               <a:spcAft>
-                <a:spcPts val="600"/>
+                <a:spcPts val="400"/>
               </a:spcAft>
               <a:buSzPct val="100000"/>
               <a:buChar char="•"/>
@@ -4538,7 +4724,7 @@
                   <a:schemeClr val="tx1"/>
                 </a:solidFill>
               </a:rPr>
-              <a:t>T + S + S: easy to pick</a:t>
+              <a:t>T + S: easy to find</a:t>
             </a:r>
             <a:endParaRPr lang="en-US" sz="2800" dirty="0"/>
           </a:p>
@@ -4546,18 +4732,18 @@
       </p:sp>
       <p:sp>
         <p:nvSpPr>
-          <p:cNvPr id="3" name="TSS row 1"/>
+          <p:cNvPr id="3" name="Rule card 1"/>
           <p:cNvSpPr/>
           <p:nvPr/>
         </p:nvSpPr>
         <p:spPr>
           <a:xfrm>
             <a:off x="457200" y="1325880"/>
-            <a:ext cx="5394960" cy="960120"/>
+            <a:ext cx="2606040" cy="3246120"/>
           </a:xfrm>
           <a:prstGeom prst="roundRect">
             <a:avLst>
-              <a:gd name="adj" fmla="val 9524"/>
+              <a:gd name="adj" fmla="val 3509"/>
             </a:avLst>
           </a:prstGeom>
           <a:solidFill>
@@ -4568,14 +4754,14 @@
       </p:sp>
       <p:sp>
         <p:nvSpPr>
-          <p:cNvPr id="4" name="TSS badge 1"/>
+          <p:cNvPr id="4" name="Rule badge 1"/>
           <p:cNvSpPr/>
           <p:nvPr/>
         </p:nvSpPr>
         <p:spPr>
           <a:xfrm>
-            <a:off x="640080" y="1472184"/>
-            <a:ext cx="658368" cy="658368"/>
+            <a:off x="640080" y="1490472"/>
+            <a:ext cx="502920" cy="502920"/>
           </a:xfrm>
           <a:prstGeom prst="ellipse">
             <a:avLst/>
@@ -4588,14 +4774,14 @@
       </p:sp>
       <p:sp>
         <p:nvSpPr>
-          <p:cNvPr id="5" name="TSS letter 1"/>
+          <p:cNvPr id="5" name="Rule letter 1"/>
           <p:cNvSpPr txBox="1"/>
           <p:nvPr/>
         </p:nvSpPr>
         <p:spPr>
           <a:xfrm>
-            <a:off x="640080" y="1472184"/>
-            <a:ext cx="658368" cy="658368"/>
+            <a:off x="640080" y="1490472"/>
+            <a:ext cx="502920" cy="502920"/>
           </a:xfrm>
           <a:prstGeom prst="rect">
             <a:avLst/>
@@ -4611,7 +4797,7 @@
               <a:buNone/>
             </a:pPr>
             <a:r>
-              <a:rPr lang="en-US" sz="2800" b="1" dirty="0">
+              <a:rPr lang="en-US" sz="2200" b="1" dirty="0">
                 <a:solidFill>
                   <a:schemeClr val="accent1"/>
                 </a:solidFill>
@@ -4621,20 +4807,20 @@
               </a:rPr>
               <a:t>T</a:t>
             </a:r>
-            <a:endParaRPr lang="en-US" sz="2800" dirty="0"/>
-          </a:p>
-        </p:txBody>
-      </p:sp>
-      <p:sp>
-        <p:nvSpPr>
-          <p:cNvPr id="6" name="TSS text 1"/>
+            <a:endParaRPr lang="en-US" sz="2200" dirty="0"/>
+          </a:p>
+        </p:txBody>
+      </p:sp>
+      <p:sp>
+        <p:nvSpPr>
+          <p:cNvPr id="6" name="Rule name 1"/>
           <p:cNvSpPr txBox="1"/>
           <p:nvPr/>
         </p:nvSpPr>
         <p:spPr>
           <a:xfrm>
-            <a:off x="1554480" y="1325880"/>
-            <a:ext cx="4114800" cy="960120"/>
+            <a:off x="1280160" y="1490472"/>
+            <a:ext cx="1645920" cy="502920"/>
           </a:xfrm>
           <a:prstGeom prst="rect">
             <a:avLst/>
@@ -4659,9 +4845,59 @@
             </a:r>
             <a:endParaRPr lang="en-US" sz="1700" dirty="0"/>
           </a:p>
-          <a:p>
-            <a:pPr indent="0" marL="0">
-              <a:buNone/>
+        </p:txBody>
+      </p:sp>
+      <p:pic>
+        <p:nvPicPr>
+          <p:cNvPr id="7" name="Rule picture 1" descr="Titles out: wrong and right example">    </p:cNvPr>
+          <p:cNvPicPr>
+            <a:picLocks noChangeAspect="1"/>
+          </p:cNvPicPr>
+          <p:nvPr/>
+        </p:nvPicPr>
+        <p:blipFill>
+          <a:blip r:embed="rId1"/>
+          <a:stretch>
+            <a:fillRect/>
+          </a:stretch>
+        </p:blipFill>
+        <p:spPr>
+          <a:xfrm>
+            <a:off x="640080" y="2180904"/>
+            <a:ext cx="2240280" cy="850271"/>
+          </a:xfrm>
+          <a:prstGeom prst="rect">
+            <a:avLst/>
+          </a:prstGeom>
+        </p:spPr>
+      </p:pic>
+      <p:sp>
+        <p:nvSpPr>
+          <p:cNvPr id="8" name="Rule detail 1"/>
+          <p:cNvSpPr txBox="1"/>
+          <p:nvPr/>
+        </p:nvSpPr>
+        <p:spPr>
+          <a:xfrm>
+            <a:off x="640080" y="3246120"/>
+            <a:ext cx="2286000" cy="1234440"/>
+          </a:xfrm>
+          <a:prstGeom prst="rect">
+            <a:avLst/>
+          </a:prstGeom>
+          <a:noFill/>
+          <a:ln/>
+        </p:spPr>
+        <p:txBody>
+          <a:bodyPr wrap="square" lIns="0" tIns="0" rIns="0" bIns="0" rtlCol="0" anchor="t"/>
+          <a:lstStyle/>
+          <a:p>
+            <a:pPr marL="342900" indent="-342900">
+              <a:spcAft>
+                <a:spcPts val="400"/>
+              </a:spcAft>
+              <a:buSzPct val="100000"/>
+              <a:buChar char="•"/>
             </a:pPr>
             <a:r>
               <a:rPr lang="en-US" sz="1400" dirty="0">
@@ -4669,26 +4905,44 @@
                   <a:schemeClr val="accent4"/>
                 </a:solidFill>
               </a:rPr>
-              <a:t>Book and DVD spines face outward so pickers can find them</a:t>
-            </a:r>
-            <a:endParaRPr lang="en-US" sz="1700" dirty="0"/>
-          </a:p>
-        </p:txBody>
-      </p:sp>
-      <p:sp>
-        <p:nvSpPr>
-          <p:cNvPr id="7" name="TSS row 2"/>
+              <a:t>Book and DVD spines face outward</a:t>
+            </a:r>
+            <a:endParaRPr lang="en-US" sz="1400" dirty="0"/>
+          </a:p>
+          <a:p>
+            <a:pPr marL="342900" indent="-342900">
+              <a:spcAft>
+                <a:spcPts val="400"/>
+              </a:spcAft>
+              <a:buSzPct val="100000"/>
+              <a:buChar char="•"/>
+            </a:pPr>
+            <a:r>
+              <a:rPr lang="en-US" sz="1400" dirty="0">
+                <a:solidFill>
+                  <a:schemeClr val="accent4"/>
+                </a:solidFill>
+              </a:rPr>
+              <a:t>So pickers can find them fast</a:t>
+            </a:r>
+            <a:endParaRPr lang="en-US" sz="1400" dirty="0"/>
+          </a:p>
+        </p:txBody>
+      </p:sp>
+      <p:sp>
+        <p:nvSpPr>
+          <p:cNvPr id="9" name="Rule card 2"/>
           <p:cNvSpPr/>
           <p:nvPr/>
         </p:nvSpPr>
         <p:spPr>
           <a:xfrm>
-            <a:off x="457200" y="2423160"/>
-            <a:ext cx="5394960" cy="960120"/>
+            <a:off x="3246120" y="1325880"/>
+            <a:ext cx="2606040" cy="3246120"/>
           </a:xfrm>
           <a:prstGeom prst="roundRect">
             <a:avLst>
-              <a:gd name="adj" fmla="val 9524"/>
+              <a:gd name="adj" fmla="val 3509"/>
             </a:avLst>
           </a:prstGeom>
           <a:solidFill>
@@ -4699,14 +4953,14 @@
       </p:sp>
       <p:sp>
         <p:nvSpPr>
-          <p:cNvPr id="8" name="TSS badge 2"/>
+          <p:cNvPr id="10" name="Rule badge 2"/>
           <p:cNvSpPr/>
           <p:nvPr/>
         </p:nvSpPr>
         <p:spPr>
           <a:xfrm>
-            <a:off x="640080" y="2569464"/>
-            <a:ext cx="658368" cy="658368"/>
+            <a:off x="3429000" y="1490472"/>
+            <a:ext cx="502920" cy="502920"/>
           </a:xfrm>
           <a:prstGeom prst="ellipse">
             <a:avLst/>
@@ -4719,14 +4973,14 @@
       </p:sp>
       <p:sp>
         <p:nvSpPr>
-          <p:cNvPr id="9" name="TSS letter 2"/>
+          <p:cNvPr id="11" name="Rule letter 2"/>
           <p:cNvSpPr txBox="1"/>
           <p:nvPr/>
         </p:nvSpPr>
         <p:spPr>
           <a:xfrm>
-            <a:off x="640080" y="2569464"/>
-            <a:ext cx="658368" cy="658368"/>
+            <a:off x="3429000" y="1490472"/>
+            <a:ext cx="502920" cy="502920"/>
           </a:xfrm>
           <a:prstGeom prst="rect">
             <a:avLst/>
@@ -4742,7 +4996,7 @@
               <a:buNone/>
             </a:pPr>
             <a:r>
-              <a:rPr lang="en-US" sz="2800" b="1" dirty="0">
+              <a:rPr lang="en-US" sz="2200" b="1" dirty="0">
                 <a:solidFill>
                   <a:schemeClr val="accent1"/>
                 </a:solidFill>
@@ -4752,20 +5006,20 @@
               </a:rPr>
               <a:t>S</a:t>
             </a:r>
-            <a:endParaRPr lang="en-US" sz="2800" dirty="0"/>
-          </a:p>
-        </p:txBody>
-      </p:sp>
-      <p:sp>
-        <p:nvSpPr>
-          <p:cNvPr id="10" name="TSS text 2"/>
+            <a:endParaRPr lang="en-US" sz="2200" dirty="0"/>
+          </a:p>
+        </p:txBody>
+      </p:sp>
+      <p:sp>
+        <p:nvSpPr>
+          <p:cNvPr id="12" name="Rule name 2"/>
           <p:cNvSpPr txBox="1"/>
           <p:nvPr/>
         </p:nvSpPr>
         <p:spPr>
           <a:xfrm>
-            <a:off x="1554480" y="2423160"/>
-            <a:ext cx="4114800" cy="960120"/>
+            <a:off x="4069080" y="1490472"/>
+            <a:ext cx="1645920" cy="502920"/>
           </a:xfrm>
           <a:prstGeom prst="rect">
             <a:avLst/>
@@ -4790,9 +5044,59 @@
             </a:r>
             <a:endParaRPr lang="en-US" sz="1700" dirty="0"/>
           </a:p>
-          <a:p>
-            <a:pPr indent="0" marL="0">
-              <a:buNone/>
+        </p:txBody>
+      </p:sp>
+      <p:pic>
+        <p:nvPicPr>
+          <p:cNvPr id="13" name="Rule picture 2" descr="Stacking: wrong and right example">    </p:cNvPr>
+          <p:cNvPicPr>
+            <a:picLocks noChangeAspect="1"/>
+          </p:cNvPicPr>
+          <p:nvPr/>
+        </p:nvPicPr>
+        <p:blipFill>
+          <a:blip r:embed="rId2"/>
+          <a:stretch>
+            <a:fillRect/>
+          </a:stretch>
+        </p:blipFill>
+        <p:spPr>
+          <a:xfrm>
+            <a:off x="3429000" y="2173511"/>
+            <a:ext cx="2240280" cy="865059"/>
+          </a:xfrm>
+          <a:prstGeom prst="rect">
+            <a:avLst/>
+          </a:prstGeom>
+        </p:spPr>
+      </p:pic>
+      <p:sp>
+        <p:nvSpPr>
+          <p:cNvPr id="14" name="Rule detail 2"/>
+          <p:cNvSpPr txBox="1"/>
+          <p:nvPr/>
+        </p:nvSpPr>
+        <p:spPr>
+          <a:xfrm>
+            <a:off x="3429000" y="3246120"/>
+            <a:ext cx="2286000" cy="1234440"/>
+          </a:xfrm>
+          <a:prstGeom prst="rect">
+            <a:avLst/>
+          </a:prstGeom>
+          <a:noFill/>
+          <a:ln/>
+        </p:spPr>
+        <p:txBody>
+          <a:bodyPr wrap="square" lIns="0" tIns="0" rIns="0" bIns="0" rtlCol="0" anchor="t"/>
+          <a:lstStyle/>
+          <a:p>
+            <a:pPr marL="342900" indent="-342900">
+              <a:spcAft>
+                <a:spcPts val="400"/>
+              </a:spcAft>
+              <a:buSzPct val="100000"/>
+              <a:buChar char="•"/>
             </a:pPr>
             <a:r>
               <a:rPr lang="en-US" sz="1400" dirty="0">
@@ -4800,130 +5104,17 @@
                   <a:schemeClr val="accent4"/>
                 </a:solidFill>
               </a:rPr>
-              <a:t>Stack the same ASIN only with two flat sides, and stay below the bands</a:t>
-            </a:r>
-            <a:endParaRPr lang="en-US" sz="1700" dirty="0"/>
-          </a:p>
-        </p:txBody>
-      </p:sp>
-      <p:sp>
-        <p:nvSpPr>
-          <p:cNvPr id="11" name="TSS row 3"/>
-          <p:cNvSpPr/>
-          <p:nvPr/>
-        </p:nvSpPr>
-        <p:spPr>
-          <a:xfrm>
-            <a:off x="457200" y="3520440"/>
-            <a:ext cx="5394960" cy="960120"/>
-          </a:xfrm>
-          <a:prstGeom prst="roundRect">
-            <a:avLst>
-              <a:gd name="adj" fmla="val 9524"/>
-            </a:avLst>
-          </a:prstGeom>
-          <a:solidFill>
-            <a:schemeClr val="bg1"/>
-          </a:solidFill>
-          <a:ln/>
-        </p:spPr>
-      </p:sp>
-      <p:sp>
-        <p:nvSpPr>
-          <p:cNvPr id="12" name="TSS badge 3"/>
-          <p:cNvSpPr/>
-          <p:nvPr/>
-        </p:nvSpPr>
-        <p:spPr>
-          <a:xfrm>
-            <a:off x="640080" y="3666744"/>
-            <a:ext cx="658368" cy="658368"/>
-          </a:xfrm>
-          <a:prstGeom prst="ellipse">
-            <a:avLst/>
-          </a:prstGeom>
-          <a:solidFill>
-            <a:schemeClr val="tx2"/>
-          </a:solidFill>
-          <a:ln/>
-        </p:spPr>
-      </p:sp>
-      <p:sp>
-        <p:nvSpPr>
-          <p:cNvPr id="13" name="TSS letter 3"/>
-          <p:cNvSpPr txBox="1"/>
-          <p:nvPr/>
-        </p:nvSpPr>
-        <p:spPr>
-          <a:xfrm>
-            <a:off x="640080" y="3666744"/>
-            <a:ext cx="658368" cy="658368"/>
-          </a:xfrm>
-          <a:prstGeom prst="rect">
-            <a:avLst/>
-          </a:prstGeom>
-          <a:noFill/>
-          <a:ln/>
-        </p:spPr>
-        <p:txBody>
-          <a:bodyPr wrap="square" lIns="0" tIns="0" rIns="0" bIns="0" rtlCol="0" anchor="ctr"/>
-          <a:lstStyle/>
-          <a:p>
-            <a:pPr algn="ctr" indent="0" marL="0">
-              <a:buNone/>
-            </a:pPr>
-            <a:r>
-              <a:rPr lang="en-US" sz="2800" b="1" dirty="0">
-                <a:solidFill>
-                  <a:schemeClr val="accent1"/>
-                </a:solidFill>
-                <a:latin typeface="Arial" pitchFamily="34" charset="0"/>
-                <a:ea typeface="Arial" pitchFamily="34" charset="-122"/>
-                <a:cs typeface="Arial" pitchFamily="34" charset="-120"/>
-              </a:rPr>
-              <a:t>S</a:t>
-            </a:r>
-            <a:endParaRPr lang="en-US" sz="2800" dirty="0"/>
-          </a:p>
-        </p:txBody>
-      </p:sp>
-      <p:sp>
-        <p:nvSpPr>
-          <p:cNvPr id="14" name="TSS text 3"/>
-          <p:cNvSpPr txBox="1"/>
-          <p:nvPr/>
-        </p:nvSpPr>
-        <p:spPr>
-          <a:xfrm>
-            <a:off x="1554480" y="3520440"/>
-            <a:ext cx="4114800" cy="960120"/>
-          </a:xfrm>
-          <a:prstGeom prst="rect">
-            <a:avLst/>
-          </a:prstGeom>
-          <a:noFill/>
-          <a:ln/>
-        </p:spPr>
-        <p:txBody>
-          <a:bodyPr wrap="square" lIns="0" tIns="0" rIns="0" bIns="0" rtlCol="0" anchor="ctr"/>
-          <a:lstStyle/>
-          <a:p>
-            <a:pPr indent="0" marL="0">
-              <a:buNone/>
-            </a:pPr>
-            <a:r>
-              <a:rPr lang="en-US" sz="1700" b="1" dirty="0">
-                <a:solidFill>
-                  <a:schemeClr val="tx1"/>
-                </a:solidFill>
-              </a:rPr>
-              <a:t>Similar items</a:t>
-            </a:r>
-            <a:endParaRPr lang="en-US" sz="1700" dirty="0"/>
-          </a:p>
-          <a:p>
-            <a:pPr indent="0" marL="0">
-              <a:buNone/>
+              <a:t>Same ASIN only, with two flat sides</a:t>
+            </a:r>
+            <a:endParaRPr lang="en-US" sz="1400" dirty="0"/>
+          </a:p>
+          <a:p>
+            <a:pPr marL="342900" indent="-342900">
+              <a:spcAft>
+                <a:spcPts val="400"/>
+              </a:spcAft>
+              <a:buSzPct val="100000"/>
+              <a:buChar char="•"/>
             </a:pPr>
             <a:r>
               <a:rPr lang="en-US" sz="1400" dirty="0">
@@ -4931,9 +5122,9 @@
                   <a:schemeClr val="accent4"/>
                 </a:solidFill>
               </a:rPr>
-              <a:t>Never put look-alike items in one bin; use the cross method</a:t>
-            </a:r>
-            <a:endParaRPr lang="en-US" sz="1700" dirty="0"/>
+              <a:t>Keep stacks below the retention bands</a:t>
+            </a:r>
+            <a:endParaRPr lang="en-US" sz="1400" dirty="0"/>
           </a:p>
         </p:txBody>
       </p:sp>
@@ -4994,7 +5185,7 @@
                   <a:schemeClr val="tx1"/>
                 </a:solidFill>
               </a:rPr>
-              <a:t>Your shift, bin by bin</a:t>
+              <a:t>S: similar items</a:t>
             </a:r>
             <a:endParaRPr lang="en-US" sz="2800" dirty="0"/>
           </a:p>
@@ -5002,27 +5193,29 @@
       </p:sp>
       <p:sp>
         <p:nvSpPr>
-          <p:cNvPr id="3" name="Recap circle 1"/>
+          <p:cNvPr id="3" name="Similar card"/>
           <p:cNvSpPr/>
           <p:nvPr/>
         </p:nvSpPr>
         <p:spPr>
           <a:xfrm>
-            <a:off x="868680" y="1371600"/>
-            <a:ext cx="868680" cy="868680"/>
-          </a:xfrm>
-          <a:prstGeom prst="ellipse">
-            <a:avLst/>
+            <a:off x="457200" y="1325880"/>
+            <a:ext cx="5394960" cy="3246120"/>
+          </a:xfrm>
+          <a:prstGeom prst="roundRect">
+            <a:avLst>
+              <a:gd name="adj" fmla="val 2817"/>
+            </a:avLst>
           </a:prstGeom>
           <a:solidFill>
-            <a:schemeClr val="accent1"/>
+            <a:schemeClr val="bg1"/>
           </a:solidFill>
           <a:ln/>
         </p:spPr>
       </p:sp>
       <p:pic>
         <p:nvPicPr>
-          <p:cNvPr id="4" name="Recap icon 1" descr="preencoded.png">    </p:cNvPr>
+          <p:cNvPr id="4" name="Similar picture" descr="Similar items: wrong and right example">    </p:cNvPr>
           <p:cNvPicPr>
             <a:picLocks noChangeAspect="1"/>
           </p:cNvPicPr>
@@ -5036,8 +5229,8 @@
         </p:blipFill>
         <p:spPr>
           <a:xfrm>
-            <a:off x="1088136" y="1591056"/>
-            <a:ext cx="429768" cy="429768"/>
+            <a:off x="1568631" y="1600200"/>
+            <a:ext cx="3172097" cy="1417320"/>
           </a:xfrm>
           <a:prstGeom prst="rect">
             <a:avLst/>
@@ -5046,14 +5239,14 @@
       </p:pic>
       <p:sp>
         <p:nvSpPr>
-          <p:cNvPr id="5" name="Recap text 1"/>
+          <p:cNvPr id="5" name="Similar text"/>
           <p:cNvSpPr txBox="1"/>
           <p:nvPr/>
         </p:nvSpPr>
         <p:spPr>
           <a:xfrm>
-            <a:off x="457200" y="2423160"/>
-            <a:ext cx="1691640" cy="1097280"/>
+            <a:off x="731520" y="3246120"/>
+            <a:ext cx="4846320" cy="1188720"/>
           </a:xfrm>
           <a:prstGeom prst="rect">
             <a:avLst/>
@@ -5065,337 +5258,58 @@
           <a:bodyPr wrap="square" lIns="0" tIns="0" rIns="0" bIns="0" rtlCol="0" anchor="t"/>
           <a:lstStyle/>
           <a:p>
-            <a:pPr algn="ctr" indent="0" marL="0">
-              <a:buNone/>
-            </a:pPr>
-            <a:r>
-              <a:rPr lang="en-US" sz="1300" dirty="0">
+            <a:pPr marL="342900" indent="-342900">
+              <a:spcAft>
+                <a:spcPts val="600"/>
+              </a:spcAft>
+              <a:buSzPct val="100000"/>
+              <a:buChar char="•"/>
+            </a:pPr>
+            <a:r>
+              <a:rPr lang="en-US" sz="1500" dirty="0">
                 <a:solidFill>
                   <a:schemeClr val="accent4"/>
                 </a:solidFill>
               </a:rPr>
-              <a:t>Shift start and after breaks</a:t>
-            </a:r>
-            <a:endParaRPr lang="en-US" sz="1300" dirty="0"/>
-          </a:p>
-          <a:p>
-            <a:pPr algn="ctr" indent="0" marL="0">
-              <a:buNone/>
-            </a:pPr>
-            <a:r>
-              <a:rPr lang="en-US" sz="1700" b="1" dirty="0">
-                <a:solidFill>
-                  <a:schemeClr val="tx1"/>
-                </a:solidFill>
-              </a:rPr>
-              <a:t>1-minute First Face Fix</a:t>
-            </a:r>
-            <a:endParaRPr lang="en-US" sz="1300" dirty="0"/>
-          </a:p>
-        </p:txBody>
-      </p:sp>
-      <p:pic>
-        <p:nvPicPr>
-          <p:cNvPr id="6" name="Arrow 1" descr="preencoded.png">    </p:cNvPr>
-          <p:cNvPicPr>
-            <a:picLocks noChangeAspect="1"/>
-          </p:cNvPicPr>
-          <p:nvPr/>
-        </p:nvPicPr>
-        <p:blipFill>
-          <a:blip r:embed="rId2"/>
-          <a:stretch>
-            <a:fillRect/>
-          </a:stretch>
-        </p:blipFill>
-        <p:spPr>
-          <a:xfrm>
-            <a:off x="2121408" y="1664208"/>
-            <a:ext cx="274320" cy="274320"/>
-          </a:xfrm>
-          <a:prstGeom prst="rect">
-            <a:avLst/>
-          </a:prstGeom>
-        </p:spPr>
-      </p:pic>
-      <p:sp>
-        <p:nvSpPr>
-          <p:cNvPr id="7" name="Recap circle 2"/>
-          <p:cNvSpPr/>
-          <p:nvPr/>
-        </p:nvSpPr>
-        <p:spPr>
-          <a:xfrm>
-            <a:off x="2697480" y="1371600"/>
-            <a:ext cx="868680" cy="868680"/>
-          </a:xfrm>
-          <a:prstGeom prst="ellipse">
-            <a:avLst/>
-          </a:prstGeom>
-          <a:solidFill>
-            <a:schemeClr val="accent1"/>
-          </a:solidFill>
-          <a:ln/>
-        </p:spPr>
-      </p:sp>
-      <p:pic>
-        <p:nvPicPr>
-          <p:cNvPr id="8" name="Recap icon 2" descr="preencoded.png">    </p:cNvPr>
-          <p:cNvPicPr>
-            <a:picLocks noChangeAspect="1"/>
-          </p:cNvPicPr>
-          <p:nvPr/>
-        </p:nvPicPr>
-        <p:blipFill>
-          <a:blip r:embed="rId3"/>
-          <a:stretch>
-            <a:fillRect/>
-          </a:stretch>
-        </p:blipFill>
-        <p:spPr>
-          <a:xfrm>
-            <a:off x="2916936" y="1591056"/>
-            <a:ext cx="429768" cy="429768"/>
-          </a:xfrm>
-          <a:prstGeom prst="rect">
-            <a:avLst/>
-          </a:prstGeom>
-        </p:spPr>
-      </p:pic>
-      <p:sp>
-        <p:nvSpPr>
-          <p:cNvPr id="9" name="Recap text 2"/>
-          <p:cNvSpPr txBox="1"/>
-          <p:nvPr/>
-        </p:nvSpPr>
-        <p:spPr>
-          <a:xfrm>
-            <a:off x="2286000" y="2423160"/>
-            <a:ext cx="1691640" cy="1097280"/>
-          </a:xfrm>
-          <a:prstGeom prst="rect">
-            <a:avLst/>
-          </a:prstGeom>
-          <a:noFill/>
-          <a:ln/>
-        </p:spPr>
-        <p:txBody>
-          <a:bodyPr wrap="square" lIns="0" tIns="0" rIns="0" bIns="0" rtlCol="0" anchor="t"/>
-          <a:lstStyle/>
-          <a:p>
-            <a:pPr algn="ctr" indent="0" marL="0">
-              <a:buNone/>
-            </a:pPr>
-            <a:r>
-              <a:rPr lang="en-US" sz="1300" dirty="0">
+              <a:t>Never put look-alike items in the same bin</a:t>
+            </a:r>
+            <a:endParaRPr lang="en-US" sz="1500" dirty="0"/>
+          </a:p>
+          <a:p>
+            <a:pPr marL="342900" indent="-342900">
+              <a:spcAft>
+                <a:spcPts val="600"/>
+              </a:spcAft>
+              <a:buSzPct val="100000"/>
+              <a:buChar char="•"/>
+            </a:pPr>
+            <a:r>
+              <a:rPr lang="en-US" sz="1500" dirty="0">
                 <a:solidFill>
                   <a:schemeClr val="accent4"/>
                 </a:solidFill>
               </a:rPr>
-              <a:t>Every bin you touch</a:t>
-            </a:r>
-            <a:endParaRPr lang="en-US" sz="1300" dirty="0"/>
-          </a:p>
-          <a:p>
-            <a:pPr algn="ctr" indent="0" marL="0">
-              <a:buNone/>
-            </a:pPr>
-            <a:r>
-              <a:rPr lang="en-US" sz="1700" b="1" dirty="0">
-                <a:solidFill>
-                  <a:schemeClr val="tx1"/>
-                </a:solidFill>
-              </a:rPr>
-              <a:t>Apply ROBOTSS</a:t>
-            </a:r>
-            <a:endParaRPr lang="en-US" sz="1300" dirty="0"/>
-          </a:p>
-        </p:txBody>
-      </p:sp>
-      <p:pic>
-        <p:nvPicPr>
-          <p:cNvPr id="10" name="Arrow 2" descr="preencoded.png">    </p:cNvPr>
-          <p:cNvPicPr>
-            <a:picLocks noChangeAspect="1"/>
-          </p:cNvPicPr>
-          <p:nvPr/>
-        </p:nvPicPr>
-        <p:blipFill>
-          <a:blip r:embed="rId4"/>
-          <a:stretch>
-            <a:fillRect/>
-          </a:stretch>
-        </p:blipFill>
-        <p:spPr>
-          <a:xfrm>
-            <a:off x="3950208" y="1664208"/>
-            <a:ext cx="274320" cy="274320"/>
-          </a:xfrm>
-          <a:prstGeom prst="rect">
-            <a:avLst/>
-          </a:prstGeom>
-        </p:spPr>
-      </p:pic>
-      <p:sp>
-        <p:nvSpPr>
-          <p:cNvPr id="11" name="Recap circle 3"/>
-          <p:cNvSpPr/>
-          <p:nvPr/>
-        </p:nvSpPr>
-        <p:spPr>
-          <a:xfrm>
-            <a:off x="4526280" y="1371600"/>
-            <a:ext cx="868680" cy="868680"/>
-          </a:xfrm>
-          <a:prstGeom prst="ellipse">
-            <a:avLst/>
-          </a:prstGeom>
-          <a:solidFill>
-            <a:schemeClr val="accent1"/>
-          </a:solidFill>
-          <a:ln/>
-        </p:spPr>
-      </p:sp>
-      <p:pic>
-        <p:nvPicPr>
-          <p:cNvPr id="12" name="Recap icon 3" descr="preencoded.png">    </p:cNvPr>
-          <p:cNvPicPr>
-            <a:picLocks noChangeAspect="1"/>
-          </p:cNvPicPr>
-          <p:nvPr/>
-        </p:nvPicPr>
-        <p:blipFill>
-          <a:blip r:embed="rId5"/>
-          <a:stretch>
-            <a:fillRect/>
-          </a:stretch>
-        </p:blipFill>
-        <p:spPr>
-          <a:xfrm>
-            <a:off x="4745736" y="1591056"/>
-            <a:ext cx="429768" cy="429768"/>
-          </a:xfrm>
-          <a:prstGeom prst="rect">
-            <a:avLst/>
-          </a:prstGeom>
-        </p:spPr>
-      </p:pic>
-      <p:sp>
-        <p:nvSpPr>
-          <p:cNvPr id="13" name="Recap text 3"/>
-          <p:cNvSpPr txBox="1"/>
-          <p:nvPr/>
-        </p:nvSpPr>
-        <p:spPr>
-          <a:xfrm>
-            <a:off x="4114800" y="2423160"/>
-            <a:ext cx="1691640" cy="1097280"/>
-          </a:xfrm>
-          <a:prstGeom prst="rect">
-            <a:avLst/>
-          </a:prstGeom>
-          <a:noFill/>
-          <a:ln/>
-        </p:spPr>
-        <p:txBody>
-          <a:bodyPr wrap="square" lIns="0" tIns="0" rIns="0" bIns="0" rtlCol="0" anchor="t"/>
-          <a:lstStyle/>
-          <a:p>
-            <a:pPr algn="ctr" indent="0" marL="0">
-              <a:buNone/>
-            </a:pPr>
-            <a:r>
-              <a:rPr lang="en-US" sz="1300" dirty="0">
+              <a:t>Use the cross method for similar items</a:t>
+            </a:r>
+            <a:endParaRPr lang="en-US" sz="1500" dirty="0"/>
+          </a:p>
+          <a:p>
+            <a:pPr marL="342900" indent="-342900">
+              <a:spcAft>
+                <a:spcPts val="600"/>
+              </a:spcAft>
+              <a:buSzPct val="100000"/>
+              <a:buChar char="•"/>
+            </a:pPr>
+            <a:r>
+              <a:rPr lang="en-US" sz="1500" dirty="0">
                 <a:solidFill>
                   <a:schemeClr val="accent4"/>
                 </a:solidFill>
               </a:rPr>
-              <a:t>All shift long</a:t>
-            </a:r>
-            <a:endParaRPr lang="en-US" sz="1300" dirty="0"/>
-          </a:p>
-          <a:p>
-            <a:pPr algn="ctr" indent="0" marL="0">
-              <a:buNone/>
-            </a:pPr>
-            <a:r>
-              <a:rPr lang="en-US" sz="1700" b="1" dirty="0">
-                <a:solidFill>
-                  <a:schemeClr val="tx1"/>
-                </a:solidFill>
-              </a:rPr>
-              <a:t>Fix as you go</a:t>
-            </a:r>
-            <a:endParaRPr lang="en-US" sz="1300" dirty="0"/>
-          </a:p>
-        </p:txBody>
-      </p:sp>
-      <p:sp>
-        <p:nvSpPr>
-          <p:cNvPr id="14" name="Goal card"/>
-          <p:cNvSpPr/>
-          <p:nvPr/>
-        </p:nvSpPr>
-        <p:spPr>
-          <a:xfrm>
-            <a:off x="457200" y="3749040"/>
-            <a:ext cx="5394960" cy="777240"/>
-          </a:xfrm>
-          <a:prstGeom prst="roundRect">
-            <a:avLst>
-              <a:gd name="adj" fmla="val 11765"/>
-            </a:avLst>
-          </a:prstGeom>
-          <a:solidFill>
-            <a:schemeClr val="tx2"/>
-          </a:solidFill>
-          <a:ln/>
-        </p:spPr>
-      </p:sp>
-      <p:sp>
-        <p:nvSpPr>
-          <p:cNvPr id="15" name="Goal text"/>
-          <p:cNvSpPr txBox="1"/>
-          <p:nvPr/>
-        </p:nvSpPr>
-        <p:spPr>
-          <a:xfrm>
-            <a:off x="731520" y="3749040"/>
-            <a:ext cx="4846320" cy="777240"/>
-          </a:xfrm>
-          <a:prstGeom prst="rect">
-            <a:avLst/>
-          </a:prstGeom>
-          <a:noFill/>
-          <a:ln/>
-        </p:spPr>
-        <p:txBody>
-          <a:bodyPr wrap="square" lIns="0" tIns="0" rIns="0" bIns="0" rtlCol="0" anchor="ctr"/>
-          <a:lstStyle/>
-          <a:p>
-            <a:pPr indent="0" marL="0">
-              <a:buNone/>
-            </a:pPr>
-            <a:r>
-              <a:rPr lang="en-US" sz="1600" b="1" dirty="0">
-                <a:solidFill>
-                  <a:srgbClr val="9EDFF7"/>
-                </a:solidFill>
-              </a:rPr>
-              <a:t>Goal: </a:t>
-            </a:r>
-            <a:pPr indent="0" marL="0">
-              <a:buNone/>
-            </a:pPr>
-            <a:r>
-              <a:rPr lang="en-US" sz="1600" dirty="0">
-                <a:solidFill>
-                  <a:schemeClr val="bg1"/>
-                </a:solidFill>
-              </a:rPr>
-              <a:t>fewer units falling, lower wAPMT, happier customers.</a:t>
-            </a:r>
-            <a:endParaRPr lang="en-US" sz="1600" dirty="0"/>
+              <a:t>The system won't always flag them on screen</a:t>
+            </a:r>
+            <a:endParaRPr lang="en-US" sz="1500" dirty="0"/>
           </a:p>
         </p:txBody>
       </p:sp>
@@ -5410,6 +5324,468 @@
 <file path=ppt/slides/slide16.xml><?xml version="1.0" encoding="utf-8"?>
 <p:sld xmlns:a="http://schemas.openxmlformats.org/drawingml/2006/main" xmlns:r="http://schemas.openxmlformats.org/officeDocument/2006/relationships" xmlns:p="http://schemas.openxmlformats.org/presentationml/2006/main">
   <p:cSld name="Slide 16">
+    <p:spTree>
+      <p:nvGrpSpPr>
+        <p:cNvPr id="1" name=""/>
+        <p:cNvGrpSpPr/>
+        <p:nvPr/>
+      </p:nvGrpSpPr>
+      <p:grpSpPr>
+        <a:xfrm>
+          <a:off x="0" y="0"/>
+          <a:ext cx="0" cy="0"/>
+          <a:chOff x="0" y="0"/>
+          <a:chExt cx="0" cy="0"/>
+        </a:xfrm>
+      </p:grpSpPr>
+      <p:sp>
+        <p:nvSpPr>
+          <p:cNvPr id="2" name="Text 0"/>
+          <p:cNvSpPr/>
+          <p:nvPr>
+            <p:ph idx="101" type="title" hasCustomPrompt="1"/>
+          </p:nvPr>
+        </p:nvSpPr>
+        <p:spPr>
+          <a:xfrm>
+            <a:off x="457200" y="640080"/>
+            <a:ext cx="5394960" cy="548640"/>
+          </a:xfrm>
+          <a:prstGeom prst="rect">
+            <a:avLst/>
+          </a:prstGeom>
+          <a:noFill/>
+          <a:ln/>
+        </p:spPr>
+        <p:txBody>
+          <a:bodyPr wrap="square" lIns="0" tIns="0" rIns="0" bIns="0" rtlCol="0" anchor="ctr"/>
+          <a:lstStyle/>
+          <a:p>
+            <a:pPr algn="l" indent="0" marL="0">
+              <a:buNone/>
+            </a:pPr>
+            <a:r>
+              <a:rPr lang="en-US" sz="2800" b="1" dirty="0">
+                <a:solidFill>
+                  <a:schemeClr val="tx1"/>
+                </a:solidFill>
+              </a:rPr>
+              <a:t>Your shift, bin by bin</a:t>
+            </a:r>
+            <a:endParaRPr lang="en-US" sz="2800" dirty="0"/>
+          </a:p>
+        </p:txBody>
+      </p:sp>
+      <p:sp>
+        <p:nvSpPr>
+          <p:cNvPr id="3" name="Recap circle 1"/>
+          <p:cNvSpPr/>
+          <p:nvPr/>
+        </p:nvSpPr>
+        <p:spPr>
+          <a:xfrm>
+            <a:off x="868680" y="1371600"/>
+            <a:ext cx="868680" cy="868680"/>
+          </a:xfrm>
+          <a:prstGeom prst="ellipse">
+            <a:avLst/>
+          </a:prstGeom>
+          <a:solidFill>
+            <a:schemeClr val="accent1"/>
+          </a:solidFill>
+          <a:ln/>
+        </p:spPr>
+      </p:sp>
+      <p:pic>
+        <p:nvPicPr>
+          <p:cNvPr id="4" name="Recap icon 1" descr="preencoded.png">    </p:cNvPr>
+          <p:cNvPicPr>
+            <a:picLocks noChangeAspect="1"/>
+          </p:cNvPicPr>
+          <p:nvPr/>
+        </p:nvPicPr>
+        <p:blipFill>
+          <a:blip r:embed="rId1"/>
+          <a:stretch>
+            <a:fillRect/>
+          </a:stretch>
+        </p:blipFill>
+        <p:spPr>
+          <a:xfrm>
+            <a:off x="1088136" y="1591056"/>
+            <a:ext cx="429768" cy="429768"/>
+          </a:xfrm>
+          <a:prstGeom prst="rect">
+            <a:avLst/>
+          </a:prstGeom>
+        </p:spPr>
+      </p:pic>
+      <p:sp>
+        <p:nvSpPr>
+          <p:cNvPr id="5" name="Recap text 1"/>
+          <p:cNvSpPr txBox="1"/>
+          <p:nvPr/>
+        </p:nvSpPr>
+        <p:spPr>
+          <a:xfrm>
+            <a:off x="457200" y="2423160"/>
+            <a:ext cx="1691640" cy="1097280"/>
+          </a:xfrm>
+          <a:prstGeom prst="rect">
+            <a:avLst/>
+          </a:prstGeom>
+          <a:noFill/>
+          <a:ln/>
+        </p:spPr>
+        <p:txBody>
+          <a:bodyPr wrap="square" lIns="0" tIns="0" rIns="0" bIns="0" rtlCol="0" anchor="t"/>
+          <a:lstStyle/>
+          <a:p>
+            <a:pPr algn="ctr" indent="0" marL="0">
+              <a:buNone/>
+            </a:pPr>
+            <a:r>
+              <a:rPr lang="en-US" sz="1300" dirty="0">
+                <a:solidFill>
+                  <a:schemeClr val="accent4"/>
+                </a:solidFill>
+              </a:rPr>
+              <a:t>Shift start and after breaks</a:t>
+            </a:r>
+            <a:endParaRPr lang="en-US" sz="1300" dirty="0"/>
+          </a:p>
+          <a:p>
+            <a:pPr algn="ctr" indent="0" marL="0">
+              <a:buNone/>
+            </a:pPr>
+            <a:r>
+              <a:rPr lang="en-US" sz="1700" b="1" dirty="0">
+                <a:solidFill>
+                  <a:schemeClr val="tx1"/>
+                </a:solidFill>
+              </a:rPr>
+              <a:t>1-minute First Face Fix</a:t>
+            </a:r>
+            <a:endParaRPr lang="en-US" sz="1300" dirty="0"/>
+          </a:p>
+        </p:txBody>
+      </p:sp>
+      <p:pic>
+        <p:nvPicPr>
+          <p:cNvPr id="6" name="Arrow 1" descr="preencoded.png">    </p:cNvPr>
+          <p:cNvPicPr>
+            <a:picLocks noChangeAspect="1"/>
+          </p:cNvPicPr>
+          <p:nvPr/>
+        </p:nvPicPr>
+        <p:blipFill>
+          <a:blip r:embed="rId2"/>
+          <a:stretch>
+            <a:fillRect/>
+          </a:stretch>
+        </p:blipFill>
+        <p:spPr>
+          <a:xfrm>
+            <a:off x="2121408" y="1664208"/>
+            <a:ext cx="274320" cy="274320"/>
+          </a:xfrm>
+          <a:prstGeom prst="rect">
+            <a:avLst/>
+          </a:prstGeom>
+        </p:spPr>
+      </p:pic>
+      <p:sp>
+        <p:nvSpPr>
+          <p:cNvPr id="7" name="Recap circle 2"/>
+          <p:cNvSpPr/>
+          <p:nvPr/>
+        </p:nvSpPr>
+        <p:spPr>
+          <a:xfrm>
+            <a:off x="2697480" y="1371600"/>
+            <a:ext cx="868680" cy="868680"/>
+          </a:xfrm>
+          <a:prstGeom prst="ellipse">
+            <a:avLst/>
+          </a:prstGeom>
+          <a:solidFill>
+            <a:schemeClr val="accent1"/>
+          </a:solidFill>
+          <a:ln/>
+        </p:spPr>
+      </p:sp>
+      <p:pic>
+        <p:nvPicPr>
+          <p:cNvPr id="8" name="Recap icon 2" descr="preencoded.png">    </p:cNvPr>
+          <p:cNvPicPr>
+            <a:picLocks noChangeAspect="1"/>
+          </p:cNvPicPr>
+          <p:nvPr/>
+        </p:nvPicPr>
+        <p:blipFill>
+          <a:blip r:embed="rId3"/>
+          <a:stretch>
+            <a:fillRect/>
+          </a:stretch>
+        </p:blipFill>
+        <p:spPr>
+          <a:xfrm>
+            <a:off x="2916936" y="1591056"/>
+            <a:ext cx="429768" cy="429768"/>
+          </a:xfrm>
+          <a:prstGeom prst="rect">
+            <a:avLst/>
+          </a:prstGeom>
+        </p:spPr>
+      </p:pic>
+      <p:sp>
+        <p:nvSpPr>
+          <p:cNvPr id="9" name="Recap text 2"/>
+          <p:cNvSpPr txBox="1"/>
+          <p:nvPr/>
+        </p:nvSpPr>
+        <p:spPr>
+          <a:xfrm>
+            <a:off x="2286000" y="2423160"/>
+            <a:ext cx="1691640" cy="1097280"/>
+          </a:xfrm>
+          <a:prstGeom prst="rect">
+            <a:avLst/>
+          </a:prstGeom>
+          <a:noFill/>
+          <a:ln/>
+        </p:spPr>
+        <p:txBody>
+          <a:bodyPr wrap="square" lIns="0" tIns="0" rIns="0" bIns="0" rtlCol="0" anchor="t"/>
+          <a:lstStyle/>
+          <a:p>
+            <a:pPr algn="ctr" indent="0" marL="0">
+              <a:buNone/>
+            </a:pPr>
+            <a:r>
+              <a:rPr lang="en-US" sz="1300" dirty="0">
+                <a:solidFill>
+                  <a:schemeClr val="accent4"/>
+                </a:solidFill>
+              </a:rPr>
+              <a:t>Every bin you touch</a:t>
+            </a:r>
+            <a:endParaRPr lang="en-US" sz="1300" dirty="0"/>
+          </a:p>
+          <a:p>
+            <a:pPr algn="ctr" indent="0" marL="0">
+              <a:buNone/>
+            </a:pPr>
+            <a:r>
+              <a:rPr lang="en-US" sz="1700" b="1" dirty="0">
+                <a:solidFill>
+                  <a:schemeClr val="tx1"/>
+                </a:solidFill>
+              </a:rPr>
+              <a:t>Apply ROBOTSS</a:t>
+            </a:r>
+            <a:endParaRPr lang="en-US" sz="1300" dirty="0"/>
+          </a:p>
+        </p:txBody>
+      </p:sp>
+      <p:pic>
+        <p:nvPicPr>
+          <p:cNvPr id="10" name="Arrow 2" descr="preencoded.png">    </p:cNvPr>
+          <p:cNvPicPr>
+            <a:picLocks noChangeAspect="1"/>
+          </p:cNvPicPr>
+          <p:nvPr/>
+        </p:nvPicPr>
+        <p:blipFill>
+          <a:blip r:embed="rId4"/>
+          <a:stretch>
+            <a:fillRect/>
+          </a:stretch>
+        </p:blipFill>
+        <p:spPr>
+          <a:xfrm>
+            <a:off x="3950208" y="1664208"/>
+            <a:ext cx="274320" cy="274320"/>
+          </a:xfrm>
+          <a:prstGeom prst="rect">
+            <a:avLst/>
+          </a:prstGeom>
+        </p:spPr>
+      </p:pic>
+      <p:sp>
+        <p:nvSpPr>
+          <p:cNvPr id="11" name="Recap circle 3"/>
+          <p:cNvSpPr/>
+          <p:nvPr/>
+        </p:nvSpPr>
+        <p:spPr>
+          <a:xfrm>
+            <a:off x="4526280" y="1371600"/>
+            <a:ext cx="868680" cy="868680"/>
+          </a:xfrm>
+          <a:prstGeom prst="ellipse">
+            <a:avLst/>
+          </a:prstGeom>
+          <a:solidFill>
+            <a:schemeClr val="accent1"/>
+          </a:solidFill>
+          <a:ln/>
+        </p:spPr>
+      </p:sp>
+      <p:pic>
+        <p:nvPicPr>
+          <p:cNvPr id="12" name="Recap icon 3" descr="preencoded.png">    </p:cNvPr>
+          <p:cNvPicPr>
+            <a:picLocks noChangeAspect="1"/>
+          </p:cNvPicPr>
+          <p:nvPr/>
+        </p:nvPicPr>
+        <p:blipFill>
+          <a:blip r:embed="rId5"/>
+          <a:stretch>
+            <a:fillRect/>
+          </a:stretch>
+        </p:blipFill>
+        <p:spPr>
+          <a:xfrm>
+            <a:off x="4745736" y="1591056"/>
+            <a:ext cx="429768" cy="429768"/>
+          </a:xfrm>
+          <a:prstGeom prst="rect">
+            <a:avLst/>
+          </a:prstGeom>
+        </p:spPr>
+      </p:pic>
+      <p:sp>
+        <p:nvSpPr>
+          <p:cNvPr id="13" name="Recap text 3"/>
+          <p:cNvSpPr txBox="1"/>
+          <p:nvPr/>
+        </p:nvSpPr>
+        <p:spPr>
+          <a:xfrm>
+            <a:off x="4114800" y="2423160"/>
+            <a:ext cx="1691640" cy="1097280"/>
+          </a:xfrm>
+          <a:prstGeom prst="rect">
+            <a:avLst/>
+          </a:prstGeom>
+          <a:noFill/>
+          <a:ln/>
+        </p:spPr>
+        <p:txBody>
+          <a:bodyPr wrap="square" lIns="0" tIns="0" rIns="0" bIns="0" rtlCol="0" anchor="t"/>
+          <a:lstStyle/>
+          <a:p>
+            <a:pPr algn="ctr" indent="0" marL="0">
+              <a:buNone/>
+            </a:pPr>
+            <a:r>
+              <a:rPr lang="en-US" sz="1300" dirty="0">
+                <a:solidFill>
+                  <a:schemeClr val="accent4"/>
+                </a:solidFill>
+              </a:rPr>
+              <a:t>All shift long</a:t>
+            </a:r>
+            <a:endParaRPr lang="en-US" sz="1300" dirty="0"/>
+          </a:p>
+          <a:p>
+            <a:pPr algn="ctr" indent="0" marL="0">
+              <a:buNone/>
+            </a:pPr>
+            <a:r>
+              <a:rPr lang="en-US" sz="1700" b="1" dirty="0">
+                <a:solidFill>
+                  <a:schemeClr val="tx1"/>
+                </a:solidFill>
+              </a:rPr>
+              <a:t>Fix as you go</a:t>
+            </a:r>
+            <a:endParaRPr lang="en-US" sz="1300" dirty="0"/>
+          </a:p>
+        </p:txBody>
+      </p:sp>
+      <p:sp>
+        <p:nvSpPr>
+          <p:cNvPr id="14" name="Goal card"/>
+          <p:cNvSpPr/>
+          <p:nvPr/>
+        </p:nvSpPr>
+        <p:spPr>
+          <a:xfrm>
+            <a:off x="457200" y="3749040"/>
+            <a:ext cx="5394960" cy="777240"/>
+          </a:xfrm>
+          <a:prstGeom prst="roundRect">
+            <a:avLst>
+              <a:gd name="adj" fmla="val 11765"/>
+            </a:avLst>
+          </a:prstGeom>
+          <a:solidFill>
+            <a:schemeClr val="tx2"/>
+          </a:solidFill>
+          <a:ln/>
+        </p:spPr>
+      </p:sp>
+      <p:sp>
+        <p:nvSpPr>
+          <p:cNvPr id="15" name="Goal text"/>
+          <p:cNvSpPr txBox="1"/>
+          <p:nvPr/>
+        </p:nvSpPr>
+        <p:spPr>
+          <a:xfrm>
+            <a:off x="731520" y="3749040"/>
+            <a:ext cx="4846320" cy="777240"/>
+          </a:xfrm>
+          <a:prstGeom prst="rect">
+            <a:avLst/>
+          </a:prstGeom>
+          <a:noFill/>
+          <a:ln/>
+        </p:spPr>
+        <p:txBody>
+          <a:bodyPr wrap="square" lIns="0" tIns="0" rIns="0" bIns="0" rtlCol="0" anchor="ctr"/>
+          <a:lstStyle/>
+          <a:p>
+            <a:pPr indent="0" marL="0">
+              <a:buNone/>
+            </a:pPr>
+            <a:r>
+              <a:rPr lang="en-US" sz="1600" b="1" dirty="0">
+                <a:solidFill>
+                  <a:srgbClr val="9EDFF7"/>
+                </a:solidFill>
+              </a:rPr>
+              <a:t>Goal: </a:t>
+            </a:r>
+            <a:pPr indent="0" marL="0">
+              <a:buNone/>
+            </a:pPr>
+            <a:r>
+              <a:rPr lang="en-US" sz="1600" dirty="0">
+                <a:solidFill>
+                  <a:schemeClr val="bg1"/>
+                </a:solidFill>
+              </a:rPr>
+              <a:t>fewer units falling, lower wAPMT, happier customers.</a:t>
+            </a:r>
+            <a:endParaRPr lang="en-US" sz="1600" dirty="0"/>
+          </a:p>
+        </p:txBody>
+      </p:sp>
+    </p:spTree>
+  </p:cSld>
+  <p:clrMapOvr>
+    <a:masterClrMapping/>
+  </p:clrMapOvr>
+</p:sld>
+</file>
+
+<file path=ppt/slides/slide17.xml><?xml version="1.0" encoding="utf-8"?>
+<p:sld xmlns:a="http://schemas.openxmlformats.org/drawingml/2006/main" xmlns:r="http://schemas.openxmlformats.org/officeDocument/2006/relationships" xmlns:p="http://schemas.openxmlformats.org/presentationml/2006/main">
+  <p:cSld name="Slide 17">
     <p:spTree>
       <p:nvGrpSpPr>
         <p:cNvPr id="1" name=""/>

--- a/APMT_Coaching_Stow_FFF_ROBOTSS.pptx
+++ b/APMT_Coaching_Stow_FFF_ROBOTSS.pptx
@@ -22,9 +22,12 @@
     <p:sldId id="270" r:id="rId16"/>
     <p:sldId id="271" r:id="rId17"/>
     <p:sldId id="272" r:id="rId18"/>
+    <p:sldId id="273" r:id="rId19"/>
+    <p:sldId id="274" r:id="rId20"/>
+    <p:sldId id="275" r:id="rId21"/>
   </p:sldIdLst>
   <p:notesMasterIdLst>
-    <p:notesMasterId r:id="rId19"/>
+    <p:notesMasterId r:id="rId22"/>
   </p:notesMasterIdLst>
   <p:sldSz cx="9144000" cy="5143500"/>
   <p:notesSz cx="5143500" cy="9144000"/>
@@ -123,7 +126,7 @@
   <p:extLst>
     <p:ext uri="{521415D9-36F7-43E2-AB2F-B90AF26B5E84}">
       <p14:sectionLst xmlns:p14="http://schemas.microsoft.com/office/powerpoint/2010/main">
-        <p14:section name="Intro" id="{03c4c055-ca39-53e4-7d6c-df39c4d04d3c}">
+        <p14:section name="Intro" id="{4b492998-d1f1-0b47-eef7-d4bd89aa89fe}">
           <p14:sldIdLst>
             <p14:sldId id="256"/>
             <p14:sldId id="257"/>
@@ -131,7 +134,7 @@
             <p14:sldId id="259"/>
           </p14:sldIdLst>
         </p14:section>
-        <p14:section name="First Face Fix" id="{398b268b-a1f4-d2e1-6a58-06c2c9fba9d0}">
+        <p14:section name="First Face Fix" id="{8e07b854-54f2-a895-377c-fa2b02068473}">
           <p14:sldIdLst>
             <p14:sldId id="260"/>
             <p14:sldId id="261"/>
@@ -140,7 +143,7 @@
             <p14:sldId id="264"/>
           </p14:sldIdLst>
         </p14:section>
-        <p14:section name="ROBOTSS" id="{0880c127-9b57-7776-301c-3b59e99bcf91}">
+        <p14:section name="ROBOTSS" id="{71a56574-d96b-62b6-8bd6-8a60aeca1c33}">
           <p14:sldIdLst>
             <p14:sldId id="265"/>
             <p14:sldId id="266"/>
@@ -148,12 +151,15 @@
             <p14:sldId id="268"/>
             <p14:sldId id="269"/>
             <p14:sldId id="270"/>
+            <p14:sldId id="271"/>
+            <p14:sldId id="272"/>
+            <p14:sldId id="273"/>
           </p14:sldIdLst>
         </p14:section>
-        <p14:section name="Wrap-up" id="{79e0f144-1d4e-da57-8644-416b2b078c8d}">
+        <p14:section name="Wrap-up" id="{011eb451-4982-1196-0caf-a701a9adffda}">
           <p14:sldIdLst>
-            <p14:sldId id="271"/>
-            <p14:sldId id="272"/>
+            <p14:sldId id="274"/>
+            <p14:sldId id="275"/>
           </p14:sldIdLst>
         </p14:section>
       </p14:sectionLst>
@@ -824,7 +830,7 @@
           <a:p>
             <a:r>
               <a:rPr lang="en-US" dirty="0"/>
-              <a:t>R is for right bin size. Always stow into the smallest bin the item fits in, and place it by its length first. The first O is no overhang. Every item must fit completely inside the bin. Anything hanging out can catch, causing drive obstructions and even pod crashes, and that's how items end up on the floor.</a:t>
+              <a:t>R is for right bin size. On the left, a tiny item sits alone in a big bin. That wastes space, and small items get lost. On the right, the item suits the size of the bin. Always stow into the smallest bin the item fits in, and place it by its length first.</a:t>
             </a:r>
             <a:endParaRPr lang="en-US" dirty="0"/>
           </a:p>
@@ -912,7 +918,7 @@
           <a:p>
             <a:r>
               <a:rPr lang="en-US" dirty="0"/>
-              <a:t>B is for blocking. Never put a large item in front of a small one, because the picker won't see it. Stand flat items upright so they can't slide out between the retention bands. The second O is overstuffing. Don't overfill a bin. Forcing items in damages customer products, and an overstuffed bin is the one most likely to spill.</a:t>
+              <a:t>The first O is no overhang. On the left, the box sticks out past the edge of the bin. On the right, everything sits fully inside. Anything hanging out can catch as the pod moves, causing drive obstructions and even pod crashes, and that's how items end up on the floor.</a:t>
             </a:r>
             <a:endParaRPr lang="en-US" dirty="0"/>
           </a:p>
@@ -1000,7 +1006,7 @@
           <a:p>
             <a:r>
               <a:rPr lang="en-US" dirty="0"/>
-              <a:t>T is for titles out. Books and DVDs go in with the spine facing outward, so pickers can find them straight away. The first S is stacking. Only stack items of the same ASIN, only when they have at least two flat surfaces, and always keep them below the retention bands.</a:t>
+              <a:t>B is for blocking. On the left, a flat item lying across the front hides everything behind it, so the picker can't see what they need. On the right, every item is visible from the front. Never put a large item in front of a small one, and stand flat items upright so they can't slide out between the retention bands.</a:t>
             </a:r>
             <a:endParaRPr lang="en-US" dirty="0"/>
           </a:p>
@@ -1088,7 +1094,7 @@
           <a:p>
             <a:r>
               <a:rPr lang="en-US" dirty="0"/>
-              <a:t>The last S is similar items. Never put items that look alike, or have similar names, in the same bin, like these two cables that only differ by length. Use the cross method for similar items instead, because the system won't always warn you on screen, and the picker could grab the wrong one.</a:t>
+              <a:t>The second O is overstuffing. On the left, items have been forced in and the bin is bulging. On the right, everything fits with room to pick. Forcing items in damages customer products, and an overstuffed bin is the one most likely to spill.</a:t>
             </a:r>
             <a:endParaRPr lang="en-US" dirty="0"/>
           </a:p>
@@ -1176,7 +1182,7 @@
           <a:p>
             <a:r>
               <a:rPr lang="en-US" dirty="0"/>
-              <a:t>So here's your shift, bin by bin. At shift start and after every break, do your one-minute First Face Fix. On every bin you touch, apply ROBOTSS. And all shift long, fix as you go. Do these three things consistently and fewer units will fall, our wAPMT will come down, and our customers get what they ordered.</a:t>
+              <a:t>T is for titles out. On the left, the spines face inward, so the picker can't read the titles. On the right, the spines face out and the titles are easy to read. Always stow books and DVDs spine out, so pickers can find them straight away.</a:t>
             </a:r>
             <a:endParaRPr lang="en-US" dirty="0"/>
           </a:p>
@@ -1264,7 +1270,7 @@
           <a:p>
             <a:r>
               <a:rPr lang="en-US" dirty="0"/>
-              <a:t>Small fixes make a big impact. Thanks for watching, and thanks for looking after every bin, every time. If you have any questions, speak to your Process Guide, your Area Manager, or the ICQA team. And please take a second to rate this video.</a:t>
+              <a:t>The first S is stacking. On the left, different items are piled on top of each other. On the right, they stand side by side, below the bands. Only stack items of the same ASIN, only when they have at least two flat surfaces, and always keep them below the retention bands.</a:t>
             </a:r>
             <a:endParaRPr lang="en-US" dirty="0"/>
           </a:p>
@@ -1288,6 +1294,182 @@
             <a:fld id="{F7021451-1387-4CA6-816F-3879F97B5CBC}" type="slidenum">
               <a:rPr lang="en-US"/>
               <a:t>17</a:t>
+            </a:fld>
+            <a:endParaRPr lang="en-US"/>
+          </a:p>
+        </p:txBody>
+      </p:sp>
+    </p:spTree>
+    <p:extLst>
+      <p:ext uri="{BB962C8B-B14F-4D97-AF65-F5344CB8AC3E}">
+        <p14:creationId xmlns:p14="http://schemas.microsoft.com/office/powerpoint/2010/main" val="1024086991"/>
+      </p:ext>
+    </p:extLst>
+  </p:cSld>
+  <p:clrMapOvr>
+    <a:masterClrMapping/>
+  </p:clrMapOvr>
+</p:notes>
+</file>
+
+<file path=ppt/notesSlides/notesSlide18.xml><?xml version="1.0" encoding="utf-8"?>
+<p:notes xmlns:a="http://schemas.openxmlformats.org/drawingml/2006/main" xmlns:r="http://schemas.openxmlformats.org/officeDocument/2006/relationships" xmlns:p="http://schemas.openxmlformats.org/presentationml/2006/main">
+  <p:cSld>
+    <p:spTree>
+      <p:nvGrpSpPr>
+        <p:cNvPr id="1" name=""/>
+        <p:cNvGrpSpPr/>
+        <p:nvPr/>
+      </p:nvGrpSpPr>
+      <p:grpSpPr>
+        <a:xfrm>
+          <a:off x="0" y="0"/>
+          <a:ext cx="0" cy="0"/>
+          <a:chOff x="0" y="0"/>
+          <a:chExt cx="0" cy="0"/>
+        </a:xfrm>
+      </p:grpSpPr>
+      <p:sp>
+        <p:nvSpPr>
+          <p:cNvPr id="2" name="Slide Image Placeholder 1"/>
+          <p:cNvSpPr>
+            <a:spLocks noGrp="1" noRot="1" noChangeAspect="1"/>
+          </p:cNvSpPr>
+          <p:nvPr>
+            <p:ph type="sldImg"/>
+          </p:nvPr>
+        </p:nvSpPr>
+        <p:spPr/>
+      </p:sp>
+      <p:sp>
+        <p:nvSpPr>
+          <p:cNvPr id="3" name="Notes Placeholder 2"/>
+          <p:cNvSpPr>
+            <a:spLocks noGrp="1"/>
+          </p:cNvSpPr>
+          <p:nvPr>
+            <p:ph type="body" idx="1"/>
+          </p:nvPr>
+        </p:nvSpPr>
+        <p:spPr/>
+        <p:txBody>
+          <a:bodyPr/>
+          <a:lstStyle/>
+          <a:p>
+            <a:r>
+              <a:rPr lang="en-US" dirty="0"/>
+              <a:t>The last S is similar items. On the left, two cables that look almost the same, one meter and two meters, are in the same bin, so the picker could easily grab the wrong one. On the right, the look-alikes are kept in different bins. Use the cross method for similar items, because the system won't always warn you on screen.</a:t>
+            </a:r>
+            <a:endParaRPr lang="en-US" dirty="0"/>
+          </a:p>
+        </p:txBody>
+      </p:sp>
+      <p:sp>
+        <p:nvSpPr>
+          <p:cNvPr id="4" name="Slide Number Placeholder 3"/>
+          <p:cNvSpPr>
+            <a:spLocks noGrp="1"/>
+          </p:cNvSpPr>
+          <p:nvPr>
+            <p:ph type="sldNum" sz="quarter" idx="10"/>
+          </p:nvPr>
+        </p:nvSpPr>
+        <p:spPr/>
+        <p:txBody>
+          <a:bodyPr/>
+          <a:lstStyle/>
+          <a:p>
+            <a:fld id="{F7021451-1387-4CA6-816F-3879F97B5CBC}" type="slidenum">
+              <a:rPr lang="en-US"/>
+              <a:t>18</a:t>
+            </a:fld>
+            <a:endParaRPr lang="en-US"/>
+          </a:p>
+        </p:txBody>
+      </p:sp>
+    </p:spTree>
+    <p:extLst>
+      <p:ext uri="{BB962C8B-B14F-4D97-AF65-F5344CB8AC3E}">
+        <p14:creationId xmlns:p14="http://schemas.microsoft.com/office/powerpoint/2010/main" val="1024086991"/>
+      </p:ext>
+    </p:extLst>
+  </p:cSld>
+  <p:clrMapOvr>
+    <a:masterClrMapping/>
+  </p:clrMapOvr>
+</p:notes>
+</file>
+
+<file path=ppt/notesSlides/notesSlide19.xml><?xml version="1.0" encoding="utf-8"?>
+<p:notes xmlns:a="http://schemas.openxmlformats.org/drawingml/2006/main" xmlns:r="http://schemas.openxmlformats.org/officeDocument/2006/relationships" xmlns:p="http://schemas.openxmlformats.org/presentationml/2006/main">
+  <p:cSld>
+    <p:spTree>
+      <p:nvGrpSpPr>
+        <p:cNvPr id="1" name=""/>
+        <p:cNvGrpSpPr/>
+        <p:nvPr/>
+      </p:nvGrpSpPr>
+      <p:grpSpPr>
+        <a:xfrm>
+          <a:off x="0" y="0"/>
+          <a:ext cx="0" cy="0"/>
+          <a:chOff x="0" y="0"/>
+          <a:chExt cx="0" cy="0"/>
+        </a:xfrm>
+      </p:grpSpPr>
+      <p:sp>
+        <p:nvSpPr>
+          <p:cNvPr id="2" name="Slide Image Placeholder 1"/>
+          <p:cNvSpPr>
+            <a:spLocks noGrp="1" noRot="1" noChangeAspect="1"/>
+          </p:cNvSpPr>
+          <p:nvPr>
+            <p:ph type="sldImg"/>
+          </p:nvPr>
+        </p:nvSpPr>
+        <p:spPr/>
+      </p:sp>
+      <p:sp>
+        <p:nvSpPr>
+          <p:cNvPr id="3" name="Notes Placeholder 2"/>
+          <p:cNvSpPr>
+            <a:spLocks noGrp="1"/>
+          </p:cNvSpPr>
+          <p:nvPr>
+            <p:ph type="body" idx="1"/>
+          </p:nvPr>
+        </p:nvSpPr>
+        <p:spPr/>
+        <p:txBody>
+          <a:bodyPr/>
+          <a:lstStyle/>
+          <a:p>
+            <a:r>
+              <a:rPr lang="en-US" dirty="0"/>
+              <a:t>So here's your shift, bin by bin. At shift start and after every break, do your one-minute First Face Fix. On every bin you touch, apply ROBOTSS. And all shift long, fix as you go. Do these three things consistently and fewer units will fall, our wAPMT will come down, and our customers get what they ordered.</a:t>
+            </a:r>
+            <a:endParaRPr lang="en-US" dirty="0"/>
+          </a:p>
+        </p:txBody>
+      </p:sp>
+      <p:sp>
+        <p:nvSpPr>
+          <p:cNvPr id="4" name="Slide Number Placeholder 3"/>
+          <p:cNvSpPr>
+            <a:spLocks noGrp="1"/>
+          </p:cNvSpPr>
+          <p:nvPr>
+            <p:ph type="sldNum" sz="quarter" idx="10"/>
+          </p:nvPr>
+        </p:nvSpPr>
+        <p:spPr/>
+        <p:txBody>
+          <a:bodyPr/>
+          <a:lstStyle/>
+          <a:p>
+            <a:fld id="{F7021451-1387-4CA6-816F-3879F97B5CBC}" type="slidenum">
+              <a:rPr lang="en-US"/>
+              <a:t>19</a:t>
             </a:fld>
             <a:endParaRPr lang="en-US"/>
           </a:p>
@@ -1376,6 +1558,94 @@
             <a:fld id="{F7021451-1387-4CA6-816F-3879F97B5CBC}" type="slidenum">
               <a:rPr lang="en-US"/>
               <a:t>2</a:t>
+            </a:fld>
+            <a:endParaRPr lang="en-US"/>
+          </a:p>
+        </p:txBody>
+      </p:sp>
+    </p:spTree>
+    <p:extLst>
+      <p:ext uri="{BB962C8B-B14F-4D97-AF65-F5344CB8AC3E}">
+        <p14:creationId xmlns:p14="http://schemas.microsoft.com/office/powerpoint/2010/main" val="1024086991"/>
+      </p:ext>
+    </p:extLst>
+  </p:cSld>
+  <p:clrMapOvr>
+    <a:masterClrMapping/>
+  </p:clrMapOvr>
+</p:notes>
+</file>
+
+<file path=ppt/notesSlides/notesSlide20.xml><?xml version="1.0" encoding="utf-8"?>
+<p:notes xmlns:a="http://schemas.openxmlformats.org/drawingml/2006/main" xmlns:r="http://schemas.openxmlformats.org/officeDocument/2006/relationships" xmlns:p="http://schemas.openxmlformats.org/presentationml/2006/main">
+  <p:cSld>
+    <p:spTree>
+      <p:nvGrpSpPr>
+        <p:cNvPr id="1" name=""/>
+        <p:cNvGrpSpPr/>
+        <p:nvPr/>
+      </p:nvGrpSpPr>
+      <p:grpSpPr>
+        <a:xfrm>
+          <a:off x="0" y="0"/>
+          <a:ext cx="0" cy="0"/>
+          <a:chOff x="0" y="0"/>
+          <a:chExt cx="0" cy="0"/>
+        </a:xfrm>
+      </p:grpSpPr>
+      <p:sp>
+        <p:nvSpPr>
+          <p:cNvPr id="2" name="Slide Image Placeholder 1"/>
+          <p:cNvSpPr>
+            <a:spLocks noGrp="1" noRot="1" noChangeAspect="1"/>
+          </p:cNvSpPr>
+          <p:nvPr>
+            <p:ph type="sldImg"/>
+          </p:nvPr>
+        </p:nvSpPr>
+        <p:spPr/>
+      </p:sp>
+      <p:sp>
+        <p:nvSpPr>
+          <p:cNvPr id="3" name="Notes Placeholder 2"/>
+          <p:cNvSpPr>
+            <a:spLocks noGrp="1"/>
+          </p:cNvSpPr>
+          <p:nvPr>
+            <p:ph type="body" idx="1"/>
+          </p:nvPr>
+        </p:nvSpPr>
+        <p:spPr/>
+        <p:txBody>
+          <a:bodyPr/>
+          <a:lstStyle/>
+          <a:p>
+            <a:r>
+              <a:rPr lang="en-US" dirty="0"/>
+              <a:t>Small fixes make a big impact. Thanks for watching, and thanks for looking after every bin, every time. If you have any questions, speak to your Process Guide, your Area Manager, or the ICQA team. And please take a second to rate this video.</a:t>
+            </a:r>
+            <a:endParaRPr lang="en-US" dirty="0"/>
+          </a:p>
+        </p:txBody>
+      </p:sp>
+      <p:sp>
+        <p:nvSpPr>
+          <p:cNvPr id="4" name="Slide Number Placeholder 3"/>
+          <p:cNvSpPr>
+            <a:spLocks noGrp="1"/>
+          </p:cNvSpPr>
+          <p:nvPr>
+            <p:ph type="sldNum" sz="quarter" idx="10"/>
+          </p:nvPr>
+        </p:nvSpPr>
+        <p:spPr/>
+        <p:txBody>
+          <a:bodyPr/>
+          <a:lstStyle/>
+          <a:p>
+            <a:fld id="{F7021451-1387-4CA6-816F-3879F97B5CBC}" type="slidenum">
+              <a:rPr lang="en-US"/>
+              <a:t>20</a:t>
             </a:fld>
             <a:endParaRPr lang="en-US"/>
           </a:p>
@@ -3802,7 +4072,7 @@
                   <a:schemeClr val="tx1"/>
                 </a:solidFill>
               </a:rPr>
-              <a:t>R + O: size it right</a:t>
+              <a:t>R: Right bin size</a:t>
             </a:r>
             <a:endParaRPr lang="en-US" sz="2800" dirty="0"/>
           </a:p>
@@ -3810,14 +4080,14 @@
       </p:sp>
       <p:sp>
         <p:nvSpPr>
-          <p:cNvPr id="3" name="Rule card 1"/>
+          <p:cNvPr id="3" name="Wrong panel"/>
           <p:cNvSpPr/>
           <p:nvPr/>
         </p:nvSpPr>
         <p:spPr>
           <a:xfrm>
             <a:off x="457200" y="1325880"/>
-            <a:ext cx="2606040" cy="3246120"/>
+            <a:ext cx="2606040" cy="2788920"/>
           </a:xfrm>
           <a:prstGeom prst="roundRect">
             <a:avLst>
@@ -3827,107 +4097,17 @@
           <a:solidFill>
             <a:schemeClr val="bg1"/>
           </a:solidFill>
-          <a:ln/>
-        </p:spPr>
-      </p:sp>
-      <p:sp>
-        <p:nvSpPr>
-          <p:cNvPr id="4" name="Rule badge 1"/>
-          <p:cNvSpPr/>
-          <p:nvPr/>
-        </p:nvSpPr>
-        <p:spPr>
-          <a:xfrm>
-            <a:off x="640080" y="1490472"/>
-            <a:ext cx="502920" cy="502920"/>
-          </a:xfrm>
-          <a:prstGeom prst="ellipse">
-            <a:avLst/>
-          </a:prstGeom>
-          <a:solidFill>
-            <a:schemeClr val="tx2"/>
-          </a:solidFill>
-          <a:ln/>
-        </p:spPr>
-      </p:sp>
-      <p:sp>
-        <p:nvSpPr>
-          <p:cNvPr id="5" name="Rule letter 1"/>
-          <p:cNvSpPr txBox="1"/>
-          <p:nvPr/>
-        </p:nvSpPr>
-        <p:spPr>
-          <a:xfrm>
-            <a:off x="640080" y="1490472"/>
-            <a:ext cx="502920" cy="502920"/>
-          </a:xfrm>
-          <a:prstGeom prst="rect">
-            <a:avLst/>
-          </a:prstGeom>
-          <a:noFill/>
-          <a:ln/>
-        </p:spPr>
-        <p:txBody>
-          <a:bodyPr wrap="square" lIns="0" tIns="0" rIns="0" bIns="0" rtlCol="0" anchor="ctr"/>
-          <a:lstStyle/>
-          <a:p>
-            <a:pPr algn="ctr" indent="0" marL="0">
-              <a:buNone/>
-            </a:pPr>
-            <a:r>
-              <a:rPr lang="en-US" sz="2200" b="1" dirty="0">
-                <a:solidFill>
-                  <a:schemeClr val="accent1"/>
-                </a:solidFill>
-                <a:latin typeface="Arial" pitchFamily="34" charset="0"/>
-                <a:ea typeface="Arial" pitchFamily="34" charset="-122"/>
-                <a:cs typeface="Arial" pitchFamily="34" charset="-120"/>
-              </a:rPr>
-              <a:t>R</a:t>
-            </a:r>
-            <a:endParaRPr lang="en-US" sz="2200" dirty="0"/>
-          </a:p>
-        </p:txBody>
-      </p:sp>
-      <p:sp>
-        <p:nvSpPr>
-          <p:cNvPr id="6" name="Rule name 1"/>
-          <p:cNvSpPr txBox="1"/>
-          <p:nvPr/>
-        </p:nvSpPr>
-        <p:spPr>
-          <a:xfrm>
-            <a:off x="1280160" y="1490472"/>
-            <a:ext cx="1645920" cy="502920"/>
-          </a:xfrm>
-          <a:prstGeom prst="rect">
-            <a:avLst/>
-          </a:prstGeom>
-          <a:noFill/>
-          <a:ln/>
-        </p:spPr>
-        <p:txBody>
-          <a:bodyPr wrap="square" lIns="0" tIns="0" rIns="0" bIns="0" rtlCol="0" anchor="ctr"/>
-          <a:lstStyle/>
-          <a:p>
-            <a:pPr indent="0" marL="0">
-              <a:buNone/>
-            </a:pPr>
-            <a:r>
-              <a:rPr lang="en-US" sz="1700" b="1" dirty="0">
-                <a:solidFill>
-                  <a:schemeClr val="tx1"/>
-                </a:solidFill>
-              </a:rPr>
-              <a:t>Right bin size</a:t>
-            </a:r>
-            <a:endParaRPr lang="en-US" sz="1700" dirty="0"/>
-          </a:p>
-        </p:txBody>
+          <a:ln w="38100">
+            <a:solidFill>
+              <a:srgbClr val="D64545"/>
+            </a:solidFill>
+            <a:prstDash val="solid"/>
+          </a:ln>
+        </p:spPr>
       </p:sp>
       <p:pic>
         <p:nvPicPr>
-          <p:cNvPr id="7" name="Rule picture 1" descr="Right bin size: wrong and right example">    </p:cNvPr>
+          <p:cNvPr id="4" name="Wrong picture" descr="Right bin size: wrong example. A tiny item in a big bin wastes space">    </p:cNvPr>
           <p:cNvPicPr>
             <a:picLocks noChangeAspect="1"/>
           </p:cNvPicPr>
@@ -3941,8 +4121,8 @@
         </p:blipFill>
         <p:spPr>
           <a:xfrm>
-            <a:off x="640080" y="2106968"/>
-            <a:ext cx="2240280" cy="998145"/>
+            <a:off x="733451" y="1417320"/>
+            <a:ext cx="2053538" cy="2103120"/>
           </a:xfrm>
           <a:prstGeom prst="rect">
             <a:avLst/>
@@ -3951,72 +4131,61 @@
       </p:pic>
       <p:sp>
         <p:nvSpPr>
-          <p:cNvPr id="8" name="Rule detail 1"/>
+          <p:cNvPr id="5" name="Wrong caption"/>
           <p:cNvSpPr txBox="1"/>
           <p:nvPr/>
         </p:nvSpPr>
         <p:spPr>
           <a:xfrm>
-            <a:off x="640080" y="3246120"/>
-            <a:ext cx="2286000" cy="1234440"/>
-          </a:xfrm>
-          <a:prstGeom prst="rect">
-            <a:avLst/>
-          </a:prstGeom>
-          <a:noFill/>
-          <a:ln/>
-        </p:spPr>
-        <p:txBody>
-          <a:bodyPr wrap="square" lIns="0" tIns="0" rIns="0" bIns="0" rtlCol="0" anchor="t"/>
-          <a:lstStyle/>
-          <a:p>
-            <a:pPr marL="342900" indent="-342900">
-              <a:spcAft>
-                <a:spcPts val="400"/>
-              </a:spcAft>
-              <a:buSzPct val="100000"/>
-              <a:buChar char="•"/>
-            </a:pPr>
-            <a:r>
-              <a:rPr lang="en-US" sz="1400" dirty="0">
-                <a:solidFill>
-                  <a:schemeClr val="accent4"/>
-                </a:solidFill>
-              </a:rPr>
-              <a:t>Use the smallest bin that fits</a:t>
-            </a:r>
-            <a:endParaRPr lang="en-US" sz="1400" dirty="0"/>
-          </a:p>
-          <a:p>
-            <a:pPr marL="342900" indent="-342900">
-              <a:spcAft>
-                <a:spcPts val="400"/>
-              </a:spcAft>
-              <a:buSzPct val="100000"/>
-              <a:buChar char="•"/>
-            </a:pPr>
-            <a:r>
-              <a:rPr lang="en-US" sz="1400" dirty="0">
-                <a:solidFill>
-                  <a:schemeClr val="accent4"/>
-                </a:solidFill>
-              </a:rPr>
-              <a:t>Place items by length first</a:t>
-            </a:r>
-            <a:endParaRPr lang="en-US" sz="1400" dirty="0"/>
-          </a:p>
-        </p:txBody>
-      </p:sp>
-      <p:sp>
-        <p:nvSpPr>
-          <p:cNvPr id="9" name="Rule card 2"/>
+            <a:off x="594360" y="3547872"/>
+            <a:ext cx="2331720" cy="502920"/>
+          </a:xfrm>
+          <a:prstGeom prst="rect">
+            <a:avLst/>
+          </a:prstGeom>
+          <a:noFill/>
+          <a:ln/>
+        </p:spPr>
+        <p:txBody>
+          <a:bodyPr wrap="square" lIns="0" tIns="0" rIns="0" bIns="0" rtlCol="0" anchor="ctr"/>
+          <a:lstStyle/>
+          <a:p>
+            <a:pPr algn="ctr" indent="0" marL="0">
+              <a:buNone/>
+            </a:pPr>
+            <a:r>
+              <a:rPr lang="en-US" sz="1300" b="1" dirty="0">
+                <a:solidFill>
+                  <a:schemeClr val="accent3"/>
+                </a:solidFill>
+              </a:rPr>
+              <a:t>WRONG: </a:t>
+            </a:r>
+            <a:pPr algn="ctr" indent="0" marL="0">
+              <a:buNone/>
+            </a:pPr>
+            <a:r>
+              <a:rPr lang="en-US" sz="1300" dirty="0">
+                <a:solidFill>
+                  <a:schemeClr val="tx1"/>
+                </a:solidFill>
+              </a:rPr>
+              <a:t>A tiny item in a big bin wastes space</a:t>
+            </a:r>
+            <a:endParaRPr lang="en-US" sz="1300" dirty="0"/>
+          </a:p>
+        </p:txBody>
+      </p:sp>
+      <p:sp>
+        <p:nvSpPr>
+          <p:cNvPr id="6" name="Right panel"/>
           <p:cNvSpPr/>
           <p:nvPr/>
         </p:nvSpPr>
         <p:spPr>
           <a:xfrm>
             <a:off x="3246120" y="1325880"/>
-            <a:ext cx="2606040" cy="3246120"/>
+            <a:ext cx="2606040" cy="2788920"/>
           </a:xfrm>
           <a:prstGeom prst="roundRect">
             <a:avLst>
@@ -4026,107 +4195,17 @@
           <a:solidFill>
             <a:schemeClr val="bg1"/>
           </a:solidFill>
-          <a:ln/>
-        </p:spPr>
-      </p:sp>
-      <p:sp>
-        <p:nvSpPr>
-          <p:cNvPr id="10" name="Rule badge 2"/>
-          <p:cNvSpPr/>
-          <p:nvPr/>
-        </p:nvSpPr>
-        <p:spPr>
-          <a:xfrm>
-            <a:off x="3429000" y="1490472"/>
-            <a:ext cx="502920" cy="502920"/>
-          </a:xfrm>
-          <a:prstGeom prst="ellipse">
-            <a:avLst/>
-          </a:prstGeom>
-          <a:solidFill>
-            <a:schemeClr val="tx2"/>
-          </a:solidFill>
-          <a:ln/>
-        </p:spPr>
-      </p:sp>
-      <p:sp>
-        <p:nvSpPr>
-          <p:cNvPr id="11" name="Rule letter 2"/>
-          <p:cNvSpPr txBox="1"/>
-          <p:nvPr/>
-        </p:nvSpPr>
-        <p:spPr>
-          <a:xfrm>
-            <a:off x="3429000" y="1490472"/>
-            <a:ext cx="502920" cy="502920"/>
-          </a:xfrm>
-          <a:prstGeom prst="rect">
-            <a:avLst/>
-          </a:prstGeom>
-          <a:noFill/>
-          <a:ln/>
-        </p:spPr>
-        <p:txBody>
-          <a:bodyPr wrap="square" lIns="0" tIns="0" rIns="0" bIns="0" rtlCol="0" anchor="ctr"/>
-          <a:lstStyle/>
-          <a:p>
-            <a:pPr algn="ctr" indent="0" marL="0">
-              <a:buNone/>
-            </a:pPr>
-            <a:r>
-              <a:rPr lang="en-US" sz="2200" b="1" dirty="0">
-                <a:solidFill>
-                  <a:schemeClr val="accent1"/>
-                </a:solidFill>
-                <a:latin typeface="Arial" pitchFamily="34" charset="0"/>
-                <a:ea typeface="Arial" pitchFamily="34" charset="-122"/>
-                <a:cs typeface="Arial" pitchFamily="34" charset="-120"/>
-              </a:rPr>
-              <a:t>O</a:t>
-            </a:r>
-            <a:endParaRPr lang="en-US" sz="2200" dirty="0"/>
-          </a:p>
-        </p:txBody>
-      </p:sp>
-      <p:sp>
-        <p:nvSpPr>
-          <p:cNvPr id="12" name="Rule name 2"/>
-          <p:cNvSpPr txBox="1"/>
-          <p:nvPr/>
-        </p:nvSpPr>
-        <p:spPr>
-          <a:xfrm>
-            <a:off x="4069080" y="1490472"/>
-            <a:ext cx="1645920" cy="502920"/>
-          </a:xfrm>
-          <a:prstGeom prst="rect">
-            <a:avLst/>
-          </a:prstGeom>
-          <a:noFill/>
-          <a:ln/>
-        </p:spPr>
-        <p:txBody>
-          <a:bodyPr wrap="square" lIns="0" tIns="0" rIns="0" bIns="0" rtlCol="0" anchor="ctr"/>
-          <a:lstStyle/>
-          <a:p>
-            <a:pPr indent="0" marL="0">
-              <a:buNone/>
-            </a:pPr>
-            <a:r>
-              <a:rPr lang="en-US" sz="1700" b="1" dirty="0">
-                <a:solidFill>
-                  <a:schemeClr val="tx1"/>
-                </a:solidFill>
-              </a:rPr>
-              <a:t>No overhang</a:t>
-            </a:r>
-            <a:endParaRPr lang="en-US" sz="1700" dirty="0"/>
-          </a:p>
-        </p:txBody>
+          <a:ln w="38100">
+            <a:solidFill>
+              <a:srgbClr val="2E7D32"/>
+            </a:solidFill>
+            <a:prstDash val="solid"/>
+          </a:ln>
+        </p:spPr>
       </p:sp>
       <p:pic>
         <p:nvPicPr>
-          <p:cNvPr id="13" name="Rule picture 2" descr="No overhang: wrong and right example">    </p:cNvPr>
+          <p:cNvPr id="7" name="Right picture" descr="Right bin size: right example. The item suits the size of the bin">    </p:cNvPr>
           <p:cNvPicPr>
             <a:picLocks noChangeAspect="1"/>
           </p:cNvPicPr>
@@ -4140,8 +4219,8 @@
         </p:blipFill>
         <p:spPr>
           <a:xfrm>
-            <a:off x="3429000" y="2143936"/>
-            <a:ext cx="2240280" cy="924208"/>
+            <a:off x="3478987" y="1417320"/>
+            <a:ext cx="2140307" cy="2103120"/>
           </a:xfrm>
           <a:prstGeom prst="rect">
             <a:avLst/>
@@ -4150,57 +4229,104 @@
       </p:pic>
       <p:sp>
         <p:nvSpPr>
-          <p:cNvPr id="14" name="Rule detail 2"/>
+          <p:cNvPr id="8" name="Right caption"/>
           <p:cNvSpPr txBox="1"/>
           <p:nvPr/>
         </p:nvSpPr>
         <p:spPr>
           <a:xfrm>
-            <a:off x="3429000" y="3246120"/>
-            <a:ext cx="2286000" cy="1234440"/>
-          </a:xfrm>
-          <a:prstGeom prst="rect">
-            <a:avLst/>
-          </a:prstGeom>
-          <a:noFill/>
-          <a:ln/>
-        </p:spPr>
-        <p:txBody>
-          <a:bodyPr wrap="square" lIns="0" tIns="0" rIns="0" bIns="0" rtlCol="0" anchor="t"/>
-          <a:lstStyle/>
-          <a:p>
-            <a:pPr marL="342900" indent="-342900">
-              <a:spcAft>
-                <a:spcPts val="400"/>
-              </a:spcAft>
-              <a:buSzPct val="100000"/>
-              <a:buChar char="•"/>
-            </a:pPr>
-            <a:r>
-              <a:rPr lang="en-US" sz="1400" dirty="0">
-                <a:solidFill>
-                  <a:schemeClr val="accent4"/>
-                </a:solidFill>
-              </a:rPr>
-              <a:t>Every item must fit fully inside the bin</a:t>
-            </a:r>
-            <a:endParaRPr lang="en-US" sz="1400" dirty="0"/>
-          </a:p>
-          <a:p>
-            <a:pPr marL="342900" indent="-342900">
-              <a:spcAft>
-                <a:spcPts val="400"/>
-              </a:spcAft>
-              <a:buSzPct val="100000"/>
-              <a:buChar char="•"/>
-            </a:pPr>
-            <a:r>
-              <a:rPr lang="en-US" sz="1400" dirty="0">
-                <a:solidFill>
-                  <a:schemeClr val="accent4"/>
-                </a:solidFill>
-              </a:rPr>
-              <a:t>Overhang causes drive obstructions and pod crashes</a:t>
+            <a:off x="3383280" y="3547872"/>
+            <a:ext cx="2331720" cy="502920"/>
+          </a:xfrm>
+          <a:prstGeom prst="rect">
+            <a:avLst/>
+          </a:prstGeom>
+          <a:noFill/>
+          <a:ln/>
+        </p:spPr>
+        <p:txBody>
+          <a:bodyPr wrap="square" lIns="0" tIns="0" rIns="0" bIns="0" rtlCol="0" anchor="ctr"/>
+          <a:lstStyle/>
+          <a:p>
+            <a:pPr algn="ctr" indent="0" marL="0">
+              <a:buNone/>
+            </a:pPr>
+            <a:r>
+              <a:rPr lang="en-US" sz="1300" b="1" dirty="0">
+                <a:solidFill>
+                  <a:srgbClr val="2E7D32"/>
+                </a:solidFill>
+              </a:rPr>
+              <a:t>RIGHT: </a:t>
+            </a:r>
+            <a:pPr algn="ctr" indent="0" marL="0">
+              <a:buNone/>
+            </a:pPr>
+            <a:r>
+              <a:rPr lang="en-US" sz="1300" dirty="0">
+                <a:solidFill>
+                  <a:schemeClr val="tx1"/>
+                </a:solidFill>
+              </a:rPr>
+              <a:t>The item suits the size of the bin</a:t>
+            </a:r>
+            <a:endParaRPr lang="en-US" sz="1300" dirty="0"/>
+          </a:p>
+        </p:txBody>
+      </p:sp>
+      <p:sp>
+        <p:nvSpPr>
+          <p:cNvPr id="9" name="Rule card"/>
+          <p:cNvSpPr/>
+          <p:nvPr/>
+        </p:nvSpPr>
+        <p:spPr>
+          <a:xfrm>
+            <a:off x="457200" y="4251960"/>
+            <a:ext cx="5394960" cy="566928"/>
+          </a:xfrm>
+          <a:prstGeom prst="roundRect">
+            <a:avLst>
+              <a:gd name="adj" fmla="val 16129"/>
+            </a:avLst>
+          </a:prstGeom>
+          <a:solidFill>
+            <a:schemeClr val="tx2"/>
+          </a:solidFill>
+          <a:ln/>
+        </p:spPr>
+      </p:sp>
+      <p:sp>
+        <p:nvSpPr>
+          <p:cNvPr id="10" name="Rule text"/>
+          <p:cNvSpPr txBox="1"/>
+          <p:nvPr/>
+        </p:nvSpPr>
+        <p:spPr>
+          <a:xfrm>
+            <a:off x="685800" y="4251960"/>
+            <a:ext cx="4937760" cy="566928"/>
+          </a:xfrm>
+          <a:prstGeom prst="rect">
+            <a:avLst/>
+          </a:prstGeom>
+          <a:noFill/>
+          <a:ln/>
+        </p:spPr>
+        <p:txBody>
+          <a:bodyPr wrap="square" lIns="0" tIns="0" rIns="0" bIns="0" rtlCol="0" anchor="ctr"/>
+          <a:lstStyle/>
+          <a:p>
+            <a:pPr indent="0" marL="0">
+              <a:buNone/>
+            </a:pPr>
+            <a:r>
+              <a:rPr lang="en-US" sz="1400" b="1" dirty="0">
+                <a:solidFill>
+                  <a:schemeClr val="bg1"/>
+                </a:solidFill>
+              </a:rPr>
+              <a:t>Use the smallest bin possible, and place items by length first.</a:t>
             </a:r>
             <a:endParaRPr lang="en-US" sz="1400" dirty="0"/>
           </a:p>
@@ -4263,7 +4389,7 @@
                   <a:schemeClr val="tx1"/>
                 </a:solidFill>
               </a:rPr>
-              <a:t>B + O: keep items safe</a:t>
+              <a:t>O: No overhang</a:t>
             </a:r>
             <a:endParaRPr lang="en-US" sz="2800" dirty="0"/>
           </a:p>
@@ -4271,14 +4397,14 @@
       </p:sp>
       <p:sp>
         <p:nvSpPr>
-          <p:cNvPr id="3" name="Rule card 1"/>
+          <p:cNvPr id="3" name="Wrong panel"/>
           <p:cNvSpPr/>
           <p:nvPr/>
         </p:nvSpPr>
         <p:spPr>
           <a:xfrm>
             <a:off x="457200" y="1325880"/>
-            <a:ext cx="2606040" cy="3246120"/>
+            <a:ext cx="2606040" cy="2788920"/>
           </a:xfrm>
           <a:prstGeom prst="roundRect">
             <a:avLst>
@@ -4288,107 +4414,17 @@
           <a:solidFill>
             <a:schemeClr val="bg1"/>
           </a:solidFill>
-          <a:ln/>
-        </p:spPr>
-      </p:sp>
-      <p:sp>
-        <p:nvSpPr>
-          <p:cNvPr id="4" name="Rule badge 1"/>
-          <p:cNvSpPr/>
-          <p:nvPr/>
-        </p:nvSpPr>
-        <p:spPr>
-          <a:xfrm>
-            <a:off x="640080" y="1490472"/>
-            <a:ext cx="502920" cy="502920"/>
-          </a:xfrm>
-          <a:prstGeom prst="ellipse">
-            <a:avLst/>
-          </a:prstGeom>
-          <a:solidFill>
-            <a:schemeClr val="tx2"/>
-          </a:solidFill>
-          <a:ln/>
-        </p:spPr>
-      </p:sp>
-      <p:sp>
-        <p:nvSpPr>
-          <p:cNvPr id="5" name="Rule letter 1"/>
-          <p:cNvSpPr txBox="1"/>
-          <p:nvPr/>
-        </p:nvSpPr>
-        <p:spPr>
-          <a:xfrm>
-            <a:off x="640080" y="1490472"/>
-            <a:ext cx="502920" cy="502920"/>
-          </a:xfrm>
-          <a:prstGeom prst="rect">
-            <a:avLst/>
-          </a:prstGeom>
-          <a:noFill/>
-          <a:ln/>
-        </p:spPr>
-        <p:txBody>
-          <a:bodyPr wrap="square" lIns="0" tIns="0" rIns="0" bIns="0" rtlCol="0" anchor="ctr"/>
-          <a:lstStyle/>
-          <a:p>
-            <a:pPr algn="ctr" indent="0" marL="0">
-              <a:buNone/>
-            </a:pPr>
-            <a:r>
-              <a:rPr lang="en-US" sz="2200" b="1" dirty="0">
-                <a:solidFill>
-                  <a:schemeClr val="accent1"/>
-                </a:solidFill>
-                <a:latin typeface="Arial" pitchFamily="34" charset="0"/>
-                <a:ea typeface="Arial" pitchFamily="34" charset="-122"/>
-                <a:cs typeface="Arial" pitchFamily="34" charset="-120"/>
-              </a:rPr>
-              <a:t>B</a:t>
-            </a:r>
-            <a:endParaRPr lang="en-US" sz="2200" dirty="0"/>
-          </a:p>
-        </p:txBody>
-      </p:sp>
-      <p:sp>
-        <p:nvSpPr>
-          <p:cNvPr id="6" name="Rule name 1"/>
-          <p:cNvSpPr txBox="1"/>
-          <p:nvPr/>
-        </p:nvSpPr>
-        <p:spPr>
-          <a:xfrm>
-            <a:off x="1280160" y="1490472"/>
-            <a:ext cx="1645920" cy="502920"/>
-          </a:xfrm>
-          <a:prstGeom prst="rect">
-            <a:avLst/>
-          </a:prstGeom>
-          <a:noFill/>
-          <a:ln/>
-        </p:spPr>
-        <p:txBody>
-          <a:bodyPr wrap="square" lIns="0" tIns="0" rIns="0" bIns="0" rtlCol="0" anchor="ctr"/>
-          <a:lstStyle/>
-          <a:p>
-            <a:pPr indent="0" marL="0">
-              <a:buNone/>
-            </a:pPr>
-            <a:r>
-              <a:rPr lang="en-US" sz="1700" b="1" dirty="0">
-                <a:solidFill>
-                  <a:schemeClr val="tx1"/>
-                </a:solidFill>
-              </a:rPr>
-              <a:t>Blocking</a:t>
-            </a:r>
-            <a:endParaRPr lang="en-US" sz="1700" dirty="0"/>
-          </a:p>
-        </p:txBody>
+          <a:ln w="38100">
+            <a:solidFill>
+              <a:srgbClr val="D64545"/>
+            </a:solidFill>
+            <a:prstDash val="solid"/>
+          </a:ln>
+        </p:spPr>
       </p:sp>
       <p:pic>
         <p:nvPicPr>
-          <p:cNvPr id="7" name="Rule picture 1" descr="Blocking: wrong and right example">    </p:cNvPr>
+          <p:cNvPr id="4" name="Wrong picture" descr="No overhang: wrong example. The box sticks out past the bin edge">    </p:cNvPr>
           <p:cNvPicPr>
             <a:picLocks noChangeAspect="1"/>
           </p:cNvPicPr>
@@ -4402,8 +4438,8 @@
         </p:blipFill>
         <p:spPr>
           <a:xfrm>
-            <a:off x="640080" y="2136542"/>
-            <a:ext cx="2240280" cy="938995"/>
+            <a:off x="700128" y="1417320"/>
+            <a:ext cx="2120184" cy="2103120"/>
           </a:xfrm>
           <a:prstGeom prst="rect">
             <a:avLst/>
@@ -4412,72 +4448,61 @@
       </p:pic>
       <p:sp>
         <p:nvSpPr>
-          <p:cNvPr id="8" name="Rule detail 1"/>
+          <p:cNvPr id="5" name="Wrong caption"/>
           <p:cNvSpPr txBox="1"/>
           <p:nvPr/>
         </p:nvSpPr>
         <p:spPr>
           <a:xfrm>
-            <a:off x="640080" y="3246120"/>
-            <a:ext cx="2286000" cy="1234440"/>
-          </a:xfrm>
-          <a:prstGeom prst="rect">
-            <a:avLst/>
-          </a:prstGeom>
-          <a:noFill/>
-          <a:ln/>
-        </p:spPr>
-        <p:txBody>
-          <a:bodyPr wrap="square" lIns="0" tIns="0" rIns="0" bIns="0" rtlCol="0" anchor="t"/>
-          <a:lstStyle/>
-          <a:p>
-            <a:pPr marL="342900" indent="-342900">
-              <a:spcAft>
-                <a:spcPts val="400"/>
-              </a:spcAft>
-              <a:buSzPct val="100000"/>
-              <a:buChar char="•"/>
-            </a:pPr>
-            <a:r>
-              <a:rPr lang="en-US" sz="1400" dirty="0">
-                <a:solidFill>
-                  <a:schemeClr val="accent4"/>
-                </a:solidFill>
-              </a:rPr>
-              <a:t>Never hide small items behind larger ones</a:t>
-            </a:r>
-            <a:endParaRPr lang="en-US" sz="1400" dirty="0"/>
-          </a:p>
-          <a:p>
-            <a:pPr marL="342900" indent="-342900">
-              <a:spcAft>
-                <a:spcPts val="400"/>
-              </a:spcAft>
-              <a:buSzPct val="100000"/>
-              <a:buChar char="•"/>
-            </a:pPr>
-            <a:r>
-              <a:rPr lang="en-US" sz="1400" dirty="0">
-                <a:solidFill>
-                  <a:schemeClr val="accent4"/>
-                </a:solidFill>
-              </a:rPr>
-              <a:t>Stand flat items upright so they can't slip between the bands</a:t>
-            </a:r>
-            <a:endParaRPr lang="en-US" sz="1400" dirty="0"/>
-          </a:p>
-        </p:txBody>
-      </p:sp>
-      <p:sp>
-        <p:nvSpPr>
-          <p:cNvPr id="9" name="Rule card 2"/>
+            <a:off x="594360" y="3547872"/>
+            <a:ext cx="2331720" cy="502920"/>
+          </a:xfrm>
+          <a:prstGeom prst="rect">
+            <a:avLst/>
+          </a:prstGeom>
+          <a:noFill/>
+          <a:ln/>
+        </p:spPr>
+        <p:txBody>
+          <a:bodyPr wrap="square" lIns="0" tIns="0" rIns="0" bIns="0" rtlCol="0" anchor="ctr"/>
+          <a:lstStyle/>
+          <a:p>
+            <a:pPr algn="ctr" indent="0" marL="0">
+              <a:buNone/>
+            </a:pPr>
+            <a:r>
+              <a:rPr lang="en-US" sz="1300" b="1" dirty="0">
+                <a:solidFill>
+                  <a:schemeClr val="accent3"/>
+                </a:solidFill>
+              </a:rPr>
+              <a:t>WRONG: </a:t>
+            </a:r>
+            <a:pPr algn="ctr" indent="0" marL="0">
+              <a:buNone/>
+            </a:pPr>
+            <a:r>
+              <a:rPr lang="en-US" sz="1300" dirty="0">
+                <a:solidFill>
+                  <a:schemeClr val="tx1"/>
+                </a:solidFill>
+              </a:rPr>
+              <a:t>The box sticks out past the bin edge</a:t>
+            </a:r>
+            <a:endParaRPr lang="en-US" sz="1300" dirty="0"/>
+          </a:p>
+        </p:txBody>
+      </p:sp>
+      <p:sp>
+        <p:nvSpPr>
+          <p:cNvPr id="6" name="Right panel"/>
           <p:cNvSpPr/>
           <p:nvPr/>
         </p:nvSpPr>
         <p:spPr>
           <a:xfrm>
             <a:off x="3246120" y="1325880"/>
-            <a:ext cx="2606040" cy="3246120"/>
+            <a:ext cx="2606040" cy="2788920"/>
           </a:xfrm>
           <a:prstGeom prst="roundRect">
             <a:avLst>
@@ -4487,107 +4512,17 @@
           <a:solidFill>
             <a:schemeClr val="bg1"/>
           </a:solidFill>
-          <a:ln/>
-        </p:spPr>
-      </p:sp>
-      <p:sp>
-        <p:nvSpPr>
-          <p:cNvPr id="10" name="Rule badge 2"/>
-          <p:cNvSpPr/>
-          <p:nvPr/>
-        </p:nvSpPr>
-        <p:spPr>
-          <a:xfrm>
-            <a:off x="3429000" y="1490472"/>
-            <a:ext cx="502920" cy="502920"/>
-          </a:xfrm>
-          <a:prstGeom prst="ellipse">
-            <a:avLst/>
-          </a:prstGeom>
-          <a:solidFill>
-            <a:schemeClr val="tx2"/>
-          </a:solidFill>
-          <a:ln/>
-        </p:spPr>
-      </p:sp>
-      <p:sp>
-        <p:nvSpPr>
-          <p:cNvPr id="11" name="Rule letter 2"/>
-          <p:cNvSpPr txBox="1"/>
-          <p:nvPr/>
-        </p:nvSpPr>
-        <p:spPr>
-          <a:xfrm>
-            <a:off x="3429000" y="1490472"/>
-            <a:ext cx="502920" cy="502920"/>
-          </a:xfrm>
-          <a:prstGeom prst="rect">
-            <a:avLst/>
-          </a:prstGeom>
-          <a:noFill/>
-          <a:ln/>
-        </p:spPr>
-        <p:txBody>
-          <a:bodyPr wrap="square" lIns="0" tIns="0" rIns="0" bIns="0" rtlCol="0" anchor="ctr"/>
-          <a:lstStyle/>
-          <a:p>
-            <a:pPr algn="ctr" indent="0" marL="0">
-              <a:buNone/>
-            </a:pPr>
-            <a:r>
-              <a:rPr lang="en-US" sz="2200" b="1" dirty="0">
-                <a:solidFill>
-                  <a:schemeClr val="accent1"/>
-                </a:solidFill>
-                <a:latin typeface="Arial" pitchFamily="34" charset="0"/>
-                <a:ea typeface="Arial" pitchFamily="34" charset="-122"/>
-                <a:cs typeface="Arial" pitchFamily="34" charset="-120"/>
-              </a:rPr>
-              <a:t>O</a:t>
-            </a:r>
-            <a:endParaRPr lang="en-US" sz="2200" dirty="0"/>
-          </a:p>
-        </p:txBody>
-      </p:sp>
-      <p:sp>
-        <p:nvSpPr>
-          <p:cNvPr id="12" name="Rule name 2"/>
-          <p:cNvSpPr txBox="1"/>
-          <p:nvPr/>
-        </p:nvSpPr>
-        <p:spPr>
-          <a:xfrm>
-            <a:off x="4069080" y="1490472"/>
-            <a:ext cx="1645920" cy="502920"/>
-          </a:xfrm>
-          <a:prstGeom prst="rect">
-            <a:avLst/>
-          </a:prstGeom>
-          <a:noFill/>
-          <a:ln/>
-        </p:spPr>
-        <p:txBody>
-          <a:bodyPr wrap="square" lIns="0" tIns="0" rIns="0" bIns="0" rtlCol="0" anchor="ctr"/>
-          <a:lstStyle/>
-          <a:p>
-            <a:pPr indent="0" marL="0">
-              <a:buNone/>
-            </a:pPr>
-            <a:r>
-              <a:rPr lang="en-US" sz="1700" b="1" dirty="0">
-                <a:solidFill>
-                  <a:schemeClr val="tx1"/>
-                </a:solidFill>
-              </a:rPr>
-              <a:t>Overstuffing</a:t>
-            </a:r>
-            <a:endParaRPr lang="en-US" sz="1700" dirty="0"/>
-          </a:p>
-        </p:txBody>
+          <a:ln w="38100">
+            <a:solidFill>
+              <a:srgbClr val="2E7D32"/>
+            </a:solidFill>
+            <a:prstDash val="solid"/>
+          </a:ln>
+        </p:spPr>
       </p:sp>
       <p:pic>
         <p:nvPicPr>
-          <p:cNvPr id="13" name="Rule picture 2" descr="Overstuffing: wrong and right example">    </p:cNvPr>
+          <p:cNvPr id="7" name="Right picture" descr="No overhang: right example. Everything sits fully inside the bin">    </p:cNvPr>
           <p:cNvPicPr>
             <a:picLocks noChangeAspect="1"/>
           </p:cNvPicPr>
@@ -4601,8 +4536,8 @@
         </p:blipFill>
         <p:spPr>
           <a:xfrm>
-            <a:off x="3429000" y="2162420"/>
-            <a:ext cx="2240280" cy="887240"/>
+            <a:off x="3521332" y="1417320"/>
+            <a:ext cx="2055616" cy="2103120"/>
           </a:xfrm>
           <a:prstGeom prst="rect">
             <a:avLst/>
@@ -4611,57 +4546,104 @@
       </p:pic>
       <p:sp>
         <p:nvSpPr>
-          <p:cNvPr id="14" name="Rule detail 2"/>
+          <p:cNvPr id="8" name="Right caption"/>
           <p:cNvSpPr txBox="1"/>
           <p:nvPr/>
         </p:nvSpPr>
         <p:spPr>
           <a:xfrm>
-            <a:off x="3429000" y="3246120"/>
-            <a:ext cx="2286000" cy="1234440"/>
-          </a:xfrm>
-          <a:prstGeom prst="rect">
-            <a:avLst/>
-          </a:prstGeom>
-          <a:noFill/>
-          <a:ln/>
-        </p:spPr>
-        <p:txBody>
-          <a:bodyPr wrap="square" lIns="0" tIns="0" rIns="0" bIns="0" rtlCol="0" anchor="t"/>
-          <a:lstStyle/>
-          <a:p>
-            <a:pPr marL="342900" indent="-342900">
-              <a:spcAft>
-                <a:spcPts val="400"/>
-              </a:spcAft>
-              <a:buSzPct val="100000"/>
-              <a:buChar char="•"/>
-            </a:pPr>
-            <a:r>
-              <a:rPr lang="en-US" sz="1400" dirty="0">
-                <a:solidFill>
-                  <a:schemeClr val="accent4"/>
-                </a:solidFill>
-              </a:rPr>
-              <a:t>Don't overfill the bin</a:t>
-            </a:r>
-            <a:endParaRPr lang="en-US" sz="1400" dirty="0"/>
-          </a:p>
-          <a:p>
-            <a:pPr marL="342900" indent="-342900">
-              <a:spcAft>
-                <a:spcPts val="400"/>
-              </a:spcAft>
-              <a:buSzPct val="100000"/>
-              <a:buChar char="•"/>
-            </a:pPr>
-            <a:r>
-              <a:rPr lang="en-US" sz="1400" dirty="0">
-                <a:solidFill>
-                  <a:schemeClr val="accent4"/>
-                </a:solidFill>
-              </a:rPr>
-              <a:t>Forcing items in damages customer products</a:t>
+            <a:off x="3383280" y="3547872"/>
+            <a:ext cx="2331720" cy="502920"/>
+          </a:xfrm>
+          <a:prstGeom prst="rect">
+            <a:avLst/>
+          </a:prstGeom>
+          <a:noFill/>
+          <a:ln/>
+        </p:spPr>
+        <p:txBody>
+          <a:bodyPr wrap="square" lIns="0" tIns="0" rIns="0" bIns="0" rtlCol="0" anchor="ctr"/>
+          <a:lstStyle/>
+          <a:p>
+            <a:pPr algn="ctr" indent="0" marL="0">
+              <a:buNone/>
+            </a:pPr>
+            <a:r>
+              <a:rPr lang="en-US" sz="1300" b="1" dirty="0">
+                <a:solidFill>
+                  <a:srgbClr val="2E7D32"/>
+                </a:solidFill>
+              </a:rPr>
+              <a:t>RIGHT: </a:t>
+            </a:r>
+            <a:pPr algn="ctr" indent="0" marL="0">
+              <a:buNone/>
+            </a:pPr>
+            <a:r>
+              <a:rPr lang="en-US" sz="1300" dirty="0">
+                <a:solidFill>
+                  <a:schemeClr val="tx1"/>
+                </a:solidFill>
+              </a:rPr>
+              <a:t>Everything sits fully inside the bin</a:t>
+            </a:r>
+            <a:endParaRPr lang="en-US" sz="1300" dirty="0"/>
+          </a:p>
+        </p:txBody>
+      </p:sp>
+      <p:sp>
+        <p:nvSpPr>
+          <p:cNvPr id="9" name="Rule card"/>
+          <p:cNvSpPr/>
+          <p:nvPr/>
+        </p:nvSpPr>
+        <p:spPr>
+          <a:xfrm>
+            <a:off x="457200" y="4251960"/>
+            <a:ext cx="5394960" cy="566928"/>
+          </a:xfrm>
+          <a:prstGeom prst="roundRect">
+            <a:avLst>
+              <a:gd name="adj" fmla="val 16129"/>
+            </a:avLst>
+          </a:prstGeom>
+          <a:solidFill>
+            <a:schemeClr val="tx2"/>
+          </a:solidFill>
+          <a:ln/>
+        </p:spPr>
+      </p:sp>
+      <p:sp>
+        <p:nvSpPr>
+          <p:cNvPr id="10" name="Rule text"/>
+          <p:cNvSpPr txBox="1"/>
+          <p:nvPr/>
+        </p:nvSpPr>
+        <p:spPr>
+          <a:xfrm>
+            <a:off x="685800" y="4251960"/>
+            <a:ext cx="4937760" cy="566928"/>
+          </a:xfrm>
+          <a:prstGeom prst="rect">
+            <a:avLst/>
+          </a:prstGeom>
+          <a:noFill/>
+          <a:ln/>
+        </p:spPr>
+        <p:txBody>
+          <a:bodyPr wrap="square" lIns="0" tIns="0" rIns="0" bIns="0" rtlCol="0" anchor="ctr"/>
+          <a:lstStyle/>
+          <a:p>
+            <a:pPr indent="0" marL="0">
+              <a:buNone/>
+            </a:pPr>
+            <a:r>
+              <a:rPr lang="en-US" sz="1400" b="1" dirty="0">
+                <a:solidFill>
+                  <a:schemeClr val="bg1"/>
+                </a:solidFill>
+              </a:rPr>
+              <a:t>All items must fit inside the bin. Overhang causes drive obstructions and pod crashes.</a:t>
             </a:r>
             <a:endParaRPr lang="en-US" sz="1400" dirty="0"/>
           </a:p>
@@ -4724,7 +4706,7 @@
                   <a:schemeClr val="tx1"/>
                 </a:solidFill>
               </a:rPr>
-              <a:t>T + S: easy to find</a:t>
+              <a:t>B: Blocking</a:t>
             </a:r>
             <a:endParaRPr lang="en-US" sz="2800" dirty="0"/>
           </a:p>
@@ -4732,14 +4714,14 @@
       </p:sp>
       <p:sp>
         <p:nvSpPr>
-          <p:cNvPr id="3" name="Rule card 1"/>
+          <p:cNvPr id="3" name="Wrong panel"/>
           <p:cNvSpPr/>
           <p:nvPr/>
         </p:nvSpPr>
         <p:spPr>
           <a:xfrm>
             <a:off x="457200" y="1325880"/>
-            <a:ext cx="2606040" cy="3246120"/>
+            <a:ext cx="2606040" cy="2788920"/>
           </a:xfrm>
           <a:prstGeom prst="roundRect">
             <a:avLst>
@@ -4749,107 +4731,17 @@
           <a:solidFill>
             <a:schemeClr val="bg1"/>
           </a:solidFill>
-          <a:ln/>
-        </p:spPr>
-      </p:sp>
-      <p:sp>
-        <p:nvSpPr>
-          <p:cNvPr id="4" name="Rule badge 1"/>
-          <p:cNvSpPr/>
-          <p:nvPr/>
-        </p:nvSpPr>
-        <p:spPr>
-          <a:xfrm>
-            <a:off x="640080" y="1490472"/>
-            <a:ext cx="502920" cy="502920"/>
-          </a:xfrm>
-          <a:prstGeom prst="ellipse">
-            <a:avLst/>
-          </a:prstGeom>
-          <a:solidFill>
-            <a:schemeClr val="tx2"/>
-          </a:solidFill>
-          <a:ln/>
-        </p:spPr>
-      </p:sp>
-      <p:sp>
-        <p:nvSpPr>
-          <p:cNvPr id="5" name="Rule letter 1"/>
-          <p:cNvSpPr txBox="1"/>
-          <p:nvPr/>
-        </p:nvSpPr>
-        <p:spPr>
-          <a:xfrm>
-            <a:off x="640080" y="1490472"/>
-            <a:ext cx="502920" cy="502920"/>
-          </a:xfrm>
-          <a:prstGeom prst="rect">
-            <a:avLst/>
-          </a:prstGeom>
-          <a:noFill/>
-          <a:ln/>
-        </p:spPr>
-        <p:txBody>
-          <a:bodyPr wrap="square" lIns="0" tIns="0" rIns="0" bIns="0" rtlCol="0" anchor="ctr"/>
-          <a:lstStyle/>
-          <a:p>
-            <a:pPr algn="ctr" indent="0" marL="0">
-              <a:buNone/>
-            </a:pPr>
-            <a:r>
-              <a:rPr lang="en-US" sz="2200" b="1" dirty="0">
-                <a:solidFill>
-                  <a:schemeClr val="accent1"/>
-                </a:solidFill>
-                <a:latin typeface="Arial" pitchFamily="34" charset="0"/>
-                <a:ea typeface="Arial" pitchFamily="34" charset="-122"/>
-                <a:cs typeface="Arial" pitchFamily="34" charset="-120"/>
-              </a:rPr>
-              <a:t>T</a:t>
-            </a:r>
-            <a:endParaRPr lang="en-US" sz="2200" dirty="0"/>
-          </a:p>
-        </p:txBody>
-      </p:sp>
-      <p:sp>
-        <p:nvSpPr>
-          <p:cNvPr id="6" name="Rule name 1"/>
-          <p:cNvSpPr txBox="1"/>
-          <p:nvPr/>
-        </p:nvSpPr>
-        <p:spPr>
-          <a:xfrm>
-            <a:off x="1280160" y="1490472"/>
-            <a:ext cx="1645920" cy="502920"/>
-          </a:xfrm>
-          <a:prstGeom prst="rect">
-            <a:avLst/>
-          </a:prstGeom>
-          <a:noFill/>
-          <a:ln/>
-        </p:spPr>
-        <p:txBody>
-          <a:bodyPr wrap="square" lIns="0" tIns="0" rIns="0" bIns="0" rtlCol="0" anchor="ctr"/>
-          <a:lstStyle/>
-          <a:p>
-            <a:pPr indent="0" marL="0">
-              <a:buNone/>
-            </a:pPr>
-            <a:r>
-              <a:rPr lang="en-US" sz="1700" b="1" dirty="0">
-                <a:solidFill>
-                  <a:schemeClr val="tx1"/>
-                </a:solidFill>
-              </a:rPr>
-              <a:t>Titles out</a:t>
-            </a:r>
-            <a:endParaRPr lang="en-US" sz="1700" dirty="0"/>
-          </a:p>
-        </p:txBody>
+          <a:ln w="38100">
+            <a:solidFill>
+              <a:srgbClr val="D64545"/>
+            </a:solidFill>
+            <a:prstDash val="solid"/>
+          </a:ln>
+        </p:spPr>
       </p:sp>
       <p:pic>
         <p:nvPicPr>
-          <p:cNvPr id="7" name="Rule picture 1" descr="Titles out: wrong and right example">    </p:cNvPr>
+          <p:cNvPr id="4" name="Wrong picture" descr="Blocking: wrong example. A flat item in front hides the items behind it">    </p:cNvPr>
           <p:cNvPicPr>
             <a:picLocks noChangeAspect="1"/>
           </p:cNvPicPr>
@@ -4863,8 +4755,8 @@
         </p:blipFill>
         <p:spPr>
           <a:xfrm>
-            <a:off x="640080" y="2180904"/>
-            <a:ext cx="2240280" cy="850271"/>
+            <a:off x="706557" y="1417320"/>
+            <a:ext cx="2107326" cy="2103120"/>
           </a:xfrm>
           <a:prstGeom prst="rect">
             <a:avLst/>
@@ -4873,72 +4765,61 @@
       </p:pic>
       <p:sp>
         <p:nvSpPr>
-          <p:cNvPr id="8" name="Rule detail 1"/>
+          <p:cNvPr id="5" name="Wrong caption"/>
           <p:cNvSpPr txBox="1"/>
           <p:nvPr/>
         </p:nvSpPr>
         <p:spPr>
           <a:xfrm>
-            <a:off x="640080" y="3246120"/>
-            <a:ext cx="2286000" cy="1234440"/>
-          </a:xfrm>
-          <a:prstGeom prst="rect">
-            <a:avLst/>
-          </a:prstGeom>
-          <a:noFill/>
-          <a:ln/>
-        </p:spPr>
-        <p:txBody>
-          <a:bodyPr wrap="square" lIns="0" tIns="0" rIns="0" bIns="0" rtlCol="0" anchor="t"/>
-          <a:lstStyle/>
-          <a:p>
-            <a:pPr marL="342900" indent="-342900">
-              <a:spcAft>
-                <a:spcPts val="400"/>
-              </a:spcAft>
-              <a:buSzPct val="100000"/>
-              <a:buChar char="•"/>
-            </a:pPr>
-            <a:r>
-              <a:rPr lang="en-US" sz="1400" dirty="0">
-                <a:solidFill>
-                  <a:schemeClr val="accent4"/>
-                </a:solidFill>
-              </a:rPr>
-              <a:t>Book and DVD spines face outward</a:t>
-            </a:r>
-            <a:endParaRPr lang="en-US" sz="1400" dirty="0"/>
-          </a:p>
-          <a:p>
-            <a:pPr marL="342900" indent="-342900">
-              <a:spcAft>
-                <a:spcPts val="400"/>
-              </a:spcAft>
-              <a:buSzPct val="100000"/>
-              <a:buChar char="•"/>
-            </a:pPr>
-            <a:r>
-              <a:rPr lang="en-US" sz="1400" dirty="0">
-                <a:solidFill>
-                  <a:schemeClr val="accent4"/>
-                </a:solidFill>
-              </a:rPr>
-              <a:t>So pickers can find them fast</a:t>
-            </a:r>
-            <a:endParaRPr lang="en-US" sz="1400" dirty="0"/>
-          </a:p>
-        </p:txBody>
-      </p:sp>
-      <p:sp>
-        <p:nvSpPr>
-          <p:cNvPr id="9" name="Rule card 2"/>
+            <a:off x="594360" y="3547872"/>
+            <a:ext cx="2331720" cy="502920"/>
+          </a:xfrm>
+          <a:prstGeom prst="rect">
+            <a:avLst/>
+          </a:prstGeom>
+          <a:noFill/>
+          <a:ln/>
+        </p:spPr>
+        <p:txBody>
+          <a:bodyPr wrap="square" lIns="0" tIns="0" rIns="0" bIns="0" rtlCol="0" anchor="ctr"/>
+          <a:lstStyle/>
+          <a:p>
+            <a:pPr algn="ctr" indent="0" marL="0">
+              <a:buNone/>
+            </a:pPr>
+            <a:r>
+              <a:rPr lang="en-US" sz="1300" b="1" dirty="0">
+                <a:solidFill>
+                  <a:schemeClr val="accent3"/>
+                </a:solidFill>
+              </a:rPr>
+              <a:t>WRONG: </a:t>
+            </a:r>
+            <a:pPr algn="ctr" indent="0" marL="0">
+              <a:buNone/>
+            </a:pPr>
+            <a:r>
+              <a:rPr lang="en-US" sz="1300" dirty="0">
+                <a:solidFill>
+                  <a:schemeClr val="tx1"/>
+                </a:solidFill>
+              </a:rPr>
+              <a:t>A flat item in front hides the items behind it</a:t>
+            </a:r>
+            <a:endParaRPr lang="en-US" sz="1300" dirty="0"/>
+          </a:p>
+        </p:txBody>
+      </p:sp>
+      <p:sp>
+        <p:nvSpPr>
+          <p:cNvPr id="6" name="Right panel"/>
           <p:cNvSpPr/>
           <p:nvPr/>
         </p:nvSpPr>
         <p:spPr>
           <a:xfrm>
             <a:off x="3246120" y="1325880"/>
-            <a:ext cx="2606040" cy="3246120"/>
+            <a:ext cx="2606040" cy="2788920"/>
           </a:xfrm>
           <a:prstGeom prst="roundRect">
             <a:avLst>
@@ -4948,107 +4829,17 @@
           <a:solidFill>
             <a:schemeClr val="bg1"/>
           </a:solidFill>
-          <a:ln/>
-        </p:spPr>
-      </p:sp>
-      <p:sp>
-        <p:nvSpPr>
-          <p:cNvPr id="10" name="Rule badge 2"/>
-          <p:cNvSpPr/>
-          <p:nvPr/>
-        </p:nvSpPr>
-        <p:spPr>
-          <a:xfrm>
-            <a:off x="3429000" y="1490472"/>
-            <a:ext cx="502920" cy="502920"/>
-          </a:xfrm>
-          <a:prstGeom prst="ellipse">
-            <a:avLst/>
-          </a:prstGeom>
-          <a:solidFill>
-            <a:schemeClr val="tx2"/>
-          </a:solidFill>
-          <a:ln/>
-        </p:spPr>
-      </p:sp>
-      <p:sp>
-        <p:nvSpPr>
-          <p:cNvPr id="11" name="Rule letter 2"/>
-          <p:cNvSpPr txBox="1"/>
-          <p:nvPr/>
-        </p:nvSpPr>
-        <p:spPr>
-          <a:xfrm>
-            <a:off x="3429000" y="1490472"/>
-            <a:ext cx="502920" cy="502920"/>
-          </a:xfrm>
-          <a:prstGeom prst="rect">
-            <a:avLst/>
-          </a:prstGeom>
-          <a:noFill/>
-          <a:ln/>
-        </p:spPr>
-        <p:txBody>
-          <a:bodyPr wrap="square" lIns="0" tIns="0" rIns="0" bIns="0" rtlCol="0" anchor="ctr"/>
-          <a:lstStyle/>
-          <a:p>
-            <a:pPr algn="ctr" indent="0" marL="0">
-              <a:buNone/>
-            </a:pPr>
-            <a:r>
-              <a:rPr lang="en-US" sz="2200" b="1" dirty="0">
-                <a:solidFill>
-                  <a:schemeClr val="accent1"/>
-                </a:solidFill>
-                <a:latin typeface="Arial" pitchFamily="34" charset="0"/>
-                <a:ea typeface="Arial" pitchFamily="34" charset="-122"/>
-                <a:cs typeface="Arial" pitchFamily="34" charset="-120"/>
-              </a:rPr>
-              <a:t>S</a:t>
-            </a:r>
-            <a:endParaRPr lang="en-US" sz="2200" dirty="0"/>
-          </a:p>
-        </p:txBody>
-      </p:sp>
-      <p:sp>
-        <p:nvSpPr>
-          <p:cNvPr id="12" name="Rule name 2"/>
-          <p:cNvSpPr txBox="1"/>
-          <p:nvPr/>
-        </p:nvSpPr>
-        <p:spPr>
-          <a:xfrm>
-            <a:off x="4069080" y="1490472"/>
-            <a:ext cx="1645920" cy="502920"/>
-          </a:xfrm>
-          <a:prstGeom prst="rect">
-            <a:avLst/>
-          </a:prstGeom>
-          <a:noFill/>
-          <a:ln/>
-        </p:spPr>
-        <p:txBody>
-          <a:bodyPr wrap="square" lIns="0" tIns="0" rIns="0" bIns="0" rtlCol="0" anchor="ctr"/>
-          <a:lstStyle/>
-          <a:p>
-            <a:pPr indent="0" marL="0">
-              <a:buNone/>
-            </a:pPr>
-            <a:r>
-              <a:rPr lang="en-US" sz="1700" b="1" dirty="0">
-                <a:solidFill>
-                  <a:schemeClr val="tx1"/>
-                </a:solidFill>
-              </a:rPr>
-              <a:t>Stacking</a:t>
-            </a:r>
-            <a:endParaRPr lang="en-US" sz="1700" dirty="0"/>
-          </a:p>
-        </p:txBody>
+          <a:ln w="38100">
+            <a:solidFill>
+              <a:srgbClr val="2E7D32"/>
+            </a:solidFill>
+            <a:prstDash val="solid"/>
+          </a:ln>
+        </p:spPr>
       </p:sp>
       <p:pic>
         <p:nvPicPr>
-          <p:cNvPr id="13" name="Rule picture 2" descr="Stacking: wrong and right example">    </p:cNvPr>
+          <p:cNvPr id="7" name="Right picture" descr="Blocking: right example. Every item is visible from the front">    </p:cNvPr>
           <p:cNvPicPr>
             <a:picLocks noChangeAspect="1"/>
           </p:cNvPicPr>
@@ -5062,8 +4853,8 @@
         </p:blipFill>
         <p:spPr>
           <a:xfrm>
-            <a:off x="3429000" y="2173511"/>
-            <a:ext cx="2240280" cy="865059"/>
+            <a:off x="3489168" y="1417320"/>
+            <a:ext cx="2119945" cy="2103120"/>
           </a:xfrm>
           <a:prstGeom prst="rect">
             <a:avLst/>
@@ -5072,57 +4863,104 @@
       </p:pic>
       <p:sp>
         <p:nvSpPr>
-          <p:cNvPr id="14" name="Rule detail 2"/>
+          <p:cNvPr id="8" name="Right caption"/>
           <p:cNvSpPr txBox="1"/>
           <p:nvPr/>
         </p:nvSpPr>
         <p:spPr>
           <a:xfrm>
-            <a:off x="3429000" y="3246120"/>
-            <a:ext cx="2286000" cy="1234440"/>
-          </a:xfrm>
-          <a:prstGeom prst="rect">
-            <a:avLst/>
-          </a:prstGeom>
-          <a:noFill/>
-          <a:ln/>
-        </p:spPr>
-        <p:txBody>
-          <a:bodyPr wrap="square" lIns="0" tIns="0" rIns="0" bIns="0" rtlCol="0" anchor="t"/>
-          <a:lstStyle/>
-          <a:p>
-            <a:pPr marL="342900" indent="-342900">
-              <a:spcAft>
-                <a:spcPts val="400"/>
-              </a:spcAft>
-              <a:buSzPct val="100000"/>
-              <a:buChar char="•"/>
-            </a:pPr>
-            <a:r>
-              <a:rPr lang="en-US" sz="1400" dirty="0">
-                <a:solidFill>
-                  <a:schemeClr val="accent4"/>
-                </a:solidFill>
-              </a:rPr>
-              <a:t>Same ASIN only, with two flat sides</a:t>
-            </a:r>
-            <a:endParaRPr lang="en-US" sz="1400" dirty="0"/>
-          </a:p>
-          <a:p>
-            <a:pPr marL="342900" indent="-342900">
-              <a:spcAft>
-                <a:spcPts val="400"/>
-              </a:spcAft>
-              <a:buSzPct val="100000"/>
-              <a:buChar char="•"/>
-            </a:pPr>
-            <a:r>
-              <a:rPr lang="en-US" sz="1400" dirty="0">
-                <a:solidFill>
-                  <a:schemeClr val="accent4"/>
-                </a:solidFill>
-              </a:rPr>
-              <a:t>Keep stacks below the retention bands</a:t>
+            <a:off x="3383280" y="3547872"/>
+            <a:ext cx="2331720" cy="502920"/>
+          </a:xfrm>
+          <a:prstGeom prst="rect">
+            <a:avLst/>
+          </a:prstGeom>
+          <a:noFill/>
+          <a:ln/>
+        </p:spPr>
+        <p:txBody>
+          <a:bodyPr wrap="square" lIns="0" tIns="0" rIns="0" bIns="0" rtlCol="0" anchor="ctr"/>
+          <a:lstStyle/>
+          <a:p>
+            <a:pPr algn="ctr" indent="0" marL="0">
+              <a:buNone/>
+            </a:pPr>
+            <a:r>
+              <a:rPr lang="en-US" sz="1300" b="1" dirty="0">
+                <a:solidFill>
+                  <a:srgbClr val="2E7D32"/>
+                </a:solidFill>
+              </a:rPr>
+              <a:t>RIGHT: </a:t>
+            </a:r>
+            <a:pPr algn="ctr" indent="0" marL="0">
+              <a:buNone/>
+            </a:pPr>
+            <a:r>
+              <a:rPr lang="en-US" sz="1300" dirty="0">
+                <a:solidFill>
+                  <a:schemeClr val="tx1"/>
+                </a:solidFill>
+              </a:rPr>
+              <a:t>Every item is visible from the front</a:t>
+            </a:r>
+            <a:endParaRPr lang="en-US" sz="1300" dirty="0"/>
+          </a:p>
+        </p:txBody>
+      </p:sp>
+      <p:sp>
+        <p:nvSpPr>
+          <p:cNvPr id="9" name="Rule card"/>
+          <p:cNvSpPr/>
+          <p:nvPr/>
+        </p:nvSpPr>
+        <p:spPr>
+          <a:xfrm>
+            <a:off x="457200" y="4251960"/>
+            <a:ext cx="5394960" cy="566928"/>
+          </a:xfrm>
+          <a:prstGeom prst="roundRect">
+            <a:avLst>
+              <a:gd name="adj" fmla="val 16129"/>
+            </a:avLst>
+          </a:prstGeom>
+          <a:solidFill>
+            <a:schemeClr val="tx2"/>
+          </a:solidFill>
+          <a:ln/>
+        </p:spPr>
+      </p:sp>
+      <p:sp>
+        <p:nvSpPr>
+          <p:cNvPr id="10" name="Rule text"/>
+          <p:cNvSpPr txBox="1"/>
+          <p:nvPr/>
+        </p:nvSpPr>
+        <p:spPr>
+          <a:xfrm>
+            <a:off x="685800" y="4251960"/>
+            <a:ext cx="4937760" cy="566928"/>
+          </a:xfrm>
+          <a:prstGeom prst="rect">
+            <a:avLst/>
+          </a:prstGeom>
+          <a:noFill/>
+          <a:ln/>
+        </p:spPr>
+        <p:txBody>
+          <a:bodyPr wrap="square" lIns="0" tIns="0" rIns="0" bIns="0" rtlCol="0" anchor="ctr"/>
+          <a:lstStyle/>
+          <a:p>
+            <a:pPr indent="0" marL="0">
+              <a:buNone/>
+            </a:pPr>
+            <a:r>
+              <a:rPr lang="en-US" sz="1400" b="1" dirty="0">
+                <a:solidFill>
+                  <a:schemeClr val="bg1"/>
+                </a:solidFill>
+              </a:rPr>
+              <a:t>Never block small items with larger ones. Stand flat items upright.</a:t>
             </a:r>
             <a:endParaRPr lang="en-US" sz="1400" dirty="0"/>
           </a:p>
@@ -5185,7 +5023,7 @@
                   <a:schemeClr val="tx1"/>
                 </a:solidFill>
               </a:rPr>
-              <a:t>S: similar items</a:t>
+              <a:t>O: Overstuffing</a:t>
             </a:r>
             <a:endParaRPr lang="en-US" sz="2800" dirty="0"/>
           </a:p>
@@ -5193,29 +5031,34 @@
       </p:sp>
       <p:sp>
         <p:nvSpPr>
-          <p:cNvPr id="3" name="Similar card"/>
+          <p:cNvPr id="3" name="Wrong panel"/>
           <p:cNvSpPr/>
           <p:nvPr/>
         </p:nvSpPr>
         <p:spPr>
           <a:xfrm>
             <a:off x="457200" y="1325880"/>
-            <a:ext cx="5394960" cy="3246120"/>
+            <a:ext cx="2606040" cy="2788920"/>
           </a:xfrm>
           <a:prstGeom prst="roundRect">
             <a:avLst>
-              <a:gd name="adj" fmla="val 2817"/>
+              <a:gd name="adj" fmla="val 3509"/>
             </a:avLst>
           </a:prstGeom>
           <a:solidFill>
             <a:schemeClr val="bg1"/>
           </a:solidFill>
-          <a:ln/>
+          <a:ln w="38100">
+            <a:solidFill>
+              <a:srgbClr val="D64545"/>
+            </a:solidFill>
+            <a:prstDash val="solid"/>
+          </a:ln>
         </p:spPr>
       </p:sp>
       <p:pic>
         <p:nvPicPr>
-          <p:cNvPr id="4" name="Similar picture" descr="Similar items: wrong and right example">    </p:cNvPr>
+          <p:cNvPr id="4" name="Wrong picture" descr="Overstuffing: wrong example. Items forced in, the bin is bulging">    </p:cNvPr>
           <p:cNvPicPr>
             <a:picLocks noChangeAspect="1"/>
           </p:cNvPicPr>
@@ -5229,8 +5072,8 @@
         </p:blipFill>
         <p:spPr>
           <a:xfrm>
-            <a:off x="1568631" y="1600200"/>
-            <a:ext cx="3172097" cy="1417320"/>
+            <a:off x="619733" y="1417320"/>
+            <a:ext cx="2280974" cy="2103120"/>
           </a:xfrm>
           <a:prstGeom prst="rect">
             <a:avLst/>
@@ -5239,77 +5082,204 @@
       </p:pic>
       <p:sp>
         <p:nvSpPr>
-          <p:cNvPr id="5" name="Similar text"/>
+          <p:cNvPr id="5" name="Wrong caption"/>
           <p:cNvSpPr txBox="1"/>
           <p:nvPr/>
         </p:nvSpPr>
         <p:spPr>
           <a:xfrm>
-            <a:off x="731520" y="3246120"/>
-            <a:ext cx="4846320" cy="1188720"/>
-          </a:xfrm>
-          <a:prstGeom prst="rect">
-            <a:avLst/>
-          </a:prstGeom>
-          <a:noFill/>
-          <a:ln/>
-        </p:spPr>
-        <p:txBody>
-          <a:bodyPr wrap="square" lIns="0" tIns="0" rIns="0" bIns="0" rtlCol="0" anchor="t"/>
-          <a:lstStyle/>
-          <a:p>
-            <a:pPr marL="342900" indent="-342900">
-              <a:spcAft>
-                <a:spcPts val="600"/>
-              </a:spcAft>
-              <a:buSzPct val="100000"/>
-              <a:buChar char="•"/>
-            </a:pPr>
-            <a:r>
-              <a:rPr lang="en-US" sz="1500" dirty="0">
-                <a:solidFill>
-                  <a:schemeClr val="accent4"/>
-                </a:solidFill>
-              </a:rPr>
-              <a:t>Never put look-alike items in the same bin</a:t>
-            </a:r>
-            <a:endParaRPr lang="en-US" sz="1500" dirty="0"/>
-          </a:p>
-          <a:p>
-            <a:pPr marL="342900" indent="-342900">
-              <a:spcAft>
-                <a:spcPts val="600"/>
-              </a:spcAft>
-              <a:buSzPct val="100000"/>
-              <a:buChar char="•"/>
-            </a:pPr>
-            <a:r>
-              <a:rPr lang="en-US" sz="1500" dirty="0">
-                <a:solidFill>
-                  <a:schemeClr val="accent4"/>
-                </a:solidFill>
-              </a:rPr>
-              <a:t>Use the cross method for similar items</a:t>
-            </a:r>
-            <a:endParaRPr lang="en-US" sz="1500" dirty="0"/>
-          </a:p>
-          <a:p>
-            <a:pPr marL="342900" indent="-342900">
-              <a:spcAft>
-                <a:spcPts val="600"/>
-              </a:spcAft>
-              <a:buSzPct val="100000"/>
-              <a:buChar char="•"/>
-            </a:pPr>
-            <a:r>
-              <a:rPr lang="en-US" sz="1500" dirty="0">
-                <a:solidFill>
-                  <a:schemeClr val="accent4"/>
-                </a:solidFill>
-              </a:rPr>
-              <a:t>The system won't always flag them on screen</a:t>
-            </a:r>
-            <a:endParaRPr lang="en-US" sz="1500" dirty="0"/>
+            <a:off x="594360" y="3547872"/>
+            <a:ext cx="2331720" cy="502920"/>
+          </a:xfrm>
+          <a:prstGeom prst="rect">
+            <a:avLst/>
+          </a:prstGeom>
+          <a:noFill/>
+          <a:ln/>
+        </p:spPr>
+        <p:txBody>
+          <a:bodyPr wrap="square" lIns="0" tIns="0" rIns="0" bIns="0" rtlCol="0" anchor="ctr"/>
+          <a:lstStyle/>
+          <a:p>
+            <a:pPr algn="ctr" indent="0" marL="0">
+              <a:buNone/>
+            </a:pPr>
+            <a:r>
+              <a:rPr lang="en-US" sz="1300" b="1" dirty="0">
+                <a:solidFill>
+                  <a:schemeClr val="accent3"/>
+                </a:solidFill>
+              </a:rPr>
+              <a:t>WRONG: </a:t>
+            </a:r>
+            <a:pPr algn="ctr" indent="0" marL="0">
+              <a:buNone/>
+            </a:pPr>
+            <a:r>
+              <a:rPr lang="en-US" sz="1300" dirty="0">
+                <a:solidFill>
+                  <a:schemeClr val="tx1"/>
+                </a:solidFill>
+              </a:rPr>
+              <a:t>Items forced in, the bin is bulging</a:t>
+            </a:r>
+            <a:endParaRPr lang="en-US" sz="1300" dirty="0"/>
+          </a:p>
+        </p:txBody>
+      </p:sp>
+      <p:sp>
+        <p:nvSpPr>
+          <p:cNvPr id="6" name="Right panel"/>
+          <p:cNvSpPr/>
+          <p:nvPr/>
+        </p:nvSpPr>
+        <p:spPr>
+          <a:xfrm>
+            <a:off x="3246120" y="1325880"/>
+            <a:ext cx="2606040" cy="2788920"/>
+          </a:xfrm>
+          <a:prstGeom prst="roundRect">
+            <a:avLst>
+              <a:gd name="adj" fmla="val 3509"/>
+            </a:avLst>
+          </a:prstGeom>
+          <a:solidFill>
+            <a:schemeClr val="bg1"/>
+          </a:solidFill>
+          <a:ln w="38100">
+            <a:solidFill>
+              <a:srgbClr val="2E7D32"/>
+            </a:solidFill>
+            <a:prstDash val="solid"/>
+          </a:ln>
+        </p:spPr>
+      </p:sp>
+      <p:pic>
+        <p:nvPicPr>
+          <p:cNvPr id="7" name="Right picture" descr="Overstuffing: right example. Items fit with room to pick">    </p:cNvPr>
+          <p:cNvPicPr>
+            <a:picLocks noChangeAspect="1"/>
+          </p:cNvPicPr>
+          <p:nvPr/>
+        </p:nvPicPr>
+        <p:blipFill>
+          <a:blip r:embed="rId2"/>
+          <a:stretch>
+            <a:fillRect/>
+          </a:stretch>
+        </p:blipFill>
+        <p:spPr>
+          <a:xfrm>
+            <a:off x="3413099" y="1417320"/>
+            <a:ext cx="2272081" cy="2103120"/>
+          </a:xfrm>
+          <a:prstGeom prst="rect">
+            <a:avLst/>
+          </a:prstGeom>
+        </p:spPr>
+      </p:pic>
+      <p:sp>
+        <p:nvSpPr>
+          <p:cNvPr id="8" name="Right caption"/>
+          <p:cNvSpPr txBox="1"/>
+          <p:nvPr/>
+        </p:nvSpPr>
+        <p:spPr>
+          <a:xfrm>
+            <a:off x="3383280" y="3547872"/>
+            <a:ext cx="2331720" cy="502920"/>
+          </a:xfrm>
+          <a:prstGeom prst="rect">
+            <a:avLst/>
+          </a:prstGeom>
+          <a:noFill/>
+          <a:ln/>
+        </p:spPr>
+        <p:txBody>
+          <a:bodyPr wrap="square" lIns="0" tIns="0" rIns="0" bIns="0" rtlCol="0" anchor="ctr"/>
+          <a:lstStyle/>
+          <a:p>
+            <a:pPr algn="ctr" indent="0" marL="0">
+              <a:buNone/>
+            </a:pPr>
+            <a:r>
+              <a:rPr lang="en-US" sz="1300" b="1" dirty="0">
+                <a:solidFill>
+                  <a:srgbClr val="2E7D32"/>
+                </a:solidFill>
+              </a:rPr>
+              <a:t>RIGHT: </a:t>
+            </a:r>
+            <a:pPr algn="ctr" indent="0" marL="0">
+              <a:buNone/>
+            </a:pPr>
+            <a:r>
+              <a:rPr lang="en-US" sz="1300" dirty="0">
+                <a:solidFill>
+                  <a:schemeClr val="tx1"/>
+                </a:solidFill>
+              </a:rPr>
+              <a:t>Items fit with room to pick</a:t>
+            </a:r>
+            <a:endParaRPr lang="en-US" sz="1300" dirty="0"/>
+          </a:p>
+        </p:txBody>
+      </p:sp>
+      <p:sp>
+        <p:nvSpPr>
+          <p:cNvPr id="9" name="Rule card"/>
+          <p:cNvSpPr/>
+          <p:nvPr/>
+        </p:nvSpPr>
+        <p:spPr>
+          <a:xfrm>
+            <a:off x="457200" y="4251960"/>
+            <a:ext cx="5394960" cy="566928"/>
+          </a:xfrm>
+          <a:prstGeom prst="roundRect">
+            <a:avLst>
+              <a:gd name="adj" fmla="val 16129"/>
+            </a:avLst>
+          </a:prstGeom>
+          <a:solidFill>
+            <a:schemeClr val="tx2"/>
+          </a:solidFill>
+          <a:ln/>
+        </p:spPr>
+      </p:sp>
+      <p:sp>
+        <p:nvSpPr>
+          <p:cNvPr id="10" name="Rule text"/>
+          <p:cNvSpPr txBox="1"/>
+          <p:nvPr/>
+        </p:nvSpPr>
+        <p:spPr>
+          <a:xfrm>
+            <a:off x="685800" y="4251960"/>
+            <a:ext cx="4937760" cy="566928"/>
+          </a:xfrm>
+          <a:prstGeom prst="rect">
+            <a:avLst/>
+          </a:prstGeom>
+          <a:noFill/>
+          <a:ln/>
+        </p:spPr>
+        <p:txBody>
+          <a:bodyPr wrap="square" lIns="0" tIns="0" rIns="0" bIns="0" rtlCol="0" anchor="ctr"/>
+          <a:lstStyle/>
+          <a:p>
+            <a:pPr indent="0" marL="0">
+              <a:buNone/>
+            </a:pPr>
+            <a:r>
+              <a:rPr lang="en-US" sz="1400" b="1" dirty="0">
+                <a:solidFill>
+                  <a:schemeClr val="bg1"/>
+                </a:solidFill>
+              </a:rPr>
+              <a:t>Don't overfill bins. Forcing items in damages customer products.</a:t>
+            </a:r>
+            <a:endParaRPr lang="en-US" sz="1400" dirty="0"/>
           </a:p>
         </p:txBody>
       </p:sp>
@@ -5370,7 +5340,7 @@
                   <a:schemeClr val="tx1"/>
                 </a:solidFill>
               </a:rPr>
-              <a:t>Your shift, bin by bin</a:t>
+              <a:t>T: Titles out</a:t>
             </a:r>
             <a:endParaRPr lang="en-US" sz="2800" dirty="0"/>
           </a:p>
@@ -5378,27 +5348,34 @@
       </p:sp>
       <p:sp>
         <p:nvSpPr>
-          <p:cNvPr id="3" name="Recap circle 1"/>
+          <p:cNvPr id="3" name="Wrong panel"/>
           <p:cNvSpPr/>
           <p:nvPr/>
         </p:nvSpPr>
         <p:spPr>
           <a:xfrm>
-            <a:off x="868680" y="1371600"/>
-            <a:ext cx="868680" cy="868680"/>
-          </a:xfrm>
-          <a:prstGeom prst="ellipse">
-            <a:avLst/>
+            <a:off x="457200" y="1325880"/>
+            <a:ext cx="2606040" cy="2788920"/>
+          </a:xfrm>
+          <a:prstGeom prst="roundRect">
+            <a:avLst>
+              <a:gd name="adj" fmla="val 3509"/>
+            </a:avLst>
           </a:prstGeom>
           <a:solidFill>
-            <a:schemeClr val="accent1"/>
+            <a:schemeClr val="bg1"/>
           </a:solidFill>
-          <a:ln/>
+          <a:ln w="38100">
+            <a:solidFill>
+              <a:srgbClr val="D64545"/>
+            </a:solidFill>
+            <a:prstDash val="solid"/>
+          </a:ln>
         </p:spPr>
       </p:sp>
       <p:pic>
         <p:nvPicPr>
-          <p:cNvPr id="4" name="Recap icon 1" descr="preencoded.png">    </p:cNvPr>
+          <p:cNvPr id="4" name="Wrong picture" descr="Titles out: wrong example. Spines face in, so titles can't be read">    </p:cNvPr>
           <p:cNvPicPr>
             <a:picLocks noChangeAspect="1"/>
           </p:cNvPicPr>
@@ -5412,8 +5389,8 @@
         </p:blipFill>
         <p:spPr>
           <a:xfrm>
-            <a:off x="1088136" y="1591056"/>
-            <a:ext cx="429768" cy="429768"/>
+            <a:off x="592074" y="1417320"/>
+            <a:ext cx="2336292" cy="2103120"/>
           </a:xfrm>
           <a:prstGeom prst="rect">
             <a:avLst/>
@@ -5422,57 +5399,81 @@
       </p:pic>
       <p:sp>
         <p:nvSpPr>
-          <p:cNvPr id="5" name="Recap text 1"/>
+          <p:cNvPr id="5" name="Wrong caption"/>
           <p:cNvSpPr txBox="1"/>
           <p:nvPr/>
         </p:nvSpPr>
         <p:spPr>
           <a:xfrm>
-            <a:off x="457200" y="2423160"/>
-            <a:ext cx="1691640" cy="1097280"/>
-          </a:xfrm>
-          <a:prstGeom prst="rect">
-            <a:avLst/>
-          </a:prstGeom>
-          <a:noFill/>
-          <a:ln/>
-        </p:spPr>
-        <p:txBody>
-          <a:bodyPr wrap="square" lIns="0" tIns="0" rIns="0" bIns="0" rtlCol="0" anchor="t"/>
+            <a:off x="594360" y="3547872"/>
+            <a:ext cx="2331720" cy="502920"/>
+          </a:xfrm>
+          <a:prstGeom prst="rect">
+            <a:avLst/>
+          </a:prstGeom>
+          <a:noFill/>
+          <a:ln/>
+        </p:spPr>
+        <p:txBody>
+          <a:bodyPr wrap="square" lIns="0" tIns="0" rIns="0" bIns="0" rtlCol="0" anchor="ctr"/>
           <a:lstStyle/>
           <a:p>
             <a:pPr algn="ctr" indent="0" marL="0">
               <a:buNone/>
             </a:pPr>
             <a:r>
+              <a:rPr lang="en-US" sz="1300" b="1" dirty="0">
+                <a:solidFill>
+                  <a:schemeClr val="accent3"/>
+                </a:solidFill>
+              </a:rPr>
+              <a:t>WRONG: </a:t>
+            </a:r>
+            <a:pPr algn="ctr" indent="0" marL="0">
+              <a:buNone/>
+            </a:pPr>
+            <a:r>
               <a:rPr lang="en-US" sz="1300" dirty="0">
                 <a:solidFill>
-                  <a:schemeClr val="accent4"/>
-                </a:solidFill>
-              </a:rPr>
-              <a:t>Shift start and after breaks</a:t>
+                  <a:schemeClr val="tx1"/>
+                </a:solidFill>
+              </a:rPr>
+              <a:t>Spines face in, so titles can't be read</a:t>
             </a:r>
             <a:endParaRPr lang="en-US" sz="1300" dirty="0"/>
           </a:p>
-          <a:p>
-            <a:pPr algn="ctr" indent="0" marL="0">
-              <a:buNone/>
-            </a:pPr>
-            <a:r>
-              <a:rPr lang="en-US" sz="1700" b="1" dirty="0">
-                <a:solidFill>
-                  <a:schemeClr val="tx1"/>
-                </a:solidFill>
-              </a:rPr>
-              <a:t>1-minute First Face Fix</a:t>
-            </a:r>
-            <a:endParaRPr lang="en-US" sz="1300" dirty="0"/>
-          </a:p>
-        </p:txBody>
+        </p:txBody>
+      </p:sp>
+      <p:sp>
+        <p:nvSpPr>
+          <p:cNvPr id="6" name="Right panel"/>
+          <p:cNvSpPr/>
+          <p:nvPr/>
+        </p:nvSpPr>
+        <p:spPr>
+          <a:xfrm>
+            <a:off x="3246120" y="1325880"/>
+            <a:ext cx="2606040" cy="2788920"/>
+          </a:xfrm>
+          <a:prstGeom prst="roundRect">
+            <a:avLst>
+              <a:gd name="adj" fmla="val 3509"/>
+            </a:avLst>
+          </a:prstGeom>
+          <a:solidFill>
+            <a:schemeClr val="bg1"/>
+          </a:solidFill>
+          <a:ln w="38100">
+            <a:solidFill>
+              <a:srgbClr val="2E7D32"/>
+            </a:solidFill>
+            <a:prstDash val="solid"/>
+          </a:ln>
+        </p:spPr>
       </p:sp>
       <p:pic>
         <p:nvPicPr>
-          <p:cNvPr id="6" name="Arrow 1" descr="preencoded.png">    </p:cNvPr>
+          <p:cNvPr id="7" name="Right picture" descr="Titles out: right example. Spines face out, titles easy to read">    </p:cNvPr>
           <p:cNvPicPr>
             <a:picLocks noChangeAspect="1"/>
           </p:cNvPicPr>
@@ -5486,8 +5487,8 @@
         </p:blipFill>
         <p:spPr>
           <a:xfrm>
-            <a:off x="2121408" y="1664208"/>
-            <a:ext cx="274320" cy="274320"/>
+            <a:off x="3385566" y="1417320"/>
+            <a:ext cx="2327148" cy="2103120"/>
           </a:xfrm>
           <a:prstGeom prst="rect">
             <a:avLst/>
@@ -5496,230 +5497,65 @@
       </p:pic>
       <p:sp>
         <p:nvSpPr>
-          <p:cNvPr id="7" name="Recap circle 2"/>
+          <p:cNvPr id="8" name="Right caption"/>
+          <p:cNvSpPr txBox="1"/>
+          <p:nvPr/>
+        </p:nvSpPr>
+        <p:spPr>
+          <a:xfrm>
+            <a:off x="3383280" y="3547872"/>
+            <a:ext cx="2331720" cy="502920"/>
+          </a:xfrm>
+          <a:prstGeom prst="rect">
+            <a:avLst/>
+          </a:prstGeom>
+          <a:noFill/>
+          <a:ln/>
+        </p:spPr>
+        <p:txBody>
+          <a:bodyPr wrap="square" lIns="0" tIns="0" rIns="0" bIns="0" rtlCol="0" anchor="ctr"/>
+          <a:lstStyle/>
+          <a:p>
+            <a:pPr algn="ctr" indent="0" marL="0">
+              <a:buNone/>
+            </a:pPr>
+            <a:r>
+              <a:rPr lang="en-US" sz="1300" b="1" dirty="0">
+                <a:solidFill>
+                  <a:srgbClr val="2E7D32"/>
+                </a:solidFill>
+              </a:rPr>
+              <a:t>RIGHT: </a:t>
+            </a:r>
+            <a:pPr algn="ctr" indent="0" marL="0">
+              <a:buNone/>
+            </a:pPr>
+            <a:r>
+              <a:rPr lang="en-US" sz="1300" dirty="0">
+                <a:solidFill>
+                  <a:schemeClr val="tx1"/>
+                </a:solidFill>
+              </a:rPr>
+              <a:t>Spines face out, titles easy to read</a:t>
+            </a:r>
+            <a:endParaRPr lang="en-US" sz="1300" dirty="0"/>
+          </a:p>
+        </p:txBody>
+      </p:sp>
+      <p:sp>
+        <p:nvSpPr>
+          <p:cNvPr id="9" name="Rule card"/>
           <p:cNvSpPr/>
           <p:nvPr/>
         </p:nvSpPr>
         <p:spPr>
           <a:xfrm>
-            <a:off x="2697480" y="1371600"/>
-            <a:ext cx="868680" cy="868680"/>
-          </a:xfrm>
-          <a:prstGeom prst="ellipse">
-            <a:avLst/>
-          </a:prstGeom>
-          <a:solidFill>
-            <a:schemeClr val="accent1"/>
-          </a:solidFill>
-          <a:ln/>
-        </p:spPr>
-      </p:sp>
-      <p:pic>
-        <p:nvPicPr>
-          <p:cNvPr id="8" name="Recap icon 2" descr="preencoded.png">    </p:cNvPr>
-          <p:cNvPicPr>
-            <a:picLocks noChangeAspect="1"/>
-          </p:cNvPicPr>
-          <p:nvPr/>
-        </p:nvPicPr>
-        <p:blipFill>
-          <a:blip r:embed="rId3"/>
-          <a:stretch>
-            <a:fillRect/>
-          </a:stretch>
-        </p:blipFill>
-        <p:spPr>
-          <a:xfrm>
-            <a:off x="2916936" y="1591056"/>
-            <a:ext cx="429768" cy="429768"/>
-          </a:xfrm>
-          <a:prstGeom prst="rect">
-            <a:avLst/>
-          </a:prstGeom>
-        </p:spPr>
-      </p:pic>
-      <p:sp>
-        <p:nvSpPr>
-          <p:cNvPr id="9" name="Recap text 2"/>
-          <p:cNvSpPr txBox="1"/>
-          <p:nvPr/>
-        </p:nvSpPr>
-        <p:spPr>
-          <a:xfrm>
-            <a:off x="2286000" y="2423160"/>
-            <a:ext cx="1691640" cy="1097280"/>
-          </a:xfrm>
-          <a:prstGeom prst="rect">
-            <a:avLst/>
-          </a:prstGeom>
-          <a:noFill/>
-          <a:ln/>
-        </p:spPr>
-        <p:txBody>
-          <a:bodyPr wrap="square" lIns="0" tIns="0" rIns="0" bIns="0" rtlCol="0" anchor="t"/>
-          <a:lstStyle/>
-          <a:p>
-            <a:pPr algn="ctr" indent="0" marL="0">
-              <a:buNone/>
-            </a:pPr>
-            <a:r>
-              <a:rPr lang="en-US" sz="1300" dirty="0">
-                <a:solidFill>
-                  <a:schemeClr val="accent4"/>
-                </a:solidFill>
-              </a:rPr>
-              <a:t>Every bin you touch</a:t>
-            </a:r>
-            <a:endParaRPr lang="en-US" sz="1300" dirty="0"/>
-          </a:p>
-          <a:p>
-            <a:pPr algn="ctr" indent="0" marL="0">
-              <a:buNone/>
-            </a:pPr>
-            <a:r>
-              <a:rPr lang="en-US" sz="1700" b="1" dirty="0">
-                <a:solidFill>
-                  <a:schemeClr val="tx1"/>
-                </a:solidFill>
-              </a:rPr>
-              <a:t>Apply ROBOTSS</a:t>
-            </a:r>
-            <a:endParaRPr lang="en-US" sz="1300" dirty="0"/>
-          </a:p>
-        </p:txBody>
-      </p:sp>
-      <p:pic>
-        <p:nvPicPr>
-          <p:cNvPr id="10" name="Arrow 2" descr="preencoded.png">    </p:cNvPr>
-          <p:cNvPicPr>
-            <a:picLocks noChangeAspect="1"/>
-          </p:cNvPicPr>
-          <p:nvPr/>
-        </p:nvPicPr>
-        <p:blipFill>
-          <a:blip r:embed="rId4"/>
-          <a:stretch>
-            <a:fillRect/>
-          </a:stretch>
-        </p:blipFill>
-        <p:spPr>
-          <a:xfrm>
-            <a:off x="3950208" y="1664208"/>
-            <a:ext cx="274320" cy="274320"/>
-          </a:xfrm>
-          <a:prstGeom prst="rect">
-            <a:avLst/>
-          </a:prstGeom>
-        </p:spPr>
-      </p:pic>
-      <p:sp>
-        <p:nvSpPr>
-          <p:cNvPr id="11" name="Recap circle 3"/>
-          <p:cNvSpPr/>
-          <p:nvPr/>
-        </p:nvSpPr>
-        <p:spPr>
-          <a:xfrm>
-            <a:off x="4526280" y="1371600"/>
-            <a:ext cx="868680" cy="868680"/>
-          </a:xfrm>
-          <a:prstGeom prst="ellipse">
-            <a:avLst/>
-          </a:prstGeom>
-          <a:solidFill>
-            <a:schemeClr val="accent1"/>
-          </a:solidFill>
-          <a:ln/>
-        </p:spPr>
-      </p:sp>
-      <p:pic>
-        <p:nvPicPr>
-          <p:cNvPr id="12" name="Recap icon 3" descr="preencoded.png">    </p:cNvPr>
-          <p:cNvPicPr>
-            <a:picLocks noChangeAspect="1"/>
-          </p:cNvPicPr>
-          <p:nvPr/>
-        </p:nvPicPr>
-        <p:blipFill>
-          <a:blip r:embed="rId5"/>
-          <a:stretch>
-            <a:fillRect/>
-          </a:stretch>
-        </p:blipFill>
-        <p:spPr>
-          <a:xfrm>
-            <a:off x="4745736" y="1591056"/>
-            <a:ext cx="429768" cy="429768"/>
-          </a:xfrm>
-          <a:prstGeom prst="rect">
-            <a:avLst/>
-          </a:prstGeom>
-        </p:spPr>
-      </p:pic>
-      <p:sp>
-        <p:nvSpPr>
-          <p:cNvPr id="13" name="Recap text 3"/>
-          <p:cNvSpPr txBox="1"/>
-          <p:nvPr/>
-        </p:nvSpPr>
-        <p:spPr>
-          <a:xfrm>
-            <a:off x="4114800" y="2423160"/>
-            <a:ext cx="1691640" cy="1097280"/>
-          </a:xfrm>
-          <a:prstGeom prst="rect">
-            <a:avLst/>
-          </a:prstGeom>
-          <a:noFill/>
-          <a:ln/>
-        </p:spPr>
-        <p:txBody>
-          <a:bodyPr wrap="square" lIns="0" tIns="0" rIns="0" bIns="0" rtlCol="0" anchor="t"/>
-          <a:lstStyle/>
-          <a:p>
-            <a:pPr algn="ctr" indent="0" marL="0">
-              <a:buNone/>
-            </a:pPr>
-            <a:r>
-              <a:rPr lang="en-US" sz="1300" dirty="0">
-                <a:solidFill>
-                  <a:schemeClr val="accent4"/>
-                </a:solidFill>
-              </a:rPr>
-              <a:t>All shift long</a:t>
-            </a:r>
-            <a:endParaRPr lang="en-US" sz="1300" dirty="0"/>
-          </a:p>
-          <a:p>
-            <a:pPr algn="ctr" indent="0" marL="0">
-              <a:buNone/>
-            </a:pPr>
-            <a:r>
-              <a:rPr lang="en-US" sz="1700" b="1" dirty="0">
-                <a:solidFill>
-                  <a:schemeClr val="tx1"/>
-                </a:solidFill>
-              </a:rPr>
-              <a:t>Fix as you go</a:t>
-            </a:r>
-            <a:endParaRPr lang="en-US" sz="1300" dirty="0"/>
-          </a:p>
-        </p:txBody>
-      </p:sp>
-      <p:sp>
-        <p:nvSpPr>
-          <p:cNvPr id="14" name="Goal card"/>
-          <p:cNvSpPr/>
-          <p:nvPr/>
-        </p:nvSpPr>
-        <p:spPr>
-          <a:xfrm>
-            <a:off x="457200" y="3749040"/>
-            <a:ext cx="5394960" cy="777240"/>
+            <a:off x="457200" y="4251960"/>
+            <a:ext cx="5394960" cy="566928"/>
           </a:xfrm>
           <a:prstGeom prst="roundRect">
             <a:avLst>
-              <a:gd name="adj" fmla="val 11765"/>
+              <a:gd name="adj" fmla="val 16129"/>
             </a:avLst>
           </a:prstGeom>
           <a:solidFill>
@@ -5730,14 +5566,14 @@
       </p:sp>
       <p:sp>
         <p:nvSpPr>
-          <p:cNvPr id="15" name="Goal text"/>
+          <p:cNvPr id="10" name="Rule text"/>
           <p:cNvSpPr txBox="1"/>
           <p:nvPr/>
         </p:nvSpPr>
         <p:spPr>
           <a:xfrm>
-            <a:off x="731520" y="3749040"/>
-            <a:ext cx="4846320" cy="777240"/>
+            <a:off x="685800" y="4251960"/>
+            <a:ext cx="4937760" cy="566928"/>
           </a:xfrm>
           <a:prstGeom prst="rect">
             <a:avLst/>
@@ -5753,25 +5589,14 @@
               <a:buNone/>
             </a:pPr>
             <a:r>
-              <a:rPr lang="en-US" sz="1600" b="1" dirty="0">
-                <a:solidFill>
-                  <a:srgbClr val="9EDFF7"/>
-                </a:solidFill>
-              </a:rPr>
-              <a:t>Goal: </a:t>
-            </a:r>
-            <a:pPr indent="0" marL="0">
-              <a:buNone/>
-            </a:pPr>
-            <a:r>
-              <a:rPr lang="en-US" sz="1600" dirty="0">
+              <a:rPr lang="en-US" sz="1400" b="1" dirty="0">
                 <a:solidFill>
                   <a:schemeClr val="bg1"/>
                 </a:solidFill>
               </a:rPr>
-              <a:t>fewer units falling, lower wAPMT, happier customers.</a:t>
-            </a:r>
-            <a:endParaRPr lang="en-US" sz="1600" dirty="0"/>
+              <a:t>Books and DVDs go in with the spine facing out.</a:t>
+            </a:r>
+            <a:endParaRPr lang="en-US" sz="1400" dirty="0"/>
           </a:p>
         </p:txBody>
       </p:sp>
@@ -5802,14 +5627,16 @@
       </p:grpSpPr>
       <p:sp>
         <p:nvSpPr>
-          <p:cNvPr id="2" name="Closing title"/>
-          <p:cNvSpPr txBox="1"/>
-          <p:nvPr/>
-        </p:nvSpPr>
-        <p:spPr>
-          <a:xfrm>
-            <a:off x="1371600" y="411480"/>
-            <a:ext cx="6400800" cy="640080"/>
+          <p:cNvPr id="2" name="Text 0"/>
+          <p:cNvSpPr/>
+          <p:nvPr>
+            <p:ph idx="101" type="title" hasCustomPrompt="1"/>
+          </p:nvPr>
+        </p:nvSpPr>
+        <p:spPr>
+          <a:xfrm>
+            <a:off x="457200" y="640080"/>
+            <a:ext cx="5394960" cy="548640"/>
           </a:xfrm>
           <a:prstGeom prst="rect">
             <a:avLst/>
@@ -5821,99 +5648,51 @@
           <a:bodyPr wrap="square" lIns="0" tIns="0" rIns="0" bIns="0" rtlCol="0" anchor="ctr"/>
           <a:lstStyle/>
           <a:p>
-            <a:pPr algn="ctr" indent="0" marL="0">
-              <a:buNone/>
-            </a:pPr>
-            <a:r>
-              <a:rPr lang="en-US" sz="3200" dirty="0">
-                <a:solidFill>
-                  <a:schemeClr val="accent1"/>
-                </a:solidFill>
-                <a:latin typeface="Arial" pitchFamily="34" charset="0"/>
-                <a:ea typeface="Arial" pitchFamily="34" charset="-122"/>
-                <a:cs typeface="Arial" pitchFamily="34" charset="-120"/>
-              </a:rPr>
-              <a:t>Learn and be curious</a:t>
-            </a:r>
-            <a:endParaRPr lang="en-US" sz="3200" dirty="0"/>
-          </a:p>
-        </p:txBody>
-      </p:sp>
-      <p:sp>
-        <p:nvSpPr>
-          <p:cNvPr id="3" name="Closing tagline"/>
-          <p:cNvSpPr txBox="1"/>
-          <p:nvPr/>
-        </p:nvSpPr>
-        <p:spPr>
-          <a:xfrm>
-            <a:off x="1371600" y="2651760"/>
-            <a:ext cx="6400800" cy="457200"/>
-          </a:xfrm>
-          <a:prstGeom prst="rect">
-            <a:avLst/>
-          </a:prstGeom>
-          <a:noFill/>
-          <a:ln/>
-        </p:spPr>
-        <p:txBody>
-          <a:bodyPr wrap="square" lIns="0" tIns="0" rIns="0" bIns="0" rtlCol="0" anchor="ctr"/>
-          <a:lstStyle/>
-          <a:p>
-            <a:pPr algn="ctr" indent="0" marL="0">
-              <a:buNone/>
-            </a:pPr>
-            <a:r>
-              <a:rPr lang="en-US" sz="1800" b="1" dirty="0">
+            <a:pPr algn="l" indent="0" marL="0">
+              <a:buNone/>
+            </a:pPr>
+            <a:r>
+              <a:rPr lang="en-US" sz="2800" b="1" dirty="0">
                 <a:solidFill>
                   <a:schemeClr val="tx1"/>
                 </a:solidFill>
               </a:rPr>
-              <a:t>Small fixes. Big impact.</a:t>
-            </a:r>
-            <a:endParaRPr lang="en-US" sz="1800" dirty="0"/>
-          </a:p>
-        </p:txBody>
-      </p:sp>
-      <p:sp>
-        <p:nvSpPr>
-          <p:cNvPr id="4" name="Rate label"/>
-          <p:cNvSpPr txBox="1"/>
-          <p:nvPr/>
-        </p:nvSpPr>
-        <p:spPr>
-          <a:xfrm>
-            <a:off x="2788920" y="3429000"/>
-            <a:ext cx="1600200" cy="365760"/>
-          </a:xfrm>
-          <a:prstGeom prst="rect">
-            <a:avLst/>
-          </a:prstGeom>
-          <a:noFill/>
-          <a:ln/>
-        </p:spPr>
-        <p:txBody>
-          <a:bodyPr wrap="square" lIns="0" tIns="0" rIns="0" bIns="0" rtlCol="0" anchor="ctr"/>
-          <a:lstStyle/>
-          <a:p>
-            <a:pPr algn="r" indent="0" marL="0">
-              <a:buNone/>
-            </a:pPr>
-            <a:r>
-              <a:rPr lang="en-US" sz="1600" dirty="0">
-                <a:solidFill>
-                  <a:schemeClr val="tx1"/>
-                </a:solidFill>
-              </a:rPr>
-              <a:t>Rate this video</a:t>
-            </a:r>
-            <a:endParaRPr lang="en-US" sz="1600" dirty="0"/>
-          </a:p>
-        </p:txBody>
+              <a:t>S: Stacking</a:t>
+            </a:r>
+            <a:endParaRPr lang="en-US" sz="2800" dirty="0"/>
+          </a:p>
+        </p:txBody>
+      </p:sp>
+      <p:sp>
+        <p:nvSpPr>
+          <p:cNvPr id="3" name="Wrong panel"/>
+          <p:cNvSpPr/>
+          <p:nvPr/>
+        </p:nvSpPr>
+        <p:spPr>
+          <a:xfrm>
+            <a:off x="457200" y="1325880"/>
+            <a:ext cx="2606040" cy="2788920"/>
+          </a:xfrm>
+          <a:prstGeom prst="roundRect">
+            <a:avLst>
+              <a:gd name="adj" fmla="val 3509"/>
+            </a:avLst>
+          </a:prstGeom>
+          <a:solidFill>
+            <a:schemeClr val="bg1"/>
+          </a:solidFill>
+          <a:ln w="38100">
+            <a:solidFill>
+              <a:srgbClr val="D64545"/>
+            </a:solidFill>
+            <a:prstDash val="solid"/>
+          </a:ln>
+        </p:spPr>
       </p:sp>
       <p:pic>
         <p:nvPicPr>
-          <p:cNvPr id="5" name="Star 1" descr="preencoded.png">    </p:cNvPr>
+          <p:cNvPr id="4" name="Wrong picture" descr="Stacking: wrong example. Different items stacked on top of each other">    </p:cNvPr>
           <p:cNvPicPr>
             <a:picLocks noChangeAspect="1"/>
           </p:cNvPicPr>
@@ -5927,17 +5706,91 @@
         </p:blipFill>
         <p:spPr>
           <a:xfrm>
-            <a:off x="4526280" y="3474720"/>
-            <a:ext cx="274320" cy="274320"/>
+            <a:off x="623277" y="1417320"/>
+            <a:ext cx="2273886" cy="2103120"/>
           </a:xfrm>
           <a:prstGeom prst="rect">
             <a:avLst/>
           </a:prstGeom>
         </p:spPr>
       </p:pic>
+      <p:sp>
+        <p:nvSpPr>
+          <p:cNvPr id="5" name="Wrong caption"/>
+          <p:cNvSpPr txBox="1"/>
+          <p:nvPr/>
+        </p:nvSpPr>
+        <p:spPr>
+          <a:xfrm>
+            <a:off x="594360" y="3547872"/>
+            <a:ext cx="2331720" cy="502920"/>
+          </a:xfrm>
+          <a:prstGeom prst="rect">
+            <a:avLst/>
+          </a:prstGeom>
+          <a:noFill/>
+          <a:ln/>
+        </p:spPr>
+        <p:txBody>
+          <a:bodyPr wrap="square" lIns="0" tIns="0" rIns="0" bIns="0" rtlCol="0" anchor="ctr"/>
+          <a:lstStyle/>
+          <a:p>
+            <a:pPr algn="ctr" indent="0" marL="0">
+              <a:buNone/>
+            </a:pPr>
+            <a:r>
+              <a:rPr lang="en-US" sz="1300" b="1" dirty="0">
+                <a:solidFill>
+                  <a:schemeClr val="accent3"/>
+                </a:solidFill>
+              </a:rPr>
+              <a:t>WRONG: </a:t>
+            </a:r>
+            <a:pPr algn="ctr" indent="0" marL="0">
+              <a:buNone/>
+            </a:pPr>
+            <a:r>
+              <a:rPr lang="en-US" sz="1300" dirty="0">
+                <a:solidFill>
+                  <a:schemeClr val="tx1"/>
+                </a:solidFill>
+              </a:rPr>
+              <a:t>Different items stacked on top of each other</a:t>
+            </a:r>
+            <a:endParaRPr lang="en-US" sz="1300" dirty="0"/>
+          </a:p>
+        </p:txBody>
+      </p:sp>
+      <p:sp>
+        <p:nvSpPr>
+          <p:cNvPr id="6" name="Right panel"/>
+          <p:cNvSpPr/>
+          <p:nvPr/>
+        </p:nvSpPr>
+        <p:spPr>
+          <a:xfrm>
+            <a:off x="3246120" y="1325880"/>
+            <a:ext cx="2606040" cy="2788920"/>
+          </a:xfrm>
+          <a:prstGeom prst="roundRect">
+            <a:avLst>
+              <a:gd name="adj" fmla="val 3509"/>
+            </a:avLst>
+          </a:prstGeom>
+          <a:solidFill>
+            <a:schemeClr val="bg1"/>
+          </a:solidFill>
+          <a:ln w="38100">
+            <a:solidFill>
+              <a:srgbClr val="2E7D32"/>
+            </a:solidFill>
+            <a:prstDash val="solid"/>
+          </a:ln>
+        </p:spPr>
+      </p:sp>
       <p:pic>
         <p:nvPicPr>
-          <p:cNvPr id="6" name="Star 2" descr="preencoded.png">    </p:cNvPr>
+          <p:cNvPr id="7" name="Right picture" descr="Stacking: right example. Items stand side by side, below the bands">    </p:cNvPr>
           <p:cNvPicPr>
             <a:picLocks noChangeAspect="1"/>
           </p:cNvPicPr>
@@ -5951,17 +5804,640 @@
         </p:blipFill>
         <p:spPr>
           <a:xfrm>
-            <a:off x="4873752" y="3474720"/>
-            <a:ext cx="274320" cy="274320"/>
+            <a:off x="3430172" y="1417320"/>
+            <a:ext cx="2237935" cy="2103120"/>
           </a:xfrm>
           <a:prstGeom prst="rect">
             <a:avLst/>
           </a:prstGeom>
         </p:spPr>
       </p:pic>
+      <p:sp>
+        <p:nvSpPr>
+          <p:cNvPr id="8" name="Right caption"/>
+          <p:cNvSpPr txBox="1"/>
+          <p:nvPr/>
+        </p:nvSpPr>
+        <p:spPr>
+          <a:xfrm>
+            <a:off x="3383280" y="3547872"/>
+            <a:ext cx="2331720" cy="502920"/>
+          </a:xfrm>
+          <a:prstGeom prst="rect">
+            <a:avLst/>
+          </a:prstGeom>
+          <a:noFill/>
+          <a:ln/>
+        </p:spPr>
+        <p:txBody>
+          <a:bodyPr wrap="square" lIns="0" tIns="0" rIns="0" bIns="0" rtlCol="0" anchor="ctr"/>
+          <a:lstStyle/>
+          <a:p>
+            <a:pPr algn="ctr" indent="0" marL="0">
+              <a:buNone/>
+            </a:pPr>
+            <a:r>
+              <a:rPr lang="en-US" sz="1300" b="1" dirty="0">
+                <a:solidFill>
+                  <a:srgbClr val="2E7D32"/>
+                </a:solidFill>
+              </a:rPr>
+              <a:t>RIGHT: </a:t>
+            </a:r>
+            <a:pPr algn="ctr" indent="0" marL="0">
+              <a:buNone/>
+            </a:pPr>
+            <a:r>
+              <a:rPr lang="en-US" sz="1300" dirty="0">
+                <a:solidFill>
+                  <a:schemeClr val="tx1"/>
+                </a:solidFill>
+              </a:rPr>
+              <a:t>Items stand side by side, below the bands</a:t>
+            </a:r>
+            <a:endParaRPr lang="en-US" sz="1300" dirty="0"/>
+          </a:p>
+        </p:txBody>
+      </p:sp>
+      <p:sp>
+        <p:nvSpPr>
+          <p:cNvPr id="9" name="Rule card"/>
+          <p:cNvSpPr/>
+          <p:nvPr/>
+        </p:nvSpPr>
+        <p:spPr>
+          <a:xfrm>
+            <a:off x="457200" y="4251960"/>
+            <a:ext cx="5394960" cy="566928"/>
+          </a:xfrm>
+          <a:prstGeom prst="roundRect">
+            <a:avLst>
+              <a:gd name="adj" fmla="val 16129"/>
+            </a:avLst>
+          </a:prstGeom>
+          <a:solidFill>
+            <a:schemeClr val="tx2"/>
+          </a:solidFill>
+          <a:ln/>
+        </p:spPr>
+      </p:sp>
+      <p:sp>
+        <p:nvSpPr>
+          <p:cNvPr id="10" name="Rule text"/>
+          <p:cNvSpPr txBox="1"/>
+          <p:nvPr/>
+        </p:nvSpPr>
+        <p:spPr>
+          <a:xfrm>
+            <a:off x="685800" y="4251960"/>
+            <a:ext cx="4937760" cy="566928"/>
+          </a:xfrm>
+          <a:prstGeom prst="rect">
+            <a:avLst/>
+          </a:prstGeom>
+          <a:noFill/>
+          <a:ln/>
+        </p:spPr>
+        <p:txBody>
+          <a:bodyPr wrap="square" lIns="0" tIns="0" rIns="0" bIns="0" rtlCol="0" anchor="ctr"/>
+          <a:lstStyle/>
+          <a:p>
+            <a:pPr indent="0" marL="0">
+              <a:buNone/>
+            </a:pPr>
+            <a:r>
+              <a:rPr lang="en-US" sz="1400" b="1" dirty="0">
+                <a:solidFill>
+                  <a:schemeClr val="bg1"/>
+                </a:solidFill>
+              </a:rPr>
+              <a:t>Only stack the same ASIN, with two flat sides, and stay below the bands.</a:t>
+            </a:r>
+            <a:endParaRPr lang="en-US" sz="1400" dirty="0"/>
+          </a:p>
+        </p:txBody>
+      </p:sp>
+    </p:spTree>
+  </p:cSld>
+  <p:clrMapOvr>
+    <a:masterClrMapping/>
+  </p:clrMapOvr>
+</p:sld>
+</file>
+
+<file path=ppt/slides/slide18.xml><?xml version="1.0" encoding="utf-8"?>
+<p:sld xmlns:a="http://schemas.openxmlformats.org/drawingml/2006/main" xmlns:r="http://schemas.openxmlformats.org/officeDocument/2006/relationships" xmlns:p="http://schemas.openxmlformats.org/presentationml/2006/main">
+  <p:cSld name="Slide 18">
+    <p:spTree>
+      <p:nvGrpSpPr>
+        <p:cNvPr id="1" name=""/>
+        <p:cNvGrpSpPr/>
+        <p:nvPr/>
+      </p:nvGrpSpPr>
+      <p:grpSpPr>
+        <a:xfrm>
+          <a:off x="0" y="0"/>
+          <a:ext cx="0" cy="0"/>
+          <a:chOff x="0" y="0"/>
+          <a:chExt cx="0" cy="0"/>
+        </a:xfrm>
+      </p:grpSpPr>
+      <p:sp>
+        <p:nvSpPr>
+          <p:cNvPr id="2" name="Text 0"/>
+          <p:cNvSpPr/>
+          <p:nvPr>
+            <p:ph idx="101" type="title" hasCustomPrompt="1"/>
+          </p:nvPr>
+        </p:nvSpPr>
+        <p:spPr>
+          <a:xfrm>
+            <a:off x="457200" y="640080"/>
+            <a:ext cx="5394960" cy="548640"/>
+          </a:xfrm>
+          <a:prstGeom prst="rect">
+            <a:avLst/>
+          </a:prstGeom>
+          <a:noFill/>
+          <a:ln/>
+        </p:spPr>
+        <p:txBody>
+          <a:bodyPr wrap="square" lIns="0" tIns="0" rIns="0" bIns="0" rtlCol="0" anchor="ctr"/>
+          <a:lstStyle/>
+          <a:p>
+            <a:pPr algn="l" indent="0" marL="0">
+              <a:buNone/>
+            </a:pPr>
+            <a:r>
+              <a:rPr lang="en-US" sz="2800" b="1" dirty="0">
+                <a:solidFill>
+                  <a:schemeClr val="tx1"/>
+                </a:solidFill>
+              </a:rPr>
+              <a:t>S: Similar items</a:t>
+            </a:r>
+            <a:endParaRPr lang="en-US" sz="2800" dirty="0"/>
+          </a:p>
+        </p:txBody>
+      </p:sp>
+      <p:sp>
+        <p:nvSpPr>
+          <p:cNvPr id="3" name="Wrong panel"/>
+          <p:cNvSpPr/>
+          <p:nvPr/>
+        </p:nvSpPr>
+        <p:spPr>
+          <a:xfrm>
+            <a:off x="457200" y="1325880"/>
+            <a:ext cx="2606040" cy="2788920"/>
+          </a:xfrm>
+          <a:prstGeom prst="roundRect">
+            <a:avLst>
+              <a:gd name="adj" fmla="val 3509"/>
+            </a:avLst>
+          </a:prstGeom>
+          <a:solidFill>
+            <a:schemeClr val="bg1"/>
+          </a:solidFill>
+          <a:ln w="38100">
+            <a:solidFill>
+              <a:srgbClr val="D64545"/>
+            </a:solidFill>
+            <a:prstDash val="solid"/>
+          </a:ln>
+        </p:spPr>
+      </p:sp>
       <p:pic>
         <p:nvPicPr>
-          <p:cNvPr id="7" name="Star 3" descr="preencoded.png">    </p:cNvPr>
+          <p:cNvPr id="4" name="Wrong picture" descr="Similar items: wrong example. Two look-alike items share one bin">    </p:cNvPr>
+          <p:cNvPicPr>
+            <a:picLocks noChangeAspect="1"/>
+          </p:cNvPicPr>
+          <p:nvPr/>
+        </p:nvPicPr>
+        <p:blipFill>
+          <a:blip r:embed="rId1"/>
+          <a:stretch>
+            <a:fillRect/>
+          </a:stretch>
+        </p:blipFill>
+        <p:spPr>
+          <a:xfrm>
+            <a:off x="608511" y="1417320"/>
+            <a:ext cx="2303417" cy="2103120"/>
+          </a:xfrm>
+          <a:prstGeom prst="rect">
+            <a:avLst/>
+          </a:prstGeom>
+        </p:spPr>
+      </p:pic>
+      <p:sp>
+        <p:nvSpPr>
+          <p:cNvPr id="5" name="Wrong caption"/>
+          <p:cNvSpPr txBox="1"/>
+          <p:nvPr/>
+        </p:nvSpPr>
+        <p:spPr>
+          <a:xfrm>
+            <a:off x="594360" y="3547872"/>
+            <a:ext cx="2331720" cy="502920"/>
+          </a:xfrm>
+          <a:prstGeom prst="rect">
+            <a:avLst/>
+          </a:prstGeom>
+          <a:noFill/>
+          <a:ln/>
+        </p:spPr>
+        <p:txBody>
+          <a:bodyPr wrap="square" lIns="0" tIns="0" rIns="0" bIns="0" rtlCol="0" anchor="ctr"/>
+          <a:lstStyle/>
+          <a:p>
+            <a:pPr algn="ctr" indent="0" marL="0">
+              <a:buNone/>
+            </a:pPr>
+            <a:r>
+              <a:rPr lang="en-US" sz="1300" b="1" dirty="0">
+                <a:solidFill>
+                  <a:schemeClr val="accent3"/>
+                </a:solidFill>
+              </a:rPr>
+              <a:t>WRONG: </a:t>
+            </a:r>
+            <a:pPr algn="ctr" indent="0" marL="0">
+              <a:buNone/>
+            </a:pPr>
+            <a:r>
+              <a:rPr lang="en-US" sz="1300" dirty="0">
+                <a:solidFill>
+                  <a:schemeClr val="tx1"/>
+                </a:solidFill>
+              </a:rPr>
+              <a:t>Two look-alike items share one bin</a:t>
+            </a:r>
+            <a:endParaRPr lang="en-US" sz="1300" dirty="0"/>
+          </a:p>
+        </p:txBody>
+      </p:sp>
+      <p:sp>
+        <p:nvSpPr>
+          <p:cNvPr id="6" name="Right panel"/>
+          <p:cNvSpPr/>
+          <p:nvPr/>
+        </p:nvSpPr>
+        <p:spPr>
+          <a:xfrm>
+            <a:off x="3246120" y="1325880"/>
+            <a:ext cx="2606040" cy="2788920"/>
+          </a:xfrm>
+          <a:prstGeom prst="roundRect">
+            <a:avLst>
+              <a:gd name="adj" fmla="val 3509"/>
+            </a:avLst>
+          </a:prstGeom>
+          <a:solidFill>
+            <a:schemeClr val="bg1"/>
+          </a:solidFill>
+          <a:ln w="38100">
+            <a:solidFill>
+              <a:srgbClr val="2E7D32"/>
+            </a:solidFill>
+            <a:prstDash val="solid"/>
+          </a:ln>
+        </p:spPr>
+      </p:sp>
+      <p:pic>
+        <p:nvPicPr>
+          <p:cNvPr id="7" name="Right picture" descr="Similar items: right example. Look-alikes are kept in different bins">    </p:cNvPr>
+          <p:cNvPicPr>
+            <a:picLocks noChangeAspect="1"/>
+          </p:cNvPicPr>
+          <p:nvPr/>
+        </p:nvPicPr>
+        <p:blipFill>
+          <a:blip r:embed="rId2"/>
+          <a:stretch>
+            <a:fillRect/>
+          </a:stretch>
+        </p:blipFill>
+        <p:spPr>
+          <a:xfrm>
+            <a:off x="3397431" y="1417320"/>
+            <a:ext cx="2303417" cy="2103120"/>
+          </a:xfrm>
+          <a:prstGeom prst="rect">
+            <a:avLst/>
+          </a:prstGeom>
+        </p:spPr>
+      </p:pic>
+      <p:sp>
+        <p:nvSpPr>
+          <p:cNvPr id="8" name="Right caption"/>
+          <p:cNvSpPr txBox="1"/>
+          <p:nvPr/>
+        </p:nvSpPr>
+        <p:spPr>
+          <a:xfrm>
+            <a:off x="3383280" y="3547872"/>
+            <a:ext cx="2331720" cy="502920"/>
+          </a:xfrm>
+          <a:prstGeom prst="rect">
+            <a:avLst/>
+          </a:prstGeom>
+          <a:noFill/>
+          <a:ln/>
+        </p:spPr>
+        <p:txBody>
+          <a:bodyPr wrap="square" lIns="0" tIns="0" rIns="0" bIns="0" rtlCol="0" anchor="ctr"/>
+          <a:lstStyle/>
+          <a:p>
+            <a:pPr algn="ctr" indent="0" marL="0">
+              <a:buNone/>
+            </a:pPr>
+            <a:r>
+              <a:rPr lang="en-US" sz="1300" b="1" dirty="0">
+                <a:solidFill>
+                  <a:srgbClr val="2E7D32"/>
+                </a:solidFill>
+              </a:rPr>
+              <a:t>RIGHT: </a:t>
+            </a:r>
+            <a:pPr algn="ctr" indent="0" marL="0">
+              <a:buNone/>
+            </a:pPr>
+            <a:r>
+              <a:rPr lang="en-US" sz="1300" dirty="0">
+                <a:solidFill>
+                  <a:schemeClr val="tx1"/>
+                </a:solidFill>
+              </a:rPr>
+              <a:t>Look-alikes are kept in different bins</a:t>
+            </a:r>
+            <a:endParaRPr lang="en-US" sz="1300" dirty="0"/>
+          </a:p>
+        </p:txBody>
+      </p:sp>
+      <p:sp>
+        <p:nvSpPr>
+          <p:cNvPr id="9" name="Rule card"/>
+          <p:cNvSpPr/>
+          <p:nvPr/>
+        </p:nvSpPr>
+        <p:spPr>
+          <a:xfrm>
+            <a:off x="457200" y="4251960"/>
+            <a:ext cx="5394960" cy="566928"/>
+          </a:xfrm>
+          <a:prstGeom prst="roundRect">
+            <a:avLst>
+              <a:gd name="adj" fmla="val 16129"/>
+            </a:avLst>
+          </a:prstGeom>
+          <a:solidFill>
+            <a:schemeClr val="tx2"/>
+          </a:solidFill>
+          <a:ln/>
+        </p:spPr>
+      </p:sp>
+      <p:sp>
+        <p:nvSpPr>
+          <p:cNvPr id="10" name="Rule text"/>
+          <p:cNvSpPr txBox="1"/>
+          <p:nvPr/>
+        </p:nvSpPr>
+        <p:spPr>
+          <a:xfrm>
+            <a:off x="685800" y="4251960"/>
+            <a:ext cx="4937760" cy="566928"/>
+          </a:xfrm>
+          <a:prstGeom prst="rect">
+            <a:avLst/>
+          </a:prstGeom>
+          <a:noFill/>
+          <a:ln/>
+        </p:spPr>
+        <p:txBody>
+          <a:bodyPr wrap="square" lIns="0" tIns="0" rIns="0" bIns="0" rtlCol="0" anchor="ctr"/>
+          <a:lstStyle/>
+          <a:p>
+            <a:pPr indent="0" marL="0">
+              <a:buNone/>
+            </a:pPr>
+            <a:r>
+              <a:rPr lang="en-US" sz="1400" b="1" dirty="0">
+                <a:solidFill>
+                  <a:schemeClr val="bg1"/>
+                </a:solidFill>
+              </a:rPr>
+              <a:t>Use the cross method. The system won't always flag similar items on screen.</a:t>
+            </a:r>
+            <a:endParaRPr lang="en-US" sz="1400" dirty="0"/>
+          </a:p>
+        </p:txBody>
+      </p:sp>
+    </p:spTree>
+  </p:cSld>
+  <p:clrMapOvr>
+    <a:masterClrMapping/>
+  </p:clrMapOvr>
+</p:sld>
+</file>
+
+<file path=ppt/slides/slide19.xml><?xml version="1.0" encoding="utf-8"?>
+<p:sld xmlns:a="http://schemas.openxmlformats.org/drawingml/2006/main" xmlns:r="http://schemas.openxmlformats.org/officeDocument/2006/relationships" xmlns:p="http://schemas.openxmlformats.org/presentationml/2006/main">
+  <p:cSld name="Slide 19">
+    <p:spTree>
+      <p:nvGrpSpPr>
+        <p:cNvPr id="1" name=""/>
+        <p:cNvGrpSpPr/>
+        <p:nvPr/>
+      </p:nvGrpSpPr>
+      <p:grpSpPr>
+        <a:xfrm>
+          <a:off x="0" y="0"/>
+          <a:ext cx="0" cy="0"/>
+          <a:chOff x="0" y="0"/>
+          <a:chExt cx="0" cy="0"/>
+        </a:xfrm>
+      </p:grpSpPr>
+      <p:sp>
+        <p:nvSpPr>
+          <p:cNvPr id="2" name="Text 0"/>
+          <p:cNvSpPr/>
+          <p:nvPr>
+            <p:ph idx="101" type="title" hasCustomPrompt="1"/>
+          </p:nvPr>
+        </p:nvSpPr>
+        <p:spPr>
+          <a:xfrm>
+            <a:off x="457200" y="640080"/>
+            <a:ext cx="5394960" cy="548640"/>
+          </a:xfrm>
+          <a:prstGeom prst="rect">
+            <a:avLst/>
+          </a:prstGeom>
+          <a:noFill/>
+          <a:ln/>
+        </p:spPr>
+        <p:txBody>
+          <a:bodyPr wrap="square" lIns="0" tIns="0" rIns="0" bIns="0" rtlCol="0" anchor="ctr"/>
+          <a:lstStyle/>
+          <a:p>
+            <a:pPr algn="l" indent="0" marL="0">
+              <a:buNone/>
+            </a:pPr>
+            <a:r>
+              <a:rPr lang="en-US" sz="2800" b="1" dirty="0">
+                <a:solidFill>
+                  <a:schemeClr val="tx1"/>
+                </a:solidFill>
+              </a:rPr>
+              <a:t>Your shift, bin by bin</a:t>
+            </a:r>
+            <a:endParaRPr lang="en-US" sz="2800" dirty="0"/>
+          </a:p>
+        </p:txBody>
+      </p:sp>
+      <p:sp>
+        <p:nvSpPr>
+          <p:cNvPr id="3" name="Recap circle 1"/>
+          <p:cNvSpPr/>
+          <p:nvPr/>
+        </p:nvSpPr>
+        <p:spPr>
+          <a:xfrm>
+            <a:off x="868680" y="1371600"/>
+            <a:ext cx="868680" cy="868680"/>
+          </a:xfrm>
+          <a:prstGeom prst="ellipse">
+            <a:avLst/>
+          </a:prstGeom>
+          <a:solidFill>
+            <a:schemeClr val="accent1"/>
+          </a:solidFill>
+          <a:ln/>
+        </p:spPr>
+      </p:sp>
+      <p:pic>
+        <p:nvPicPr>
+          <p:cNvPr id="4" name="Recap icon 1" descr="preencoded.png">    </p:cNvPr>
+          <p:cNvPicPr>
+            <a:picLocks noChangeAspect="1"/>
+          </p:cNvPicPr>
+          <p:nvPr/>
+        </p:nvPicPr>
+        <p:blipFill>
+          <a:blip r:embed="rId1"/>
+          <a:stretch>
+            <a:fillRect/>
+          </a:stretch>
+        </p:blipFill>
+        <p:spPr>
+          <a:xfrm>
+            <a:off x="1088136" y="1591056"/>
+            <a:ext cx="429768" cy="429768"/>
+          </a:xfrm>
+          <a:prstGeom prst="rect">
+            <a:avLst/>
+          </a:prstGeom>
+        </p:spPr>
+      </p:pic>
+      <p:sp>
+        <p:nvSpPr>
+          <p:cNvPr id="5" name="Recap text 1"/>
+          <p:cNvSpPr txBox="1"/>
+          <p:nvPr/>
+        </p:nvSpPr>
+        <p:spPr>
+          <a:xfrm>
+            <a:off x="457200" y="2423160"/>
+            <a:ext cx="1691640" cy="1097280"/>
+          </a:xfrm>
+          <a:prstGeom prst="rect">
+            <a:avLst/>
+          </a:prstGeom>
+          <a:noFill/>
+          <a:ln/>
+        </p:spPr>
+        <p:txBody>
+          <a:bodyPr wrap="square" lIns="0" tIns="0" rIns="0" bIns="0" rtlCol="0" anchor="t"/>
+          <a:lstStyle/>
+          <a:p>
+            <a:pPr algn="ctr" indent="0" marL="0">
+              <a:buNone/>
+            </a:pPr>
+            <a:r>
+              <a:rPr lang="en-US" sz="1300" dirty="0">
+                <a:solidFill>
+                  <a:schemeClr val="accent4"/>
+                </a:solidFill>
+              </a:rPr>
+              <a:t>Shift start and after breaks</a:t>
+            </a:r>
+            <a:endParaRPr lang="en-US" sz="1300" dirty="0"/>
+          </a:p>
+          <a:p>
+            <a:pPr algn="ctr" indent="0" marL="0">
+              <a:buNone/>
+            </a:pPr>
+            <a:r>
+              <a:rPr lang="en-US" sz="1700" b="1" dirty="0">
+                <a:solidFill>
+                  <a:schemeClr val="tx1"/>
+                </a:solidFill>
+              </a:rPr>
+              <a:t>1-minute First Face Fix</a:t>
+            </a:r>
+            <a:endParaRPr lang="en-US" sz="1300" dirty="0"/>
+          </a:p>
+        </p:txBody>
+      </p:sp>
+      <p:pic>
+        <p:nvPicPr>
+          <p:cNvPr id="6" name="Arrow 1" descr="preencoded.png">    </p:cNvPr>
+          <p:cNvPicPr>
+            <a:picLocks noChangeAspect="1"/>
+          </p:cNvPicPr>
+          <p:nvPr/>
+        </p:nvPicPr>
+        <p:blipFill>
+          <a:blip r:embed="rId2"/>
+          <a:stretch>
+            <a:fillRect/>
+          </a:stretch>
+        </p:blipFill>
+        <p:spPr>
+          <a:xfrm>
+            <a:off x="2121408" y="1664208"/>
+            <a:ext cx="274320" cy="274320"/>
+          </a:xfrm>
+          <a:prstGeom prst="rect">
+            <a:avLst/>
+          </a:prstGeom>
+        </p:spPr>
+      </p:pic>
+      <p:sp>
+        <p:nvSpPr>
+          <p:cNvPr id="7" name="Recap circle 2"/>
+          <p:cNvSpPr/>
+          <p:nvPr/>
+        </p:nvSpPr>
+        <p:spPr>
+          <a:xfrm>
+            <a:off x="2697480" y="1371600"/>
+            <a:ext cx="868680" cy="868680"/>
+          </a:xfrm>
+          <a:prstGeom prst="ellipse">
+            <a:avLst/>
+          </a:prstGeom>
+          <a:solidFill>
+            <a:schemeClr val="accent1"/>
+          </a:solidFill>
+          <a:ln/>
+        </p:spPr>
+      </p:sp>
+      <p:pic>
+        <p:nvPicPr>
+          <p:cNvPr id="8" name="Recap icon 2" descr="preencoded.png">    </p:cNvPr>
           <p:cNvPicPr>
             <a:picLocks noChangeAspect="1"/>
           </p:cNvPicPr>
@@ -5975,17 +6451,67 @@
         </p:blipFill>
         <p:spPr>
           <a:xfrm>
-            <a:off x="5221224" y="3474720"/>
-            <a:ext cx="274320" cy="274320"/>
+            <a:off x="2916936" y="1591056"/>
+            <a:ext cx="429768" cy="429768"/>
           </a:xfrm>
           <a:prstGeom prst="rect">
             <a:avLst/>
           </a:prstGeom>
         </p:spPr>
       </p:pic>
+      <p:sp>
+        <p:nvSpPr>
+          <p:cNvPr id="9" name="Recap text 2"/>
+          <p:cNvSpPr txBox="1"/>
+          <p:nvPr/>
+        </p:nvSpPr>
+        <p:spPr>
+          <a:xfrm>
+            <a:off x="2286000" y="2423160"/>
+            <a:ext cx="1691640" cy="1097280"/>
+          </a:xfrm>
+          <a:prstGeom prst="rect">
+            <a:avLst/>
+          </a:prstGeom>
+          <a:noFill/>
+          <a:ln/>
+        </p:spPr>
+        <p:txBody>
+          <a:bodyPr wrap="square" lIns="0" tIns="0" rIns="0" bIns="0" rtlCol="0" anchor="t"/>
+          <a:lstStyle/>
+          <a:p>
+            <a:pPr algn="ctr" indent="0" marL="0">
+              <a:buNone/>
+            </a:pPr>
+            <a:r>
+              <a:rPr lang="en-US" sz="1300" dirty="0">
+                <a:solidFill>
+                  <a:schemeClr val="accent4"/>
+                </a:solidFill>
+              </a:rPr>
+              <a:t>Every bin you touch</a:t>
+            </a:r>
+            <a:endParaRPr lang="en-US" sz="1300" dirty="0"/>
+          </a:p>
+          <a:p>
+            <a:pPr algn="ctr" indent="0" marL="0">
+              <a:buNone/>
+            </a:pPr>
+            <a:r>
+              <a:rPr lang="en-US" sz="1700" b="1" dirty="0">
+                <a:solidFill>
+                  <a:schemeClr val="tx1"/>
+                </a:solidFill>
+              </a:rPr>
+              <a:t>Apply ROBOTSS</a:t>
+            </a:r>
+            <a:endParaRPr lang="en-US" sz="1300" dirty="0"/>
+          </a:p>
+        </p:txBody>
+      </p:sp>
       <p:pic>
         <p:nvPicPr>
-          <p:cNvPr id="8" name="Star 4" descr="preencoded.png">    </p:cNvPr>
+          <p:cNvPr id="10" name="Arrow 2" descr="preencoded.png">    </p:cNvPr>
           <p:cNvPicPr>
             <a:picLocks noChangeAspect="1"/>
           </p:cNvPicPr>
@@ -5999,7 +6525,7 @@
         </p:blipFill>
         <p:spPr>
           <a:xfrm>
-            <a:off x="5568696" y="3474720"/>
+            <a:off x="3950208" y="1664208"/>
             <a:ext cx="274320" cy="274320"/>
           </a:xfrm>
           <a:prstGeom prst="rect">
@@ -6007,9 +6533,29 @@
           </a:prstGeom>
         </p:spPr>
       </p:pic>
+      <p:sp>
+        <p:nvSpPr>
+          <p:cNvPr id="11" name="Recap circle 3"/>
+          <p:cNvSpPr/>
+          <p:nvPr/>
+        </p:nvSpPr>
+        <p:spPr>
+          <a:xfrm>
+            <a:off x="4526280" y="1371600"/>
+            <a:ext cx="868680" cy="868680"/>
+          </a:xfrm>
+          <a:prstGeom prst="ellipse">
+            <a:avLst/>
+          </a:prstGeom>
+          <a:solidFill>
+            <a:schemeClr val="accent1"/>
+          </a:solidFill>
+          <a:ln/>
+        </p:spPr>
+      </p:sp>
       <p:pic>
         <p:nvPicPr>
-          <p:cNvPr id="9" name="Star 5" descr="preencoded.png">    </p:cNvPr>
+          <p:cNvPr id="12" name="Recap icon 3" descr="preencoded.png">    </p:cNvPr>
           <p:cNvPicPr>
             <a:picLocks noChangeAspect="1"/>
           </p:cNvPicPr>
@@ -6023,14 +6569,133 @@
         </p:blipFill>
         <p:spPr>
           <a:xfrm>
-            <a:off x="5916168" y="3474720"/>
-            <a:ext cx="274320" cy="274320"/>
+            <a:off x="4745736" y="1591056"/>
+            <a:ext cx="429768" cy="429768"/>
           </a:xfrm>
           <a:prstGeom prst="rect">
             <a:avLst/>
           </a:prstGeom>
         </p:spPr>
       </p:pic>
+      <p:sp>
+        <p:nvSpPr>
+          <p:cNvPr id="13" name="Recap text 3"/>
+          <p:cNvSpPr txBox="1"/>
+          <p:nvPr/>
+        </p:nvSpPr>
+        <p:spPr>
+          <a:xfrm>
+            <a:off x="4114800" y="2423160"/>
+            <a:ext cx="1691640" cy="1097280"/>
+          </a:xfrm>
+          <a:prstGeom prst="rect">
+            <a:avLst/>
+          </a:prstGeom>
+          <a:noFill/>
+          <a:ln/>
+        </p:spPr>
+        <p:txBody>
+          <a:bodyPr wrap="square" lIns="0" tIns="0" rIns="0" bIns="0" rtlCol="0" anchor="t"/>
+          <a:lstStyle/>
+          <a:p>
+            <a:pPr algn="ctr" indent="0" marL="0">
+              <a:buNone/>
+            </a:pPr>
+            <a:r>
+              <a:rPr lang="en-US" sz="1300" dirty="0">
+                <a:solidFill>
+                  <a:schemeClr val="accent4"/>
+                </a:solidFill>
+              </a:rPr>
+              <a:t>All shift long</a:t>
+            </a:r>
+            <a:endParaRPr lang="en-US" sz="1300" dirty="0"/>
+          </a:p>
+          <a:p>
+            <a:pPr algn="ctr" indent="0" marL="0">
+              <a:buNone/>
+            </a:pPr>
+            <a:r>
+              <a:rPr lang="en-US" sz="1700" b="1" dirty="0">
+                <a:solidFill>
+                  <a:schemeClr val="tx1"/>
+                </a:solidFill>
+              </a:rPr>
+              <a:t>Fix as you go</a:t>
+            </a:r>
+            <a:endParaRPr lang="en-US" sz="1300" dirty="0"/>
+          </a:p>
+        </p:txBody>
+      </p:sp>
+      <p:sp>
+        <p:nvSpPr>
+          <p:cNvPr id="14" name="Goal card"/>
+          <p:cNvSpPr/>
+          <p:nvPr/>
+        </p:nvSpPr>
+        <p:spPr>
+          <a:xfrm>
+            <a:off x="457200" y="3749040"/>
+            <a:ext cx="5394960" cy="777240"/>
+          </a:xfrm>
+          <a:prstGeom prst="roundRect">
+            <a:avLst>
+              <a:gd name="adj" fmla="val 11765"/>
+            </a:avLst>
+          </a:prstGeom>
+          <a:solidFill>
+            <a:schemeClr val="tx2"/>
+          </a:solidFill>
+          <a:ln/>
+        </p:spPr>
+      </p:sp>
+      <p:sp>
+        <p:nvSpPr>
+          <p:cNvPr id="15" name="Goal text"/>
+          <p:cNvSpPr txBox="1"/>
+          <p:nvPr/>
+        </p:nvSpPr>
+        <p:spPr>
+          <a:xfrm>
+            <a:off x="731520" y="3749040"/>
+            <a:ext cx="4846320" cy="777240"/>
+          </a:xfrm>
+          <a:prstGeom prst="rect">
+            <a:avLst/>
+          </a:prstGeom>
+          <a:noFill/>
+          <a:ln/>
+        </p:spPr>
+        <p:txBody>
+          <a:bodyPr wrap="square" lIns="0" tIns="0" rIns="0" bIns="0" rtlCol="0" anchor="ctr"/>
+          <a:lstStyle/>
+          <a:p>
+            <a:pPr indent="0" marL="0">
+              <a:buNone/>
+            </a:pPr>
+            <a:r>
+              <a:rPr lang="en-US" sz="1600" b="1" dirty="0">
+                <a:solidFill>
+                  <a:srgbClr val="9EDFF7"/>
+                </a:solidFill>
+              </a:rPr>
+              <a:t>Goal: </a:t>
+            </a:r>
+            <a:pPr indent="0" marL="0">
+              <a:buNone/>
+            </a:pPr>
+            <a:r>
+              <a:rPr lang="en-US" sz="1600" dirty="0">
+                <a:solidFill>
+                  <a:schemeClr val="bg1"/>
+                </a:solidFill>
+              </a:rPr>
+              <a:t>fewer units falling, lower wAPMT, happier customers.</a:t>
+            </a:r>
+            <a:endParaRPr lang="en-US" sz="1600" dirty="0"/>
+          </a:p>
+        </p:txBody>
+      </p:sp>
     </p:spTree>
   </p:cSld>
   <p:clrMapOvr>
@@ -6412,6 +7077,262 @@
           </a:p>
         </p:txBody>
       </p:sp>
+    </p:spTree>
+  </p:cSld>
+  <p:clrMapOvr>
+    <a:masterClrMapping/>
+  </p:clrMapOvr>
+</p:sld>
+</file>
+
+<file path=ppt/slides/slide20.xml><?xml version="1.0" encoding="utf-8"?>
+<p:sld xmlns:a="http://schemas.openxmlformats.org/drawingml/2006/main" xmlns:r="http://schemas.openxmlformats.org/officeDocument/2006/relationships" xmlns:p="http://schemas.openxmlformats.org/presentationml/2006/main">
+  <p:cSld name="Slide 20">
+    <p:spTree>
+      <p:nvGrpSpPr>
+        <p:cNvPr id="1" name=""/>
+        <p:cNvGrpSpPr/>
+        <p:nvPr/>
+      </p:nvGrpSpPr>
+      <p:grpSpPr>
+        <a:xfrm>
+          <a:off x="0" y="0"/>
+          <a:ext cx="0" cy="0"/>
+          <a:chOff x="0" y="0"/>
+          <a:chExt cx="0" cy="0"/>
+        </a:xfrm>
+      </p:grpSpPr>
+      <p:sp>
+        <p:nvSpPr>
+          <p:cNvPr id="2" name="Closing title"/>
+          <p:cNvSpPr txBox="1"/>
+          <p:nvPr/>
+        </p:nvSpPr>
+        <p:spPr>
+          <a:xfrm>
+            <a:off x="1371600" y="411480"/>
+            <a:ext cx="6400800" cy="640080"/>
+          </a:xfrm>
+          <a:prstGeom prst="rect">
+            <a:avLst/>
+          </a:prstGeom>
+          <a:noFill/>
+          <a:ln/>
+        </p:spPr>
+        <p:txBody>
+          <a:bodyPr wrap="square" lIns="0" tIns="0" rIns="0" bIns="0" rtlCol="0" anchor="ctr"/>
+          <a:lstStyle/>
+          <a:p>
+            <a:pPr algn="ctr" indent="0" marL="0">
+              <a:buNone/>
+            </a:pPr>
+            <a:r>
+              <a:rPr lang="en-US" sz="3200" dirty="0">
+                <a:solidFill>
+                  <a:schemeClr val="accent1"/>
+                </a:solidFill>
+                <a:latin typeface="Arial" pitchFamily="34" charset="0"/>
+                <a:ea typeface="Arial" pitchFamily="34" charset="-122"/>
+                <a:cs typeface="Arial" pitchFamily="34" charset="-120"/>
+              </a:rPr>
+              <a:t>Learn and be curious</a:t>
+            </a:r>
+            <a:endParaRPr lang="en-US" sz="3200" dirty="0"/>
+          </a:p>
+        </p:txBody>
+      </p:sp>
+      <p:sp>
+        <p:nvSpPr>
+          <p:cNvPr id="3" name="Closing tagline"/>
+          <p:cNvSpPr txBox="1"/>
+          <p:nvPr/>
+        </p:nvSpPr>
+        <p:spPr>
+          <a:xfrm>
+            <a:off x="1371600" y="2651760"/>
+            <a:ext cx="6400800" cy="457200"/>
+          </a:xfrm>
+          <a:prstGeom prst="rect">
+            <a:avLst/>
+          </a:prstGeom>
+          <a:noFill/>
+          <a:ln/>
+        </p:spPr>
+        <p:txBody>
+          <a:bodyPr wrap="square" lIns="0" tIns="0" rIns="0" bIns="0" rtlCol="0" anchor="ctr"/>
+          <a:lstStyle/>
+          <a:p>
+            <a:pPr algn="ctr" indent="0" marL="0">
+              <a:buNone/>
+            </a:pPr>
+            <a:r>
+              <a:rPr lang="en-US" sz="1800" b="1" dirty="0">
+                <a:solidFill>
+                  <a:schemeClr val="tx1"/>
+                </a:solidFill>
+              </a:rPr>
+              <a:t>Small fixes. Big impact.</a:t>
+            </a:r>
+            <a:endParaRPr lang="en-US" sz="1800" dirty="0"/>
+          </a:p>
+        </p:txBody>
+      </p:sp>
+      <p:sp>
+        <p:nvSpPr>
+          <p:cNvPr id="4" name="Rate label"/>
+          <p:cNvSpPr txBox="1"/>
+          <p:nvPr/>
+        </p:nvSpPr>
+        <p:spPr>
+          <a:xfrm>
+            <a:off x="2788920" y="3429000"/>
+            <a:ext cx="1600200" cy="365760"/>
+          </a:xfrm>
+          <a:prstGeom prst="rect">
+            <a:avLst/>
+          </a:prstGeom>
+          <a:noFill/>
+          <a:ln/>
+        </p:spPr>
+        <p:txBody>
+          <a:bodyPr wrap="square" lIns="0" tIns="0" rIns="0" bIns="0" rtlCol="0" anchor="ctr"/>
+          <a:lstStyle/>
+          <a:p>
+            <a:pPr algn="r" indent="0" marL="0">
+              <a:buNone/>
+            </a:pPr>
+            <a:r>
+              <a:rPr lang="en-US" sz="1600" dirty="0">
+                <a:solidFill>
+                  <a:schemeClr val="tx1"/>
+                </a:solidFill>
+              </a:rPr>
+              <a:t>Rate this video</a:t>
+            </a:r>
+            <a:endParaRPr lang="en-US" sz="1600" dirty="0"/>
+          </a:p>
+        </p:txBody>
+      </p:sp>
+      <p:pic>
+        <p:nvPicPr>
+          <p:cNvPr id="5" name="Star 1" descr="preencoded.png">    </p:cNvPr>
+          <p:cNvPicPr>
+            <a:picLocks noChangeAspect="1"/>
+          </p:cNvPicPr>
+          <p:nvPr/>
+        </p:nvPicPr>
+        <p:blipFill>
+          <a:blip r:embed="rId1"/>
+          <a:stretch>
+            <a:fillRect/>
+          </a:stretch>
+        </p:blipFill>
+        <p:spPr>
+          <a:xfrm>
+            <a:off x="4526280" y="3474720"/>
+            <a:ext cx="274320" cy="274320"/>
+          </a:xfrm>
+          <a:prstGeom prst="rect">
+            <a:avLst/>
+          </a:prstGeom>
+        </p:spPr>
+      </p:pic>
+      <p:pic>
+        <p:nvPicPr>
+          <p:cNvPr id="6" name="Star 2" descr="preencoded.png">    </p:cNvPr>
+          <p:cNvPicPr>
+            <a:picLocks noChangeAspect="1"/>
+          </p:cNvPicPr>
+          <p:nvPr/>
+        </p:nvPicPr>
+        <p:blipFill>
+          <a:blip r:embed="rId2"/>
+          <a:stretch>
+            <a:fillRect/>
+          </a:stretch>
+        </p:blipFill>
+        <p:spPr>
+          <a:xfrm>
+            <a:off x="4873752" y="3474720"/>
+            <a:ext cx="274320" cy="274320"/>
+          </a:xfrm>
+          <a:prstGeom prst="rect">
+            <a:avLst/>
+          </a:prstGeom>
+        </p:spPr>
+      </p:pic>
+      <p:pic>
+        <p:nvPicPr>
+          <p:cNvPr id="7" name="Star 3" descr="preencoded.png">    </p:cNvPr>
+          <p:cNvPicPr>
+            <a:picLocks noChangeAspect="1"/>
+          </p:cNvPicPr>
+          <p:nvPr/>
+        </p:nvPicPr>
+        <p:blipFill>
+          <a:blip r:embed="rId3"/>
+          <a:stretch>
+            <a:fillRect/>
+          </a:stretch>
+        </p:blipFill>
+        <p:spPr>
+          <a:xfrm>
+            <a:off x="5221224" y="3474720"/>
+            <a:ext cx="274320" cy="274320"/>
+          </a:xfrm>
+          <a:prstGeom prst="rect">
+            <a:avLst/>
+          </a:prstGeom>
+        </p:spPr>
+      </p:pic>
+      <p:pic>
+        <p:nvPicPr>
+          <p:cNvPr id="8" name="Star 4" descr="preencoded.png">    </p:cNvPr>
+          <p:cNvPicPr>
+            <a:picLocks noChangeAspect="1"/>
+          </p:cNvPicPr>
+          <p:nvPr/>
+        </p:nvPicPr>
+        <p:blipFill>
+          <a:blip r:embed="rId4"/>
+          <a:stretch>
+            <a:fillRect/>
+          </a:stretch>
+        </p:blipFill>
+        <p:spPr>
+          <a:xfrm>
+            <a:off x="5568696" y="3474720"/>
+            <a:ext cx="274320" cy="274320"/>
+          </a:xfrm>
+          <a:prstGeom prst="rect">
+            <a:avLst/>
+          </a:prstGeom>
+        </p:spPr>
+      </p:pic>
+      <p:pic>
+        <p:nvPicPr>
+          <p:cNvPr id="9" name="Star 5" descr="preencoded.png">    </p:cNvPr>
+          <p:cNvPicPr>
+            <a:picLocks noChangeAspect="1"/>
+          </p:cNvPicPr>
+          <p:nvPr/>
+        </p:nvPicPr>
+        <p:blipFill>
+          <a:blip r:embed="rId5"/>
+          <a:stretch>
+            <a:fillRect/>
+          </a:stretch>
+        </p:blipFill>
+        <p:spPr>
+          <a:xfrm>
+            <a:off x="5916168" y="3474720"/>
+            <a:ext cx="274320" cy="274320"/>
+          </a:xfrm>
+          <a:prstGeom prst="rect">
+            <a:avLst/>
+          </a:prstGeom>
+        </p:spPr>
+      </p:pic>
     </p:spTree>
   </p:cSld>
   <p:clrMapOvr>

--- a/APMT_Coaching_Stow_FFF_ROBOTSS.pptx
+++ b/APMT_Coaching_Stow_FFF_ROBOTSS.pptx
@@ -25,9 +25,10 @@
     <p:sldId id="273" r:id="rId19"/>
     <p:sldId id="274" r:id="rId20"/>
     <p:sldId id="275" r:id="rId21"/>
+    <p:sldId id="276" r:id="rId22"/>
   </p:sldIdLst>
   <p:notesMasterIdLst>
-    <p:notesMasterId r:id="rId22"/>
+    <p:notesMasterId r:id="rId23"/>
   </p:notesMasterIdLst>
   <p:sldSz cx="9144000" cy="5143500"/>
   <p:notesSz cx="5143500" cy="9144000"/>
@@ -126,26 +127,26 @@
   <p:extLst>
     <p:ext uri="{521415D9-36F7-43E2-AB2F-B90AF26B5E84}">
       <p14:sectionLst xmlns:p14="http://schemas.microsoft.com/office/powerpoint/2010/main">
-        <p14:section name="Intro" id="{4b492998-d1f1-0b47-eef7-d4bd89aa89fe}">
+        <p14:section name="Intro" id="{ab9608e6-831c-b02d-ff96-d03b9b1a1704}">
           <p14:sldIdLst>
             <p14:sldId id="256"/>
             <p14:sldId id="257"/>
             <p14:sldId id="258"/>
             <p14:sldId id="259"/>
+            <p14:sldId id="260"/>
           </p14:sldIdLst>
         </p14:section>
-        <p14:section name="First Face Fix" id="{8e07b854-54f2-a895-377c-fa2b02068473}">
+        <p14:section name="First Face Fix" id="{4ec580bb-c2e8-6032-f0b3-f98d397b75f2}">
           <p14:sldIdLst>
-            <p14:sldId id="260"/>
             <p14:sldId id="261"/>
             <p14:sldId id="262"/>
             <p14:sldId id="263"/>
             <p14:sldId id="264"/>
+            <p14:sldId id="265"/>
           </p14:sldIdLst>
         </p14:section>
-        <p14:section name="ROBOTSS" id="{71a56574-d96b-62b6-8bd6-8a60aeca1c33}">
+        <p14:section name="ROBOTSS" id="{8109cdf7-5fb3-088a-060f-1221da709732}">
           <p14:sldIdLst>
-            <p14:sldId id="265"/>
             <p14:sldId id="266"/>
             <p14:sldId id="267"/>
             <p14:sldId id="268"/>
@@ -154,12 +155,13 @@
             <p14:sldId id="271"/>
             <p14:sldId id="272"/>
             <p14:sldId id="273"/>
+            <p14:sldId id="274"/>
           </p14:sldIdLst>
         </p14:section>
-        <p14:section name="Wrap-up" id="{011eb451-4982-1196-0caf-a701a9adffda}">
+        <p14:section name="Wrap-up" id="{e9b0c754-ac98-28ad-f9a9-4491728e9c2b}">
           <p14:sldIdLst>
-            <p14:sldId id="274"/>
             <p14:sldId id="275"/>
+            <p14:sldId id="276"/>
           </p14:sldIdLst>
         </p14:section>
       </p14:sectionLst>
@@ -654,7 +656,7 @@
           <a:p>
             <a:r>
               <a:rPr lang="en-US" dirty="0"/>
-              <a:t>Now for part two: the rules you use during First Face Fix and every time you touch a bin. They're called ROBOTSS.</a:t>
+              <a:t>First Face Fix gets your shift off to a clean start, but it doesn't stop there. Whenever your hands are in a bin, fix its etiquette as you go. If every one of us leaves each bin a little better than we found it, units won't fall out as the pod moves. We check First Face Fix with at least fifteen audits per shift, and our target is ninety percent compliance or better, with feedback given to you right away.</a:t>
             </a:r>
             <a:endParaRPr lang="en-US" dirty="0"/>
           </a:p>
@@ -742,7 +744,7 @@
           <a:p>
             <a:r>
               <a:rPr lang="en-US" dirty="0"/>
-              <a:t>ROBOTSS stands for seven rules. R, right bin size. O, no overhang. B, blocking. O, overstuffing. T, titles out. S, stacking. And S, similar items. Follow them and pickers find items faster, bins hold more, and nothing falls out when the pod moves. Let's go through them one by one.</a:t>
+              <a:t>Now for part two: the rules you use during First Face Fix and every time you touch a bin. They're called ROBOTSS.</a:t>
             </a:r>
             <a:endParaRPr lang="en-US" dirty="0"/>
           </a:p>
@@ -830,7 +832,7 @@
           <a:p>
             <a:r>
               <a:rPr lang="en-US" dirty="0"/>
-              <a:t>R is for right bin size. On the left, a tiny item sits alone in a big bin. That wastes space, and small items get lost. On the right, the item suits the size of the bin. Always stow into the smallest bin the item fits in, and place it by its length first.</a:t>
+              <a:t>ROBOTSS stands for seven rules. R, right bin size. O, no overhang. B, blocking. O, overstuffing. T, titles out. S, stacking. And S, similar items. Follow them and pickers find items faster, bins hold more, and nothing falls out when the pod moves. Let's go through them one by one.</a:t>
             </a:r>
             <a:endParaRPr lang="en-US" dirty="0"/>
           </a:p>
@@ -918,7 +920,7 @@
           <a:p>
             <a:r>
               <a:rPr lang="en-US" dirty="0"/>
-              <a:t>The first O is no overhang. On the left, the box sticks out past the edge of the bin. On the right, everything sits fully inside. Anything hanging out can catch as the pod moves, causing drive obstructions and even pod crashes, and that's how items end up on the floor.</a:t>
+              <a:t>R is for right bin size. On the left, a tiny item sits alone in a big bin. That wastes space, and small items get lost. On the right, the item suits the size of the bin. Always stow into the smallest bin the item fits in, and place it by its length first.</a:t>
             </a:r>
             <a:endParaRPr lang="en-US" dirty="0"/>
           </a:p>
@@ -1006,7 +1008,7 @@
           <a:p>
             <a:r>
               <a:rPr lang="en-US" dirty="0"/>
-              <a:t>B is for blocking. On the left, a flat item lying across the front hides everything behind it, so the picker can't see what they need. On the right, every item is visible from the front. Never put a large item in front of a small one, and stand flat items upright so they can't slide out between the retention bands.</a:t>
+              <a:t>The first O is no overhang. On the left, the box sticks out past the edge of the bin. On the right, everything sits fully inside. Anything hanging out can catch as the pod moves, causing drive obstructions and even pod crashes, and that's how items end up on the floor.</a:t>
             </a:r>
             <a:endParaRPr lang="en-US" dirty="0"/>
           </a:p>
@@ -1094,7 +1096,7 @@
           <a:p>
             <a:r>
               <a:rPr lang="en-US" dirty="0"/>
-              <a:t>The second O is overstuffing. On the left, items have been forced in and the bin is bulging. On the right, everything fits with room to pick. Forcing items in damages customer products, and an overstuffed bin is the one most likely to spill.</a:t>
+              <a:t>B is for blocking. On the left, a flat item lying across the front hides everything behind it, so the picker can't see what they need. On the right, every item is visible from the front. Never put a large item in front of a small one, and stand flat items upright so they can't slide out between the retention bands.</a:t>
             </a:r>
             <a:endParaRPr lang="en-US" dirty="0"/>
           </a:p>
@@ -1182,7 +1184,7 @@
           <a:p>
             <a:r>
               <a:rPr lang="en-US" dirty="0"/>
-              <a:t>T is for titles out. On the left, the spines face inward, so the picker can't read the titles. On the right, the spines face out and the titles are easy to read. Always stow books and DVDs spine out, so pickers can find them straight away.</a:t>
+              <a:t>The second O is overstuffing. On the left, items have been forced in and the bin is bulging. On the right, everything fits with room to pick. Forcing items in damages customer products, and an overstuffed bin is the one most likely to spill.</a:t>
             </a:r>
             <a:endParaRPr lang="en-US" dirty="0"/>
           </a:p>
@@ -1270,7 +1272,7 @@
           <a:p>
             <a:r>
               <a:rPr lang="en-US" dirty="0"/>
-              <a:t>The first S is stacking. On the left, different items are piled on top of each other. On the right, they stand side by side, below the bands. Only stack items of the same ASIN, only when they have at least two flat surfaces, and always keep them below the retention bands.</a:t>
+              <a:t>T is for titles out. On the left, the spines face inward, so the picker can't read the titles. On the right, the spines face out and the titles are easy to read. Always stow books and DVDs spine out, so pickers can find them straight away.</a:t>
             </a:r>
             <a:endParaRPr lang="en-US" dirty="0"/>
           </a:p>
@@ -1358,7 +1360,7 @@
           <a:p>
             <a:r>
               <a:rPr lang="en-US" dirty="0"/>
-              <a:t>The last S is similar items. On the left, two cables that look almost the same, one meter and two meters, are in the same bin, so the picker could easily grab the wrong one. On the right, the look-alikes are kept in different bins. Use the cross method for similar items, because the system won't always warn you on screen.</a:t>
+              <a:t>The first S is stacking. On the left, different items are piled on top of each other. On the right, they stand side by side, below the bands. Only stack items of the same ASIN, only when they have at least two flat surfaces, and always keep them below the retention bands.</a:t>
             </a:r>
             <a:endParaRPr lang="en-US" dirty="0"/>
           </a:p>
@@ -1446,7 +1448,7 @@
           <a:p>
             <a:r>
               <a:rPr lang="en-US" dirty="0"/>
-              <a:t>So here's your shift, bin by bin. At shift start and after every break, do your one-minute First Face Fix. On every bin you touch, apply ROBOTSS. And all shift long, fix as you go. Do these three things consistently and fewer units will fall, our wAPMT will come down, and our customers get what they ordered.</a:t>
+              <a:t>The last S is similar items. On the left, two cables that look almost the same, one meter and two meters, are in the same bin, so the picker could easily grab the wrong one. On the right, the look-alikes are kept in different bins. Use the cross method for similar items, because the system won't always warn you on screen.</a:t>
             </a:r>
             <a:endParaRPr lang="en-US" dirty="0"/>
           </a:p>
@@ -1622,7 +1624,7 @@
           <a:p>
             <a:r>
               <a:rPr lang="en-US" dirty="0"/>
-              <a:t>Small fixes make a big impact. Thanks for watching, and thanks for looking after every bin, every time. If you have any questions, speak to your Process Guide, your Area Manager, or the ICQA team. And please take a second to rate this video.</a:t>
+              <a:t>So here's your shift, bin by bin. At shift start and after every break, do your one-minute First Face Fix. On every bin you touch, apply ROBOTSS. And all shift long, fix as you go. Do these three things consistently and fewer units will fall, our wAPMT will come down, and our customers get what they ordered.</a:t>
             </a:r>
             <a:endParaRPr lang="en-US" dirty="0"/>
           </a:p>
@@ -1646,6 +1648,94 @@
             <a:fld id="{F7021451-1387-4CA6-816F-3879F97B5CBC}" type="slidenum">
               <a:rPr lang="en-US"/>
               <a:t>20</a:t>
+            </a:fld>
+            <a:endParaRPr lang="en-US"/>
+          </a:p>
+        </p:txBody>
+      </p:sp>
+    </p:spTree>
+    <p:extLst>
+      <p:ext uri="{BB962C8B-B14F-4D97-AF65-F5344CB8AC3E}">
+        <p14:creationId xmlns:p14="http://schemas.microsoft.com/office/powerpoint/2010/main" val="1024086991"/>
+      </p:ext>
+    </p:extLst>
+  </p:cSld>
+  <p:clrMapOvr>
+    <a:masterClrMapping/>
+  </p:clrMapOvr>
+</p:notes>
+</file>
+
+<file path=ppt/notesSlides/notesSlide21.xml><?xml version="1.0" encoding="utf-8"?>
+<p:notes xmlns:a="http://schemas.openxmlformats.org/drawingml/2006/main" xmlns:r="http://schemas.openxmlformats.org/officeDocument/2006/relationships" xmlns:p="http://schemas.openxmlformats.org/presentationml/2006/main">
+  <p:cSld>
+    <p:spTree>
+      <p:nvGrpSpPr>
+        <p:cNvPr id="1" name=""/>
+        <p:cNvGrpSpPr/>
+        <p:nvPr/>
+      </p:nvGrpSpPr>
+      <p:grpSpPr>
+        <a:xfrm>
+          <a:off x="0" y="0"/>
+          <a:ext cx="0" cy="0"/>
+          <a:chOff x="0" y="0"/>
+          <a:chExt cx="0" cy="0"/>
+        </a:xfrm>
+      </p:grpSpPr>
+      <p:sp>
+        <p:nvSpPr>
+          <p:cNvPr id="2" name="Slide Image Placeholder 1"/>
+          <p:cNvSpPr>
+            <a:spLocks noGrp="1" noRot="1" noChangeAspect="1"/>
+          </p:cNvSpPr>
+          <p:nvPr>
+            <p:ph type="sldImg"/>
+          </p:nvPr>
+        </p:nvSpPr>
+        <p:spPr/>
+      </p:sp>
+      <p:sp>
+        <p:nvSpPr>
+          <p:cNvPr id="3" name="Notes Placeholder 2"/>
+          <p:cNvSpPr>
+            <a:spLocks noGrp="1"/>
+          </p:cNvSpPr>
+          <p:nvPr>
+            <p:ph type="body" idx="1"/>
+          </p:nvPr>
+        </p:nvSpPr>
+        <p:spPr/>
+        <p:txBody>
+          <a:bodyPr/>
+          <a:lstStyle/>
+          <a:p>
+            <a:r>
+              <a:rPr lang="en-US" dirty="0"/>
+              <a:t>Small fixes make a big impact. Thanks for watching, and thanks for looking after every bin, every time. If you have any questions, speak to your Process Guide, your Area Manager, or the ICQA team. And please take a second to rate this video.</a:t>
+            </a:r>
+            <a:endParaRPr lang="en-US" dirty="0"/>
+          </a:p>
+        </p:txBody>
+      </p:sp>
+      <p:sp>
+        <p:nvSpPr>
+          <p:cNvPr id="4" name="Slide Number Placeholder 3"/>
+          <p:cNvSpPr>
+            <a:spLocks noGrp="1"/>
+          </p:cNvSpPr>
+          <p:nvPr>
+            <p:ph type="sldNum" sz="quarter" idx="10"/>
+          </p:nvPr>
+        </p:nvSpPr>
+        <p:spPr/>
+        <p:txBody>
+          <a:bodyPr/>
+          <a:lstStyle/>
+          <a:p>
+            <a:fld id="{F7021451-1387-4CA6-816F-3879F97B5CBC}" type="slidenum">
+              <a:rPr lang="en-US"/>
+              <a:t>21</a:t>
             </a:fld>
             <a:endParaRPr lang="en-US"/>
           </a:p>
@@ -1798,7 +1888,7 @@
           <a:p>
             <a:r>
               <a:rPr lang="en-US" dirty="0"/>
-              <a:t>Here's the key distinction. Amnesty is only for items that haven't been picked yet: they belong in a stowed pod bin, and they're not in it. Those go to amnesty. But if you find an item that has already been picked, one that should be in a tote, at a rebin location or in a chute, and it fell or was put in the wrong place, that is not amnesty. That's an outbound problem solve item. Putting picked items into amnesty over-inflates our wAPMT, and it hides the real outbound problem that needs fixing.</a:t>
+              <a:t>Here's the key distinction. Amnesty is only for items that have already been stowed into a pod bin, and haven't been picked yet. If one of those is not in its bin, it goes to amnesty. But if you find an item that hasn't been stowed yet, one that still belongs in a stow tote or cart, and it fell or was left behind before it was stowed, that is not amnesty. That's an inbound problem solve item. Putting unstowed items into amnesty over-inflates our wAPMT, and it hides the real inbound problem that needs fixing.</a:t>
             </a:r>
             <a:endParaRPr lang="en-US" dirty="0"/>
           </a:p>
@@ -1886,7 +1976,7 @@
           <a:p>
             <a:r>
               <a:rPr lang="en-US" dirty="0"/>
-              <a:t>Let's start with part one: First Face Fix, or F F F.</a:t>
+              <a:t>So when you find an item out of place, ask yourself one question: has it been stowed yet? If the answer is yes, and it belongs in a stowed pod bin, it's amnesty. If the answer is no, and it never made it into a pod bin, it's not amnesty. Take it to inbound problem solve.</a:t>
             </a:r>
             <a:endParaRPr lang="en-US" dirty="0"/>
           </a:p>
@@ -1974,7 +2064,7 @@
           <a:p>
             <a:r>
               <a:rPr lang="en-US" dirty="0"/>
-              <a:t>First Face Fix is a standard process to fix the bin etiquette of the very first pod face that arrives at your station. It takes just one minute. You do it at the start of your shift, and again after every break. It applies to all Stow and ICQA associates.</a:t>
+              <a:t>Let's start with part one: First Face Fix, or F F F.</a:t>
             </a:r>
             <a:endParaRPr lang="en-US" dirty="0"/>
           </a:p>
@@ -2062,7 +2152,7 @@
           <a:p>
             <a:r>
               <a:rPr lang="en-US" dirty="0"/>
-              <a:t>Here's how to do it in four steps. One: enter your station, log in, choose your process path, and make sure your station is ready. Two: when the first pod face arrives, work from the top to the bottom, just like the stow snake. Three: fix every bin so it meets the ROBOTSS rules, which we'll cover in a moment. Four: start your assigned process after one minute, or as soon as the face meets ROBOTSS.</a:t>
+              <a:t>First Face Fix is a standard process to fix the bin etiquette of the very first pod face that arrives at your station. It takes just one minute. You do it at the start of your shift, and again after every break. It applies to all Stow and ICQA associates.</a:t>
             </a:r>
             <a:endParaRPr lang="en-US" dirty="0"/>
           </a:p>
@@ -2150,7 +2240,7 @@
           <a:p>
             <a:r>
               <a:rPr lang="en-US" dirty="0"/>
-              <a:t>There are three things you must not do before or during First Face Fix. Don't scan any articles in totes or bins. Don't move articles to a different bin. And don't remove any articles from bins. First Face Fix is only about organizing what's already in each bin, so the inventory stays exactly where the system expects it.</a:t>
+              <a:t>Here's how to do it in four steps. One: enter your station, log in, choose your process path, and make sure your station is ready. Two: when the first pod face arrives, work from the top to the bottom, just like the stow snake. Three: fix every bin so it meets the ROBOTSS rules, which we'll cover in a moment. Four: start your assigned process after one minute, or as soon as the face meets ROBOTSS.</a:t>
             </a:r>
             <a:endParaRPr lang="en-US" dirty="0"/>
           </a:p>
@@ -2238,7 +2328,7 @@
           <a:p>
             <a:r>
               <a:rPr lang="en-US" dirty="0"/>
-              <a:t>First Face Fix gets your shift off to a clean start, but it doesn't stop there. Whenever your hands are in a bin, fix its etiquette as you go. If every one of us leaves each bin a little better than we found it, units won't fall out as the pod moves. We check First Face Fix with at least fifteen audits per shift, and our target is ninety percent compliance or better, with feedback given to you right away.</a:t>
+              <a:t>There are three things you must not do before or during First Face Fix. Don't scan any articles in totes or bins. Don't move articles to a different bin. And don't remove any articles from bins. First Face Fix is only about organizing what's already in each bin, so the inventory stays exactly where the system expects it.</a:t>
             </a:r>
             <a:endParaRPr lang="en-US" dirty="0"/>
           </a:p>
@@ -3092,54 +3182,98 @@
       </p:grpSpPr>
       <p:sp>
         <p:nvSpPr>
-          <p:cNvPr id="2" name="Text 1"/>
+          <p:cNvPr id="2" name="Text 0"/>
           <p:cNvSpPr/>
           <p:nvPr>
-            <p:ph idx="102" type="body" hasCustomPrompt="1"/>
+            <p:ph idx="101" type="title" hasCustomPrompt="1"/>
           </p:nvPr>
         </p:nvSpPr>
         <p:spPr>
           <a:xfrm>
-            <a:off x="2514600" y="502920"/>
-            <a:ext cx="6400800" cy="320040"/>
-          </a:xfrm>
-          <a:prstGeom prst="rect">
-            <a:avLst/>
-          </a:prstGeom>
-          <a:noFill/>
-          <a:ln/>
-        </p:spPr>
-        <p:txBody>
-          <a:bodyPr wrap="square" lIns="0" tIns="0" rIns="0" bIns="0" rtlCol="0"/>
-          <a:lstStyle/>
-          <a:p>
-            <a:pPr algn="ctr" indent="0" marL="0">
-              <a:buNone/>
-            </a:pPr>
-            <a:r>
-              <a:rPr lang="en-US" sz="1300" b="1" spc="300" kern="0" dirty="0">
-                <a:solidFill>
-                  <a:schemeClr val="accent6"/>
-                </a:solidFill>
-              </a:rPr>
-              <a:t>PART 2</a:t>
-            </a:r>
-            <a:endParaRPr lang="en-US" sz="1300" dirty="0"/>
-          </a:p>
-        </p:txBody>
-      </p:sp>
-      <p:sp>
-        <p:nvSpPr>
-          <p:cNvPr id="3" name="Text 1"/>
+            <a:off x="457200" y="640080"/>
+            <a:ext cx="5394960" cy="548640"/>
+          </a:xfrm>
+          <a:prstGeom prst="rect">
+            <a:avLst/>
+          </a:prstGeom>
+          <a:noFill/>
+          <a:ln/>
+        </p:spPr>
+        <p:txBody>
+          <a:bodyPr wrap="square" lIns="0" tIns="0" rIns="0" bIns="0" rtlCol="0" anchor="ctr"/>
+          <a:lstStyle/>
+          <a:p>
+            <a:pPr algn="l" indent="0" marL="0">
+              <a:buNone/>
+            </a:pPr>
+            <a:r>
+              <a:rPr lang="en-US" sz="2800" b="1" dirty="0">
+                <a:solidFill>
+                  <a:schemeClr val="tx1"/>
+                </a:solidFill>
+              </a:rPr>
+              <a:t>Then keep fixing as you go</a:t>
+            </a:r>
+            <a:endParaRPr lang="en-US" sz="2800" dirty="0"/>
+          </a:p>
+        </p:txBody>
+      </p:sp>
+      <p:sp>
+        <p:nvSpPr>
+          <p:cNvPr id="3" name="Quote card"/>
           <p:cNvSpPr/>
-          <p:nvPr>
-            <p:ph idx="103" type="title" hasCustomPrompt="1"/>
-          </p:nvPr>
-        </p:nvSpPr>
-        <p:spPr>
-          <a:xfrm>
-            <a:off x="2514600" y="868680"/>
-            <a:ext cx="6400800" cy="868680"/>
+          <p:nvPr/>
+        </p:nvSpPr>
+        <p:spPr>
+          <a:xfrm>
+            <a:off x="457200" y="1325880"/>
+            <a:ext cx="5394960" cy="1188720"/>
+          </a:xfrm>
+          <a:prstGeom prst="roundRect">
+            <a:avLst>
+              <a:gd name="adj" fmla="val 7692"/>
+            </a:avLst>
+          </a:prstGeom>
+          <a:solidFill>
+            <a:schemeClr val="bg1"/>
+          </a:solidFill>
+          <a:ln/>
+        </p:spPr>
+      </p:sp>
+      <p:pic>
+        <p:nvPicPr>
+          <p:cNvPr id="4" name="Redo icon" descr="preencoded.png">    </p:cNvPr>
+          <p:cNvPicPr>
+            <a:picLocks noChangeAspect="1"/>
+          </p:cNvPicPr>
+          <p:nvPr/>
+        </p:nvPicPr>
+        <p:blipFill>
+          <a:blip r:embed="rId1"/>
+          <a:stretch>
+            <a:fillRect/>
+          </a:stretch>
+        </p:blipFill>
+        <p:spPr>
+          <a:xfrm>
+            <a:off x="731520" y="1709928"/>
+            <a:ext cx="411480" cy="411480"/>
+          </a:xfrm>
+          <a:prstGeom prst="rect">
+            <a:avLst/>
+          </a:prstGeom>
+        </p:spPr>
+      </p:pic>
+      <p:sp>
+        <p:nvSpPr>
+          <p:cNvPr id="5" name="Quote"/>
+          <p:cNvSpPr txBox="1"/>
+          <p:nvPr/>
+        </p:nvSpPr>
+        <p:spPr>
+          <a:xfrm>
+            <a:off x="1371600" y="1325880"/>
+            <a:ext cx="4297680" cy="1188720"/>
           </a:xfrm>
           <a:prstGeom prst="rect">
             <a:avLst/>
@@ -3151,33 +3285,45 @@
           <a:bodyPr wrap="square" lIns="0" tIns="0" rIns="0" bIns="0" rtlCol="0" anchor="ctr"/>
           <a:lstStyle/>
           <a:p>
-            <a:pPr algn="ctr" indent="0" marL="0">
-              <a:buNone/>
-            </a:pPr>
-            <a:r>
-              <a:rPr lang="en-US" sz="3600" b="1" dirty="0">
+            <a:pPr indent="0" marL="0">
+              <a:buNone/>
+            </a:pPr>
+            <a:r>
+              <a:rPr lang="en-US" sz="1800" b="1" dirty="0">
                 <a:solidFill>
                   <a:schemeClr val="tx1"/>
                 </a:solidFill>
               </a:rPr>
-              <a:t>Bin Etiquette: ROBOTSS</a:t>
-            </a:r>
-            <a:endParaRPr lang="en-US" sz="3600" dirty="0"/>
-          </a:p>
-        </p:txBody>
-      </p:sp>
-      <p:sp>
-        <p:nvSpPr>
-          <p:cNvPr id="4" name="Text 1"/>
-          <p:cNvSpPr/>
-          <p:nvPr>
-            <p:ph idx="104" type="body" hasCustomPrompt="1"/>
-          </p:nvPr>
-        </p:nvSpPr>
-        <p:spPr>
-          <a:xfrm>
-            <a:off x="2971800" y="1783080"/>
-            <a:ext cx="5486400" cy="685800"/>
+              <a:t>Leave every bin better than you found it.</a:t>
+            </a:r>
+            <a:endParaRPr lang="en-US" sz="1800" dirty="0"/>
+          </a:p>
+          <a:p>
+            <a:pPr indent="0" marL="0">
+              <a:buNone/>
+            </a:pPr>
+            <a:r>
+              <a:rPr lang="en-US" sz="1400" dirty="0">
+                <a:solidFill>
+                  <a:schemeClr val="accent4"/>
+                </a:solidFill>
+              </a:rPr>
+              <a:t>Whenever your hands are in a bin, fix its etiquette.</a:t>
+            </a:r>
+            <a:endParaRPr lang="en-US" sz="1800" dirty="0"/>
+          </a:p>
+        </p:txBody>
+      </p:sp>
+      <p:sp>
+        <p:nvSpPr>
+          <p:cNvPr id="6" name="Stat 1"/>
+          <p:cNvSpPr txBox="1"/>
+          <p:nvPr/>
+        </p:nvSpPr>
+        <p:spPr>
+          <a:xfrm>
+            <a:off x="457200" y="2743200"/>
+            <a:ext cx="2606040" cy="1463040"/>
           </a:xfrm>
           <a:prstGeom prst="rect">
             <a:avLst/>
@@ -3189,18 +3335,118 @@
           <a:bodyPr wrap="square" lIns="0" tIns="0" rIns="0" bIns="0" rtlCol="0" anchor="t"/>
           <a:lstStyle/>
           <a:p>
-            <a:pPr algn="ctr" indent="0" marL="0">
-              <a:buNone/>
-            </a:pPr>
-            <a:r>
-              <a:rPr lang="en-US" sz="1600" dirty="0">
+            <a:pPr indent="0" marL="0">
+              <a:buNone/>
+            </a:pPr>
+            <a:r>
+              <a:rPr lang="en-US" sz="5400" b="1" dirty="0">
+                <a:solidFill>
+                  <a:schemeClr val="accent1"/>
+                </a:solidFill>
+              </a:rPr>
+              <a:t>15</a:t>
+            </a:r>
+            <a:endParaRPr lang="en-US" sz="5400" dirty="0"/>
+          </a:p>
+          <a:p>
+            <a:pPr indent="0" marL="0">
+              <a:buNone/>
+            </a:pPr>
+            <a:r>
+              <a:rPr lang="en-US" sz="1500" dirty="0">
                 <a:solidFill>
                   <a:schemeClr val="accent4"/>
                 </a:solidFill>
               </a:rPr>
-              <a:t>Seven rules for every bin you touch, in Stow, Pick and ICQA.</a:t>
-            </a:r>
-            <a:endParaRPr lang="en-US" sz="1600" dirty="0"/>
+              <a:t>FFF audits per shift</a:t>
+            </a:r>
+            <a:endParaRPr lang="en-US" sz="5400" dirty="0"/>
+          </a:p>
+        </p:txBody>
+      </p:sp>
+      <p:sp>
+        <p:nvSpPr>
+          <p:cNvPr id="7" name="Stat 2"/>
+          <p:cNvSpPr txBox="1"/>
+          <p:nvPr/>
+        </p:nvSpPr>
+        <p:spPr>
+          <a:xfrm>
+            <a:off x="3246120" y="2743200"/>
+            <a:ext cx="2606040" cy="1463040"/>
+          </a:xfrm>
+          <a:prstGeom prst="rect">
+            <a:avLst/>
+          </a:prstGeom>
+          <a:noFill/>
+          <a:ln/>
+        </p:spPr>
+        <p:txBody>
+          <a:bodyPr wrap="square" lIns="0" tIns="0" rIns="0" bIns="0" rtlCol="0" anchor="t"/>
+          <a:lstStyle/>
+          <a:p>
+            <a:pPr indent="0" marL="0">
+              <a:buNone/>
+            </a:pPr>
+            <a:r>
+              <a:rPr lang="en-US" sz="5400" b="1" dirty="0">
+                <a:solidFill>
+                  <a:schemeClr val="accent1"/>
+                </a:solidFill>
+              </a:rPr>
+              <a:t>90%+</a:t>
+            </a:r>
+            <a:endParaRPr lang="en-US" sz="5400" dirty="0"/>
+          </a:p>
+          <a:p>
+            <a:pPr indent="0" marL="0">
+              <a:buNone/>
+            </a:pPr>
+            <a:r>
+              <a:rPr lang="en-US" sz="1500" dirty="0">
+                <a:solidFill>
+                  <a:schemeClr val="accent4"/>
+                </a:solidFill>
+              </a:rPr>
+              <a:t>daily compliance target</a:t>
+            </a:r>
+            <a:endParaRPr lang="en-US" sz="5400" dirty="0"/>
+          </a:p>
+        </p:txBody>
+      </p:sp>
+      <p:sp>
+        <p:nvSpPr>
+          <p:cNvPr id="8" name="Caption"/>
+          <p:cNvSpPr txBox="1"/>
+          <p:nvPr/>
+        </p:nvSpPr>
+        <p:spPr>
+          <a:xfrm>
+            <a:off x="457200" y="4343400"/>
+            <a:ext cx="5394960" cy="320040"/>
+          </a:xfrm>
+          <a:prstGeom prst="rect">
+            <a:avLst/>
+          </a:prstGeom>
+          <a:noFill/>
+          <a:ln/>
+        </p:spPr>
+        <p:txBody>
+          <a:bodyPr wrap="square" lIns="0" tIns="0" rIns="0" bIns="0" rtlCol="0" anchor="ctr"/>
+          <a:lstStyle/>
+          <a:p>
+            <a:pPr indent="0" marL="0">
+              <a:buNone/>
+            </a:pPr>
+            <a:r>
+              <a:rPr lang="en-US" sz="1200" dirty="0">
+                <a:solidFill>
+                  <a:srgbClr val="7A8795"/>
+                </a:solidFill>
+              </a:rPr>
+              <a:t>Audited by ICQA, Ops and L&amp;D, with feedback on the spot</a:t>
+            </a:r>
+            <a:endParaRPr lang="en-US" sz="1200" dirty="0"/>
           </a:p>
         </p:txBody>
       </p:sp>
@@ -3231,16 +3477,54 @@
       </p:grpSpPr>
       <p:sp>
         <p:nvSpPr>
-          <p:cNvPr id="2" name="Text 0"/>
+          <p:cNvPr id="2" name="Text 1"/>
           <p:cNvSpPr/>
           <p:nvPr>
-            <p:ph idx="101" type="title" hasCustomPrompt="1"/>
+            <p:ph idx="102" type="body" hasCustomPrompt="1"/>
           </p:nvPr>
         </p:nvSpPr>
         <p:spPr>
           <a:xfrm>
-            <a:off x="457200" y="640080"/>
-            <a:ext cx="5394960" cy="548640"/>
+            <a:off x="2514600" y="502920"/>
+            <a:ext cx="6400800" cy="320040"/>
+          </a:xfrm>
+          <a:prstGeom prst="rect">
+            <a:avLst/>
+          </a:prstGeom>
+          <a:noFill/>
+          <a:ln/>
+        </p:spPr>
+        <p:txBody>
+          <a:bodyPr wrap="square" lIns="0" tIns="0" rIns="0" bIns="0" rtlCol="0"/>
+          <a:lstStyle/>
+          <a:p>
+            <a:pPr algn="ctr" indent="0" marL="0">
+              <a:buNone/>
+            </a:pPr>
+            <a:r>
+              <a:rPr lang="en-US" sz="1300" b="1" spc="300" kern="0" dirty="0">
+                <a:solidFill>
+                  <a:schemeClr val="accent6"/>
+                </a:solidFill>
+              </a:rPr>
+              <a:t>PART 2</a:t>
+            </a:r>
+            <a:endParaRPr lang="en-US" sz="1300" dirty="0"/>
+          </a:p>
+        </p:txBody>
+      </p:sp>
+      <p:sp>
+        <p:nvSpPr>
+          <p:cNvPr id="3" name="Text 1"/>
+          <p:cNvSpPr/>
+          <p:nvPr>
+            <p:ph idx="103" type="title" hasCustomPrompt="1"/>
+          </p:nvPr>
+        </p:nvSpPr>
+        <p:spPr>
+          <a:xfrm>
+            <a:off x="2514600" y="868680"/>
+            <a:ext cx="6400800" cy="868680"/>
           </a:xfrm>
           <a:prstGeom prst="rect">
             <a:avLst/>
@@ -3252,766 +3536,56 @@
           <a:bodyPr wrap="square" lIns="0" tIns="0" rIns="0" bIns="0" rtlCol="0" anchor="ctr"/>
           <a:lstStyle/>
           <a:p>
-            <a:pPr algn="l" indent="0" marL="0">
-              <a:buNone/>
-            </a:pPr>
-            <a:r>
-              <a:rPr lang="en-US" sz="2800" b="1" dirty="0">
+            <a:pPr algn="ctr" indent="0" marL="0">
+              <a:buNone/>
+            </a:pPr>
+            <a:r>
+              <a:rPr lang="en-US" sz="3600" b="1" dirty="0">
                 <a:solidFill>
                   <a:schemeClr val="tx1"/>
                 </a:solidFill>
               </a:rPr>
-              <a:t>Seven rules, one word</a:t>
-            </a:r>
-            <a:endParaRPr lang="en-US" sz="2800" dirty="0"/>
-          </a:p>
-        </p:txBody>
-      </p:sp>
-      <p:sp>
-        <p:nvSpPr>
-          <p:cNvPr id="3" name="Tile 1"/>
+              <a:t>Bin Etiquette: ROBOTSS</a:t>
+            </a:r>
+            <a:endParaRPr lang="en-US" sz="3600" dirty="0"/>
+          </a:p>
+        </p:txBody>
+      </p:sp>
+      <p:sp>
+        <p:nvSpPr>
+          <p:cNvPr id="4" name="Text 1"/>
           <p:cNvSpPr/>
-          <p:nvPr/>
-        </p:nvSpPr>
-        <p:spPr>
-          <a:xfrm>
-            <a:off x="457200" y="1417320"/>
-            <a:ext cx="676656" cy="868680"/>
-          </a:xfrm>
-          <a:prstGeom prst="roundRect">
-            <a:avLst>
-              <a:gd name="adj" fmla="val 13514"/>
-            </a:avLst>
-          </a:prstGeom>
-          <a:solidFill>
-            <a:schemeClr val="tx2"/>
-          </a:solidFill>
-          <a:ln/>
-        </p:spPr>
-      </p:sp>
-      <p:sp>
-        <p:nvSpPr>
-          <p:cNvPr id="4" name="Letter 1"/>
-          <p:cNvSpPr txBox="1"/>
-          <p:nvPr/>
-        </p:nvSpPr>
-        <p:spPr>
-          <a:xfrm>
-            <a:off x="457200" y="1417320"/>
-            <a:ext cx="676656" cy="868680"/>
-          </a:xfrm>
-          <a:prstGeom prst="rect">
-            <a:avLst/>
-          </a:prstGeom>
-          <a:noFill/>
-          <a:ln/>
-        </p:spPr>
-        <p:txBody>
-          <a:bodyPr wrap="square" lIns="0" tIns="0" rIns="0" bIns="0" rtlCol="0" anchor="ctr"/>
+          <p:nvPr>
+            <p:ph idx="104" type="body" hasCustomPrompt="1"/>
+          </p:nvPr>
+        </p:nvSpPr>
+        <p:spPr>
+          <a:xfrm>
+            <a:off x="2971800" y="1783080"/>
+            <a:ext cx="5486400" cy="685800"/>
+          </a:xfrm>
+          <a:prstGeom prst="rect">
+            <a:avLst/>
+          </a:prstGeom>
+          <a:noFill/>
+          <a:ln/>
+        </p:spPr>
+        <p:txBody>
+          <a:bodyPr wrap="square" lIns="0" tIns="0" rIns="0" bIns="0" rtlCol="0" anchor="t"/>
           <a:lstStyle/>
           <a:p>
             <a:pPr algn="ctr" indent="0" marL="0">
               <a:buNone/>
             </a:pPr>
             <a:r>
-              <a:rPr lang="en-US" sz="3600" b="1" dirty="0">
-                <a:solidFill>
-                  <a:schemeClr val="accent1"/>
-                </a:solidFill>
-                <a:latin typeface="Arial" pitchFamily="34" charset="0"/>
-                <a:ea typeface="Arial" pitchFamily="34" charset="-122"/>
-                <a:cs typeface="Arial" pitchFamily="34" charset="-120"/>
-              </a:rPr>
-              <a:t>R</a:t>
-            </a:r>
-            <a:endParaRPr lang="en-US" sz="3600" dirty="0"/>
-          </a:p>
-        </p:txBody>
-      </p:sp>
-      <p:sp>
-        <p:nvSpPr>
-          <p:cNvPr id="5" name="Label 1"/>
-          <p:cNvSpPr txBox="1"/>
-          <p:nvPr/>
-        </p:nvSpPr>
-        <p:spPr>
-          <a:xfrm>
-            <a:off x="420624" y="2377440"/>
-            <a:ext cx="749808" cy="594360"/>
-          </a:xfrm>
-          <a:prstGeom prst="rect">
-            <a:avLst/>
-          </a:prstGeom>
-          <a:noFill/>
-          <a:ln/>
-        </p:spPr>
-        <p:txBody>
-          <a:bodyPr wrap="square" lIns="0" tIns="0" rIns="0" bIns="0" rtlCol="0" anchor="t"/>
-          <a:lstStyle/>
-          <a:p>
-            <a:pPr algn="ctr" indent="0" marL="0">
-              <a:buNone/>
-            </a:pPr>
-            <a:r>
-              <a:rPr lang="en-US" sz="1200" dirty="0">
-                <a:solidFill>
-                  <a:schemeClr val="tx1"/>
-                </a:solidFill>
-              </a:rPr>
-              <a:t>Right bin size</a:t>
-            </a:r>
-            <a:endParaRPr lang="en-US" sz="1200" dirty="0"/>
-          </a:p>
-        </p:txBody>
-      </p:sp>
-      <p:sp>
-        <p:nvSpPr>
-          <p:cNvPr id="6" name="Tile 2"/>
-          <p:cNvSpPr/>
-          <p:nvPr/>
-        </p:nvSpPr>
-        <p:spPr>
-          <a:xfrm>
-            <a:off x="1243584" y="1417320"/>
-            <a:ext cx="676656" cy="868680"/>
-          </a:xfrm>
-          <a:prstGeom prst="roundRect">
-            <a:avLst>
-              <a:gd name="adj" fmla="val 13514"/>
-            </a:avLst>
-          </a:prstGeom>
-          <a:solidFill>
-            <a:schemeClr val="tx2"/>
-          </a:solidFill>
-          <a:ln/>
-        </p:spPr>
-      </p:sp>
-      <p:sp>
-        <p:nvSpPr>
-          <p:cNvPr id="7" name="Letter 2"/>
-          <p:cNvSpPr txBox="1"/>
-          <p:nvPr/>
-        </p:nvSpPr>
-        <p:spPr>
-          <a:xfrm>
-            <a:off x="1243584" y="1417320"/>
-            <a:ext cx="676656" cy="868680"/>
-          </a:xfrm>
-          <a:prstGeom prst="rect">
-            <a:avLst/>
-          </a:prstGeom>
-          <a:noFill/>
-          <a:ln/>
-        </p:spPr>
-        <p:txBody>
-          <a:bodyPr wrap="square" lIns="0" tIns="0" rIns="0" bIns="0" rtlCol="0" anchor="ctr"/>
-          <a:lstStyle/>
-          <a:p>
-            <a:pPr algn="ctr" indent="0" marL="0">
-              <a:buNone/>
-            </a:pPr>
-            <a:r>
-              <a:rPr lang="en-US" sz="3600" b="1" dirty="0">
-                <a:solidFill>
-                  <a:schemeClr val="accent1"/>
-                </a:solidFill>
-                <a:latin typeface="Arial" pitchFamily="34" charset="0"/>
-                <a:ea typeface="Arial" pitchFamily="34" charset="-122"/>
-                <a:cs typeface="Arial" pitchFamily="34" charset="-120"/>
-              </a:rPr>
-              <a:t>O</a:t>
-            </a:r>
-            <a:endParaRPr lang="en-US" sz="3600" dirty="0"/>
-          </a:p>
-        </p:txBody>
-      </p:sp>
-      <p:sp>
-        <p:nvSpPr>
-          <p:cNvPr id="8" name="Label 2"/>
-          <p:cNvSpPr txBox="1"/>
-          <p:nvPr/>
-        </p:nvSpPr>
-        <p:spPr>
-          <a:xfrm>
-            <a:off x="1207008" y="2377440"/>
-            <a:ext cx="749808" cy="594360"/>
-          </a:xfrm>
-          <a:prstGeom prst="rect">
-            <a:avLst/>
-          </a:prstGeom>
-          <a:noFill/>
-          <a:ln/>
-        </p:spPr>
-        <p:txBody>
-          <a:bodyPr wrap="square" lIns="0" tIns="0" rIns="0" bIns="0" rtlCol="0" anchor="t"/>
-          <a:lstStyle/>
-          <a:p>
-            <a:pPr algn="ctr" indent="0" marL="0">
-              <a:buNone/>
-            </a:pPr>
-            <a:r>
-              <a:rPr lang="en-US" sz="1200" dirty="0">
-                <a:solidFill>
-                  <a:schemeClr val="tx1"/>
-                </a:solidFill>
-              </a:rPr>
-              <a:t>No overhang</a:t>
-            </a:r>
-            <a:endParaRPr lang="en-US" sz="1200" dirty="0"/>
-          </a:p>
-        </p:txBody>
-      </p:sp>
-      <p:sp>
-        <p:nvSpPr>
-          <p:cNvPr id="9" name="Tile 3"/>
-          <p:cNvSpPr/>
-          <p:nvPr/>
-        </p:nvSpPr>
-        <p:spPr>
-          <a:xfrm>
-            <a:off x="2029968" y="1417320"/>
-            <a:ext cx="676656" cy="868680"/>
-          </a:xfrm>
-          <a:prstGeom prst="roundRect">
-            <a:avLst>
-              <a:gd name="adj" fmla="val 13514"/>
-            </a:avLst>
-          </a:prstGeom>
-          <a:solidFill>
-            <a:schemeClr val="tx2"/>
-          </a:solidFill>
-          <a:ln/>
-        </p:spPr>
-      </p:sp>
-      <p:sp>
-        <p:nvSpPr>
-          <p:cNvPr id="10" name="Letter 3"/>
-          <p:cNvSpPr txBox="1"/>
-          <p:nvPr/>
-        </p:nvSpPr>
-        <p:spPr>
-          <a:xfrm>
-            <a:off x="2029968" y="1417320"/>
-            <a:ext cx="676656" cy="868680"/>
-          </a:xfrm>
-          <a:prstGeom prst="rect">
-            <a:avLst/>
-          </a:prstGeom>
-          <a:noFill/>
-          <a:ln/>
-        </p:spPr>
-        <p:txBody>
-          <a:bodyPr wrap="square" lIns="0" tIns="0" rIns="0" bIns="0" rtlCol="0" anchor="ctr"/>
-          <a:lstStyle/>
-          <a:p>
-            <a:pPr algn="ctr" indent="0" marL="0">
-              <a:buNone/>
-            </a:pPr>
-            <a:r>
-              <a:rPr lang="en-US" sz="3600" b="1" dirty="0">
-                <a:solidFill>
-                  <a:schemeClr val="accent1"/>
-                </a:solidFill>
-                <a:latin typeface="Arial" pitchFamily="34" charset="0"/>
-                <a:ea typeface="Arial" pitchFamily="34" charset="-122"/>
-                <a:cs typeface="Arial" pitchFamily="34" charset="-120"/>
-              </a:rPr>
-              <a:t>B</a:t>
-            </a:r>
-            <a:endParaRPr lang="en-US" sz="3600" dirty="0"/>
-          </a:p>
-        </p:txBody>
-      </p:sp>
-      <p:sp>
-        <p:nvSpPr>
-          <p:cNvPr id="11" name="Label 3"/>
-          <p:cNvSpPr txBox="1"/>
-          <p:nvPr/>
-        </p:nvSpPr>
-        <p:spPr>
-          <a:xfrm>
-            <a:off x="1993392" y="2377440"/>
-            <a:ext cx="749808" cy="594360"/>
-          </a:xfrm>
-          <a:prstGeom prst="rect">
-            <a:avLst/>
-          </a:prstGeom>
-          <a:noFill/>
-          <a:ln/>
-        </p:spPr>
-        <p:txBody>
-          <a:bodyPr wrap="square" lIns="0" tIns="0" rIns="0" bIns="0" rtlCol="0" anchor="t"/>
-          <a:lstStyle/>
-          <a:p>
-            <a:pPr algn="ctr" indent="0" marL="0">
-              <a:buNone/>
-            </a:pPr>
-            <a:r>
-              <a:rPr lang="en-US" sz="1200" dirty="0">
-                <a:solidFill>
-                  <a:schemeClr val="tx1"/>
-                </a:solidFill>
-              </a:rPr>
-              <a:t>Blocking</a:t>
-            </a:r>
-            <a:endParaRPr lang="en-US" sz="1200" dirty="0"/>
-          </a:p>
-        </p:txBody>
-      </p:sp>
-      <p:sp>
-        <p:nvSpPr>
-          <p:cNvPr id="12" name="Tile 4"/>
-          <p:cNvSpPr/>
-          <p:nvPr/>
-        </p:nvSpPr>
-        <p:spPr>
-          <a:xfrm>
-            <a:off x="2816352" y="1417320"/>
-            <a:ext cx="676656" cy="868680"/>
-          </a:xfrm>
-          <a:prstGeom prst="roundRect">
-            <a:avLst>
-              <a:gd name="adj" fmla="val 13514"/>
-            </a:avLst>
-          </a:prstGeom>
-          <a:solidFill>
-            <a:schemeClr val="tx2"/>
-          </a:solidFill>
-          <a:ln/>
-        </p:spPr>
-      </p:sp>
-      <p:sp>
-        <p:nvSpPr>
-          <p:cNvPr id="13" name="Letter 4"/>
-          <p:cNvSpPr txBox="1"/>
-          <p:nvPr/>
-        </p:nvSpPr>
-        <p:spPr>
-          <a:xfrm>
-            <a:off x="2816352" y="1417320"/>
-            <a:ext cx="676656" cy="868680"/>
-          </a:xfrm>
-          <a:prstGeom prst="rect">
-            <a:avLst/>
-          </a:prstGeom>
-          <a:noFill/>
-          <a:ln/>
-        </p:spPr>
-        <p:txBody>
-          <a:bodyPr wrap="square" lIns="0" tIns="0" rIns="0" bIns="0" rtlCol="0" anchor="ctr"/>
-          <a:lstStyle/>
-          <a:p>
-            <a:pPr algn="ctr" indent="0" marL="0">
-              <a:buNone/>
-            </a:pPr>
-            <a:r>
-              <a:rPr lang="en-US" sz="3600" b="1" dirty="0">
-                <a:solidFill>
-                  <a:schemeClr val="accent1"/>
-                </a:solidFill>
-                <a:latin typeface="Arial" pitchFamily="34" charset="0"/>
-                <a:ea typeface="Arial" pitchFamily="34" charset="-122"/>
-                <a:cs typeface="Arial" pitchFamily="34" charset="-120"/>
-              </a:rPr>
-              <a:t>O</a:t>
-            </a:r>
-            <a:endParaRPr lang="en-US" sz="3600" dirty="0"/>
-          </a:p>
-        </p:txBody>
-      </p:sp>
-      <p:sp>
-        <p:nvSpPr>
-          <p:cNvPr id="14" name="Label 4"/>
-          <p:cNvSpPr txBox="1"/>
-          <p:nvPr/>
-        </p:nvSpPr>
-        <p:spPr>
-          <a:xfrm>
-            <a:off x="2779776" y="2377440"/>
-            <a:ext cx="749808" cy="594360"/>
-          </a:xfrm>
-          <a:prstGeom prst="rect">
-            <a:avLst/>
-          </a:prstGeom>
-          <a:noFill/>
-          <a:ln/>
-        </p:spPr>
-        <p:txBody>
-          <a:bodyPr wrap="square" lIns="0" tIns="0" rIns="0" bIns="0" rtlCol="0" anchor="t"/>
-          <a:lstStyle/>
-          <a:p>
-            <a:pPr algn="ctr" indent="0" marL="0">
-              <a:buNone/>
-            </a:pPr>
-            <a:r>
-              <a:rPr lang="en-US" sz="1200" dirty="0">
-                <a:solidFill>
-                  <a:schemeClr val="tx1"/>
-                </a:solidFill>
-              </a:rPr>
-              <a:t>Over-stuffing</a:t>
-            </a:r>
-            <a:endParaRPr lang="en-US" sz="1200" dirty="0"/>
-          </a:p>
-        </p:txBody>
-      </p:sp>
-      <p:sp>
-        <p:nvSpPr>
-          <p:cNvPr id="15" name="Tile 5"/>
-          <p:cNvSpPr/>
-          <p:nvPr/>
-        </p:nvSpPr>
-        <p:spPr>
-          <a:xfrm>
-            <a:off x="3602736" y="1417320"/>
-            <a:ext cx="676656" cy="868680"/>
-          </a:xfrm>
-          <a:prstGeom prst="roundRect">
-            <a:avLst>
-              <a:gd name="adj" fmla="val 13514"/>
-            </a:avLst>
-          </a:prstGeom>
-          <a:solidFill>
-            <a:schemeClr val="tx2"/>
-          </a:solidFill>
-          <a:ln/>
-        </p:spPr>
-      </p:sp>
-      <p:sp>
-        <p:nvSpPr>
-          <p:cNvPr id="16" name="Letter 5"/>
-          <p:cNvSpPr txBox="1"/>
-          <p:nvPr/>
-        </p:nvSpPr>
-        <p:spPr>
-          <a:xfrm>
-            <a:off x="3602736" y="1417320"/>
-            <a:ext cx="676656" cy="868680"/>
-          </a:xfrm>
-          <a:prstGeom prst="rect">
-            <a:avLst/>
-          </a:prstGeom>
-          <a:noFill/>
-          <a:ln/>
-        </p:spPr>
-        <p:txBody>
-          <a:bodyPr wrap="square" lIns="0" tIns="0" rIns="0" bIns="0" rtlCol="0" anchor="ctr"/>
-          <a:lstStyle/>
-          <a:p>
-            <a:pPr algn="ctr" indent="0" marL="0">
-              <a:buNone/>
-            </a:pPr>
-            <a:r>
-              <a:rPr lang="en-US" sz="3600" b="1" dirty="0">
-                <a:solidFill>
-                  <a:schemeClr val="accent1"/>
-                </a:solidFill>
-                <a:latin typeface="Arial" pitchFamily="34" charset="0"/>
-                <a:ea typeface="Arial" pitchFamily="34" charset="-122"/>
-                <a:cs typeface="Arial" pitchFamily="34" charset="-120"/>
-              </a:rPr>
-              <a:t>T</a:t>
-            </a:r>
-            <a:endParaRPr lang="en-US" sz="3600" dirty="0"/>
-          </a:p>
-        </p:txBody>
-      </p:sp>
-      <p:sp>
-        <p:nvSpPr>
-          <p:cNvPr id="17" name="Label 5"/>
-          <p:cNvSpPr txBox="1"/>
-          <p:nvPr/>
-        </p:nvSpPr>
-        <p:spPr>
-          <a:xfrm>
-            <a:off x="3566160" y="2377440"/>
-            <a:ext cx="749808" cy="594360"/>
-          </a:xfrm>
-          <a:prstGeom prst="rect">
-            <a:avLst/>
-          </a:prstGeom>
-          <a:noFill/>
-          <a:ln/>
-        </p:spPr>
-        <p:txBody>
-          <a:bodyPr wrap="square" lIns="0" tIns="0" rIns="0" bIns="0" rtlCol="0" anchor="t"/>
-          <a:lstStyle/>
-          <a:p>
-            <a:pPr algn="ctr" indent="0" marL="0">
-              <a:buNone/>
-            </a:pPr>
-            <a:r>
-              <a:rPr lang="en-US" sz="1200" dirty="0">
-                <a:solidFill>
-                  <a:schemeClr val="tx1"/>
-                </a:solidFill>
-              </a:rPr>
-              <a:t>Titles out</a:t>
-            </a:r>
-            <a:endParaRPr lang="en-US" sz="1200" dirty="0"/>
-          </a:p>
-        </p:txBody>
-      </p:sp>
-      <p:sp>
-        <p:nvSpPr>
-          <p:cNvPr id="18" name="Tile 6"/>
-          <p:cNvSpPr/>
-          <p:nvPr/>
-        </p:nvSpPr>
-        <p:spPr>
-          <a:xfrm>
-            <a:off x="4389120" y="1417320"/>
-            <a:ext cx="676656" cy="868680"/>
-          </a:xfrm>
-          <a:prstGeom prst="roundRect">
-            <a:avLst>
-              <a:gd name="adj" fmla="val 13514"/>
-            </a:avLst>
-          </a:prstGeom>
-          <a:solidFill>
-            <a:schemeClr val="tx2"/>
-          </a:solidFill>
-          <a:ln/>
-        </p:spPr>
-      </p:sp>
-      <p:sp>
-        <p:nvSpPr>
-          <p:cNvPr id="19" name="Letter 6"/>
-          <p:cNvSpPr txBox="1"/>
-          <p:nvPr/>
-        </p:nvSpPr>
-        <p:spPr>
-          <a:xfrm>
-            <a:off x="4389120" y="1417320"/>
-            <a:ext cx="676656" cy="868680"/>
-          </a:xfrm>
-          <a:prstGeom prst="rect">
-            <a:avLst/>
-          </a:prstGeom>
-          <a:noFill/>
-          <a:ln/>
-        </p:spPr>
-        <p:txBody>
-          <a:bodyPr wrap="square" lIns="0" tIns="0" rIns="0" bIns="0" rtlCol="0" anchor="ctr"/>
-          <a:lstStyle/>
-          <a:p>
-            <a:pPr algn="ctr" indent="0" marL="0">
-              <a:buNone/>
-            </a:pPr>
-            <a:r>
-              <a:rPr lang="en-US" sz="3600" b="1" dirty="0">
-                <a:solidFill>
-                  <a:schemeClr val="accent1"/>
-                </a:solidFill>
-                <a:latin typeface="Arial" pitchFamily="34" charset="0"/>
-                <a:ea typeface="Arial" pitchFamily="34" charset="-122"/>
-                <a:cs typeface="Arial" pitchFamily="34" charset="-120"/>
-              </a:rPr>
-              <a:t>S</a:t>
-            </a:r>
-            <a:endParaRPr lang="en-US" sz="3600" dirty="0"/>
-          </a:p>
-        </p:txBody>
-      </p:sp>
-      <p:sp>
-        <p:nvSpPr>
-          <p:cNvPr id="20" name="Label 6"/>
-          <p:cNvSpPr txBox="1"/>
-          <p:nvPr/>
-        </p:nvSpPr>
-        <p:spPr>
-          <a:xfrm>
-            <a:off x="4352544" y="2377440"/>
-            <a:ext cx="749808" cy="594360"/>
-          </a:xfrm>
-          <a:prstGeom prst="rect">
-            <a:avLst/>
-          </a:prstGeom>
-          <a:noFill/>
-          <a:ln/>
-        </p:spPr>
-        <p:txBody>
-          <a:bodyPr wrap="square" lIns="0" tIns="0" rIns="0" bIns="0" rtlCol="0" anchor="t"/>
-          <a:lstStyle/>
-          <a:p>
-            <a:pPr algn="ctr" indent="0" marL="0">
-              <a:buNone/>
-            </a:pPr>
-            <a:r>
-              <a:rPr lang="en-US" sz="1200" dirty="0">
-                <a:solidFill>
-                  <a:schemeClr val="tx1"/>
-                </a:solidFill>
-              </a:rPr>
-              <a:t>Stacking</a:t>
-            </a:r>
-            <a:endParaRPr lang="en-US" sz="1200" dirty="0"/>
-          </a:p>
-        </p:txBody>
-      </p:sp>
-      <p:sp>
-        <p:nvSpPr>
-          <p:cNvPr id="21" name="Tile 7"/>
-          <p:cNvSpPr/>
-          <p:nvPr/>
-        </p:nvSpPr>
-        <p:spPr>
-          <a:xfrm>
-            <a:off x="5175504" y="1417320"/>
-            <a:ext cx="676656" cy="868680"/>
-          </a:xfrm>
-          <a:prstGeom prst="roundRect">
-            <a:avLst>
-              <a:gd name="adj" fmla="val 13514"/>
-            </a:avLst>
-          </a:prstGeom>
-          <a:solidFill>
-            <a:schemeClr val="tx2"/>
-          </a:solidFill>
-          <a:ln/>
-        </p:spPr>
-      </p:sp>
-      <p:sp>
-        <p:nvSpPr>
-          <p:cNvPr id="22" name="Letter 7"/>
-          <p:cNvSpPr txBox="1"/>
-          <p:nvPr/>
-        </p:nvSpPr>
-        <p:spPr>
-          <a:xfrm>
-            <a:off x="5175504" y="1417320"/>
-            <a:ext cx="676656" cy="868680"/>
-          </a:xfrm>
-          <a:prstGeom prst="rect">
-            <a:avLst/>
-          </a:prstGeom>
-          <a:noFill/>
-          <a:ln/>
-        </p:spPr>
-        <p:txBody>
-          <a:bodyPr wrap="square" lIns="0" tIns="0" rIns="0" bIns="0" rtlCol="0" anchor="ctr"/>
-          <a:lstStyle/>
-          <a:p>
-            <a:pPr algn="ctr" indent="0" marL="0">
-              <a:buNone/>
-            </a:pPr>
-            <a:r>
-              <a:rPr lang="en-US" sz="3600" b="1" dirty="0">
-                <a:solidFill>
-                  <a:schemeClr val="accent1"/>
-                </a:solidFill>
-                <a:latin typeface="Arial" pitchFamily="34" charset="0"/>
-                <a:ea typeface="Arial" pitchFamily="34" charset="-122"/>
-                <a:cs typeface="Arial" pitchFamily="34" charset="-120"/>
-              </a:rPr>
-              <a:t>S</a:t>
-            </a:r>
-            <a:endParaRPr lang="en-US" sz="3600" dirty="0"/>
-          </a:p>
-        </p:txBody>
-      </p:sp>
-      <p:sp>
-        <p:nvSpPr>
-          <p:cNvPr id="23" name="Label 7"/>
-          <p:cNvSpPr txBox="1"/>
-          <p:nvPr/>
-        </p:nvSpPr>
-        <p:spPr>
-          <a:xfrm>
-            <a:off x="5138928" y="2377440"/>
-            <a:ext cx="749808" cy="594360"/>
-          </a:xfrm>
-          <a:prstGeom prst="rect">
-            <a:avLst/>
-          </a:prstGeom>
-          <a:noFill/>
-          <a:ln/>
-        </p:spPr>
-        <p:txBody>
-          <a:bodyPr wrap="square" lIns="0" tIns="0" rIns="0" bIns="0" rtlCol="0" anchor="t"/>
-          <a:lstStyle/>
-          <a:p>
-            <a:pPr algn="ctr" indent="0" marL="0">
-              <a:buNone/>
-            </a:pPr>
-            <a:r>
-              <a:rPr lang="en-US" sz="1200" dirty="0">
-                <a:solidFill>
-                  <a:schemeClr val="tx1"/>
-                </a:solidFill>
-              </a:rPr>
-              <a:t>Similar items</a:t>
-            </a:r>
-            <a:endParaRPr lang="en-US" sz="1200" dirty="0"/>
-          </a:p>
-        </p:txBody>
-      </p:sp>
-      <p:sp>
-        <p:nvSpPr>
-          <p:cNvPr id="24" name="Why card"/>
-          <p:cNvSpPr/>
-          <p:nvPr/>
-        </p:nvSpPr>
-        <p:spPr>
-          <a:xfrm>
-            <a:off x="457200" y="3429000"/>
-            <a:ext cx="5394960" cy="1097280"/>
-          </a:xfrm>
-          <a:prstGeom prst="roundRect">
-            <a:avLst>
-              <a:gd name="adj" fmla="val 8333"/>
-            </a:avLst>
-          </a:prstGeom>
-          <a:solidFill>
-            <a:schemeClr val="bg1"/>
-          </a:solidFill>
-          <a:ln/>
-        </p:spPr>
-      </p:sp>
-      <p:sp>
-        <p:nvSpPr>
-          <p:cNvPr id="25" name="Why text"/>
-          <p:cNvSpPr txBox="1"/>
-          <p:nvPr/>
-        </p:nvSpPr>
-        <p:spPr>
-          <a:xfrm>
-            <a:off x="731520" y="3429000"/>
-            <a:ext cx="4846320" cy="1097280"/>
-          </a:xfrm>
-          <a:prstGeom prst="rect">
-            <a:avLst/>
-          </a:prstGeom>
-          <a:noFill/>
-          <a:ln/>
-        </p:spPr>
-        <p:txBody>
-          <a:bodyPr wrap="square" lIns="0" tIns="0" rIns="0" bIns="0" rtlCol="0" anchor="ctr"/>
-          <a:lstStyle/>
-          <a:p>
-            <a:pPr indent="0" marL="0">
-              <a:buNone/>
-            </a:pPr>
-            <a:r>
-              <a:rPr lang="en-US" sz="1500" b="1" dirty="0">
-                <a:solidFill>
-                  <a:schemeClr val="tx1"/>
-                </a:solidFill>
-              </a:rPr>
-              <a:t>Why it matters: </a:t>
-            </a:r>
-            <a:pPr indent="0" marL="0">
-              <a:buNone/>
-            </a:pPr>
-            <a:r>
-              <a:rPr lang="en-US" sz="1500" dirty="0">
+              <a:rPr lang="en-US" sz="1600" dirty="0">
                 <a:solidFill>
                   <a:schemeClr val="accent4"/>
                 </a:solidFill>
               </a:rPr>
-              <a:t>pickers find items faster, bins hold more, and nothing falls out when the pod moves.</a:t>
-            </a:r>
-            <a:endParaRPr lang="en-US" sz="1500" dirty="0"/>
+              <a:t>Seven rules for every bin you touch, in Stow, Pick and ICQA.</a:t>
+            </a:r>
+            <a:endParaRPr lang="en-US" sz="1600" dirty="0"/>
           </a:p>
         </p:txBody>
       </p:sp>
@@ -4072,7 +3646,7 @@
                   <a:schemeClr val="tx1"/>
                 </a:solidFill>
               </a:rPr>
-              <a:t>R: Right bin size</a:t>
+              <a:t>Seven rules, one word</a:t>
             </a:r>
             <a:endParaRPr lang="en-US" sz="2800" dirty="0"/>
           </a:p>
@@ -4080,65 +3654,715 @@
       </p:sp>
       <p:sp>
         <p:nvSpPr>
-          <p:cNvPr id="3" name="Wrong panel"/>
+          <p:cNvPr id="3" name="Tile 1"/>
           <p:cNvSpPr/>
           <p:nvPr/>
         </p:nvSpPr>
         <p:spPr>
           <a:xfrm>
-            <a:off x="457200" y="1325880"/>
-            <a:ext cx="2606040" cy="2788920"/>
+            <a:off x="457200" y="1417320"/>
+            <a:ext cx="676656" cy="868680"/>
           </a:xfrm>
           <a:prstGeom prst="roundRect">
             <a:avLst>
-              <a:gd name="adj" fmla="val 3509"/>
+              <a:gd name="adj" fmla="val 13514"/>
+            </a:avLst>
+          </a:prstGeom>
+          <a:solidFill>
+            <a:schemeClr val="tx2"/>
+          </a:solidFill>
+          <a:ln/>
+        </p:spPr>
+      </p:sp>
+      <p:sp>
+        <p:nvSpPr>
+          <p:cNvPr id="4" name="Letter 1"/>
+          <p:cNvSpPr txBox="1"/>
+          <p:nvPr/>
+        </p:nvSpPr>
+        <p:spPr>
+          <a:xfrm>
+            <a:off x="457200" y="1417320"/>
+            <a:ext cx="676656" cy="868680"/>
+          </a:xfrm>
+          <a:prstGeom prst="rect">
+            <a:avLst/>
+          </a:prstGeom>
+          <a:noFill/>
+          <a:ln/>
+        </p:spPr>
+        <p:txBody>
+          <a:bodyPr wrap="square" lIns="0" tIns="0" rIns="0" bIns="0" rtlCol="0" anchor="ctr"/>
+          <a:lstStyle/>
+          <a:p>
+            <a:pPr algn="ctr" indent="0" marL="0">
+              <a:buNone/>
+            </a:pPr>
+            <a:r>
+              <a:rPr lang="en-US" sz="3600" b="1" dirty="0">
+                <a:solidFill>
+                  <a:schemeClr val="accent1"/>
+                </a:solidFill>
+                <a:latin typeface="Arial" pitchFamily="34" charset="0"/>
+                <a:ea typeface="Arial" pitchFamily="34" charset="-122"/>
+                <a:cs typeface="Arial" pitchFamily="34" charset="-120"/>
+              </a:rPr>
+              <a:t>R</a:t>
+            </a:r>
+            <a:endParaRPr lang="en-US" sz="3600" dirty="0"/>
+          </a:p>
+        </p:txBody>
+      </p:sp>
+      <p:sp>
+        <p:nvSpPr>
+          <p:cNvPr id="5" name="Label 1"/>
+          <p:cNvSpPr txBox="1"/>
+          <p:nvPr/>
+        </p:nvSpPr>
+        <p:spPr>
+          <a:xfrm>
+            <a:off x="420624" y="2377440"/>
+            <a:ext cx="749808" cy="594360"/>
+          </a:xfrm>
+          <a:prstGeom prst="rect">
+            <a:avLst/>
+          </a:prstGeom>
+          <a:noFill/>
+          <a:ln/>
+        </p:spPr>
+        <p:txBody>
+          <a:bodyPr wrap="square" lIns="0" tIns="0" rIns="0" bIns="0" rtlCol="0" anchor="t"/>
+          <a:lstStyle/>
+          <a:p>
+            <a:pPr algn="ctr" indent="0" marL="0">
+              <a:buNone/>
+            </a:pPr>
+            <a:r>
+              <a:rPr lang="en-US" sz="1200" dirty="0">
+                <a:solidFill>
+                  <a:schemeClr val="tx1"/>
+                </a:solidFill>
+              </a:rPr>
+              <a:t>Right bin size</a:t>
+            </a:r>
+            <a:endParaRPr lang="en-US" sz="1200" dirty="0"/>
+          </a:p>
+        </p:txBody>
+      </p:sp>
+      <p:sp>
+        <p:nvSpPr>
+          <p:cNvPr id="6" name="Tile 2"/>
+          <p:cNvSpPr/>
+          <p:nvPr/>
+        </p:nvSpPr>
+        <p:spPr>
+          <a:xfrm>
+            <a:off x="1243584" y="1417320"/>
+            <a:ext cx="676656" cy="868680"/>
+          </a:xfrm>
+          <a:prstGeom prst="roundRect">
+            <a:avLst>
+              <a:gd name="adj" fmla="val 13514"/>
+            </a:avLst>
+          </a:prstGeom>
+          <a:solidFill>
+            <a:schemeClr val="tx2"/>
+          </a:solidFill>
+          <a:ln/>
+        </p:spPr>
+      </p:sp>
+      <p:sp>
+        <p:nvSpPr>
+          <p:cNvPr id="7" name="Letter 2"/>
+          <p:cNvSpPr txBox="1"/>
+          <p:nvPr/>
+        </p:nvSpPr>
+        <p:spPr>
+          <a:xfrm>
+            <a:off x="1243584" y="1417320"/>
+            <a:ext cx="676656" cy="868680"/>
+          </a:xfrm>
+          <a:prstGeom prst="rect">
+            <a:avLst/>
+          </a:prstGeom>
+          <a:noFill/>
+          <a:ln/>
+        </p:spPr>
+        <p:txBody>
+          <a:bodyPr wrap="square" lIns="0" tIns="0" rIns="0" bIns="0" rtlCol="0" anchor="ctr"/>
+          <a:lstStyle/>
+          <a:p>
+            <a:pPr algn="ctr" indent="0" marL="0">
+              <a:buNone/>
+            </a:pPr>
+            <a:r>
+              <a:rPr lang="en-US" sz="3600" b="1" dirty="0">
+                <a:solidFill>
+                  <a:schemeClr val="accent1"/>
+                </a:solidFill>
+                <a:latin typeface="Arial" pitchFamily="34" charset="0"/>
+                <a:ea typeface="Arial" pitchFamily="34" charset="-122"/>
+                <a:cs typeface="Arial" pitchFamily="34" charset="-120"/>
+              </a:rPr>
+              <a:t>O</a:t>
+            </a:r>
+            <a:endParaRPr lang="en-US" sz="3600" dirty="0"/>
+          </a:p>
+        </p:txBody>
+      </p:sp>
+      <p:sp>
+        <p:nvSpPr>
+          <p:cNvPr id="8" name="Label 2"/>
+          <p:cNvSpPr txBox="1"/>
+          <p:nvPr/>
+        </p:nvSpPr>
+        <p:spPr>
+          <a:xfrm>
+            <a:off x="1207008" y="2377440"/>
+            <a:ext cx="749808" cy="594360"/>
+          </a:xfrm>
+          <a:prstGeom prst="rect">
+            <a:avLst/>
+          </a:prstGeom>
+          <a:noFill/>
+          <a:ln/>
+        </p:spPr>
+        <p:txBody>
+          <a:bodyPr wrap="square" lIns="0" tIns="0" rIns="0" bIns="0" rtlCol="0" anchor="t"/>
+          <a:lstStyle/>
+          <a:p>
+            <a:pPr algn="ctr" indent="0" marL="0">
+              <a:buNone/>
+            </a:pPr>
+            <a:r>
+              <a:rPr lang="en-US" sz="1200" dirty="0">
+                <a:solidFill>
+                  <a:schemeClr val="tx1"/>
+                </a:solidFill>
+              </a:rPr>
+              <a:t>No overhang</a:t>
+            </a:r>
+            <a:endParaRPr lang="en-US" sz="1200" dirty="0"/>
+          </a:p>
+        </p:txBody>
+      </p:sp>
+      <p:sp>
+        <p:nvSpPr>
+          <p:cNvPr id="9" name="Tile 3"/>
+          <p:cNvSpPr/>
+          <p:nvPr/>
+        </p:nvSpPr>
+        <p:spPr>
+          <a:xfrm>
+            <a:off x="2029968" y="1417320"/>
+            <a:ext cx="676656" cy="868680"/>
+          </a:xfrm>
+          <a:prstGeom prst="roundRect">
+            <a:avLst>
+              <a:gd name="adj" fmla="val 13514"/>
+            </a:avLst>
+          </a:prstGeom>
+          <a:solidFill>
+            <a:schemeClr val="tx2"/>
+          </a:solidFill>
+          <a:ln/>
+        </p:spPr>
+      </p:sp>
+      <p:sp>
+        <p:nvSpPr>
+          <p:cNvPr id="10" name="Letter 3"/>
+          <p:cNvSpPr txBox="1"/>
+          <p:nvPr/>
+        </p:nvSpPr>
+        <p:spPr>
+          <a:xfrm>
+            <a:off x="2029968" y="1417320"/>
+            <a:ext cx="676656" cy="868680"/>
+          </a:xfrm>
+          <a:prstGeom prst="rect">
+            <a:avLst/>
+          </a:prstGeom>
+          <a:noFill/>
+          <a:ln/>
+        </p:spPr>
+        <p:txBody>
+          <a:bodyPr wrap="square" lIns="0" tIns="0" rIns="0" bIns="0" rtlCol="0" anchor="ctr"/>
+          <a:lstStyle/>
+          <a:p>
+            <a:pPr algn="ctr" indent="0" marL="0">
+              <a:buNone/>
+            </a:pPr>
+            <a:r>
+              <a:rPr lang="en-US" sz="3600" b="1" dirty="0">
+                <a:solidFill>
+                  <a:schemeClr val="accent1"/>
+                </a:solidFill>
+                <a:latin typeface="Arial" pitchFamily="34" charset="0"/>
+                <a:ea typeface="Arial" pitchFamily="34" charset="-122"/>
+                <a:cs typeface="Arial" pitchFamily="34" charset="-120"/>
+              </a:rPr>
+              <a:t>B</a:t>
+            </a:r>
+            <a:endParaRPr lang="en-US" sz="3600" dirty="0"/>
+          </a:p>
+        </p:txBody>
+      </p:sp>
+      <p:sp>
+        <p:nvSpPr>
+          <p:cNvPr id="11" name="Label 3"/>
+          <p:cNvSpPr txBox="1"/>
+          <p:nvPr/>
+        </p:nvSpPr>
+        <p:spPr>
+          <a:xfrm>
+            <a:off x="1993392" y="2377440"/>
+            <a:ext cx="749808" cy="594360"/>
+          </a:xfrm>
+          <a:prstGeom prst="rect">
+            <a:avLst/>
+          </a:prstGeom>
+          <a:noFill/>
+          <a:ln/>
+        </p:spPr>
+        <p:txBody>
+          <a:bodyPr wrap="square" lIns="0" tIns="0" rIns="0" bIns="0" rtlCol="0" anchor="t"/>
+          <a:lstStyle/>
+          <a:p>
+            <a:pPr algn="ctr" indent="0" marL="0">
+              <a:buNone/>
+            </a:pPr>
+            <a:r>
+              <a:rPr lang="en-US" sz="1200" dirty="0">
+                <a:solidFill>
+                  <a:schemeClr val="tx1"/>
+                </a:solidFill>
+              </a:rPr>
+              <a:t>Blocking</a:t>
+            </a:r>
+            <a:endParaRPr lang="en-US" sz="1200" dirty="0"/>
+          </a:p>
+        </p:txBody>
+      </p:sp>
+      <p:sp>
+        <p:nvSpPr>
+          <p:cNvPr id="12" name="Tile 4"/>
+          <p:cNvSpPr/>
+          <p:nvPr/>
+        </p:nvSpPr>
+        <p:spPr>
+          <a:xfrm>
+            <a:off x="2816352" y="1417320"/>
+            <a:ext cx="676656" cy="868680"/>
+          </a:xfrm>
+          <a:prstGeom prst="roundRect">
+            <a:avLst>
+              <a:gd name="adj" fmla="val 13514"/>
+            </a:avLst>
+          </a:prstGeom>
+          <a:solidFill>
+            <a:schemeClr val="tx2"/>
+          </a:solidFill>
+          <a:ln/>
+        </p:spPr>
+      </p:sp>
+      <p:sp>
+        <p:nvSpPr>
+          <p:cNvPr id="13" name="Letter 4"/>
+          <p:cNvSpPr txBox="1"/>
+          <p:nvPr/>
+        </p:nvSpPr>
+        <p:spPr>
+          <a:xfrm>
+            <a:off x="2816352" y="1417320"/>
+            <a:ext cx="676656" cy="868680"/>
+          </a:xfrm>
+          <a:prstGeom prst="rect">
+            <a:avLst/>
+          </a:prstGeom>
+          <a:noFill/>
+          <a:ln/>
+        </p:spPr>
+        <p:txBody>
+          <a:bodyPr wrap="square" lIns="0" tIns="0" rIns="0" bIns="0" rtlCol="0" anchor="ctr"/>
+          <a:lstStyle/>
+          <a:p>
+            <a:pPr algn="ctr" indent="0" marL="0">
+              <a:buNone/>
+            </a:pPr>
+            <a:r>
+              <a:rPr lang="en-US" sz="3600" b="1" dirty="0">
+                <a:solidFill>
+                  <a:schemeClr val="accent1"/>
+                </a:solidFill>
+                <a:latin typeface="Arial" pitchFamily="34" charset="0"/>
+                <a:ea typeface="Arial" pitchFamily="34" charset="-122"/>
+                <a:cs typeface="Arial" pitchFamily="34" charset="-120"/>
+              </a:rPr>
+              <a:t>O</a:t>
+            </a:r>
+            <a:endParaRPr lang="en-US" sz="3600" dirty="0"/>
+          </a:p>
+        </p:txBody>
+      </p:sp>
+      <p:sp>
+        <p:nvSpPr>
+          <p:cNvPr id="14" name="Label 4"/>
+          <p:cNvSpPr txBox="1"/>
+          <p:nvPr/>
+        </p:nvSpPr>
+        <p:spPr>
+          <a:xfrm>
+            <a:off x="2779776" y="2377440"/>
+            <a:ext cx="749808" cy="594360"/>
+          </a:xfrm>
+          <a:prstGeom prst="rect">
+            <a:avLst/>
+          </a:prstGeom>
+          <a:noFill/>
+          <a:ln/>
+        </p:spPr>
+        <p:txBody>
+          <a:bodyPr wrap="square" lIns="0" tIns="0" rIns="0" bIns="0" rtlCol="0" anchor="t"/>
+          <a:lstStyle/>
+          <a:p>
+            <a:pPr algn="ctr" indent="0" marL="0">
+              <a:buNone/>
+            </a:pPr>
+            <a:r>
+              <a:rPr lang="en-US" sz="1200" dirty="0">
+                <a:solidFill>
+                  <a:schemeClr val="tx1"/>
+                </a:solidFill>
+              </a:rPr>
+              <a:t>Over-stuffing</a:t>
+            </a:r>
+            <a:endParaRPr lang="en-US" sz="1200" dirty="0"/>
+          </a:p>
+        </p:txBody>
+      </p:sp>
+      <p:sp>
+        <p:nvSpPr>
+          <p:cNvPr id="15" name="Tile 5"/>
+          <p:cNvSpPr/>
+          <p:nvPr/>
+        </p:nvSpPr>
+        <p:spPr>
+          <a:xfrm>
+            <a:off x="3602736" y="1417320"/>
+            <a:ext cx="676656" cy="868680"/>
+          </a:xfrm>
+          <a:prstGeom prst="roundRect">
+            <a:avLst>
+              <a:gd name="adj" fmla="val 13514"/>
+            </a:avLst>
+          </a:prstGeom>
+          <a:solidFill>
+            <a:schemeClr val="tx2"/>
+          </a:solidFill>
+          <a:ln/>
+        </p:spPr>
+      </p:sp>
+      <p:sp>
+        <p:nvSpPr>
+          <p:cNvPr id="16" name="Letter 5"/>
+          <p:cNvSpPr txBox="1"/>
+          <p:nvPr/>
+        </p:nvSpPr>
+        <p:spPr>
+          <a:xfrm>
+            <a:off x="3602736" y="1417320"/>
+            <a:ext cx="676656" cy="868680"/>
+          </a:xfrm>
+          <a:prstGeom prst="rect">
+            <a:avLst/>
+          </a:prstGeom>
+          <a:noFill/>
+          <a:ln/>
+        </p:spPr>
+        <p:txBody>
+          <a:bodyPr wrap="square" lIns="0" tIns="0" rIns="0" bIns="0" rtlCol="0" anchor="ctr"/>
+          <a:lstStyle/>
+          <a:p>
+            <a:pPr algn="ctr" indent="0" marL="0">
+              <a:buNone/>
+            </a:pPr>
+            <a:r>
+              <a:rPr lang="en-US" sz="3600" b="1" dirty="0">
+                <a:solidFill>
+                  <a:schemeClr val="accent1"/>
+                </a:solidFill>
+                <a:latin typeface="Arial" pitchFamily="34" charset="0"/>
+                <a:ea typeface="Arial" pitchFamily="34" charset="-122"/>
+                <a:cs typeface="Arial" pitchFamily="34" charset="-120"/>
+              </a:rPr>
+              <a:t>T</a:t>
+            </a:r>
+            <a:endParaRPr lang="en-US" sz="3600" dirty="0"/>
+          </a:p>
+        </p:txBody>
+      </p:sp>
+      <p:sp>
+        <p:nvSpPr>
+          <p:cNvPr id="17" name="Label 5"/>
+          <p:cNvSpPr txBox="1"/>
+          <p:nvPr/>
+        </p:nvSpPr>
+        <p:spPr>
+          <a:xfrm>
+            <a:off x="3566160" y="2377440"/>
+            <a:ext cx="749808" cy="594360"/>
+          </a:xfrm>
+          <a:prstGeom prst="rect">
+            <a:avLst/>
+          </a:prstGeom>
+          <a:noFill/>
+          <a:ln/>
+        </p:spPr>
+        <p:txBody>
+          <a:bodyPr wrap="square" lIns="0" tIns="0" rIns="0" bIns="0" rtlCol="0" anchor="t"/>
+          <a:lstStyle/>
+          <a:p>
+            <a:pPr algn="ctr" indent="0" marL="0">
+              <a:buNone/>
+            </a:pPr>
+            <a:r>
+              <a:rPr lang="en-US" sz="1200" dirty="0">
+                <a:solidFill>
+                  <a:schemeClr val="tx1"/>
+                </a:solidFill>
+              </a:rPr>
+              <a:t>Titles out</a:t>
+            </a:r>
+            <a:endParaRPr lang="en-US" sz="1200" dirty="0"/>
+          </a:p>
+        </p:txBody>
+      </p:sp>
+      <p:sp>
+        <p:nvSpPr>
+          <p:cNvPr id="18" name="Tile 6"/>
+          <p:cNvSpPr/>
+          <p:nvPr/>
+        </p:nvSpPr>
+        <p:spPr>
+          <a:xfrm>
+            <a:off x="4389120" y="1417320"/>
+            <a:ext cx="676656" cy="868680"/>
+          </a:xfrm>
+          <a:prstGeom prst="roundRect">
+            <a:avLst>
+              <a:gd name="adj" fmla="val 13514"/>
+            </a:avLst>
+          </a:prstGeom>
+          <a:solidFill>
+            <a:schemeClr val="tx2"/>
+          </a:solidFill>
+          <a:ln/>
+        </p:spPr>
+      </p:sp>
+      <p:sp>
+        <p:nvSpPr>
+          <p:cNvPr id="19" name="Letter 6"/>
+          <p:cNvSpPr txBox="1"/>
+          <p:nvPr/>
+        </p:nvSpPr>
+        <p:spPr>
+          <a:xfrm>
+            <a:off x="4389120" y="1417320"/>
+            <a:ext cx="676656" cy="868680"/>
+          </a:xfrm>
+          <a:prstGeom prst="rect">
+            <a:avLst/>
+          </a:prstGeom>
+          <a:noFill/>
+          <a:ln/>
+        </p:spPr>
+        <p:txBody>
+          <a:bodyPr wrap="square" lIns="0" tIns="0" rIns="0" bIns="0" rtlCol="0" anchor="ctr"/>
+          <a:lstStyle/>
+          <a:p>
+            <a:pPr algn="ctr" indent="0" marL="0">
+              <a:buNone/>
+            </a:pPr>
+            <a:r>
+              <a:rPr lang="en-US" sz="3600" b="1" dirty="0">
+                <a:solidFill>
+                  <a:schemeClr val="accent1"/>
+                </a:solidFill>
+                <a:latin typeface="Arial" pitchFamily="34" charset="0"/>
+                <a:ea typeface="Arial" pitchFamily="34" charset="-122"/>
+                <a:cs typeface="Arial" pitchFamily="34" charset="-120"/>
+              </a:rPr>
+              <a:t>S</a:t>
+            </a:r>
+            <a:endParaRPr lang="en-US" sz="3600" dirty="0"/>
+          </a:p>
+        </p:txBody>
+      </p:sp>
+      <p:sp>
+        <p:nvSpPr>
+          <p:cNvPr id="20" name="Label 6"/>
+          <p:cNvSpPr txBox="1"/>
+          <p:nvPr/>
+        </p:nvSpPr>
+        <p:spPr>
+          <a:xfrm>
+            <a:off x="4352544" y="2377440"/>
+            <a:ext cx="749808" cy="594360"/>
+          </a:xfrm>
+          <a:prstGeom prst="rect">
+            <a:avLst/>
+          </a:prstGeom>
+          <a:noFill/>
+          <a:ln/>
+        </p:spPr>
+        <p:txBody>
+          <a:bodyPr wrap="square" lIns="0" tIns="0" rIns="0" bIns="0" rtlCol="0" anchor="t"/>
+          <a:lstStyle/>
+          <a:p>
+            <a:pPr algn="ctr" indent="0" marL="0">
+              <a:buNone/>
+            </a:pPr>
+            <a:r>
+              <a:rPr lang="en-US" sz="1200" dirty="0">
+                <a:solidFill>
+                  <a:schemeClr val="tx1"/>
+                </a:solidFill>
+              </a:rPr>
+              <a:t>Stacking</a:t>
+            </a:r>
+            <a:endParaRPr lang="en-US" sz="1200" dirty="0"/>
+          </a:p>
+        </p:txBody>
+      </p:sp>
+      <p:sp>
+        <p:nvSpPr>
+          <p:cNvPr id="21" name="Tile 7"/>
+          <p:cNvSpPr/>
+          <p:nvPr/>
+        </p:nvSpPr>
+        <p:spPr>
+          <a:xfrm>
+            <a:off x="5175504" y="1417320"/>
+            <a:ext cx="676656" cy="868680"/>
+          </a:xfrm>
+          <a:prstGeom prst="roundRect">
+            <a:avLst>
+              <a:gd name="adj" fmla="val 13514"/>
+            </a:avLst>
+          </a:prstGeom>
+          <a:solidFill>
+            <a:schemeClr val="tx2"/>
+          </a:solidFill>
+          <a:ln/>
+        </p:spPr>
+      </p:sp>
+      <p:sp>
+        <p:nvSpPr>
+          <p:cNvPr id="22" name="Letter 7"/>
+          <p:cNvSpPr txBox="1"/>
+          <p:nvPr/>
+        </p:nvSpPr>
+        <p:spPr>
+          <a:xfrm>
+            <a:off x="5175504" y="1417320"/>
+            <a:ext cx="676656" cy="868680"/>
+          </a:xfrm>
+          <a:prstGeom prst="rect">
+            <a:avLst/>
+          </a:prstGeom>
+          <a:noFill/>
+          <a:ln/>
+        </p:spPr>
+        <p:txBody>
+          <a:bodyPr wrap="square" lIns="0" tIns="0" rIns="0" bIns="0" rtlCol="0" anchor="ctr"/>
+          <a:lstStyle/>
+          <a:p>
+            <a:pPr algn="ctr" indent="0" marL="0">
+              <a:buNone/>
+            </a:pPr>
+            <a:r>
+              <a:rPr lang="en-US" sz="3600" b="1" dirty="0">
+                <a:solidFill>
+                  <a:schemeClr val="accent1"/>
+                </a:solidFill>
+                <a:latin typeface="Arial" pitchFamily="34" charset="0"/>
+                <a:ea typeface="Arial" pitchFamily="34" charset="-122"/>
+                <a:cs typeface="Arial" pitchFamily="34" charset="-120"/>
+              </a:rPr>
+              <a:t>S</a:t>
+            </a:r>
+            <a:endParaRPr lang="en-US" sz="3600" dirty="0"/>
+          </a:p>
+        </p:txBody>
+      </p:sp>
+      <p:sp>
+        <p:nvSpPr>
+          <p:cNvPr id="23" name="Label 7"/>
+          <p:cNvSpPr txBox="1"/>
+          <p:nvPr/>
+        </p:nvSpPr>
+        <p:spPr>
+          <a:xfrm>
+            <a:off x="5138928" y="2377440"/>
+            <a:ext cx="749808" cy="594360"/>
+          </a:xfrm>
+          <a:prstGeom prst="rect">
+            <a:avLst/>
+          </a:prstGeom>
+          <a:noFill/>
+          <a:ln/>
+        </p:spPr>
+        <p:txBody>
+          <a:bodyPr wrap="square" lIns="0" tIns="0" rIns="0" bIns="0" rtlCol="0" anchor="t"/>
+          <a:lstStyle/>
+          <a:p>
+            <a:pPr algn="ctr" indent="0" marL="0">
+              <a:buNone/>
+            </a:pPr>
+            <a:r>
+              <a:rPr lang="en-US" sz="1200" dirty="0">
+                <a:solidFill>
+                  <a:schemeClr val="tx1"/>
+                </a:solidFill>
+              </a:rPr>
+              <a:t>Similar items</a:t>
+            </a:r>
+            <a:endParaRPr lang="en-US" sz="1200" dirty="0"/>
+          </a:p>
+        </p:txBody>
+      </p:sp>
+      <p:sp>
+        <p:nvSpPr>
+          <p:cNvPr id="24" name="Why card"/>
+          <p:cNvSpPr/>
+          <p:nvPr/>
+        </p:nvSpPr>
+        <p:spPr>
+          <a:xfrm>
+            <a:off x="457200" y="3429000"/>
+            <a:ext cx="5394960" cy="1097280"/>
+          </a:xfrm>
+          <a:prstGeom prst="roundRect">
+            <a:avLst>
+              <a:gd name="adj" fmla="val 8333"/>
             </a:avLst>
           </a:prstGeom>
           <a:solidFill>
             <a:schemeClr val="bg1"/>
           </a:solidFill>
-          <a:ln w="38100">
-            <a:solidFill>
-              <a:srgbClr val="D64545"/>
-            </a:solidFill>
-            <a:prstDash val="solid"/>
-          </a:ln>
-        </p:spPr>
-      </p:sp>
-      <p:pic>
-        <p:nvPicPr>
-          <p:cNvPr id="4" name="Wrong picture" descr="Right bin size: wrong example. A tiny item in a big bin wastes space">    </p:cNvPr>
-          <p:cNvPicPr>
-            <a:picLocks noChangeAspect="1"/>
-          </p:cNvPicPr>
-          <p:nvPr/>
-        </p:nvPicPr>
-        <p:blipFill>
-          <a:blip r:embed="rId1"/>
-          <a:stretch>
-            <a:fillRect/>
-          </a:stretch>
-        </p:blipFill>
-        <p:spPr>
-          <a:xfrm>
-            <a:off x="733451" y="1417320"/>
-            <a:ext cx="2053538" cy="2103120"/>
-          </a:xfrm>
-          <a:prstGeom prst="rect">
-            <a:avLst/>
-          </a:prstGeom>
-        </p:spPr>
-      </p:pic>
-      <p:sp>
-        <p:nvSpPr>
-          <p:cNvPr id="5" name="Wrong caption"/>
+          <a:ln/>
+        </p:spPr>
+      </p:sp>
+      <p:sp>
+        <p:nvSpPr>
+          <p:cNvPr id="25" name="Why text"/>
           <p:cNvSpPr txBox="1"/>
           <p:nvPr/>
         </p:nvSpPr>
         <p:spPr>
           <a:xfrm>
-            <a:off x="594360" y="3547872"/>
-            <a:ext cx="2331720" cy="502920"/>
+            <a:off x="731520" y="3429000"/>
+            <a:ext cx="4846320" cy="1097280"/>
           </a:xfrm>
           <a:prstGeom prst="rect">
             <a:avLst/>
@@ -4150,185 +4374,29 @@
           <a:bodyPr wrap="square" lIns="0" tIns="0" rIns="0" bIns="0" rtlCol="0" anchor="ctr"/>
           <a:lstStyle/>
           <a:p>
-            <a:pPr algn="ctr" indent="0" marL="0">
-              <a:buNone/>
-            </a:pPr>
-            <a:r>
-              <a:rPr lang="en-US" sz="1300" b="1" dirty="0">
-                <a:solidFill>
-                  <a:schemeClr val="accent3"/>
-                </a:solidFill>
-              </a:rPr>
-              <a:t>WRONG: </a:t>
-            </a:r>
-            <a:pPr algn="ctr" indent="0" marL="0">
-              <a:buNone/>
-            </a:pPr>
-            <a:r>
-              <a:rPr lang="en-US" sz="1300" dirty="0">
+            <a:pPr indent="0" marL="0">
+              <a:buNone/>
+            </a:pPr>
+            <a:r>
+              <a:rPr lang="en-US" sz="1500" b="1" dirty="0">
                 <a:solidFill>
                   <a:schemeClr val="tx1"/>
                 </a:solidFill>
               </a:rPr>
-              <a:t>A tiny item in a big bin wastes space</a:t>
-            </a:r>
-            <a:endParaRPr lang="en-US" sz="1300" dirty="0"/>
-          </a:p>
-        </p:txBody>
-      </p:sp>
-      <p:sp>
-        <p:nvSpPr>
-          <p:cNvPr id="6" name="Right panel"/>
-          <p:cNvSpPr/>
-          <p:nvPr/>
-        </p:nvSpPr>
-        <p:spPr>
-          <a:xfrm>
-            <a:off x="3246120" y="1325880"/>
-            <a:ext cx="2606040" cy="2788920"/>
-          </a:xfrm>
-          <a:prstGeom prst="roundRect">
-            <a:avLst>
-              <a:gd name="adj" fmla="val 3509"/>
-            </a:avLst>
-          </a:prstGeom>
-          <a:solidFill>
-            <a:schemeClr val="bg1"/>
-          </a:solidFill>
-          <a:ln w="38100">
-            <a:solidFill>
-              <a:srgbClr val="2E7D32"/>
-            </a:solidFill>
-            <a:prstDash val="solid"/>
-          </a:ln>
-        </p:spPr>
-      </p:sp>
-      <p:pic>
-        <p:nvPicPr>
-          <p:cNvPr id="7" name="Right picture" descr="Right bin size: right example. The item suits the size of the bin">    </p:cNvPr>
-          <p:cNvPicPr>
-            <a:picLocks noChangeAspect="1"/>
-          </p:cNvPicPr>
-          <p:nvPr/>
-        </p:nvPicPr>
-        <p:blipFill>
-          <a:blip r:embed="rId2"/>
-          <a:stretch>
-            <a:fillRect/>
-          </a:stretch>
-        </p:blipFill>
-        <p:spPr>
-          <a:xfrm>
-            <a:off x="3478987" y="1417320"/>
-            <a:ext cx="2140307" cy="2103120"/>
-          </a:xfrm>
-          <a:prstGeom prst="rect">
-            <a:avLst/>
-          </a:prstGeom>
-        </p:spPr>
-      </p:pic>
-      <p:sp>
-        <p:nvSpPr>
-          <p:cNvPr id="8" name="Right caption"/>
-          <p:cNvSpPr txBox="1"/>
-          <p:nvPr/>
-        </p:nvSpPr>
-        <p:spPr>
-          <a:xfrm>
-            <a:off x="3383280" y="3547872"/>
-            <a:ext cx="2331720" cy="502920"/>
-          </a:xfrm>
-          <a:prstGeom prst="rect">
-            <a:avLst/>
-          </a:prstGeom>
-          <a:noFill/>
-          <a:ln/>
-        </p:spPr>
-        <p:txBody>
-          <a:bodyPr wrap="square" lIns="0" tIns="0" rIns="0" bIns="0" rtlCol="0" anchor="ctr"/>
-          <a:lstStyle/>
-          <a:p>
-            <a:pPr algn="ctr" indent="0" marL="0">
-              <a:buNone/>
-            </a:pPr>
-            <a:r>
-              <a:rPr lang="en-US" sz="1300" b="1" dirty="0">
-                <a:solidFill>
-                  <a:srgbClr val="2E7D32"/>
-                </a:solidFill>
-              </a:rPr>
-              <a:t>RIGHT: </a:t>
-            </a:r>
-            <a:pPr algn="ctr" indent="0" marL="0">
-              <a:buNone/>
-            </a:pPr>
-            <a:r>
-              <a:rPr lang="en-US" sz="1300" dirty="0">
-                <a:solidFill>
-                  <a:schemeClr val="tx1"/>
-                </a:solidFill>
-              </a:rPr>
-              <a:t>The item suits the size of the bin</a:t>
-            </a:r>
-            <a:endParaRPr lang="en-US" sz="1300" dirty="0"/>
-          </a:p>
-        </p:txBody>
-      </p:sp>
-      <p:sp>
-        <p:nvSpPr>
-          <p:cNvPr id="9" name="Rule card"/>
-          <p:cNvSpPr/>
-          <p:nvPr/>
-        </p:nvSpPr>
-        <p:spPr>
-          <a:xfrm>
-            <a:off x="457200" y="4251960"/>
-            <a:ext cx="5394960" cy="566928"/>
-          </a:xfrm>
-          <a:prstGeom prst="roundRect">
-            <a:avLst>
-              <a:gd name="adj" fmla="val 16129"/>
-            </a:avLst>
-          </a:prstGeom>
-          <a:solidFill>
-            <a:schemeClr val="tx2"/>
-          </a:solidFill>
-          <a:ln/>
-        </p:spPr>
-      </p:sp>
-      <p:sp>
-        <p:nvSpPr>
-          <p:cNvPr id="10" name="Rule text"/>
-          <p:cNvSpPr txBox="1"/>
-          <p:nvPr/>
-        </p:nvSpPr>
-        <p:spPr>
-          <a:xfrm>
-            <a:off x="685800" y="4251960"/>
-            <a:ext cx="4937760" cy="566928"/>
-          </a:xfrm>
-          <a:prstGeom prst="rect">
-            <a:avLst/>
-          </a:prstGeom>
-          <a:noFill/>
-          <a:ln/>
-        </p:spPr>
-        <p:txBody>
-          <a:bodyPr wrap="square" lIns="0" tIns="0" rIns="0" bIns="0" rtlCol="0" anchor="ctr"/>
-          <a:lstStyle/>
-          <a:p>
+              <a:t>Why it matters: </a:t>
+            </a:r>
             <a:pPr indent="0" marL="0">
               <a:buNone/>
             </a:pPr>
             <a:r>
-              <a:rPr lang="en-US" sz="1400" b="1" dirty="0">
-                <a:solidFill>
-                  <a:schemeClr val="bg1"/>
-                </a:solidFill>
-              </a:rPr>
-              <a:t>Use the smallest bin possible, and place items by length first.</a:t>
-            </a:r>
-            <a:endParaRPr lang="en-US" sz="1400" dirty="0"/>
+              <a:rPr lang="en-US" sz="1500" dirty="0">
+                <a:solidFill>
+                  <a:schemeClr val="accent4"/>
+                </a:solidFill>
+              </a:rPr>
+              <a:t>pickers find items faster, bins hold more, and nothing falls out when the pod moves.</a:t>
+            </a:r>
+            <a:endParaRPr lang="en-US" sz="1500" dirty="0"/>
           </a:p>
         </p:txBody>
       </p:sp>
@@ -4389,7 +4457,7 @@
                   <a:schemeClr val="tx1"/>
                 </a:solidFill>
               </a:rPr>
-              <a:t>O: No overhang</a:t>
+              <a:t>R: Right bin size</a:t>
             </a:r>
             <a:endParaRPr lang="en-US" sz="2800" dirty="0"/>
           </a:p>
@@ -4424,7 +4492,7 @@
       </p:sp>
       <p:pic>
         <p:nvPicPr>
-          <p:cNvPr id="4" name="Wrong picture" descr="No overhang: wrong example. The box sticks out past the bin edge">    </p:cNvPr>
+          <p:cNvPr id="4" name="Wrong picture" descr="Right bin size: wrong example. A tiny item in a big bin wastes space">    </p:cNvPr>
           <p:cNvPicPr>
             <a:picLocks noChangeAspect="1"/>
           </p:cNvPicPr>
@@ -4438,8 +4506,8 @@
         </p:blipFill>
         <p:spPr>
           <a:xfrm>
-            <a:off x="700128" y="1417320"/>
-            <a:ext cx="2120184" cy="2103120"/>
+            <a:off x="733451" y="1417320"/>
+            <a:ext cx="2053538" cy="2103120"/>
           </a:xfrm>
           <a:prstGeom prst="rect">
             <a:avLst/>
@@ -4487,7 +4555,7 @@
                   <a:schemeClr val="tx1"/>
                 </a:solidFill>
               </a:rPr>
-              <a:t>The box sticks out past the bin edge</a:t>
+              <a:t>A tiny item in a big bin wastes space</a:t>
             </a:r>
             <a:endParaRPr lang="en-US" sz="1300" dirty="0"/>
           </a:p>
@@ -4522,7 +4590,7 @@
       </p:sp>
       <p:pic>
         <p:nvPicPr>
-          <p:cNvPr id="7" name="Right picture" descr="No overhang: right example. Everything sits fully inside the bin">    </p:cNvPr>
+          <p:cNvPr id="7" name="Right picture" descr="Right bin size: right example. The item suits the size of the bin">    </p:cNvPr>
           <p:cNvPicPr>
             <a:picLocks noChangeAspect="1"/>
           </p:cNvPicPr>
@@ -4536,8 +4604,8 @@
         </p:blipFill>
         <p:spPr>
           <a:xfrm>
-            <a:off x="3521332" y="1417320"/>
-            <a:ext cx="2055616" cy="2103120"/>
+            <a:off x="3478987" y="1417320"/>
+            <a:ext cx="2140307" cy="2103120"/>
           </a:xfrm>
           <a:prstGeom prst="rect">
             <a:avLst/>
@@ -4585,7 +4653,7 @@
                   <a:schemeClr val="tx1"/>
                 </a:solidFill>
               </a:rPr>
-              <a:t>Everything sits fully inside the bin</a:t>
+              <a:t>The item suits the size of the bin</a:t>
             </a:r>
             <a:endParaRPr lang="en-US" sz="1300" dirty="0"/>
           </a:p>
@@ -4643,7 +4711,7 @@
                   <a:schemeClr val="bg1"/>
                 </a:solidFill>
               </a:rPr>
-              <a:t>All items must fit inside the bin. Overhang causes drive obstructions and pod crashes.</a:t>
+              <a:t>Use the smallest bin possible, and place items by length first.</a:t>
             </a:r>
             <a:endParaRPr lang="en-US" sz="1400" dirty="0"/>
           </a:p>
@@ -4706,7 +4774,7 @@
                   <a:schemeClr val="tx1"/>
                 </a:solidFill>
               </a:rPr>
-              <a:t>B: Blocking</a:t>
+              <a:t>O: No overhang</a:t>
             </a:r>
             <a:endParaRPr lang="en-US" sz="2800" dirty="0"/>
           </a:p>
@@ -4741,7 +4809,7 @@
       </p:sp>
       <p:pic>
         <p:nvPicPr>
-          <p:cNvPr id="4" name="Wrong picture" descr="Blocking: wrong example. A flat item in front hides the items behind it">    </p:cNvPr>
+          <p:cNvPr id="4" name="Wrong picture" descr="No overhang: wrong example. The box sticks out past the bin edge">    </p:cNvPr>
           <p:cNvPicPr>
             <a:picLocks noChangeAspect="1"/>
           </p:cNvPicPr>
@@ -4755,8 +4823,8 @@
         </p:blipFill>
         <p:spPr>
           <a:xfrm>
-            <a:off x="706557" y="1417320"/>
-            <a:ext cx="2107326" cy="2103120"/>
+            <a:off x="700128" y="1417320"/>
+            <a:ext cx="2120184" cy="2103120"/>
           </a:xfrm>
           <a:prstGeom prst="rect">
             <a:avLst/>
@@ -4804,7 +4872,7 @@
                   <a:schemeClr val="tx1"/>
                 </a:solidFill>
               </a:rPr>
-              <a:t>A flat item in front hides the items behind it</a:t>
+              <a:t>The box sticks out past the bin edge</a:t>
             </a:r>
             <a:endParaRPr lang="en-US" sz="1300" dirty="0"/>
           </a:p>
@@ -4839,7 +4907,7 @@
       </p:sp>
       <p:pic>
         <p:nvPicPr>
-          <p:cNvPr id="7" name="Right picture" descr="Blocking: right example. Every item is visible from the front">    </p:cNvPr>
+          <p:cNvPr id="7" name="Right picture" descr="No overhang: right example. Everything sits fully inside the bin">    </p:cNvPr>
           <p:cNvPicPr>
             <a:picLocks noChangeAspect="1"/>
           </p:cNvPicPr>
@@ -4853,8 +4921,8 @@
         </p:blipFill>
         <p:spPr>
           <a:xfrm>
-            <a:off x="3489168" y="1417320"/>
-            <a:ext cx="2119945" cy="2103120"/>
+            <a:off x="3521332" y="1417320"/>
+            <a:ext cx="2055616" cy="2103120"/>
           </a:xfrm>
           <a:prstGeom prst="rect">
             <a:avLst/>
@@ -4902,7 +4970,7 @@
                   <a:schemeClr val="tx1"/>
                 </a:solidFill>
               </a:rPr>
-              <a:t>Every item is visible from the front</a:t>
+              <a:t>Everything sits fully inside the bin</a:t>
             </a:r>
             <a:endParaRPr lang="en-US" sz="1300" dirty="0"/>
           </a:p>
@@ -4960,7 +5028,7 @@
                   <a:schemeClr val="bg1"/>
                 </a:solidFill>
               </a:rPr>
-              <a:t>Never block small items with larger ones. Stand flat items upright.</a:t>
+              <a:t>All items must fit inside the bin. Overhang causes drive obstructions and pod crashes.</a:t>
             </a:r>
             <a:endParaRPr lang="en-US" sz="1400" dirty="0"/>
           </a:p>
@@ -5023,7 +5091,7 @@
                   <a:schemeClr val="tx1"/>
                 </a:solidFill>
               </a:rPr>
-              <a:t>O: Overstuffing</a:t>
+              <a:t>B: Blocking</a:t>
             </a:r>
             <a:endParaRPr lang="en-US" sz="2800" dirty="0"/>
           </a:p>
@@ -5058,7 +5126,7 @@
       </p:sp>
       <p:pic>
         <p:nvPicPr>
-          <p:cNvPr id="4" name="Wrong picture" descr="Overstuffing: wrong example. Items forced in, the bin is bulging">    </p:cNvPr>
+          <p:cNvPr id="4" name="Wrong picture" descr="Blocking: wrong example. A flat item in front hides the items behind it">    </p:cNvPr>
           <p:cNvPicPr>
             <a:picLocks noChangeAspect="1"/>
           </p:cNvPicPr>
@@ -5072,8 +5140,8 @@
         </p:blipFill>
         <p:spPr>
           <a:xfrm>
-            <a:off x="619733" y="1417320"/>
-            <a:ext cx="2280974" cy="2103120"/>
+            <a:off x="706557" y="1417320"/>
+            <a:ext cx="2107326" cy="2103120"/>
           </a:xfrm>
           <a:prstGeom prst="rect">
             <a:avLst/>
@@ -5121,7 +5189,7 @@
                   <a:schemeClr val="tx1"/>
                 </a:solidFill>
               </a:rPr>
-              <a:t>Items forced in, the bin is bulging</a:t>
+              <a:t>A flat item in front hides the items behind it</a:t>
             </a:r>
             <a:endParaRPr lang="en-US" sz="1300" dirty="0"/>
           </a:p>
@@ -5156,7 +5224,7 @@
       </p:sp>
       <p:pic>
         <p:nvPicPr>
-          <p:cNvPr id="7" name="Right picture" descr="Overstuffing: right example. Items fit with room to pick">    </p:cNvPr>
+          <p:cNvPr id="7" name="Right picture" descr="Blocking: right example. Every item is visible from the front">    </p:cNvPr>
           <p:cNvPicPr>
             <a:picLocks noChangeAspect="1"/>
           </p:cNvPicPr>
@@ -5170,8 +5238,8 @@
         </p:blipFill>
         <p:spPr>
           <a:xfrm>
-            <a:off x="3413099" y="1417320"/>
-            <a:ext cx="2272081" cy="2103120"/>
+            <a:off x="3489168" y="1417320"/>
+            <a:ext cx="2119945" cy="2103120"/>
           </a:xfrm>
           <a:prstGeom prst="rect">
             <a:avLst/>
@@ -5219,7 +5287,7 @@
                   <a:schemeClr val="tx1"/>
                 </a:solidFill>
               </a:rPr>
-              <a:t>Items fit with room to pick</a:t>
+              <a:t>Every item is visible from the front</a:t>
             </a:r>
             <a:endParaRPr lang="en-US" sz="1300" dirty="0"/>
           </a:p>
@@ -5277,7 +5345,7 @@
                   <a:schemeClr val="bg1"/>
                 </a:solidFill>
               </a:rPr>
-              <a:t>Don't overfill bins. Forcing items in damages customer products.</a:t>
+              <a:t>Never block small items with larger ones. Stand flat items upright.</a:t>
             </a:r>
             <a:endParaRPr lang="en-US" sz="1400" dirty="0"/>
           </a:p>
@@ -5340,7 +5408,7 @@
                   <a:schemeClr val="tx1"/>
                 </a:solidFill>
               </a:rPr>
-              <a:t>T: Titles out</a:t>
+              <a:t>O: Overstuffing</a:t>
             </a:r>
             <a:endParaRPr lang="en-US" sz="2800" dirty="0"/>
           </a:p>
@@ -5375,7 +5443,7 @@
       </p:sp>
       <p:pic>
         <p:nvPicPr>
-          <p:cNvPr id="4" name="Wrong picture" descr="Titles out: wrong example. Spines face in, so titles can't be read">    </p:cNvPr>
+          <p:cNvPr id="4" name="Wrong picture" descr="Overstuffing: wrong example. Items forced in, the bin is bulging">    </p:cNvPr>
           <p:cNvPicPr>
             <a:picLocks noChangeAspect="1"/>
           </p:cNvPicPr>
@@ -5389,8 +5457,8 @@
         </p:blipFill>
         <p:spPr>
           <a:xfrm>
-            <a:off x="592074" y="1417320"/>
-            <a:ext cx="2336292" cy="2103120"/>
+            <a:off x="619733" y="1417320"/>
+            <a:ext cx="2280974" cy="2103120"/>
           </a:xfrm>
           <a:prstGeom prst="rect">
             <a:avLst/>
@@ -5438,7 +5506,7 @@
                   <a:schemeClr val="tx1"/>
                 </a:solidFill>
               </a:rPr>
-              <a:t>Spines face in, so titles can't be read</a:t>
+              <a:t>Items forced in, the bin is bulging</a:t>
             </a:r>
             <a:endParaRPr lang="en-US" sz="1300" dirty="0"/>
           </a:p>
@@ -5473,7 +5541,7 @@
       </p:sp>
       <p:pic>
         <p:nvPicPr>
-          <p:cNvPr id="7" name="Right picture" descr="Titles out: right example. Spines face out, titles easy to read">    </p:cNvPr>
+          <p:cNvPr id="7" name="Right picture" descr="Overstuffing: right example. Items fit with room to pick">    </p:cNvPr>
           <p:cNvPicPr>
             <a:picLocks noChangeAspect="1"/>
           </p:cNvPicPr>
@@ -5487,8 +5555,8 @@
         </p:blipFill>
         <p:spPr>
           <a:xfrm>
-            <a:off x="3385566" y="1417320"/>
-            <a:ext cx="2327148" cy="2103120"/>
+            <a:off x="3413099" y="1417320"/>
+            <a:ext cx="2272081" cy="2103120"/>
           </a:xfrm>
           <a:prstGeom prst="rect">
             <a:avLst/>
@@ -5536,7 +5604,7 @@
                   <a:schemeClr val="tx1"/>
                 </a:solidFill>
               </a:rPr>
-              <a:t>Spines face out, titles easy to read</a:t>
+              <a:t>Items fit with room to pick</a:t>
             </a:r>
             <a:endParaRPr lang="en-US" sz="1300" dirty="0"/>
           </a:p>
@@ -5594,7 +5662,7 @@
                   <a:schemeClr val="bg1"/>
                 </a:solidFill>
               </a:rPr>
-              <a:t>Books and DVDs go in with the spine facing out.</a:t>
+              <a:t>Don't overfill bins. Forcing items in damages customer products.</a:t>
             </a:r>
             <a:endParaRPr lang="en-US" sz="1400" dirty="0"/>
           </a:p>
@@ -5657,7 +5725,7 @@
                   <a:schemeClr val="tx1"/>
                 </a:solidFill>
               </a:rPr>
-              <a:t>S: Stacking</a:t>
+              <a:t>T: Titles out</a:t>
             </a:r>
             <a:endParaRPr lang="en-US" sz="2800" dirty="0"/>
           </a:p>
@@ -5692,7 +5760,7 @@
       </p:sp>
       <p:pic>
         <p:nvPicPr>
-          <p:cNvPr id="4" name="Wrong picture" descr="Stacking: wrong example. Different items stacked on top of each other">    </p:cNvPr>
+          <p:cNvPr id="4" name="Wrong picture" descr="Titles out: wrong example. Spines face in, so titles can't be read">    </p:cNvPr>
           <p:cNvPicPr>
             <a:picLocks noChangeAspect="1"/>
           </p:cNvPicPr>
@@ -5706,8 +5774,8 @@
         </p:blipFill>
         <p:spPr>
           <a:xfrm>
-            <a:off x="623277" y="1417320"/>
-            <a:ext cx="2273886" cy="2103120"/>
+            <a:off x="592074" y="1417320"/>
+            <a:ext cx="2336292" cy="2103120"/>
           </a:xfrm>
           <a:prstGeom prst="rect">
             <a:avLst/>
@@ -5755,7 +5823,7 @@
                   <a:schemeClr val="tx1"/>
                 </a:solidFill>
               </a:rPr>
-              <a:t>Different items stacked on top of each other</a:t>
+              <a:t>Spines face in, so titles can't be read</a:t>
             </a:r>
             <a:endParaRPr lang="en-US" sz="1300" dirty="0"/>
           </a:p>
@@ -5790,7 +5858,7 @@
       </p:sp>
       <p:pic>
         <p:nvPicPr>
-          <p:cNvPr id="7" name="Right picture" descr="Stacking: right example. Items stand side by side, below the bands">    </p:cNvPr>
+          <p:cNvPr id="7" name="Right picture" descr="Titles out: right example. Spines face out, titles easy to read">    </p:cNvPr>
           <p:cNvPicPr>
             <a:picLocks noChangeAspect="1"/>
           </p:cNvPicPr>
@@ -5804,8 +5872,8 @@
         </p:blipFill>
         <p:spPr>
           <a:xfrm>
-            <a:off x="3430172" y="1417320"/>
-            <a:ext cx="2237935" cy="2103120"/>
+            <a:off x="3385566" y="1417320"/>
+            <a:ext cx="2327148" cy="2103120"/>
           </a:xfrm>
           <a:prstGeom prst="rect">
             <a:avLst/>
@@ -5853,7 +5921,7 @@
                   <a:schemeClr val="tx1"/>
                 </a:solidFill>
               </a:rPr>
-              <a:t>Items stand side by side, below the bands</a:t>
+              <a:t>Spines face out, titles easy to read</a:t>
             </a:r>
             <a:endParaRPr lang="en-US" sz="1300" dirty="0"/>
           </a:p>
@@ -5911,7 +5979,7 @@
                   <a:schemeClr val="bg1"/>
                 </a:solidFill>
               </a:rPr>
-              <a:t>Only stack the same ASIN, with two flat sides, and stay below the bands.</a:t>
+              <a:t>Books and DVDs go in with the spine facing out.</a:t>
             </a:r>
             <a:endParaRPr lang="en-US" sz="1400" dirty="0"/>
           </a:p>
@@ -5974,7 +6042,7 @@
                   <a:schemeClr val="tx1"/>
                 </a:solidFill>
               </a:rPr>
-              <a:t>S: Similar items</a:t>
+              <a:t>S: Stacking</a:t>
             </a:r>
             <a:endParaRPr lang="en-US" sz="2800" dirty="0"/>
           </a:p>
@@ -6009,7 +6077,7 @@
       </p:sp>
       <p:pic>
         <p:nvPicPr>
-          <p:cNvPr id="4" name="Wrong picture" descr="Similar items: wrong example. Two look-alike items share one bin">    </p:cNvPr>
+          <p:cNvPr id="4" name="Wrong picture" descr="Stacking: wrong example. Different items stacked on top of each other">    </p:cNvPr>
           <p:cNvPicPr>
             <a:picLocks noChangeAspect="1"/>
           </p:cNvPicPr>
@@ -6023,8 +6091,8 @@
         </p:blipFill>
         <p:spPr>
           <a:xfrm>
-            <a:off x="608511" y="1417320"/>
-            <a:ext cx="2303417" cy="2103120"/>
+            <a:off x="623277" y="1417320"/>
+            <a:ext cx="2273886" cy="2103120"/>
           </a:xfrm>
           <a:prstGeom prst="rect">
             <a:avLst/>
@@ -6072,7 +6140,7 @@
                   <a:schemeClr val="tx1"/>
                 </a:solidFill>
               </a:rPr>
-              <a:t>Two look-alike items share one bin</a:t>
+              <a:t>Different items stacked on top of each other</a:t>
             </a:r>
             <a:endParaRPr lang="en-US" sz="1300" dirty="0"/>
           </a:p>
@@ -6107,7 +6175,7 @@
       </p:sp>
       <p:pic>
         <p:nvPicPr>
-          <p:cNvPr id="7" name="Right picture" descr="Similar items: right example. Look-alikes are kept in different bins">    </p:cNvPr>
+          <p:cNvPr id="7" name="Right picture" descr="Stacking: right example. Items stand side by side, below the bands">    </p:cNvPr>
           <p:cNvPicPr>
             <a:picLocks noChangeAspect="1"/>
           </p:cNvPicPr>
@@ -6121,8 +6189,8 @@
         </p:blipFill>
         <p:spPr>
           <a:xfrm>
-            <a:off x="3397431" y="1417320"/>
-            <a:ext cx="2303417" cy="2103120"/>
+            <a:off x="3430172" y="1417320"/>
+            <a:ext cx="2237935" cy="2103120"/>
           </a:xfrm>
           <a:prstGeom prst="rect">
             <a:avLst/>
@@ -6170,7 +6238,7 @@
                   <a:schemeClr val="tx1"/>
                 </a:solidFill>
               </a:rPr>
-              <a:t>Look-alikes are kept in different bins</a:t>
+              <a:t>Items stand side by side, below the bands</a:t>
             </a:r>
             <a:endParaRPr lang="en-US" sz="1300" dirty="0"/>
           </a:p>
@@ -6228,7 +6296,7 @@
                   <a:schemeClr val="bg1"/>
                 </a:solidFill>
               </a:rPr>
-              <a:t>Use the cross method. The system won't always flag similar items on screen.</a:t>
+              <a:t>Only stack the same ASIN, with two flat sides, and stay below the bands.</a:t>
             </a:r>
             <a:endParaRPr lang="en-US" sz="1400" dirty="0"/>
           </a:p>
@@ -6291,7 +6359,7 @@
                   <a:schemeClr val="tx1"/>
                 </a:solidFill>
               </a:rPr>
-              <a:t>Your shift, bin by bin</a:t>
+              <a:t>S: Similar items</a:t>
             </a:r>
             <a:endParaRPr lang="en-US" sz="2800" dirty="0"/>
           </a:p>
@@ -6299,27 +6367,34 @@
       </p:sp>
       <p:sp>
         <p:nvSpPr>
-          <p:cNvPr id="3" name="Recap circle 1"/>
+          <p:cNvPr id="3" name="Wrong panel"/>
           <p:cNvSpPr/>
           <p:nvPr/>
         </p:nvSpPr>
         <p:spPr>
           <a:xfrm>
-            <a:off x="868680" y="1371600"/>
-            <a:ext cx="868680" cy="868680"/>
-          </a:xfrm>
-          <a:prstGeom prst="ellipse">
-            <a:avLst/>
+            <a:off x="457200" y="1325880"/>
+            <a:ext cx="2606040" cy="2788920"/>
+          </a:xfrm>
+          <a:prstGeom prst="roundRect">
+            <a:avLst>
+              <a:gd name="adj" fmla="val 3509"/>
+            </a:avLst>
           </a:prstGeom>
           <a:solidFill>
-            <a:schemeClr val="accent1"/>
+            <a:schemeClr val="bg1"/>
           </a:solidFill>
-          <a:ln/>
+          <a:ln w="38100">
+            <a:solidFill>
+              <a:srgbClr val="D64545"/>
+            </a:solidFill>
+            <a:prstDash val="solid"/>
+          </a:ln>
         </p:spPr>
       </p:sp>
       <p:pic>
         <p:nvPicPr>
-          <p:cNvPr id="4" name="Recap icon 1" descr="preencoded.png">    </p:cNvPr>
+          <p:cNvPr id="4" name="Wrong picture" descr="Similar items: wrong example. Two look-alike items share one bin">    </p:cNvPr>
           <p:cNvPicPr>
             <a:picLocks noChangeAspect="1"/>
           </p:cNvPicPr>
@@ -6333,8 +6408,8 @@
         </p:blipFill>
         <p:spPr>
           <a:xfrm>
-            <a:off x="1088136" y="1591056"/>
-            <a:ext cx="429768" cy="429768"/>
+            <a:off x="608511" y="1417320"/>
+            <a:ext cx="2303417" cy="2103120"/>
           </a:xfrm>
           <a:prstGeom prst="rect">
             <a:avLst/>
@@ -6343,57 +6418,81 @@
       </p:pic>
       <p:sp>
         <p:nvSpPr>
-          <p:cNvPr id="5" name="Recap text 1"/>
+          <p:cNvPr id="5" name="Wrong caption"/>
           <p:cNvSpPr txBox="1"/>
           <p:nvPr/>
         </p:nvSpPr>
         <p:spPr>
           <a:xfrm>
-            <a:off x="457200" y="2423160"/>
-            <a:ext cx="1691640" cy="1097280"/>
-          </a:xfrm>
-          <a:prstGeom prst="rect">
-            <a:avLst/>
-          </a:prstGeom>
-          <a:noFill/>
-          <a:ln/>
-        </p:spPr>
-        <p:txBody>
-          <a:bodyPr wrap="square" lIns="0" tIns="0" rIns="0" bIns="0" rtlCol="0" anchor="t"/>
+            <a:off x="594360" y="3547872"/>
+            <a:ext cx="2331720" cy="502920"/>
+          </a:xfrm>
+          <a:prstGeom prst="rect">
+            <a:avLst/>
+          </a:prstGeom>
+          <a:noFill/>
+          <a:ln/>
+        </p:spPr>
+        <p:txBody>
+          <a:bodyPr wrap="square" lIns="0" tIns="0" rIns="0" bIns="0" rtlCol="0" anchor="ctr"/>
           <a:lstStyle/>
           <a:p>
             <a:pPr algn="ctr" indent="0" marL="0">
               <a:buNone/>
             </a:pPr>
             <a:r>
+              <a:rPr lang="en-US" sz="1300" b="1" dirty="0">
+                <a:solidFill>
+                  <a:schemeClr val="accent3"/>
+                </a:solidFill>
+              </a:rPr>
+              <a:t>WRONG: </a:t>
+            </a:r>
+            <a:pPr algn="ctr" indent="0" marL="0">
+              <a:buNone/>
+            </a:pPr>
+            <a:r>
               <a:rPr lang="en-US" sz="1300" dirty="0">
                 <a:solidFill>
-                  <a:schemeClr val="accent4"/>
-                </a:solidFill>
-              </a:rPr>
-              <a:t>Shift start and after breaks</a:t>
+                  <a:schemeClr val="tx1"/>
+                </a:solidFill>
+              </a:rPr>
+              <a:t>Two look-alike items share one bin</a:t>
             </a:r>
             <a:endParaRPr lang="en-US" sz="1300" dirty="0"/>
           </a:p>
-          <a:p>
-            <a:pPr algn="ctr" indent="0" marL="0">
-              <a:buNone/>
-            </a:pPr>
-            <a:r>
-              <a:rPr lang="en-US" sz="1700" b="1" dirty="0">
-                <a:solidFill>
-                  <a:schemeClr val="tx1"/>
-                </a:solidFill>
-              </a:rPr>
-              <a:t>1-minute First Face Fix</a:t>
-            </a:r>
-            <a:endParaRPr lang="en-US" sz="1300" dirty="0"/>
-          </a:p>
-        </p:txBody>
+        </p:txBody>
+      </p:sp>
+      <p:sp>
+        <p:nvSpPr>
+          <p:cNvPr id="6" name="Right panel"/>
+          <p:cNvSpPr/>
+          <p:nvPr/>
+        </p:nvSpPr>
+        <p:spPr>
+          <a:xfrm>
+            <a:off x="3246120" y="1325880"/>
+            <a:ext cx="2606040" cy="2788920"/>
+          </a:xfrm>
+          <a:prstGeom prst="roundRect">
+            <a:avLst>
+              <a:gd name="adj" fmla="val 3509"/>
+            </a:avLst>
+          </a:prstGeom>
+          <a:solidFill>
+            <a:schemeClr val="bg1"/>
+          </a:solidFill>
+          <a:ln w="38100">
+            <a:solidFill>
+              <a:srgbClr val="2E7D32"/>
+            </a:solidFill>
+            <a:prstDash val="solid"/>
+          </a:ln>
+        </p:spPr>
       </p:sp>
       <p:pic>
         <p:nvPicPr>
-          <p:cNvPr id="6" name="Arrow 1" descr="preencoded.png">    </p:cNvPr>
+          <p:cNvPr id="7" name="Right picture" descr="Similar items: right example. Look-alikes are kept in different bins">    </p:cNvPr>
           <p:cNvPicPr>
             <a:picLocks noChangeAspect="1"/>
           </p:cNvPicPr>
@@ -6407,8 +6506,8 @@
         </p:blipFill>
         <p:spPr>
           <a:xfrm>
-            <a:off x="2121408" y="1664208"/>
-            <a:ext cx="274320" cy="274320"/>
+            <a:off x="3397431" y="1417320"/>
+            <a:ext cx="2303417" cy="2103120"/>
           </a:xfrm>
           <a:prstGeom prst="rect">
             <a:avLst/>
@@ -6417,230 +6516,65 @@
       </p:pic>
       <p:sp>
         <p:nvSpPr>
-          <p:cNvPr id="7" name="Recap circle 2"/>
+          <p:cNvPr id="8" name="Right caption"/>
+          <p:cNvSpPr txBox="1"/>
+          <p:nvPr/>
+        </p:nvSpPr>
+        <p:spPr>
+          <a:xfrm>
+            <a:off x="3383280" y="3547872"/>
+            <a:ext cx="2331720" cy="502920"/>
+          </a:xfrm>
+          <a:prstGeom prst="rect">
+            <a:avLst/>
+          </a:prstGeom>
+          <a:noFill/>
+          <a:ln/>
+        </p:spPr>
+        <p:txBody>
+          <a:bodyPr wrap="square" lIns="0" tIns="0" rIns="0" bIns="0" rtlCol="0" anchor="ctr"/>
+          <a:lstStyle/>
+          <a:p>
+            <a:pPr algn="ctr" indent="0" marL="0">
+              <a:buNone/>
+            </a:pPr>
+            <a:r>
+              <a:rPr lang="en-US" sz="1300" b="1" dirty="0">
+                <a:solidFill>
+                  <a:srgbClr val="2E7D32"/>
+                </a:solidFill>
+              </a:rPr>
+              <a:t>RIGHT: </a:t>
+            </a:r>
+            <a:pPr algn="ctr" indent="0" marL="0">
+              <a:buNone/>
+            </a:pPr>
+            <a:r>
+              <a:rPr lang="en-US" sz="1300" dirty="0">
+                <a:solidFill>
+                  <a:schemeClr val="tx1"/>
+                </a:solidFill>
+              </a:rPr>
+              <a:t>Look-alikes are kept in different bins</a:t>
+            </a:r>
+            <a:endParaRPr lang="en-US" sz="1300" dirty="0"/>
+          </a:p>
+        </p:txBody>
+      </p:sp>
+      <p:sp>
+        <p:nvSpPr>
+          <p:cNvPr id="9" name="Rule card"/>
           <p:cNvSpPr/>
           <p:nvPr/>
         </p:nvSpPr>
         <p:spPr>
           <a:xfrm>
-            <a:off x="2697480" y="1371600"/>
-            <a:ext cx="868680" cy="868680"/>
-          </a:xfrm>
-          <a:prstGeom prst="ellipse">
-            <a:avLst/>
-          </a:prstGeom>
-          <a:solidFill>
-            <a:schemeClr val="accent1"/>
-          </a:solidFill>
-          <a:ln/>
-        </p:spPr>
-      </p:sp>
-      <p:pic>
-        <p:nvPicPr>
-          <p:cNvPr id="8" name="Recap icon 2" descr="preencoded.png">    </p:cNvPr>
-          <p:cNvPicPr>
-            <a:picLocks noChangeAspect="1"/>
-          </p:cNvPicPr>
-          <p:nvPr/>
-        </p:nvPicPr>
-        <p:blipFill>
-          <a:blip r:embed="rId3"/>
-          <a:stretch>
-            <a:fillRect/>
-          </a:stretch>
-        </p:blipFill>
-        <p:spPr>
-          <a:xfrm>
-            <a:off x="2916936" y="1591056"/>
-            <a:ext cx="429768" cy="429768"/>
-          </a:xfrm>
-          <a:prstGeom prst="rect">
-            <a:avLst/>
-          </a:prstGeom>
-        </p:spPr>
-      </p:pic>
-      <p:sp>
-        <p:nvSpPr>
-          <p:cNvPr id="9" name="Recap text 2"/>
-          <p:cNvSpPr txBox="1"/>
-          <p:nvPr/>
-        </p:nvSpPr>
-        <p:spPr>
-          <a:xfrm>
-            <a:off x="2286000" y="2423160"/>
-            <a:ext cx="1691640" cy="1097280"/>
-          </a:xfrm>
-          <a:prstGeom prst="rect">
-            <a:avLst/>
-          </a:prstGeom>
-          <a:noFill/>
-          <a:ln/>
-        </p:spPr>
-        <p:txBody>
-          <a:bodyPr wrap="square" lIns="0" tIns="0" rIns="0" bIns="0" rtlCol="0" anchor="t"/>
-          <a:lstStyle/>
-          <a:p>
-            <a:pPr algn="ctr" indent="0" marL="0">
-              <a:buNone/>
-            </a:pPr>
-            <a:r>
-              <a:rPr lang="en-US" sz="1300" dirty="0">
-                <a:solidFill>
-                  <a:schemeClr val="accent4"/>
-                </a:solidFill>
-              </a:rPr>
-              <a:t>Every bin you touch</a:t>
-            </a:r>
-            <a:endParaRPr lang="en-US" sz="1300" dirty="0"/>
-          </a:p>
-          <a:p>
-            <a:pPr algn="ctr" indent="0" marL="0">
-              <a:buNone/>
-            </a:pPr>
-            <a:r>
-              <a:rPr lang="en-US" sz="1700" b="1" dirty="0">
-                <a:solidFill>
-                  <a:schemeClr val="tx1"/>
-                </a:solidFill>
-              </a:rPr>
-              <a:t>Apply ROBOTSS</a:t>
-            </a:r>
-            <a:endParaRPr lang="en-US" sz="1300" dirty="0"/>
-          </a:p>
-        </p:txBody>
-      </p:sp>
-      <p:pic>
-        <p:nvPicPr>
-          <p:cNvPr id="10" name="Arrow 2" descr="preencoded.png">    </p:cNvPr>
-          <p:cNvPicPr>
-            <a:picLocks noChangeAspect="1"/>
-          </p:cNvPicPr>
-          <p:nvPr/>
-        </p:nvPicPr>
-        <p:blipFill>
-          <a:blip r:embed="rId4"/>
-          <a:stretch>
-            <a:fillRect/>
-          </a:stretch>
-        </p:blipFill>
-        <p:spPr>
-          <a:xfrm>
-            <a:off x="3950208" y="1664208"/>
-            <a:ext cx="274320" cy="274320"/>
-          </a:xfrm>
-          <a:prstGeom prst="rect">
-            <a:avLst/>
-          </a:prstGeom>
-        </p:spPr>
-      </p:pic>
-      <p:sp>
-        <p:nvSpPr>
-          <p:cNvPr id="11" name="Recap circle 3"/>
-          <p:cNvSpPr/>
-          <p:nvPr/>
-        </p:nvSpPr>
-        <p:spPr>
-          <a:xfrm>
-            <a:off x="4526280" y="1371600"/>
-            <a:ext cx="868680" cy="868680"/>
-          </a:xfrm>
-          <a:prstGeom prst="ellipse">
-            <a:avLst/>
-          </a:prstGeom>
-          <a:solidFill>
-            <a:schemeClr val="accent1"/>
-          </a:solidFill>
-          <a:ln/>
-        </p:spPr>
-      </p:sp>
-      <p:pic>
-        <p:nvPicPr>
-          <p:cNvPr id="12" name="Recap icon 3" descr="preencoded.png">    </p:cNvPr>
-          <p:cNvPicPr>
-            <a:picLocks noChangeAspect="1"/>
-          </p:cNvPicPr>
-          <p:nvPr/>
-        </p:nvPicPr>
-        <p:blipFill>
-          <a:blip r:embed="rId5"/>
-          <a:stretch>
-            <a:fillRect/>
-          </a:stretch>
-        </p:blipFill>
-        <p:spPr>
-          <a:xfrm>
-            <a:off x="4745736" y="1591056"/>
-            <a:ext cx="429768" cy="429768"/>
-          </a:xfrm>
-          <a:prstGeom prst="rect">
-            <a:avLst/>
-          </a:prstGeom>
-        </p:spPr>
-      </p:pic>
-      <p:sp>
-        <p:nvSpPr>
-          <p:cNvPr id="13" name="Recap text 3"/>
-          <p:cNvSpPr txBox="1"/>
-          <p:nvPr/>
-        </p:nvSpPr>
-        <p:spPr>
-          <a:xfrm>
-            <a:off x="4114800" y="2423160"/>
-            <a:ext cx="1691640" cy="1097280"/>
-          </a:xfrm>
-          <a:prstGeom prst="rect">
-            <a:avLst/>
-          </a:prstGeom>
-          <a:noFill/>
-          <a:ln/>
-        </p:spPr>
-        <p:txBody>
-          <a:bodyPr wrap="square" lIns="0" tIns="0" rIns="0" bIns="0" rtlCol="0" anchor="t"/>
-          <a:lstStyle/>
-          <a:p>
-            <a:pPr algn="ctr" indent="0" marL="0">
-              <a:buNone/>
-            </a:pPr>
-            <a:r>
-              <a:rPr lang="en-US" sz="1300" dirty="0">
-                <a:solidFill>
-                  <a:schemeClr val="accent4"/>
-                </a:solidFill>
-              </a:rPr>
-              <a:t>All shift long</a:t>
-            </a:r>
-            <a:endParaRPr lang="en-US" sz="1300" dirty="0"/>
-          </a:p>
-          <a:p>
-            <a:pPr algn="ctr" indent="0" marL="0">
-              <a:buNone/>
-            </a:pPr>
-            <a:r>
-              <a:rPr lang="en-US" sz="1700" b="1" dirty="0">
-                <a:solidFill>
-                  <a:schemeClr val="tx1"/>
-                </a:solidFill>
-              </a:rPr>
-              <a:t>Fix as you go</a:t>
-            </a:r>
-            <a:endParaRPr lang="en-US" sz="1300" dirty="0"/>
-          </a:p>
-        </p:txBody>
-      </p:sp>
-      <p:sp>
-        <p:nvSpPr>
-          <p:cNvPr id="14" name="Goal card"/>
-          <p:cNvSpPr/>
-          <p:nvPr/>
-        </p:nvSpPr>
-        <p:spPr>
-          <a:xfrm>
-            <a:off x="457200" y="3749040"/>
-            <a:ext cx="5394960" cy="777240"/>
+            <a:off x="457200" y="4251960"/>
+            <a:ext cx="5394960" cy="566928"/>
           </a:xfrm>
           <a:prstGeom prst="roundRect">
             <a:avLst>
-              <a:gd name="adj" fmla="val 11765"/>
+              <a:gd name="adj" fmla="val 16129"/>
             </a:avLst>
           </a:prstGeom>
           <a:solidFill>
@@ -6651,14 +6585,14 @@
       </p:sp>
       <p:sp>
         <p:nvSpPr>
-          <p:cNvPr id="15" name="Goal text"/>
+          <p:cNvPr id="10" name="Rule text"/>
           <p:cNvSpPr txBox="1"/>
           <p:nvPr/>
         </p:nvSpPr>
         <p:spPr>
           <a:xfrm>
-            <a:off x="731520" y="3749040"/>
-            <a:ext cx="4846320" cy="777240"/>
+            <a:off x="685800" y="4251960"/>
+            <a:ext cx="4937760" cy="566928"/>
           </a:xfrm>
           <a:prstGeom prst="rect">
             <a:avLst/>
@@ -6674,25 +6608,14 @@
               <a:buNone/>
             </a:pPr>
             <a:r>
-              <a:rPr lang="en-US" sz="1600" b="1" dirty="0">
-                <a:solidFill>
-                  <a:srgbClr val="9EDFF7"/>
-                </a:solidFill>
-              </a:rPr>
-              <a:t>Goal: </a:t>
-            </a:r>
-            <a:pPr indent="0" marL="0">
-              <a:buNone/>
-            </a:pPr>
-            <a:r>
-              <a:rPr lang="en-US" sz="1600" dirty="0">
+              <a:rPr lang="en-US" sz="1400" b="1" dirty="0">
                 <a:solidFill>
                   <a:schemeClr val="bg1"/>
                 </a:solidFill>
               </a:rPr>
-              <a:t>fewer units falling, lower wAPMT, happier customers.</a:t>
-            </a:r>
-            <a:endParaRPr lang="en-US" sz="1600" dirty="0"/>
+              <a:t>Use the cross method. The system won't always flag similar items on screen.</a:t>
+            </a:r>
+            <a:endParaRPr lang="en-US" sz="1400" dirty="0"/>
           </a:p>
         </p:txBody>
       </p:sp>
@@ -7088,6 +7011,468 @@
 <file path=ppt/slides/slide20.xml><?xml version="1.0" encoding="utf-8"?>
 <p:sld xmlns:a="http://schemas.openxmlformats.org/drawingml/2006/main" xmlns:r="http://schemas.openxmlformats.org/officeDocument/2006/relationships" xmlns:p="http://schemas.openxmlformats.org/presentationml/2006/main">
   <p:cSld name="Slide 20">
+    <p:spTree>
+      <p:nvGrpSpPr>
+        <p:cNvPr id="1" name=""/>
+        <p:cNvGrpSpPr/>
+        <p:nvPr/>
+      </p:nvGrpSpPr>
+      <p:grpSpPr>
+        <a:xfrm>
+          <a:off x="0" y="0"/>
+          <a:ext cx="0" cy="0"/>
+          <a:chOff x="0" y="0"/>
+          <a:chExt cx="0" cy="0"/>
+        </a:xfrm>
+      </p:grpSpPr>
+      <p:sp>
+        <p:nvSpPr>
+          <p:cNvPr id="2" name="Text 0"/>
+          <p:cNvSpPr/>
+          <p:nvPr>
+            <p:ph idx="101" type="title" hasCustomPrompt="1"/>
+          </p:nvPr>
+        </p:nvSpPr>
+        <p:spPr>
+          <a:xfrm>
+            <a:off x="457200" y="640080"/>
+            <a:ext cx="5394960" cy="548640"/>
+          </a:xfrm>
+          <a:prstGeom prst="rect">
+            <a:avLst/>
+          </a:prstGeom>
+          <a:noFill/>
+          <a:ln/>
+        </p:spPr>
+        <p:txBody>
+          <a:bodyPr wrap="square" lIns="0" tIns="0" rIns="0" bIns="0" rtlCol="0" anchor="ctr"/>
+          <a:lstStyle/>
+          <a:p>
+            <a:pPr algn="l" indent="0" marL="0">
+              <a:buNone/>
+            </a:pPr>
+            <a:r>
+              <a:rPr lang="en-US" sz="2800" b="1" dirty="0">
+                <a:solidFill>
+                  <a:schemeClr val="tx1"/>
+                </a:solidFill>
+              </a:rPr>
+              <a:t>Your shift, bin by bin</a:t>
+            </a:r>
+            <a:endParaRPr lang="en-US" sz="2800" dirty="0"/>
+          </a:p>
+        </p:txBody>
+      </p:sp>
+      <p:sp>
+        <p:nvSpPr>
+          <p:cNvPr id="3" name="Recap circle 1"/>
+          <p:cNvSpPr/>
+          <p:nvPr/>
+        </p:nvSpPr>
+        <p:spPr>
+          <a:xfrm>
+            <a:off x="868680" y="1371600"/>
+            <a:ext cx="868680" cy="868680"/>
+          </a:xfrm>
+          <a:prstGeom prst="ellipse">
+            <a:avLst/>
+          </a:prstGeom>
+          <a:solidFill>
+            <a:schemeClr val="accent1"/>
+          </a:solidFill>
+          <a:ln/>
+        </p:spPr>
+      </p:sp>
+      <p:pic>
+        <p:nvPicPr>
+          <p:cNvPr id="4" name="Recap icon 1" descr="preencoded.png">    </p:cNvPr>
+          <p:cNvPicPr>
+            <a:picLocks noChangeAspect="1"/>
+          </p:cNvPicPr>
+          <p:nvPr/>
+        </p:nvPicPr>
+        <p:blipFill>
+          <a:blip r:embed="rId1"/>
+          <a:stretch>
+            <a:fillRect/>
+          </a:stretch>
+        </p:blipFill>
+        <p:spPr>
+          <a:xfrm>
+            <a:off x="1088136" y="1591056"/>
+            <a:ext cx="429768" cy="429768"/>
+          </a:xfrm>
+          <a:prstGeom prst="rect">
+            <a:avLst/>
+          </a:prstGeom>
+        </p:spPr>
+      </p:pic>
+      <p:sp>
+        <p:nvSpPr>
+          <p:cNvPr id="5" name="Recap text 1"/>
+          <p:cNvSpPr txBox="1"/>
+          <p:nvPr/>
+        </p:nvSpPr>
+        <p:spPr>
+          <a:xfrm>
+            <a:off x="457200" y="2423160"/>
+            <a:ext cx="1691640" cy="1097280"/>
+          </a:xfrm>
+          <a:prstGeom prst="rect">
+            <a:avLst/>
+          </a:prstGeom>
+          <a:noFill/>
+          <a:ln/>
+        </p:spPr>
+        <p:txBody>
+          <a:bodyPr wrap="square" lIns="0" tIns="0" rIns="0" bIns="0" rtlCol="0" anchor="t"/>
+          <a:lstStyle/>
+          <a:p>
+            <a:pPr algn="ctr" indent="0" marL="0">
+              <a:buNone/>
+            </a:pPr>
+            <a:r>
+              <a:rPr lang="en-US" sz="1300" dirty="0">
+                <a:solidFill>
+                  <a:schemeClr val="accent4"/>
+                </a:solidFill>
+              </a:rPr>
+              <a:t>Shift start and after breaks</a:t>
+            </a:r>
+            <a:endParaRPr lang="en-US" sz="1300" dirty="0"/>
+          </a:p>
+          <a:p>
+            <a:pPr algn="ctr" indent="0" marL="0">
+              <a:buNone/>
+            </a:pPr>
+            <a:r>
+              <a:rPr lang="en-US" sz="1700" b="1" dirty="0">
+                <a:solidFill>
+                  <a:schemeClr val="tx1"/>
+                </a:solidFill>
+              </a:rPr>
+              <a:t>1-minute First Face Fix</a:t>
+            </a:r>
+            <a:endParaRPr lang="en-US" sz="1300" dirty="0"/>
+          </a:p>
+        </p:txBody>
+      </p:sp>
+      <p:pic>
+        <p:nvPicPr>
+          <p:cNvPr id="6" name="Arrow 1" descr="preencoded.png">    </p:cNvPr>
+          <p:cNvPicPr>
+            <a:picLocks noChangeAspect="1"/>
+          </p:cNvPicPr>
+          <p:nvPr/>
+        </p:nvPicPr>
+        <p:blipFill>
+          <a:blip r:embed="rId2"/>
+          <a:stretch>
+            <a:fillRect/>
+          </a:stretch>
+        </p:blipFill>
+        <p:spPr>
+          <a:xfrm>
+            <a:off x="2121408" y="1664208"/>
+            <a:ext cx="274320" cy="274320"/>
+          </a:xfrm>
+          <a:prstGeom prst="rect">
+            <a:avLst/>
+          </a:prstGeom>
+        </p:spPr>
+      </p:pic>
+      <p:sp>
+        <p:nvSpPr>
+          <p:cNvPr id="7" name="Recap circle 2"/>
+          <p:cNvSpPr/>
+          <p:nvPr/>
+        </p:nvSpPr>
+        <p:spPr>
+          <a:xfrm>
+            <a:off x="2697480" y="1371600"/>
+            <a:ext cx="868680" cy="868680"/>
+          </a:xfrm>
+          <a:prstGeom prst="ellipse">
+            <a:avLst/>
+          </a:prstGeom>
+          <a:solidFill>
+            <a:schemeClr val="accent1"/>
+          </a:solidFill>
+          <a:ln/>
+        </p:spPr>
+      </p:sp>
+      <p:pic>
+        <p:nvPicPr>
+          <p:cNvPr id="8" name="Recap icon 2" descr="preencoded.png">    </p:cNvPr>
+          <p:cNvPicPr>
+            <a:picLocks noChangeAspect="1"/>
+          </p:cNvPicPr>
+          <p:nvPr/>
+        </p:nvPicPr>
+        <p:blipFill>
+          <a:blip r:embed="rId3"/>
+          <a:stretch>
+            <a:fillRect/>
+          </a:stretch>
+        </p:blipFill>
+        <p:spPr>
+          <a:xfrm>
+            <a:off x="2916936" y="1591056"/>
+            <a:ext cx="429768" cy="429768"/>
+          </a:xfrm>
+          <a:prstGeom prst="rect">
+            <a:avLst/>
+          </a:prstGeom>
+        </p:spPr>
+      </p:pic>
+      <p:sp>
+        <p:nvSpPr>
+          <p:cNvPr id="9" name="Recap text 2"/>
+          <p:cNvSpPr txBox="1"/>
+          <p:nvPr/>
+        </p:nvSpPr>
+        <p:spPr>
+          <a:xfrm>
+            <a:off x="2286000" y="2423160"/>
+            <a:ext cx="1691640" cy="1097280"/>
+          </a:xfrm>
+          <a:prstGeom prst="rect">
+            <a:avLst/>
+          </a:prstGeom>
+          <a:noFill/>
+          <a:ln/>
+        </p:spPr>
+        <p:txBody>
+          <a:bodyPr wrap="square" lIns="0" tIns="0" rIns="0" bIns="0" rtlCol="0" anchor="t"/>
+          <a:lstStyle/>
+          <a:p>
+            <a:pPr algn="ctr" indent="0" marL="0">
+              <a:buNone/>
+            </a:pPr>
+            <a:r>
+              <a:rPr lang="en-US" sz="1300" dirty="0">
+                <a:solidFill>
+                  <a:schemeClr val="accent4"/>
+                </a:solidFill>
+              </a:rPr>
+              <a:t>Every bin you touch</a:t>
+            </a:r>
+            <a:endParaRPr lang="en-US" sz="1300" dirty="0"/>
+          </a:p>
+          <a:p>
+            <a:pPr algn="ctr" indent="0" marL="0">
+              <a:buNone/>
+            </a:pPr>
+            <a:r>
+              <a:rPr lang="en-US" sz="1700" b="1" dirty="0">
+                <a:solidFill>
+                  <a:schemeClr val="tx1"/>
+                </a:solidFill>
+              </a:rPr>
+              <a:t>Apply ROBOTSS</a:t>
+            </a:r>
+            <a:endParaRPr lang="en-US" sz="1300" dirty="0"/>
+          </a:p>
+        </p:txBody>
+      </p:sp>
+      <p:pic>
+        <p:nvPicPr>
+          <p:cNvPr id="10" name="Arrow 2" descr="preencoded.png">    </p:cNvPr>
+          <p:cNvPicPr>
+            <a:picLocks noChangeAspect="1"/>
+          </p:cNvPicPr>
+          <p:nvPr/>
+        </p:nvPicPr>
+        <p:blipFill>
+          <a:blip r:embed="rId4"/>
+          <a:stretch>
+            <a:fillRect/>
+          </a:stretch>
+        </p:blipFill>
+        <p:spPr>
+          <a:xfrm>
+            <a:off x="3950208" y="1664208"/>
+            <a:ext cx="274320" cy="274320"/>
+          </a:xfrm>
+          <a:prstGeom prst="rect">
+            <a:avLst/>
+          </a:prstGeom>
+        </p:spPr>
+      </p:pic>
+      <p:sp>
+        <p:nvSpPr>
+          <p:cNvPr id="11" name="Recap circle 3"/>
+          <p:cNvSpPr/>
+          <p:nvPr/>
+        </p:nvSpPr>
+        <p:spPr>
+          <a:xfrm>
+            <a:off x="4526280" y="1371600"/>
+            <a:ext cx="868680" cy="868680"/>
+          </a:xfrm>
+          <a:prstGeom prst="ellipse">
+            <a:avLst/>
+          </a:prstGeom>
+          <a:solidFill>
+            <a:schemeClr val="accent1"/>
+          </a:solidFill>
+          <a:ln/>
+        </p:spPr>
+      </p:sp>
+      <p:pic>
+        <p:nvPicPr>
+          <p:cNvPr id="12" name="Recap icon 3" descr="preencoded.png">    </p:cNvPr>
+          <p:cNvPicPr>
+            <a:picLocks noChangeAspect="1"/>
+          </p:cNvPicPr>
+          <p:nvPr/>
+        </p:nvPicPr>
+        <p:blipFill>
+          <a:blip r:embed="rId5"/>
+          <a:stretch>
+            <a:fillRect/>
+          </a:stretch>
+        </p:blipFill>
+        <p:spPr>
+          <a:xfrm>
+            <a:off x="4745736" y="1591056"/>
+            <a:ext cx="429768" cy="429768"/>
+          </a:xfrm>
+          <a:prstGeom prst="rect">
+            <a:avLst/>
+          </a:prstGeom>
+        </p:spPr>
+      </p:pic>
+      <p:sp>
+        <p:nvSpPr>
+          <p:cNvPr id="13" name="Recap text 3"/>
+          <p:cNvSpPr txBox="1"/>
+          <p:nvPr/>
+        </p:nvSpPr>
+        <p:spPr>
+          <a:xfrm>
+            <a:off x="4114800" y="2423160"/>
+            <a:ext cx="1691640" cy="1097280"/>
+          </a:xfrm>
+          <a:prstGeom prst="rect">
+            <a:avLst/>
+          </a:prstGeom>
+          <a:noFill/>
+          <a:ln/>
+        </p:spPr>
+        <p:txBody>
+          <a:bodyPr wrap="square" lIns="0" tIns="0" rIns="0" bIns="0" rtlCol="0" anchor="t"/>
+          <a:lstStyle/>
+          <a:p>
+            <a:pPr algn="ctr" indent="0" marL="0">
+              <a:buNone/>
+            </a:pPr>
+            <a:r>
+              <a:rPr lang="en-US" sz="1300" dirty="0">
+                <a:solidFill>
+                  <a:schemeClr val="accent4"/>
+                </a:solidFill>
+              </a:rPr>
+              <a:t>All shift long</a:t>
+            </a:r>
+            <a:endParaRPr lang="en-US" sz="1300" dirty="0"/>
+          </a:p>
+          <a:p>
+            <a:pPr algn="ctr" indent="0" marL="0">
+              <a:buNone/>
+            </a:pPr>
+            <a:r>
+              <a:rPr lang="en-US" sz="1700" b="1" dirty="0">
+                <a:solidFill>
+                  <a:schemeClr val="tx1"/>
+                </a:solidFill>
+              </a:rPr>
+              <a:t>Fix as you go</a:t>
+            </a:r>
+            <a:endParaRPr lang="en-US" sz="1300" dirty="0"/>
+          </a:p>
+        </p:txBody>
+      </p:sp>
+      <p:sp>
+        <p:nvSpPr>
+          <p:cNvPr id="14" name="Goal card"/>
+          <p:cNvSpPr/>
+          <p:nvPr/>
+        </p:nvSpPr>
+        <p:spPr>
+          <a:xfrm>
+            <a:off x="457200" y="3749040"/>
+            <a:ext cx="5394960" cy="777240"/>
+          </a:xfrm>
+          <a:prstGeom prst="roundRect">
+            <a:avLst>
+              <a:gd name="adj" fmla="val 11765"/>
+            </a:avLst>
+          </a:prstGeom>
+          <a:solidFill>
+            <a:schemeClr val="tx2"/>
+          </a:solidFill>
+          <a:ln/>
+        </p:spPr>
+      </p:sp>
+      <p:sp>
+        <p:nvSpPr>
+          <p:cNvPr id="15" name="Goal text"/>
+          <p:cNvSpPr txBox="1"/>
+          <p:nvPr/>
+        </p:nvSpPr>
+        <p:spPr>
+          <a:xfrm>
+            <a:off x="731520" y="3749040"/>
+            <a:ext cx="4846320" cy="777240"/>
+          </a:xfrm>
+          <a:prstGeom prst="rect">
+            <a:avLst/>
+          </a:prstGeom>
+          <a:noFill/>
+          <a:ln/>
+        </p:spPr>
+        <p:txBody>
+          <a:bodyPr wrap="square" lIns="0" tIns="0" rIns="0" bIns="0" rtlCol="0" anchor="ctr"/>
+          <a:lstStyle/>
+          <a:p>
+            <a:pPr indent="0" marL="0">
+              <a:buNone/>
+            </a:pPr>
+            <a:r>
+              <a:rPr lang="en-US" sz="1600" b="1" dirty="0">
+                <a:solidFill>
+                  <a:srgbClr val="9EDFF7"/>
+                </a:solidFill>
+              </a:rPr>
+              <a:t>Goal: </a:t>
+            </a:r>
+            <a:pPr indent="0" marL="0">
+              <a:buNone/>
+            </a:pPr>
+            <a:r>
+              <a:rPr lang="en-US" sz="1600" dirty="0">
+                <a:solidFill>
+                  <a:schemeClr val="bg1"/>
+                </a:solidFill>
+              </a:rPr>
+              <a:t>fewer units falling, lower wAPMT, happier customers.</a:t>
+            </a:r>
+            <a:endParaRPr lang="en-US" sz="1600" dirty="0"/>
+          </a:p>
+        </p:txBody>
+      </p:sp>
+    </p:spTree>
+  </p:cSld>
+  <p:clrMapOvr>
+    <a:masterClrMapping/>
+  </p:clrMapOvr>
+</p:sld>
+</file>
+
+<file path=ppt/slides/slide21.xml><?xml version="1.0" encoding="utf-8"?>
+<p:sld xmlns:a="http://schemas.openxmlformats.org/drawingml/2006/main" xmlns:r="http://schemas.openxmlformats.org/officeDocument/2006/relationships" xmlns:p="http://schemas.openxmlformats.org/presentationml/2006/main">
+  <p:cSld name="Slide 21">
     <p:spTree>
       <p:nvGrpSpPr>
         <p:cNvPr id="1" name=""/>
@@ -7838,7 +8223,7 @@
                   <a:schemeClr val="tx1"/>
                 </a:solidFill>
               </a:rPr>
-              <a:t>Not picked yet</a:t>
+              <a:t>Stowed, not picked yet</a:t>
             </a:r>
             <a:endParaRPr lang="en-US" sz="1800" dirty="0"/>
           </a:p>
@@ -8042,7 +8427,7 @@
                   <a:schemeClr val="tx1"/>
                 </a:solidFill>
               </a:rPr>
-              <a:t>Already picked</a:t>
+              <a:t>Not stowed yet</a:t>
             </a:r>
             <a:endParaRPr lang="en-US" sz="1800" dirty="0"/>
           </a:p>
@@ -8060,7 +8445,7 @@
                   <a:schemeClr val="accent4"/>
                 </a:solidFill>
               </a:rPr>
-              <a:t>Belongs in a tote, rebin location or chute</a:t>
+              <a:t>Still belongs in a stow tote or cart</a:t>
             </a:r>
             <a:endParaRPr lang="en-US" sz="1800" dirty="0"/>
           </a:p>
@@ -8078,7 +8463,7 @@
                   <a:schemeClr val="accent4"/>
                 </a:solidFill>
               </a:rPr>
-              <a:t>Fell or was put in the wrong place</a:t>
+              <a:t>Fell or was left before it was stowed</a:t>
             </a:r>
             <a:endParaRPr lang="en-US" sz="1800" dirty="0"/>
           </a:p>
@@ -8125,7 +8510,7 @@
                   <a:schemeClr val="accent3"/>
                 </a:solidFill>
               </a:rPr>
-              <a:t>Outbound problem solve</a:t>
+              <a:t>Inbound problem solve</a:t>
             </a:r>
             <a:endParaRPr lang="en-US" sz="1500" dirty="0"/>
           </a:p>
@@ -8183,7 +8568,7 @@
                   <a:schemeClr val="bg1"/>
                 </a:solidFill>
               </a:rPr>
-              <a:t>Putting picked items into amnesty over-inflates wAPMT and hides the real outbound problem.</a:t>
+              <a:t>Putting unstowed items into amnesty over-inflates wAPMT and hides the real inbound problem.</a:t>
             </a:r>
             <a:endParaRPr lang="en-US" sz="1500" dirty="0"/>
           </a:p>
@@ -8216,54 +8601,391 @@
       </p:grpSpPr>
       <p:sp>
         <p:nvSpPr>
-          <p:cNvPr id="2" name="Text 1"/>
+          <p:cNvPr id="2" name="Text 0"/>
           <p:cNvSpPr/>
           <p:nvPr>
-            <p:ph idx="102" type="body" hasCustomPrompt="1"/>
+            <p:ph idx="101" type="title" hasCustomPrompt="1"/>
           </p:nvPr>
         </p:nvSpPr>
         <p:spPr>
           <a:xfrm>
-            <a:off x="2514600" y="502920"/>
-            <a:ext cx="6400800" cy="320040"/>
-          </a:xfrm>
-          <a:prstGeom prst="rect">
-            <a:avLst/>
-          </a:prstGeom>
-          <a:noFill/>
-          <a:ln/>
-        </p:spPr>
-        <p:txBody>
-          <a:bodyPr wrap="square" lIns="0" tIns="0" rIns="0" bIns="0" rtlCol="0"/>
+            <a:off x="457200" y="640080"/>
+            <a:ext cx="5394960" cy="548640"/>
+          </a:xfrm>
+          <a:prstGeom prst="rect">
+            <a:avLst/>
+          </a:prstGeom>
+          <a:noFill/>
+          <a:ln/>
+        </p:spPr>
+        <p:txBody>
+          <a:bodyPr wrap="square" lIns="0" tIns="0" rIns="0" bIns="0" rtlCol="0" anchor="ctr"/>
+          <a:lstStyle/>
+          <a:p>
+            <a:pPr algn="l" indent="0" marL="0">
+              <a:buNone/>
+            </a:pPr>
+            <a:r>
+              <a:rPr lang="en-US" sz="2800" b="1" dirty="0">
+                <a:solidFill>
+                  <a:schemeClr val="tx1"/>
+                </a:solidFill>
+              </a:rPr>
+              <a:t>One question to ask</a:t>
+            </a:r>
+            <a:endParaRPr lang="en-US" sz="2800" dirty="0"/>
+          </a:p>
+        </p:txBody>
+      </p:sp>
+      <p:sp>
+        <p:nvSpPr>
+          <p:cNvPr id="3" name="Start box"/>
+          <p:cNvSpPr/>
+          <p:nvPr/>
+        </p:nvSpPr>
+        <p:spPr>
+          <a:xfrm>
+            <a:off x="1783080" y="1325880"/>
+            <a:ext cx="2743200" cy="548640"/>
+          </a:xfrm>
+          <a:prstGeom prst="roundRect">
+            <a:avLst>
+              <a:gd name="adj" fmla="val 16667"/>
+            </a:avLst>
+          </a:prstGeom>
+          <a:solidFill>
+            <a:schemeClr val="tx2"/>
+          </a:solidFill>
+          <a:ln/>
+        </p:spPr>
+      </p:sp>
+      <p:sp>
+        <p:nvSpPr>
+          <p:cNvPr id="4" name="Start text"/>
+          <p:cNvSpPr txBox="1"/>
+          <p:nvPr/>
+        </p:nvSpPr>
+        <p:spPr>
+          <a:xfrm>
+            <a:off x="1783080" y="1325880"/>
+            <a:ext cx="2743200" cy="548640"/>
+          </a:xfrm>
+          <a:prstGeom prst="rect">
+            <a:avLst/>
+          </a:prstGeom>
+          <a:noFill/>
+          <a:ln/>
+        </p:spPr>
+        <p:txBody>
+          <a:bodyPr wrap="square" lIns="0" tIns="0" rIns="0" bIns="0" rtlCol="0" anchor="ctr"/>
           <a:lstStyle/>
           <a:p>
             <a:pPr algn="ctr" indent="0" marL="0">
               <a:buNone/>
             </a:pPr>
             <a:r>
-              <a:rPr lang="en-US" sz="1300" b="1" spc="300" kern="0" dirty="0">
+              <a:rPr lang="en-US" sz="1500" dirty="0">
+                <a:solidFill>
+                  <a:schemeClr val="bg1"/>
+                </a:solidFill>
+              </a:rPr>
+              <a:t>You find an item out of place</a:t>
+            </a:r>
+            <a:endParaRPr lang="en-US" sz="1500" dirty="0"/>
+          </a:p>
+        </p:txBody>
+      </p:sp>
+      <p:sp>
+        <p:nvSpPr>
+          <p:cNvPr id="5" name="Line 1"/>
+          <p:cNvSpPr/>
+          <p:nvPr/>
+        </p:nvSpPr>
+        <p:spPr>
+          <a:xfrm>
+            <a:off x="3154680" y="1874520"/>
+            <a:ext cx="0" cy="228600"/>
+          </a:xfrm>
+          <a:prstGeom prst="line">
+            <a:avLst/>
+          </a:prstGeom>
+          <a:noFill/>
+          <a:ln w="25400">
+            <a:solidFill>
+              <a:srgbClr val="9AA6B2"/>
+            </a:solidFill>
+            <a:prstDash val="solid"/>
+          </a:ln>
+        </p:spPr>
+      </p:sp>
+      <p:sp>
+        <p:nvSpPr>
+          <p:cNvPr id="6" name="Question box"/>
+          <p:cNvSpPr/>
+          <p:nvPr/>
+        </p:nvSpPr>
+        <p:spPr>
+          <a:xfrm>
+            <a:off x="1554480" y="2103120"/>
+            <a:ext cx="3200400" cy="685800"/>
+          </a:xfrm>
+          <a:prstGeom prst="roundRect">
+            <a:avLst>
+              <a:gd name="adj" fmla="val 13333"/>
+            </a:avLst>
+          </a:prstGeom>
+          <a:solidFill>
+            <a:schemeClr val="accent1"/>
+          </a:solidFill>
+          <a:ln/>
+        </p:spPr>
+      </p:sp>
+      <p:sp>
+        <p:nvSpPr>
+          <p:cNvPr id="7" name="Question text"/>
+          <p:cNvSpPr txBox="1"/>
+          <p:nvPr/>
+        </p:nvSpPr>
+        <p:spPr>
+          <a:xfrm>
+            <a:off x="1554480" y="2103120"/>
+            <a:ext cx="3200400" cy="685800"/>
+          </a:xfrm>
+          <a:prstGeom prst="rect">
+            <a:avLst/>
+          </a:prstGeom>
+          <a:noFill/>
+          <a:ln/>
+        </p:spPr>
+        <p:txBody>
+          <a:bodyPr wrap="square" lIns="0" tIns="0" rIns="0" bIns="0" rtlCol="0" anchor="ctr"/>
+          <a:lstStyle/>
+          <a:p>
+            <a:pPr algn="ctr" indent="0" marL="0">
+              <a:buNone/>
+            </a:pPr>
+            <a:r>
+              <a:rPr lang="en-US" sz="1800" b="1" dirty="0">
+                <a:solidFill>
+                  <a:schemeClr val="bg1"/>
+                </a:solidFill>
+              </a:rPr>
+              <a:t>Has it been stowed yet?</a:t>
+            </a:r>
+            <a:endParaRPr lang="en-US" sz="1800" dirty="0"/>
+          </a:p>
+        </p:txBody>
+      </p:sp>
+      <p:sp>
+        <p:nvSpPr>
+          <p:cNvPr id="8" name="Line 2"/>
+          <p:cNvSpPr/>
+          <p:nvPr/>
+        </p:nvSpPr>
+        <p:spPr>
+          <a:xfrm>
+            <a:off x="3154680" y="2788920"/>
+            <a:ext cx="0" cy="228600"/>
+          </a:xfrm>
+          <a:prstGeom prst="line">
+            <a:avLst/>
+          </a:prstGeom>
+          <a:noFill/>
+          <a:ln w="25400">
+            <a:solidFill>
+              <a:srgbClr val="9AA6B2"/>
+            </a:solidFill>
+            <a:prstDash val="solid"/>
+          </a:ln>
+        </p:spPr>
+      </p:sp>
+      <p:sp>
+        <p:nvSpPr>
+          <p:cNvPr id="9" name="Line 3"/>
+          <p:cNvSpPr/>
+          <p:nvPr/>
+        </p:nvSpPr>
+        <p:spPr>
+          <a:xfrm>
+            <a:off x="1783080" y="3017520"/>
+            <a:ext cx="2743200" cy="0"/>
+          </a:xfrm>
+          <a:prstGeom prst="line">
+            <a:avLst/>
+          </a:prstGeom>
+          <a:noFill/>
+          <a:ln w="25400">
+            <a:solidFill>
+              <a:srgbClr val="9AA6B2"/>
+            </a:solidFill>
+            <a:prstDash val="solid"/>
+          </a:ln>
+        </p:spPr>
+      </p:sp>
+      <p:sp>
+        <p:nvSpPr>
+          <p:cNvPr id="10" name="Line 4"/>
+          <p:cNvSpPr/>
+          <p:nvPr/>
+        </p:nvSpPr>
+        <p:spPr>
+          <a:xfrm>
+            <a:off x="1783080" y="3017520"/>
+            <a:ext cx="0" cy="228600"/>
+          </a:xfrm>
+          <a:prstGeom prst="line">
+            <a:avLst/>
+          </a:prstGeom>
+          <a:noFill/>
+          <a:ln w="25400">
+            <a:solidFill>
+              <a:srgbClr val="9AA6B2"/>
+            </a:solidFill>
+            <a:prstDash val="solid"/>
+          </a:ln>
+        </p:spPr>
+      </p:sp>
+      <p:sp>
+        <p:nvSpPr>
+          <p:cNvPr id="11" name="Line 5"/>
+          <p:cNvSpPr/>
+          <p:nvPr/>
+        </p:nvSpPr>
+        <p:spPr>
+          <a:xfrm>
+            <a:off x="4526280" y="3017520"/>
+            <a:ext cx="0" cy="228600"/>
+          </a:xfrm>
+          <a:prstGeom prst="line">
+            <a:avLst/>
+          </a:prstGeom>
+          <a:noFill/>
+          <a:ln w="25400">
+            <a:solidFill>
+              <a:srgbClr val="9AA6B2"/>
+            </a:solidFill>
+            <a:prstDash val="solid"/>
+          </a:ln>
+        </p:spPr>
+      </p:sp>
+      <p:sp>
+        <p:nvSpPr>
+          <p:cNvPr id="12" name="Outcome 1"/>
+          <p:cNvSpPr/>
+          <p:nvPr/>
+        </p:nvSpPr>
+        <p:spPr>
+          <a:xfrm>
+            <a:off x="457200" y="3246120"/>
+            <a:ext cx="2651760" cy="1280160"/>
+          </a:xfrm>
+          <a:prstGeom prst="roundRect">
+            <a:avLst>
+              <a:gd name="adj" fmla="val 7143"/>
+            </a:avLst>
+          </a:prstGeom>
+          <a:solidFill>
+            <a:schemeClr val="bg1"/>
+          </a:solidFill>
+          <a:ln/>
+        </p:spPr>
+      </p:sp>
+      <p:sp>
+        <p:nvSpPr>
+          <p:cNvPr id="13" name="Outcome text 1"/>
+          <p:cNvSpPr txBox="1"/>
+          <p:nvPr/>
+        </p:nvSpPr>
+        <p:spPr>
+          <a:xfrm>
+            <a:off x="640080" y="3246120"/>
+            <a:ext cx="2286000" cy="1280160"/>
+          </a:xfrm>
+          <a:prstGeom prst="rect">
+            <a:avLst/>
+          </a:prstGeom>
+          <a:noFill/>
+          <a:ln/>
+        </p:spPr>
+        <p:txBody>
+          <a:bodyPr wrap="square" lIns="0" tIns="0" rIns="0" bIns="0" rtlCol="0" anchor="ctr"/>
+          <a:lstStyle/>
+          <a:p>
+            <a:pPr algn="ctr" indent="0" marL="0">
+              <a:buNone/>
+            </a:pPr>
+            <a:r>
+              <a:rPr lang="en-US" sz="1300" b="1" spc="200" kern="0" dirty="0">
+                <a:solidFill>
+                  <a:schemeClr val="accent4"/>
+                </a:solidFill>
+              </a:rPr>
+              <a:t>YES</a:t>
+            </a:r>
+            <a:endParaRPr lang="en-US" sz="1300" dirty="0"/>
+          </a:p>
+          <a:p>
+            <a:pPr algn="ctr" indent="0" marL="0">
+              <a:buNone/>
+            </a:pPr>
+            <a:r>
+              <a:rPr lang="en-US" sz="1800" b="1" dirty="0">
                 <a:solidFill>
                   <a:schemeClr val="accent6"/>
                 </a:solidFill>
               </a:rPr>
-              <a:t>PART 1</a:t>
+              <a:t>Amnesty</a:t>
             </a:r>
             <a:endParaRPr lang="en-US" sz="1300" dirty="0"/>
           </a:p>
-        </p:txBody>
-      </p:sp>
-      <p:sp>
-        <p:nvSpPr>
-          <p:cNvPr id="3" name="Text 1"/>
+          <a:p>
+            <a:pPr algn="ctr" indent="0" marL="0">
+              <a:buNone/>
+            </a:pPr>
+            <a:r>
+              <a:rPr lang="en-US" sz="1400" dirty="0">
+                <a:solidFill>
+                  <a:schemeClr val="tx1"/>
+                </a:solidFill>
+              </a:rPr>
+              <a:t>It belongs in a stowed pod bin</a:t>
+            </a:r>
+            <a:endParaRPr lang="en-US" sz="1300" dirty="0"/>
+          </a:p>
+        </p:txBody>
+      </p:sp>
+      <p:sp>
+        <p:nvSpPr>
+          <p:cNvPr id="14" name="Outcome 2"/>
           <p:cNvSpPr/>
-          <p:nvPr>
-            <p:ph idx="103" type="title" hasCustomPrompt="1"/>
-          </p:nvPr>
-        </p:nvSpPr>
-        <p:spPr>
-          <a:xfrm>
-            <a:off x="2514600" y="868680"/>
-            <a:ext cx="6400800" cy="868680"/>
+          <p:nvPr/>
+        </p:nvSpPr>
+        <p:spPr>
+          <a:xfrm>
+            <a:off x="3200400" y="3246120"/>
+            <a:ext cx="2651760" cy="1280160"/>
+          </a:xfrm>
+          <a:prstGeom prst="roundRect">
+            <a:avLst>
+              <a:gd name="adj" fmla="val 7143"/>
+            </a:avLst>
+          </a:prstGeom>
+          <a:solidFill>
+            <a:srgbClr val="FBECEC"/>
+          </a:solidFill>
+          <a:ln/>
+        </p:spPr>
+      </p:sp>
+      <p:sp>
+        <p:nvSpPr>
+          <p:cNvPr id="15" name="Outcome text 2"/>
+          <p:cNvSpPr txBox="1"/>
+          <p:nvPr/>
+        </p:nvSpPr>
+        <p:spPr>
+          <a:xfrm>
+            <a:off x="3383280" y="3246120"/>
+            <a:ext cx="2286000" cy="1280160"/>
           </a:xfrm>
           <a:prstGeom prst="rect">
             <a:avLst/>
@@ -8279,52 +9001,42 @@
               <a:buNone/>
             </a:pPr>
             <a:r>
-              <a:rPr lang="en-US" sz="3600" b="1" dirty="0">
+              <a:rPr lang="en-US" sz="1300" b="1" spc="200" kern="0" dirty="0">
+                <a:solidFill>
+                  <a:schemeClr val="accent4"/>
+                </a:solidFill>
+              </a:rPr>
+              <a:t>NO</a:t>
+            </a:r>
+            <a:endParaRPr lang="en-US" sz="1300" dirty="0"/>
+          </a:p>
+          <a:p>
+            <a:pPr algn="ctr" indent="0" marL="0">
+              <a:buNone/>
+            </a:pPr>
+            <a:r>
+              <a:rPr lang="en-US" sz="1800" b="1" dirty="0">
+                <a:solidFill>
+                  <a:schemeClr val="accent3"/>
+                </a:solidFill>
+              </a:rPr>
+              <a:t>Inbound problem solve</a:t>
+            </a:r>
+            <a:endParaRPr lang="en-US" sz="1300" dirty="0"/>
+          </a:p>
+          <a:p>
+            <a:pPr algn="ctr" indent="0" marL="0">
+              <a:buNone/>
+            </a:pPr>
+            <a:r>
+              <a:rPr lang="en-US" sz="1400" dirty="0">
                 <a:solidFill>
                   <a:schemeClr val="tx1"/>
                 </a:solidFill>
               </a:rPr>
-              <a:t>First Face Fix</a:t>
-            </a:r>
-            <a:endParaRPr lang="en-US" sz="3600" dirty="0"/>
-          </a:p>
-        </p:txBody>
-      </p:sp>
-      <p:sp>
-        <p:nvSpPr>
-          <p:cNvPr id="4" name="Text 1"/>
-          <p:cNvSpPr/>
-          <p:nvPr>
-            <p:ph idx="104" type="body" hasCustomPrompt="1"/>
-          </p:nvPr>
-        </p:nvSpPr>
-        <p:spPr>
-          <a:xfrm>
-            <a:off x="2971800" y="1783080"/>
-            <a:ext cx="5486400" cy="685800"/>
-          </a:xfrm>
-          <a:prstGeom prst="rect">
-            <a:avLst/>
-          </a:prstGeom>
-          <a:noFill/>
-          <a:ln/>
-        </p:spPr>
-        <p:txBody>
-          <a:bodyPr wrap="square" lIns="0" tIns="0" rIns="0" bIns="0" rtlCol="0" anchor="t"/>
-          <a:lstStyle/>
-          <a:p>
-            <a:pPr algn="ctr" indent="0" marL="0">
-              <a:buNone/>
-            </a:pPr>
-            <a:r>
-              <a:rPr lang="en-US" sz="1600" dirty="0">
-                <a:solidFill>
-                  <a:schemeClr val="accent4"/>
-                </a:solidFill>
-              </a:rPr>
-              <a:t>One minute. The first pod face. Every shift start and after every break.</a:t>
-            </a:r>
-            <a:endParaRPr lang="en-US" sz="1600" dirty="0"/>
+              <a:t>Not amnesty: it never made it into a pod bin</a:t>
+            </a:r>
+            <a:endParaRPr lang="en-US" sz="1300" dirty="0"/>
           </a:p>
         </p:txBody>
       </p:sp>
@@ -8355,16 +9067,54 @@
       </p:grpSpPr>
       <p:sp>
         <p:nvSpPr>
-          <p:cNvPr id="2" name="Text 0"/>
+          <p:cNvPr id="2" name="Text 1"/>
           <p:cNvSpPr/>
           <p:nvPr>
-            <p:ph idx="101" type="title" hasCustomPrompt="1"/>
+            <p:ph idx="102" type="body" hasCustomPrompt="1"/>
           </p:nvPr>
         </p:nvSpPr>
         <p:spPr>
           <a:xfrm>
-            <a:off x="457200" y="640080"/>
-            <a:ext cx="5394960" cy="548640"/>
+            <a:off x="2514600" y="502920"/>
+            <a:ext cx="6400800" cy="320040"/>
+          </a:xfrm>
+          <a:prstGeom prst="rect">
+            <a:avLst/>
+          </a:prstGeom>
+          <a:noFill/>
+          <a:ln/>
+        </p:spPr>
+        <p:txBody>
+          <a:bodyPr wrap="square" lIns="0" tIns="0" rIns="0" bIns="0" rtlCol="0"/>
+          <a:lstStyle/>
+          <a:p>
+            <a:pPr algn="ctr" indent="0" marL="0">
+              <a:buNone/>
+            </a:pPr>
+            <a:r>
+              <a:rPr lang="en-US" sz="1300" b="1" spc="300" kern="0" dirty="0">
+                <a:solidFill>
+                  <a:schemeClr val="accent6"/>
+                </a:solidFill>
+              </a:rPr>
+              <a:t>PART 1</a:t>
+            </a:r>
+            <a:endParaRPr lang="en-US" sz="1300" dirty="0"/>
+          </a:p>
+        </p:txBody>
+      </p:sp>
+      <p:sp>
+        <p:nvSpPr>
+          <p:cNvPr id="3" name="Text 1"/>
+          <p:cNvSpPr/>
+          <p:nvPr>
+            <p:ph idx="103" type="title" hasCustomPrompt="1"/>
+          </p:nvPr>
+        </p:nvSpPr>
+        <p:spPr>
+          <a:xfrm>
+            <a:off x="2514600" y="868680"/>
+            <a:ext cx="6400800" cy="868680"/>
           </a:xfrm>
           <a:prstGeom prst="rect">
             <a:avLst/>
@@ -8376,312 +9126,56 @@
           <a:bodyPr wrap="square" lIns="0" tIns="0" rIns="0" bIns="0" rtlCol="0" anchor="ctr"/>
           <a:lstStyle/>
           <a:p>
-            <a:pPr algn="l" indent="0" marL="0">
-              <a:buNone/>
-            </a:pPr>
-            <a:r>
-              <a:rPr lang="en-US" sz="2800" b="1" dirty="0">
+            <a:pPr algn="ctr" indent="0" marL="0">
+              <a:buNone/>
+            </a:pPr>
+            <a:r>
+              <a:rPr lang="en-US" sz="3600" b="1" dirty="0">
                 <a:solidFill>
                   <a:schemeClr val="tx1"/>
                 </a:solidFill>
               </a:rPr>
-              <a:t>What is First Face Fix?</a:t>
-            </a:r>
-            <a:endParaRPr lang="en-US" sz="2800" dirty="0"/>
-          </a:p>
-        </p:txBody>
-      </p:sp>
-      <p:sp>
-        <p:nvSpPr>
-          <p:cNvPr id="3" name="Stat card"/>
+              <a:t>First Face Fix</a:t>
+            </a:r>
+            <a:endParaRPr lang="en-US" sz="3600" dirty="0"/>
+          </a:p>
+        </p:txBody>
+      </p:sp>
+      <p:sp>
+        <p:nvSpPr>
+          <p:cNvPr id="4" name="Text 1"/>
           <p:cNvSpPr/>
-          <p:nvPr/>
-        </p:nvSpPr>
-        <p:spPr>
-          <a:xfrm>
-            <a:off x="457200" y="1325880"/>
-            <a:ext cx="2011680" cy="3200400"/>
-          </a:xfrm>
-          <a:prstGeom prst="roundRect">
-            <a:avLst>
-              <a:gd name="adj" fmla="val 4545"/>
-            </a:avLst>
-          </a:prstGeom>
-          <a:solidFill>
-            <a:schemeClr val="tx2"/>
-          </a:solidFill>
-          <a:ln/>
-        </p:spPr>
-      </p:sp>
-      <p:sp>
-        <p:nvSpPr>
-          <p:cNvPr id="4" name="Stat"/>
-          <p:cNvSpPr txBox="1"/>
-          <p:nvPr/>
-        </p:nvSpPr>
-        <p:spPr>
-          <a:xfrm>
-            <a:off x="685800" y="1325880"/>
-            <a:ext cx="1554480" cy="3200400"/>
-          </a:xfrm>
-          <a:prstGeom prst="rect">
-            <a:avLst/>
-          </a:prstGeom>
-          <a:noFill/>
-          <a:ln/>
-        </p:spPr>
-        <p:txBody>
-          <a:bodyPr wrap="square" lIns="0" tIns="0" rIns="0" bIns="0" rtlCol="0" anchor="ctr"/>
-          <a:lstStyle/>
-          <a:p>
-            <a:pPr indent="0" marL="0">
-              <a:buNone/>
-            </a:pPr>
-            <a:r>
-              <a:rPr lang="en-US" sz="7200" b="1" dirty="0">
-                <a:solidFill>
-                  <a:schemeClr val="accent1"/>
-                </a:solidFill>
-              </a:rPr>
-              <a:t>1</a:t>
-            </a:r>
-            <a:endParaRPr lang="en-US" sz="7200" dirty="0"/>
-          </a:p>
-          <a:p>
-            <a:pPr indent="0" marL="0">
+          <p:nvPr>
+            <p:ph idx="104" type="body" hasCustomPrompt="1"/>
+          </p:nvPr>
+        </p:nvSpPr>
+        <p:spPr>
+          <a:xfrm>
+            <a:off x="2971800" y="1783080"/>
+            <a:ext cx="5486400" cy="685800"/>
+          </a:xfrm>
+          <a:prstGeom prst="rect">
+            <a:avLst/>
+          </a:prstGeom>
+          <a:noFill/>
+          <a:ln/>
+        </p:spPr>
+        <p:txBody>
+          <a:bodyPr wrap="square" lIns="0" tIns="0" rIns="0" bIns="0" rtlCol="0" anchor="t"/>
+          <a:lstStyle/>
+          <a:p>
+            <a:pPr algn="ctr" indent="0" marL="0">
               <a:buNone/>
             </a:pPr>
             <a:r>
               <a:rPr lang="en-US" sz="1600" dirty="0">
                 <a:solidFill>
-                  <a:schemeClr val="bg1"/>
-                </a:solidFill>
-              </a:rPr>
-              <a:t>minute to fix the first pod face</a:t>
-            </a:r>
-            <a:endParaRPr lang="en-US" sz="7200" dirty="0"/>
-          </a:p>
-        </p:txBody>
-      </p:sp>
-      <p:pic>
-        <p:nvPicPr>
-          <p:cNvPr id="5" name="Fact icon 1" descr="preencoded.png">    </p:cNvPr>
-          <p:cNvPicPr>
-            <a:picLocks noChangeAspect="1"/>
-          </p:cNvPicPr>
-          <p:nvPr/>
-        </p:nvPicPr>
-        <p:blipFill>
-          <a:blip r:embed="rId1"/>
-          <a:stretch>
-            <a:fillRect/>
-          </a:stretch>
-        </p:blipFill>
-        <p:spPr>
-          <a:xfrm>
-            <a:off x="2743200" y="1444752"/>
-            <a:ext cx="347472" cy="347472"/>
-          </a:xfrm>
-          <a:prstGeom prst="rect">
-            <a:avLst/>
-          </a:prstGeom>
-        </p:spPr>
-      </p:pic>
-      <p:sp>
-        <p:nvSpPr>
-          <p:cNvPr id="6" name="Fact 1"/>
-          <p:cNvSpPr txBox="1"/>
-          <p:nvPr/>
-        </p:nvSpPr>
-        <p:spPr>
-          <a:xfrm>
-            <a:off x="3246120" y="1371600"/>
-            <a:ext cx="2606040" cy="868680"/>
-          </a:xfrm>
-          <a:prstGeom prst="rect">
-            <a:avLst/>
-          </a:prstGeom>
-          <a:noFill/>
-          <a:ln/>
-        </p:spPr>
-        <p:txBody>
-          <a:bodyPr wrap="square" lIns="0" tIns="0" rIns="0" bIns="0" rtlCol="0" anchor="t"/>
-          <a:lstStyle/>
-          <a:p>
-            <a:pPr indent="0" marL="0">
-              <a:buNone/>
-            </a:pPr>
-            <a:r>
-              <a:rPr lang="en-US" sz="1700" b="1" dirty="0">
-                <a:solidFill>
-                  <a:schemeClr val="tx1"/>
-                </a:solidFill>
-              </a:rPr>
-              <a:t>When</a:t>
-            </a:r>
-            <a:endParaRPr lang="en-US" sz="1700" dirty="0"/>
-          </a:p>
-          <a:p>
-            <a:pPr indent="0" marL="0">
-              <a:buNone/>
-            </a:pPr>
-            <a:r>
-              <a:rPr lang="en-US" sz="1400" dirty="0">
-                <a:solidFill>
                   <a:schemeClr val="accent4"/>
                 </a:solidFill>
               </a:rPr>
-              <a:t>At shift start and after every break</a:t>
-            </a:r>
-            <a:endParaRPr lang="en-US" sz="1700" dirty="0"/>
-          </a:p>
-        </p:txBody>
-      </p:sp>
-      <p:pic>
-        <p:nvPicPr>
-          <p:cNvPr id="7" name="Fact icon 2" descr="preencoded.png">    </p:cNvPr>
-          <p:cNvPicPr>
-            <a:picLocks noChangeAspect="1"/>
-          </p:cNvPicPr>
-          <p:nvPr/>
-        </p:nvPicPr>
-        <p:blipFill>
-          <a:blip r:embed="rId2"/>
-          <a:stretch>
-            <a:fillRect/>
-          </a:stretch>
-        </p:blipFill>
-        <p:spPr>
-          <a:xfrm>
-            <a:off x="2743200" y="2514600"/>
-            <a:ext cx="347472" cy="347472"/>
-          </a:xfrm>
-          <a:prstGeom prst="rect">
-            <a:avLst/>
-          </a:prstGeom>
-        </p:spPr>
-      </p:pic>
-      <p:sp>
-        <p:nvSpPr>
-          <p:cNvPr id="8" name="Fact 2"/>
-          <p:cNvSpPr txBox="1"/>
-          <p:nvPr/>
-        </p:nvSpPr>
-        <p:spPr>
-          <a:xfrm>
-            <a:off x="3246120" y="2441448"/>
-            <a:ext cx="2606040" cy="868680"/>
-          </a:xfrm>
-          <a:prstGeom prst="rect">
-            <a:avLst/>
-          </a:prstGeom>
-          <a:noFill/>
-          <a:ln/>
-        </p:spPr>
-        <p:txBody>
-          <a:bodyPr wrap="square" lIns="0" tIns="0" rIns="0" bIns="0" rtlCol="0" anchor="t"/>
-          <a:lstStyle/>
-          <a:p>
-            <a:pPr indent="0" marL="0">
-              <a:buNone/>
-            </a:pPr>
-            <a:r>
-              <a:rPr lang="en-US" sz="1700" b="1" dirty="0">
-                <a:solidFill>
-                  <a:schemeClr val="tx1"/>
-                </a:solidFill>
-              </a:rPr>
-              <a:t>What</a:t>
-            </a:r>
-            <a:endParaRPr lang="en-US" sz="1700" dirty="0"/>
-          </a:p>
-          <a:p>
-            <a:pPr indent="0" marL="0">
-              <a:buNone/>
-            </a:pPr>
-            <a:r>
-              <a:rPr lang="en-US" sz="1400" dirty="0">
-                <a:solidFill>
-                  <a:schemeClr val="accent4"/>
-                </a:solidFill>
-              </a:rPr>
-              <a:t>The first pod face that arrives at your station</a:t>
-            </a:r>
-            <a:endParaRPr lang="en-US" sz="1700" dirty="0"/>
-          </a:p>
-        </p:txBody>
-      </p:sp>
-      <p:pic>
-        <p:nvPicPr>
-          <p:cNvPr id="9" name="Fact icon 3" descr="preencoded.png">    </p:cNvPr>
-          <p:cNvPicPr>
-            <a:picLocks noChangeAspect="1"/>
-          </p:cNvPicPr>
-          <p:nvPr/>
-        </p:nvPicPr>
-        <p:blipFill>
-          <a:blip r:embed="rId3"/>
-          <a:stretch>
-            <a:fillRect/>
-          </a:stretch>
-        </p:blipFill>
-        <p:spPr>
-          <a:xfrm>
-            <a:off x="2743200" y="3584448"/>
-            <a:ext cx="347472" cy="347472"/>
-          </a:xfrm>
-          <a:prstGeom prst="rect">
-            <a:avLst/>
-          </a:prstGeom>
-        </p:spPr>
-      </p:pic>
-      <p:sp>
-        <p:nvSpPr>
-          <p:cNvPr id="10" name="Fact 3"/>
-          <p:cNvSpPr txBox="1"/>
-          <p:nvPr/>
-        </p:nvSpPr>
-        <p:spPr>
-          <a:xfrm>
-            <a:off x="3246120" y="3511296"/>
-            <a:ext cx="2606040" cy="868680"/>
-          </a:xfrm>
-          <a:prstGeom prst="rect">
-            <a:avLst/>
-          </a:prstGeom>
-          <a:noFill/>
-          <a:ln/>
-        </p:spPr>
-        <p:txBody>
-          <a:bodyPr wrap="square" lIns="0" tIns="0" rIns="0" bIns="0" rtlCol="0" anchor="t"/>
-          <a:lstStyle/>
-          <a:p>
-            <a:pPr indent="0" marL="0">
-              <a:buNone/>
-            </a:pPr>
-            <a:r>
-              <a:rPr lang="en-US" sz="1700" b="1" dirty="0">
-                <a:solidFill>
-                  <a:schemeClr val="tx1"/>
-                </a:solidFill>
-              </a:rPr>
-              <a:t>Who</a:t>
-            </a:r>
-            <a:endParaRPr lang="en-US" sz="1700" dirty="0"/>
-          </a:p>
-          <a:p>
-            <a:pPr indent="0" marL="0">
-              <a:buNone/>
-            </a:pPr>
-            <a:r>
-              <a:rPr lang="en-US" sz="1400" dirty="0">
-                <a:solidFill>
-                  <a:schemeClr val="accent4"/>
-                </a:solidFill>
-              </a:rPr>
-              <a:t>All Stow and ICQA associates</a:t>
-            </a:r>
-            <a:endParaRPr lang="en-US" sz="1700" dirty="0"/>
+              <a:t>One minute. The first pod face. Every shift start and after every break.</a:t>
+            </a:r>
+            <a:endParaRPr lang="en-US" sz="1600" dirty="0"/>
           </a:p>
         </p:txBody>
       </p:sp>
@@ -8742,7 +9236,7 @@
                   <a:schemeClr val="tx1"/>
                 </a:solidFill>
               </a:rPr>
-              <a:t>How to do FFF in 4 steps</a:t>
+              <a:t>What is First Face Fix?</a:t>
             </a:r>
             <a:endParaRPr lang="en-US" sz="2800" dirty="0"/>
           </a:p>
@@ -8750,34 +9244,36 @@
       </p:sp>
       <p:sp>
         <p:nvSpPr>
-          <p:cNvPr id="3" name="Step badge 1"/>
+          <p:cNvPr id="3" name="Stat card"/>
           <p:cNvSpPr/>
           <p:nvPr/>
         </p:nvSpPr>
         <p:spPr>
           <a:xfrm>
             <a:off x="457200" y="1325880"/>
-            <a:ext cx="548640" cy="548640"/>
-          </a:xfrm>
-          <a:prstGeom prst="ellipse">
-            <a:avLst/>
+            <a:ext cx="2011680" cy="3200400"/>
+          </a:xfrm>
+          <a:prstGeom prst="roundRect">
+            <a:avLst>
+              <a:gd name="adj" fmla="val 4545"/>
+            </a:avLst>
           </a:prstGeom>
           <a:solidFill>
-            <a:schemeClr val="accent1"/>
+            <a:schemeClr val="tx2"/>
           </a:solidFill>
           <a:ln/>
         </p:spPr>
       </p:sp>
       <p:sp>
         <p:nvSpPr>
-          <p:cNvPr id="4" name="Step number 1"/>
+          <p:cNvPr id="4" name="Stat"/>
           <p:cNvSpPr txBox="1"/>
           <p:nvPr/>
         </p:nvSpPr>
         <p:spPr>
           <a:xfrm>
-            <a:off x="457200" y="1325880"/>
-            <a:ext cx="548640" cy="548640"/>
+            <a:off x="685800" y="1325880"/>
+            <a:ext cx="1554480" cy="3200400"/>
           </a:xfrm>
           <a:prstGeom prst="rect">
             <a:avLst/>
@@ -8789,40 +9285,78 @@
           <a:bodyPr wrap="square" lIns="0" tIns="0" rIns="0" bIns="0" rtlCol="0" anchor="ctr"/>
           <a:lstStyle/>
           <a:p>
-            <a:pPr algn="ctr" indent="0" marL="0">
-              <a:buNone/>
-            </a:pPr>
-            <a:r>
-              <a:rPr lang="en-US" sz="2000" b="1" dirty="0">
+            <a:pPr indent="0" marL="0">
+              <a:buNone/>
+            </a:pPr>
+            <a:r>
+              <a:rPr lang="en-US" sz="7200" b="1" dirty="0">
+                <a:solidFill>
+                  <a:schemeClr val="accent1"/>
+                </a:solidFill>
+              </a:rPr>
+              <a:t>1</a:t>
+            </a:r>
+            <a:endParaRPr lang="en-US" sz="7200" dirty="0"/>
+          </a:p>
+          <a:p>
+            <a:pPr indent="0" marL="0">
+              <a:buNone/>
+            </a:pPr>
+            <a:r>
+              <a:rPr lang="en-US" sz="1600" dirty="0">
                 <a:solidFill>
                   <a:schemeClr val="bg1"/>
                 </a:solidFill>
               </a:rPr>
-              <a:t>1</a:t>
-            </a:r>
-            <a:endParaRPr lang="en-US" sz="2000" dirty="0"/>
-          </a:p>
-        </p:txBody>
-      </p:sp>
-      <p:sp>
-        <p:nvSpPr>
-          <p:cNvPr id="5" name="Step 1"/>
+              <a:t>minute to fix the first pod face</a:t>
+            </a:r>
+            <a:endParaRPr lang="en-US" sz="7200" dirty="0"/>
+          </a:p>
+        </p:txBody>
+      </p:sp>
+      <p:pic>
+        <p:nvPicPr>
+          <p:cNvPr id="5" name="Fact icon 1" descr="preencoded.png">    </p:cNvPr>
+          <p:cNvPicPr>
+            <a:picLocks noChangeAspect="1"/>
+          </p:cNvPicPr>
+          <p:nvPr/>
+        </p:nvPicPr>
+        <p:blipFill>
+          <a:blip r:embed="rId1"/>
+          <a:stretch>
+            <a:fillRect/>
+          </a:stretch>
+        </p:blipFill>
+        <p:spPr>
+          <a:xfrm>
+            <a:off x="2743200" y="1444752"/>
+            <a:ext cx="347472" cy="347472"/>
+          </a:xfrm>
+          <a:prstGeom prst="rect">
+            <a:avLst/>
+          </a:prstGeom>
+        </p:spPr>
+      </p:pic>
+      <p:sp>
+        <p:nvSpPr>
+          <p:cNvPr id="6" name="Fact 1"/>
           <p:cNvSpPr txBox="1"/>
           <p:nvPr/>
         </p:nvSpPr>
         <p:spPr>
           <a:xfrm>
-            <a:off x="1280160" y="1261872"/>
-            <a:ext cx="4572000" cy="685800"/>
-          </a:xfrm>
-          <a:prstGeom prst="rect">
-            <a:avLst/>
-          </a:prstGeom>
-          <a:noFill/>
-          <a:ln/>
-        </p:spPr>
-        <p:txBody>
-          <a:bodyPr wrap="square" lIns="0" tIns="0" rIns="0" bIns="0" rtlCol="0" anchor="ctr"/>
+            <a:off x="3246120" y="1371600"/>
+            <a:ext cx="2606040" cy="868680"/>
+          </a:xfrm>
+          <a:prstGeom prst="rect">
+            <a:avLst/>
+          </a:prstGeom>
+          <a:noFill/>
+          <a:ln/>
+        </p:spPr>
+        <p:txBody>
+          <a:bodyPr wrap="square" lIns="0" tIns="0" rIns="0" bIns="0" rtlCol="0" anchor="t"/>
           <a:lstStyle/>
           <a:p>
             <a:pPr indent="0" marL="0">
@@ -8834,7 +9368,7 @@
                   <a:schemeClr val="tx1"/>
                 </a:solidFill>
               </a:rPr>
-              <a:t>Get ready</a:t>
+              <a:t>When</a:t>
             </a:r>
             <a:endParaRPr lang="en-US" sz="1700" dirty="0"/>
           </a:p>
@@ -8848,87 +9382,129 @@
                   <a:schemeClr val="accent4"/>
                 </a:solidFill>
               </a:rPr>
-              <a:t>Log in, choose your process path, check your station</a:t>
+              <a:t>At shift start and after every break</a:t>
             </a:r>
             <a:endParaRPr lang="en-US" sz="1700" dirty="0"/>
           </a:p>
         </p:txBody>
       </p:sp>
-      <p:sp>
-        <p:nvSpPr>
-          <p:cNvPr id="6" name="Step badge 2"/>
-          <p:cNvSpPr/>
-          <p:nvPr/>
-        </p:nvSpPr>
-        <p:spPr>
-          <a:xfrm>
-            <a:off x="457200" y="2148840"/>
-            <a:ext cx="548640" cy="548640"/>
-          </a:xfrm>
-          <a:prstGeom prst="ellipse">
-            <a:avLst/>
-          </a:prstGeom>
-          <a:solidFill>
-            <a:schemeClr val="accent1"/>
-          </a:solidFill>
-          <a:ln/>
-        </p:spPr>
-      </p:sp>
-      <p:sp>
-        <p:nvSpPr>
-          <p:cNvPr id="7" name="Step number 2"/>
+      <p:pic>
+        <p:nvPicPr>
+          <p:cNvPr id="7" name="Fact icon 2" descr="preencoded.png">    </p:cNvPr>
+          <p:cNvPicPr>
+            <a:picLocks noChangeAspect="1"/>
+          </p:cNvPicPr>
+          <p:nvPr/>
+        </p:nvPicPr>
+        <p:blipFill>
+          <a:blip r:embed="rId2"/>
+          <a:stretch>
+            <a:fillRect/>
+          </a:stretch>
+        </p:blipFill>
+        <p:spPr>
+          <a:xfrm>
+            <a:off x="2743200" y="2514600"/>
+            <a:ext cx="347472" cy="347472"/>
+          </a:xfrm>
+          <a:prstGeom prst="rect">
+            <a:avLst/>
+          </a:prstGeom>
+        </p:spPr>
+      </p:pic>
+      <p:sp>
+        <p:nvSpPr>
+          <p:cNvPr id="8" name="Fact 2"/>
           <p:cNvSpPr txBox="1"/>
           <p:nvPr/>
         </p:nvSpPr>
         <p:spPr>
           <a:xfrm>
-            <a:off x="457200" y="2148840"/>
-            <a:ext cx="548640" cy="548640"/>
-          </a:xfrm>
-          <a:prstGeom prst="rect">
-            <a:avLst/>
-          </a:prstGeom>
-          <a:noFill/>
-          <a:ln/>
-        </p:spPr>
-        <p:txBody>
-          <a:bodyPr wrap="square" lIns="0" tIns="0" rIns="0" bIns="0" rtlCol="0" anchor="ctr"/>
-          <a:lstStyle/>
-          <a:p>
-            <a:pPr algn="ctr" indent="0" marL="0">
-              <a:buNone/>
-            </a:pPr>
-            <a:r>
-              <a:rPr lang="en-US" sz="2000" b="1" dirty="0">
-                <a:solidFill>
-                  <a:schemeClr val="bg1"/>
-                </a:solidFill>
-              </a:rPr>
-              <a:t>2</a:t>
-            </a:r>
-            <a:endParaRPr lang="en-US" sz="2000" dirty="0"/>
-          </a:p>
-        </p:txBody>
-      </p:sp>
-      <p:sp>
-        <p:nvSpPr>
-          <p:cNvPr id="8" name="Step 2"/>
+            <a:off x="3246120" y="2441448"/>
+            <a:ext cx="2606040" cy="868680"/>
+          </a:xfrm>
+          <a:prstGeom prst="rect">
+            <a:avLst/>
+          </a:prstGeom>
+          <a:noFill/>
+          <a:ln/>
+        </p:spPr>
+        <p:txBody>
+          <a:bodyPr wrap="square" lIns="0" tIns="0" rIns="0" bIns="0" rtlCol="0" anchor="t"/>
+          <a:lstStyle/>
+          <a:p>
+            <a:pPr indent="0" marL="0">
+              <a:buNone/>
+            </a:pPr>
+            <a:r>
+              <a:rPr lang="en-US" sz="1700" b="1" dirty="0">
+                <a:solidFill>
+                  <a:schemeClr val="tx1"/>
+                </a:solidFill>
+              </a:rPr>
+              <a:t>What</a:t>
+            </a:r>
+            <a:endParaRPr lang="en-US" sz="1700" dirty="0"/>
+          </a:p>
+          <a:p>
+            <a:pPr indent="0" marL="0">
+              <a:buNone/>
+            </a:pPr>
+            <a:r>
+              <a:rPr lang="en-US" sz="1400" dirty="0">
+                <a:solidFill>
+                  <a:schemeClr val="accent4"/>
+                </a:solidFill>
+              </a:rPr>
+              <a:t>The first pod face that arrives at your station</a:t>
+            </a:r>
+            <a:endParaRPr lang="en-US" sz="1700" dirty="0"/>
+          </a:p>
+        </p:txBody>
+      </p:sp>
+      <p:pic>
+        <p:nvPicPr>
+          <p:cNvPr id="9" name="Fact icon 3" descr="preencoded.png">    </p:cNvPr>
+          <p:cNvPicPr>
+            <a:picLocks noChangeAspect="1"/>
+          </p:cNvPicPr>
+          <p:nvPr/>
+        </p:nvPicPr>
+        <p:blipFill>
+          <a:blip r:embed="rId3"/>
+          <a:stretch>
+            <a:fillRect/>
+          </a:stretch>
+        </p:blipFill>
+        <p:spPr>
+          <a:xfrm>
+            <a:off x="2743200" y="3584448"/>
+            <a:ext cx="347472" cy="347472"/>
+          </a:xfrm>
+          <a:prstGeom prst="rect">
+            <a:avLst/>
+          </a:prstGeom>
+        </p:spPr>
+      </p:pic>
+      <p:sp>
+        <p:nvSpPr>
+          <p:cNvPr id="10" name="Fact 3"/>
           <p:cNvSpPr txBox="1"/>
           <p:nvPr/>
         </p:nvSpPr>
         <p:spPr>
           <a:xfrm>
-            <a:off x="1280160" y="2084832"/>
-            <a:ext cx="4572000" cy="685800"/>
-          </a:xfrm>
-          <a:prstGeom prst="rect">
-            <a:avLst/>
-          </a:prstGeom>
-          <a:noFill/>
-          <a:ln/>
-        </p:spPr>
-        <p:txBody>
-          <a:bodyPr wrap="square" lIns="0" tIns="0" rIns="0" bIns="0" rtlCol="0" anchor="ctr"/>
+            <a:off x="3246120" y="3511296"/>
+            <a:ext cx="2606040" cy="868680"/>
+          </a:xfrm>
+          <a:prstGeom prst="rect">
+            <a:avLst/>
+          </a:prstGeom>
+          <a:noFill/>
+          <a:ln/>
+        </p:spPr>
+        <p:txBody>
+          <a:bodyPr wrap="square" lIns="0" tIns="0" rIns="0" bIns="0" rtlCol="0" anchor="t"/>
           <a:lstStyle/>
           <a:p>
             <a:pPr indent="0" marL="0">
@@ -8940,7 +9516,7 @@
                   <a:schemeClr val="tx1"/>
                 </a:solidFill>
               </a:rPr>
-              <a:t>Work top to bottom</a:t>
+              <a:t>Who</a:t>
             </a:r>
             <a:endParaRPr lang="en-US" sz="1700" dirty="0"/>
           </a:p>
@@ -8954,219 +9530,7 @@
                   <a:schemeClr val="accent4"/>
                 </a:solidFill>
               </a:rPr>
-              <a:t>Start at the top of the face and follow the stow snake</a:t>
-            </a:r>
-            <a:endParaRPr lang="en-US" sz="1700" dirty="0"/>
-          </a:p>
-        </p:txBody>
-      </p:sp>
-      <p:sp>
-        <p:nvSpPr>
-          <p:cNvPr id="9" name="Step badge 3"/>
-          <p:cNvSpPr/>
-          <p:nvPr/>
-        </p:nvSpPr>
-        <p:spPr>
-          <a:xfrm>
-            <a:off x="457200" y="2971800"/>
-            <a:ext cx="548640" cy="548640"/>
-          </a:xfrm>
-          <a:prstGeom prst="ellipse">
-            <a:avLst/>
-          </a:prstGeom>
-          <a:solidFill>
-            <a:schemeClr val="accent1"/>
-          </a:solidFill>
-          <a:ln/>
-        </p:spPr>
-      </p:sp>
-      <p:sp>
-        <p:nvSpPr>
-          <p:cNvPr id="10" name="Step number 3"/>
-          <p:cNvSpPr txBox="1"/>
-          <p:nvPr/>
-        </p:nvSpPr>
-        <p:spPr>
-          <a:xfrm>
-            <a:off x="457200" y="2971800"/>
-            <a:ext cx="548640" cy="548640"/>
-          </a:xfrm>
-          <a:prstGeom prst="rect">
-            <a:avLst/>
-          </a:prstGeom>
-          <a:noFill/>
-          <a:ln/>
-        </p:spPr>
-        <p:txBody>
-          <a:bodyPr wrap="square" lIns="0" tIns="0" rIns="0" bIns="0" rtlCol="0" anchor="ctr"/>
-          <a:lstStyle/>
-          <a:p>
-            <a:pPr algn="ctr" indent="0" marL="0">
-              <a:buNone/>
-            </a:pPr>
-            <a:r>
-              <a:rPr lang="en-US" sz="2000" b="1" dirty="0">
-                <a:solidFill>
-                  <a:schemeClr val="bg1"/>
-                </a:solidFill>
-              </a:rPr>
-              <a:t>3</a:t>
-            </a:r>
-            <a:endParaRPr lang="en-US" sz="2000" dirty="0"/>
-          </a:p>
-        </p:txBody>
-      </p:sp>
-      <p:sp>
-        <p:nvSpPr>
-          <p:cNvPr id="11" name="Step 3"/>
-          <p:cNvSpPr txBox="1"/>
-          <p:nvPr/>
-        </p:nvSpPr>
-        <p:spPr>
-          <a:xfrm>
-            <a:off x="1280160" y="2907792"/>
-            <a:ext cx="4572000" cy="685800"/>
-          </a:xfrm>
-          <a:prstGeom prst="rect">
-            <a:avLst/>
-          </a:prstGeom>
-          <a:noFill/>
-          <a:ln/>
-        </p:spPr>
-        <p:txBody>
-          <a:bodyPr wrap="square" lIns="0" tIns="0" rIns="0" bIns="0" rtlCol="0" anchor="ctr"/>
-          <a:lstStyle/>
-          <a:p>
-            <a:pPr indent="0" marL="0">
-              <a:buNone/>
-            </a:pPr>
-            <a:r>
-              <a:rPr lang="en-US" sz="1700" b="1" dirty="0">
-                <a:solidFill>
-                  <a:schemeClr val="tx1"/>
-                </a:solidFill>
-              </a:rPr>
-              <a:t>Fix every bin</a:t>
-            </a:r>
-            <a:endParaRPr lang="en-US" sz="1700" dirty="0"/>
-          </a:p>
-          <a:p>
-            <a:pPr indent="0" marL="0">
-              <a:buNone/>
-            </a:pPr>
-            <a:r>
-              <a:rPr lang="en-US" sz="1400" dirty="0">
-                <a:solidFill>
-                  <a:schemeClr val="accent4"/>
-                </a:solidFill>
-              </a:rPr>
-              <a:t>Bring each bin up to the ROBOTSS rules</a:t>
-            </a:r>
-            <a:endParaRPr lang="en-US" sz="1700" dirty="0"/>
-          </a:p>
-        </p:txBody>
-      </p:sp>
-      <p:sp>
-        <p:nvSpPr>
-          <p:cNvPr id="12" name="Step badge 4"/>
-          <p:cNvSpPr/>
-          <p:nvPr/>
-        </p:nvSpPr>
-        <p:spPr>
-          <a:xfrm>
-            <a:off x="457200" y="3794760"/>
-            <a:ext cx="548640" cy="548640"/>
-          </a:xfrm>
-          <a:prstGeom prst="ellipse">
-            <a:avLst/>
-          </a:prstGeom>
-          <a:solidFill>
-            <a:schemeClr val="accent1"/>
-          </a:solidFill>
-          <a:ln/>
-        </p:spPr>
-      </p:sp>
-      <p:sp>
-        <p:nvSpPr>
-          <p:cNvPr id="13" name="Step number 4"/>
-          <p:cNvSpPr txBox="1"/>
-          <p:nvPr/>
-        </p:nvSpPr>
-        <p:spPr>
-          <a:xfrm>
-            <a:off x="457200" y="3794760"/>
-            <a:ext cx="548640" cy="548640"/>
-          </a:xfrm>
-          <a:prstGeom prst="rect">
-            <a:avLst/>
-          </a:prstGeom>
-          <a:noFill/>
-          <a:ln/>
-        </p:spPr>
-        <p:txBody>
-          <a:bodyPr wrap="square" lIns="0" tIns="0" rIns="0" bIns="0" rtlCol="0" anchor="ctr"/>
-          <a:lstStyle/>
-          <a:p>
-            <a:pPr algn="ctr" indent="0" marL="0">
-              <a:buNone/>
-            </a:pPr>
-            <a:r>
-              <a:rPr lang="en-US" sz="2000" b="1" dirty="0">
-                <a:solidFill>
-                  <a:schemeClr val="bg1"/>
-                </a:solidFill>
-              </a:rPr>
-              <a:t>4</a:t>
-            </a:r>
-            <a:endParaRPr lang="en-US" sz="2000" dirty="0"/>
-          </a:p>
-        </p:txBody>
-      </p:sp>
-      <p:sp>
-        <p:nvSpPr>
-          <p:cNvPr id="14" name="Step 4"/>
-          <p:cNvSpPr txBox="1"/>
-          <p:nvPr/>
-        </p:nvSpPr>
-        <p:spPr>
-          <a:xfrm>
-            <a:off x="1280160" y="3730752"/>
-            <a:ext cx="4572000" cy="685800"/>
-          </a:xfrm>
-          <a:prstGeom prst="rect">
-            <a:avLst/>
-          </a:prstGeom>
-          <a:noFill/>
-          <a:ln/>
-        </p:spPr>
-        <p:txBody>
-          <a:bodyPr wrap="square" lIns="0" tIns="0" rIns="0" bIns="0" rtlCol="0" anchor="ctr"/>
-          <a:lstStyle/>
-          <a:p>
-            <a:pPr indent="0" marL="0">
-              <a:buNone/>
-            </a:pPr>
-            <a:r>
-              <a:rPr lang="en-US" sz="1700" b="1" dirty="0">
-                <a:solidFill>
-                  <a:schemeClr val="tx1"/>
-                </a:solidFill>
-              </a:rPr>
-              <a:t>Start your process</a:t>
-            </a:r>
-            <a:endParaRPr lang="en-US" sz="1700" dirty="0"/>
-          </a:p>
-          <a:p>
-            <a:pPr indent="0" marL="0">
-              <a:buNone/>
-            </a:pPr>
-            <a:r>
-              <a:rPr lang="en-US" sz="1400" dirty="0">
-                <a:solidFill>
-                  <a:schemeClr val="accent4"/>
-                </a:solidFill>
-              </a:rPr>
-              <a:t>After 1 minute, or once the face meets ROBOTSS</a:t>
+              <a:t>All Stow and ICQA associates</a:t>
             </a:r>
             <a:endParaRPr lang="en-US" sz="1700" dirty="0"/>
           </a:p>
@@ -9229,7 +9593,7 @@
                   <a:schemeClr val="tx1"/>
                 </a:solidFill>
               </a:rPr>
-              <a:t>During FFF, do NOT</a:t>
+              <a:t>How to do FFF in 4 steps</a:t>
             </a:r>
             <a:endParaRPr lang="en-US" sz="2800" dirty="0"/>
           </a:p>
@@ -9237,119 +9601,373 @@
       </p:sp>
       <p:sp>
         <p:nvSpPr>
-          <p:cNvPr id="3" name="Dont card 1"/>
+          <p:cNvPr id="3" name="Step badge 1"/>
           <p:cNvSpPr/>
           <p:nvPr/>
         </p:nvSpPr>
         <p:spPr>
           <a:xfrm>
             <a:off x="457200" y="1325880"/>
-            <a:ext cx="1691640" cy="2194560"/>
-          </a:xfrm>
-          <a:prstGeom prst="roundRect">
-            <a:avLst>
-              <a:gd name="adj" fmla="val 5405"/>
-            </a:avLst>
+            <a:ext cx="548640" cy="548640"/>
+          </a:xfrm>
+          <a:prstGeom prst="ellipse">
+            <a:avLst/>
           </a:prstGeom>
           <a:solidFill>
-            <a:srgbClr val="FBECEC"/>
+            <a:schemeClr val="accent1"/>
           </a:solidFill>
           <a:ln/>
         </p:spPr>
       </p:sp>
-      <p:pic>
-        <p:nvPicPr>
-          <p:cNvPr id="4" name="Dont icon 1" descr="preencoded.png">    </p:cNvPr>
-          <p:cNvPicPr>
-            <a:picLocks noChangeAspect="1"/>
-          </p:cNvPicPr>
-          <p:nvPr/>
-        </p:nvPicPr>
-        <p:blipFill>
-          <a:blip r:embed="rId1"/>
-          <a:stretch>
-            <a:fillRect/>
-          </a:stretch>
-        </p:blipFill>
-        <p:spPr>
-          <a:xfrm>
-            <a:off x="685800" y="1554480"/>
-            <a:ext cx="457200" cy="457200"/>
-          </a:xfrm>
-          <a:prstGeom prst="rect">
-            <a:avLst/>
-          </a:prstGeom>
-        </p:spPr>
-      </p:pic>
-      <p:pic>
-        <p:nvPicPr>
-          <p:cNvPr id="5" name="Ban icon 1" descr="preencoded.png">    </p:cNvPr>
-          <p:cNvPicPr>
-            <a:picLocks noChangeAspect="1"/>
-          </p:cNvPicPr>
-          <p:nvPr/>
-        </p:nvPicPr>
-        <p:blipFill>
-          <a:blip r:embed="rId2"/>
-          <a:stretch>
-            <a:fillRect/>
-          </a:stretch>
-        </p:blipFill>
-        <p:spPr>
-          <a:xfrm>
-            <a:off x="1554480" y="1554480"/>
-            <a:ext cx="365760" cy="365760"/>
-          </a:xfrm>
-          <a:prstGeom prst="rect">
-            <a:avLst/>
-          </a:prstGeom>
-        </p:spPr>
-      </p:pic>
-      <p:sp>
-        <p:nvSpPr>
-          <p:cNvPr id="6" name="Dont text 1"/>
+      <p:sp>
+        <p:nvSpPr>
+          <p:cNvPr id="4" name="Step number 1"/>
           <p:cNvSpPr txBox="1"/>
           <p:nvPr/>
         </p:nvSpPr>
         <p:spPr>
           <a:xfrm>
-            <a:off x="685800" y="2194560"/>
-            <a:ext cx="1280160" cy="1234440"/>
-          </a:xfrm>
-          <a:prstGeom prst="rect">
-            <a:avLst/>
-          </a:prstGeom>
-          <a:noFill/>
-          <a:ln/>
-        </p:spPr>
-        <p:txBody>
-          <a:bodyPr wrap="square" lIns="0" tIns="0" rIns="0" bIns="0" rtlCol="0" anchor="t"/>
+            <a:off x="457200" y="1325880"/>
+            <a:ext cx="548640" cy="548640"/>
+          </a:xfrm>
+          <a:prstGeom prst="rect">
+            <a:avLst/>
+          </a:prstGeom>
+          <a:noFill/>
+          <a:ln/>
+        </p:spPr>
+        <p:txBody>
+          <a:bodyPr wrap="square" lIns="0" tIns="0" rIns="0" bIns="0" rtlCol="0" anchor="ctr"/>
+          <a:lstStyle/>
+          <a:p>
+            <a:pPr algn="ctr" indent="0" marL="0">
+              <a:buNone/>
+            </a:pPr>
+            <a:r>
+              <a:rPr lang="en-US" sz="2000" b="1" dirty="0">
+                <a:solidFill>
+                  <a:schemeClr val="bg1"/>
+                </a:solidFill>
+              </a:rPr>
+              <a:t>1</a:t>
+            </a:r>
+            <a:endParaRPr lang="en-US" sz="2000" dirty="0"/>
+          </a:p>
+        </p:txBody>
+      </p:sp>
+      <p:sp>
+        <p:nvSpPr>
+          <p:cNvPr id="5" name="Step 1"/>
+          <p:cNvSpPr txBox="1"/>
+          <p:nvPr/>
+        </p:nvSpPr>
+        <p:spPr>
+          <a:xfrm>
+            <a:off x="1280160" y="1261872"/>
+            <a:ext cx="4572000" cy="685800"/>
+          </a:xfrm>
+          <a:prstGeom prst="rect">
+            <a:avLst/>
+          </a:prstGeom>
+          <a:noFill/>
+          <a:ln/>
+        </p:spPr>
+        <p:txBody>
+          <a:bodyPr wrap="square" lIns="0" tIns="0" rIns="0" bIns="0" rtlCol="0" anchor="ctr"/>
           <a:lstStyle/>
           <a:p>
             <a:pPr indent="0" marL="0">
               <a:buNone/>
             </a:pPr>
             <a:r>
+              <a:rPr lang="en-US" sz="1700" b="1" dirty="0">
+                <a:solidFill>
+                  <a:schemeClr val="tx1"/>
+                </a:solidFill>
+              </a:rPr>
+              <a:t>Get ready</a:t>
+            </a:r>
+            <a:endParaRPr lang="en-US" sz="1700" dirty="0"/>
+          </a:p>
+          <a:p>
+            <a:pPr indent="0" marL="0">
+              <a:buNone/>
+            </a:pPr>
+            <a:r>
+              <a:rPr lang="en-US" sz="1400" dirty="0">
+                <a:solidFill>
+                  <a:schemeClr val="accent4"/>
+                </a:solidFill>
+              </a:rPr>
+              <a:t>Log in, choose your process path, check your station</a:t>
+            </a:r>
+            <a:endParaRPr lang="en-US" sz="1700" dirty="0"/>
+          </a:p>
+        </p:txBody>
+      </p:sp>
+      <p:sp>
+        <p:nvSpPr>
+          <p:cNvPr id="6" name="Step badge 2"/>
+          <p:cNvSpPr/>
+          <p:nvPr/>
+        </p:nvSpPr>
+        <p:spPr>
+          <a:xfrm>
+            <a:off x="457200" y="2148840"/>
+            <a:ext cx="548640" cy="548640"/>
+          </a:xfrm>
+          <a:prstGeom prst="ellipse">
+            <a:avLst/>
+          </a:prstGeom>
+          <a:solidFill>
+            <a:schemeClr val="accent1"/>
+          </a:solidFill>
+          <a:ln/>
+        </p:spPr>
+      </p:sp>
+      <p:sp>
+        <p:nvSpPr>
+          <p:cNvPr id="7" name="Step number 2"/>
+          <p:cNvSpPr txBox="1"/>
+          <p:nvPr/>
+        </p:nvSpPr>
+        <p:spPr>
+          <a:xfrm>
+            <a:off x="457200" y="2148840"/>
+            <a:ext cx="548640" cy="548640"/>
+          </a:xfrm>
+          <a:prstGeom prst="rect">
+            <a:avLst/>
+          </a:prstGeom>
+          <a:noFill/>
+          <a:ln/>
+        </p:spPr>
+        <p:txBody>
+          <a:bodyPr wrap="square" lIns="0" tIns="0" rIns="0" bIns="0" rtlCol="0" anchor="ctr"/>
+          <a:lstStyle/>
+          <a:p>
+            <a:pPr algn="ctr" indent="0" marL="0">
+              <a:buNone/>
+            </a:pPr>
+            <a:r>
               <a:rPr lang="en-US" sz="2000" b="1" dirty="0">
                 <a:solidFill>
-                  <a:schemeClr val="accent3"/>
-                </a:solidFill>
-              </a:rPr>
-              <a:t>Scan</a:t>
+                  <a:schemeClr val="bg1"/>
+                </a:solidFill>
+              </a:rPr>
+              <a:t>2</a:t>
             </a:r>
             <a:endParaRPr lang="en-US" sz="2000" dirty="0"/>
           </a:p>
+        </p:txBody>
+      </p:sp>
+      <p:sp>
+        <p:nvSpPr>
+          <p:cNvPr id="8" name="Step 2"/>
+          <p:cNvSpPr txBox="1"/>
+          <p:nvPr/>
+        </p:nvSpPr>
+        <p:spPr>
+          <a:xfrm>
+            <a:off x="1280160" y="2084832"/>
+            <a:ext cx="4572000" cy="685800"/>
+          </a:xfrm>
+          <a:prstGeom prst="rect">
+            <a:avLst/>
+          </a:prstGeom>
+          <a:noFill/>
+          <a:ln/>
+        </p:spPr>
+        <p:txBody>
+          <a:bodyPr wrap="square" lIns="0" tIns="0" rIns="0" bIns="0" rtlCol="0" anchor="ctr"/>
+          <a:lstStyle/>
           <a:p>
             <a:pPr indent="0" marL="0">
               <a:buNone/>
             </a:pPr>
             <a:r>
+              <a:rPr lang="en-US" sz="1700" b="1" dirty="0">
+                <a:solidFill>
+                  <a:schemeClr val="tx1"/>
+                </a:solidFill>
+              </a:rPr>
+              <a:t>Work top to bottom</a:t>
+            </a:r>
+            <a:endParaRPr lang="en-US" sz="1700" dirty="0"/>
+          </a:p>
+          <a:p>
+            <a:pPr indent="0" marL="0">
+              <a:buNone/>
+            </a:pPr>
+            <a:r>
               <a:rPr lang="en-US" sz="1400" dirty="0">
                 <a:solidFill>
+                  <a:schemeClr val="accent4"/>
+                </a:solidFill>
+              </a:rPr>
+              <a:t>Start at the top of the face and follow the stow snake</a:t>
+            </a:r>
+            <a:endParaRPr lang="en-US" sz="1700" dirty="0"/>
+          </a:p>
+        </p:txBody>
+      </p:sp>
+      <p:sp>
+        <p:nvSpPr>
+          <p:cNvPr id="9" name="Step badge 3"/>
+          <p:cNvSpPr/>
+          <p:nvPr/>
+        </p:nvSpPr>
+        <p:spPr>
+          <a:xfrm>
+            <a:off x="457200" y="2971800"/>
+            <a:ext cx="548640" cy="548640"/>
+          </a:xfrm>
+          <a:prstGeom prst="ellipse">
+            <a:avLst/>
+          </a:prstGeom>
+          <a:solidFill>
+            <a:schemeClr val="accent1"/>
+          </a:solidFill>
+          <a:ln/>
+        </p:spPr>
+      </p:sp>
+      <p:sp>
+        <p:nvSpPr>
+          <p:cNvPr id="10" name="Step number 3"/>
+          <p:cNvSpPr txBox="1"/>
+          <p:nvPr/>
+        </p:nvSpPr>
+        <p:spPr>
+          <a:xfrm>
+            <a:off x="457200" y="2971800"/>
+            <a:ext cx="548640" cy="548640"/>
+          </a:xfrm>
+          <a:prstGeom prst="rect">
+            <a:avLst/>
+          </a:prstGeom>
+          <a:noFill/>
+          <a:ln/>
+        </p:spPr>
+        <p:txBody>
+          <a:bodyPr wrap="square" lIns="0" tIns="0" rIns="0" bIns="0" rtlCol="0" anchor="ctr"/>
+          <a:lstStyle/>
+          <a:p>
+            <a:pPr algn="ctr" indent="0" marL="0">
+              <a:buNone/>
+            </a:pPr>
+            <a:r>
+              <a:rPr lang="en-US" sz="2000" b="1" dirty="0">
+                <a:solidFill>
+                  <a:schemeClr val="bg1"/>
+                </a:solidFill>
+              </a:rPr>
+              <a:t>3</a:t>
+            </a:r>
+            <a:endParaRPr lang="en-US" sz="2000" dirty="0"/>
+          </a:p>
+        </p:txBody>
+      </p:sp>
+      <p:sp>
+        <p:nvSpPr>
+          <p:cNvPr id="11" name="Step 3"/>
+          <p:cNvSpPr txBox="1"/>
+          <p:nvPr/>
+        </p:nvSpPr>
+        <p:spPr>
+          <a:xfrm>
+            <a:off x="1280160" y="2907792"/>
+            <a:ext cx="4572000" cy="685800"/>
+          </a:xfrm>
+          <a:prstGeom prst="rect">
+            <a:avLst/>
+          </a:prstGeom>
+          <a:noFill/>
+          <a:ln/>
+        </p:spPr>
+        <p:txBody>
+          <a:bodyPr wrap="square" lIns="0" tIns="0" rIns="0" bIns="0" rtlCol="0" anchor="ctr"/>
+          <a:lstStyle/>
+          <a:p>
+            <a:pPr indent="0" marL="0">
+              <a:buNone/>
+            </a:pPr>
+            <a:r>
+              <a:rPr lang="en-US" sz="1700" b="1" dirty="0">
+                <a:solidFill>
                   <a:schemeClr val="tx1"/>
                 </a:solidFill>
               </a:rPr>
-              <a:t>any articles in totes or bins</a:t>
+              <a:t>Fix every bin</a:t>
+            </a:r>
+            <a:endParaRPr lang="en-US" sz="1700" dirty="0"/>
+          </a:p>
+          <a:p>
+            <a:pPr indent="0" marL="0">
+              <a:buNone/>
+            </a:pPr>
+            <a:r>
+              <a:rPr lang="en-US" sz="1400" dirty="0">
+                <a:solidFill>
+                  <a:schemeClr val="accent4"/>
+                </a:solidFill>
+              </a:rPr>
+              <a:t>Bring each bin up to the ROBOTSS rules</a:t>
+            </a:r>
+            <a:endParaRPr lang="en-US" sz="1700" dirty="0"/>
+          </a:p>
+        </p:txBody>
+      </p:sp>
+      <p:sp>
+        <p:nvSpPr>
+          <p:cNvPr id="12" name="Step badge 4"/>
+          <p:cNvSpPr/>
+          <p:nvPr/>
+        </p:nvSpPr>
+        <p:spPr>
+          <a:xfrm>
+            <a:off x="457200" y="3794760"/>
+            <a:ext cx="548640" cy="548640"/>
+          </a:xfrm>
+          <a:prstGeom prst="ellipse">
+            <a:avLst/>
+          </a:prstGeom>
+          <a:solidFill>
+            <a:schemeClr val="accent1"/>
+          </a:solidFill>
+          <a:ln/>
+        </p:spPr>
+      </p:sp>
+      <p:sp>
+        <p:nvSpPr>
+          <p:cNvPr id="13" name="Step number 4"/>
+          <p:cNvSpPr txBox="1"/>
+          <p:nvPr/>
+        </p:nvSpPr>
+        <p:spPr>
+          <a:xfrm>
+            <a:off x="457200" y="3794760"/>
+            <a:ext cx="548640" cy="548640"/>
+          </a:xfrm>
+          <a:prstGeom prst="rect">
+            <a:avLst/>
+          </a:prstGeom>
+          <a:noFill/>
+          <a:ln/>
+        </p:spPr>
+        <p:txBody>
+          <a:bodyPr wrap="square" lIns="0" tIns="0" rIns="0" bIns="0" rtlCol="0" anchor="ctr"/>
+          <a:lstStyle/>
+          <a:p>
+            <a:pPr algn="ctr" indent="0" marL="0">
+              <a:buNone/>
+            </a:pPr>
+            <a:r>
+              <a:rPr lang="en-US" sz="2000" b="1" dirty="0">
+                <a:solidFill>
+                  <a:schemeClr val="bg1"/>
+                </a:solidFill>
+              </a:rPr>
+              <a:t>4</a:t>
             </a:r>
             <a:endParaRPr lang="en-US" sz="2000" dirty="0"/>
           </a:p>
@@ -9357,107 +9975,37 @@
       </p:sp>
       <p:sp>
         <p:nvSpPr>
-          <p:cNvPr id="7" name="Dont card 2"/>
-          <p:cNvSpPr/>
-          <p:nvPr/>
-        </p:nvSpPr>
-        <p:spPr>
-          <a:xfrm>
-            <a:off x="2286000" y="1325880"/>
-            <a:ext cx="1691640" cy="2194560"/>
-          </a:xfrm>
-          <a:prstGeom prst="roundRect">
-            <a:avLst>
-              <a:gd name="adj" fmla="val 5405"/>
-            </a:avLst>
-          </a:prstGeom>
-          <a:solidFill>
-            <a:srgbClr val="FBECEC"/>
-          </a:solidFill>
-          <a:ln/>
-        </p:spPr>
-      </p:sp>
-      <p:pic>
-        <p:nvPicPr>
-          <p:cNvPr id="8" name="Dont icon 2" descr="preencoded.png">    </p:cNvPr>
-          <p:cNvPicPr>
-            <a:picLocks noChangeAspect="1"/>
-          </p:cNvPicPr>
-          <p:nvPr/>
-        </p:nvPicPr>
-        <p:blipFill>
-          <a:blip r:embed="rId3"/>
-          <a:stretch>
-            <a:fillRect/>
-          </a:stretch>
-        </p:blipFill>
-        <p:spPr>
-          <a:xfrm>
-            <a:off x="2514600" y="1554480"/>
-            <a:ext cx="457200" cy="457200"/>
-          </a:xfrm>
-          <a:prstGeom prst="rect">
-            <a:avLst/>
-          </a:prstGeom>
-        </p:spPr>
-      </p:pic>
-      <p:pic>
-        <p:nvPicPr>
-          <p:cNvPr id="9" name="Ban icon 2" descr="preencoded.png">    </p:cNvPr>
-          <p:cNvPicPr>
-            <a:picLocks noChangeAspect="1"/>
-          </p:cNvPicPr>
-          <p:nvPr/>
-        </p:nvPicPr>
-        <p:blipFill>
-          <a:blip r:embed="rId4"/>
-          <a:stretch>
-            <a:fillRect/>
-          </a:stretch>
-        </p:blipFill>
-        <p:spPr>
-          <a:xfrm>
-            <a:off x="3383280" y="1554480"/>
-            <a:ext cx="365760" cy="365760"/>
-          </a:xfrm>
-          <a:prstGeom prst="rect">
-            <a:avLst/>
-          </a:prstGeom>
-        </p:spPr>
-      </p:pic>
-      <p:sp>
-        <p:nvSpPr>
-          <p:cNvPr id="10" name="Dont text 2"/>
+          <p:cNvPr id="14" name="Step 4"/>
           <p:cNvSpPr txBox="1"/>
           <p:nvPr/>
         </p:nvSpPr>
         <p:spPr>
           <a:xfrm>
-            <a:off x="2514600" y="2194560"/>
-            <a:ext cx="1280160" cy="1234440"/>
-          </a:xfrm>
-          <a:prstGeom prst="rect">
-            <a:avLst/>
-          </a:prstGeom>
-          <a:noFill/>
-          <a:ln/>
-        </p:spPr>
-        <p:txBody>
-          <a:bodyPr wrap="square" lIns="0" tIns="0" rIns="0" bIns="0" rtlCol="0" anchor="t"/>
+            <a:off x="1280160" y="3730752"/>
+            <a:ext cx="4572000" cy="685800"/>
+          </a:xfrm>
+          <a:prstGeom prst="rect">
+            <a:avLst/>
+          </a:prstGeom>
+          <a:noFill/>
+          <a:ln/>
+        </p:spPr>
+        <p:txBody>
+          <a:bodyPr wrap="square" lIns="0" tIns="0" rIns="0" bIns="0" rtlCol="0" anchor="ctr"/>
           <a:lstStyle/>
           <a:p>
             <a:pPr indent="0" marL="0">
               <a:buNone/>
             </a:pPr>
             <a:r>
-              <a:rPr lang="en-US" sz="2000" b="1" dirty="0">
-                <a:solidFill>
-                  <a:schemeClr val="accent3"/>
-                </a:solidFill>
-              </a:rPr>
-              <a:t>Move</a:t>
-            </a:r>
-            <a:endParaRPr lang="en-US" sz="2000" dirty="0"/>
+              <a:rPr lang="en-US" sz="1700" b="1" dirty="0">
+                <a:solidFill>
+                  <a:schemeClr val="tx1"/>
+                </a:solidFill>
+              </a:rPr>
+              <a:t>Start your process</a:t>
+            </a:r>
+            <a:endParaRPr lang="en-US" sz="1700" dirty="0"/>
           </a:p>
           <a:p>
             <a:pPr indent="0" marL="0">
@@ -9466,192 +10014,12 @@
             <a:r>
               <a:rPr lang="en-US" sz="1400" dirty="0">
                 <a:solidFill>
-                  <a:schemeClr val="tx1"/>
-                </a:solidFill>
-              </a:rPr>
-              <a:t>articles to a different bin</a:t>
-            </a:r>
-            <a:endParaRPr lang="en-US" sz="2000" dirty="0"/>
-          </a:p>
-        </p:txBody>
-      </p:sp>
-      <p:sp>
-        <p:nvSpPr>
-          <p:cNvPr id="11" name="Dont card 3"/>
-          <p:cNvSpPr/>
-          <p:nvPr/>
-        </p:nvSpPr>
-        <p:spPr>
-          <a:xfrm>
-            <a:off x="4114800" y="1325880"/>
-            <a:ext cx="1691640" cy="2194560"/>
-          </a:xfrm>
-          <a:prstGeom prst="roundRect">
-            <a:avLst>
-              <a:gd name="adj" fmla="val 5405"/>
-            </a:avLst>
-          </a:prstGeom>
-          <a:solidFill>
-            <a:srgbClr val="FBECEC"/>
-          </a:solidFill>
-          <a:ln/>
-        </p:spPr>
-      </p:sp>
-      <p:pic>
-        <p:nvPicPr>
-          <p:cNvPr id="12" name="Dont icon 3" descr="preencoded.png">    </p:cNvPr>
-          <p:cNvPicPr>
-            <a:picLocks noChangeAspect="1"/>
-          </p:cNvPicPr>
-          <p:nvPr/>
-        </p:nvPicPr>
-        <p:blipFill>
-          <a:blip r:embed="rId5"/>
-          <a:stretch>
-            <a:fillRect/>
-          </a:stretch>
-        </p:blipFill>
-        <p:spPr>
-          <a:xfrm>
-            <a:off x="4343400" y="1554480"/>
-            <a:ext cx="457200" cy="457200"/>
-          </a:xfrm>
-          <a:prstGeom prst="rect">
-            <a:avLst/>
-          </a:prstGeom>
-        </p:spPr>
-      </p:pic>
-      <p:pic>
-        <p:nvPicPr>
-          <p:cNvPr id="13" name="Ban icon 3" descr="preencoded.png">    </p:cNvPr>
-          <p:cNvPicPr>
-            <a:picLocks noChangeAspect="1"/>
-          </p:cNvPicPr>
-          <p:nvPr/>
-        </p:nvPicPr>
-        <p:blipFill>
-          <a:blip r:embed="rId6"/>
-          <a:stretch>
-            <a:fillRect/>
-          </a:stretch>
-        </p:blipFill>
-        <p:spPr>
-          <a:xfrm>
-            <a:off x="5212080" y="1554480"/>
-            <a:ext cx="365760" cy="365760"/>
-          </a:xfrm>
-          <a:prstGeom prst="rect">
-            <a:avLst/>
-          </a:prstGeom>
-        </p:spPr>
-      </p:pic>
-      <p:sp>
-        <p:nvSpPr>
-          <p:cNvPr id="14" name="Dont text 3"/>
-          <p:cNvSpPr txBox="1"/>
-          <p:nvPr/>
-        </p:nvSpPr>
-        <p:spPr>
-          <a:xfrm>
-            <a:off x="4343400" y="2194560"/>
-            <a:ext cx="1280160" cy="1234440"/>
-          </a:xfrm>
-          <a:prstGeom prst="rect">
-            <a:avLst/>
-          </a:prstGeom>
-          <a:noFill/>
-          <a:ln/>
-        </p:spPr>
-        <p:txBody>
-          <a:bodyPr wrap="square" lIns="0" tIns="0" rIns="0" bIns="0" rtlCol="0" anchor="t"/>
-          <a:lstStyle/>
-          <a:p>
-            <a:pPr indent="0" marL="0">
-              <a:buNone/>
-            </a:pPr>
-            <a:r>
-              <a:rPr lang="en-US" sz="2000" b="1" dirty="0">
-                <a:solidFill>
-                  <a:schemeClr val="accent3"/>
-                </a:solidFill>
-              </a:rPr>
-              <a:t>Remove</a:t>
-            </a:r>
-            <a:endParaRPr lang="en-US" sz="2000" dirty="0"/>
-          </a:p>
-          <a:p>
-            <a:pPr indent="0" marL="0">
-              <a:buNone/>
-            </a:pPr>
-            <a:r>
-              <a:rPr lang="en-US" sz="1400" dirty="0">
-                <a:solidFill>
-                  <a:schemeClr val="tx1"/>
-                </a:solidFill>
-              </a:rPr>
-              <a:t>any articles from bins</a:t>
-            </a:r>
-            <a:endParaRPr lang="en-US" sz="2000" dirty="0"/>
-          </a:p>
-        </p:txBody>
-      </p:sp>
-      <p:pic>
-        <p:nvPicPr>
-          <p:cNvPr id="15" name="Check icon" descr="preencoded.png">    </p:cNvPr>
-          <p:cNvPicPr>
-            <a:picLocks noChangeAspect="1"/>
-          </p:cNvPicPr>
-          <p:nvPr/>
-        </p:nvPicPr>
-        <p:blipFill>
-          <a:blip r:embed="rId7"/>
-          <a:stretch>
-            <a:fillRect/>
-          </a:stretch>
-        </p:blipFill>
-        <p:spPr>
-          <a:xfrm>
-            <a:off x="457200" y="3886200"/>
-            <a:ext cx="365760" cy="365760"/>
-          </a:xfrm>
-          <a:prstGeom prst="rect">
-            <a:avLst/>
-          </a:prstGeom>
-        </p:spPr>
-      </p:pic>
-      <p:sp>
-        <p:nvSpPr>
-          <p:cNvPr id="16" name="Do text"/>
-          <p:cNvSpPr txBox="1"/>
-          <p:nvPr/>
-        </p:nvSpPr>
-        <p:spPr>
-          <a:xfrm>
-            <a:off x="1005840" y="3776472"/>
-            <a:ext cx="4846320" cy="594360"/>
-          </a:xfrm>
-          <a:prstGeom prst="rect">
-            <a:avLst/>
-          </a:prstGeom>
-          <a:noFill/>
-          <a:ln/>
-        </p:spPr>
-        <p:txBody>
-          <a:bodyPr wrap="square" lIns="0" tIns="0" rIns="0" bIns="0" rtlCol="0" anchor="ctr"/>
-          <a:lstStyle/>
-          <a:p>
-            <a:pPr indent="0" marL="0">
-              <a:buNone/>
-            </a:pPr>
-            <a:r>
-              <a:rPr lang="en-US" sz="1600" b="1" dirty="0">
-                <a:solidFill>
-                  <a:schemeClr val="accent2"/>
-                </a:solidFill>
-              </a:rPr>
-              <a:t>FFF is only about organizing what is already in each bin.</a:t>
-            </a:r>
-            <a:endParaRPr lang="en-US" sz="1600" dirty="0"/>
+                  <a:schemeClr val="accent4"/>
+                </a:solidFill>
+              </a:rPr>
+              <a:t>After 1 minute, or once the face meets ROBOTSS</a:t>
+            </a:r>
+            <a:endParaRPr lang="en-US" sz="1700" dirty="0"/>
           </a:p>
         </p:txBody>
       </p:sp>
@@ -9712,7 +10080,7 @@
                   <a:schemeClr val="tx1"/>
                 </a:solidFill>
               </a:rPr>
-              <a:t>Then keep fixing as you go</a:t>
+              <a:t>During FFF, do NOT</a:t>
             </a:r>
             <a:endParaRPr lang="en-US" sz="2800" dirty="0"/>
           </a:p>
@@ -9720,29 +10088,29 @@
       </p:sp>
       <p:sp>
         <p:nvSpPr>
-          <p:cNvPr id="3" name="Quote card"/>
+          <p:cNvPr id="3" name="Dont card 1"/>
           <p:cNvSpPr/>
           <p:nvPr/>
         </p:nvSpPr>
         <p:spPr>
           <a:xfrm>
             <a:off x="457200" y="1325880"/>
-            <a:ext cx="5394960" cy="1188720"/>
+            <a:ext cx="1691640" cy="2194560"/>
           </a:xfrm>
           <a:prstGeom prst="roundRect">
             <a:avLst>
-              <a:gd name="adj" fmla="val 7692"/>
+              <a:gd name="adj" fmla="val 5405"/>
             </a:avLst>
           </a:prstGeom>
           <a:solidFill>
-            <a:schemeClr val="bg1"/>
+            <a:srgbClr val="FBECEC"/>
           </a:solidFill>
           <a:ln/>
         </p:spPr>
       </p:sp>
       <p:pic>
         <p:nvPicPr>
-          <p:cNvPr id="4" name="Redo icon" descr="preencoded.png">    </p:cNvPr>
+          <p:cNvPr id="4" name="Dont icon 1" descr="preencoded.png">    </p:cNvPr>
           <p:cNvPicPr>
             <a:picLocks noChangeAspect="1"/>
           </p:cNvPicPr>
@@ -9756,24 +10124,362 @@
         </p:blipFill>
         <p:spPr>
           <a:xfrm>
-            <a:off x="731520" y="1709928"/>
-            <a:ext cx="411480" cy="411480"/>
+            <a:off x="685800" y="1554480"/>
+            <a:ext cx="457200" cy="457200"/>
           </a:xfrm>
           <a:prstGeom prst="rect">
             <a:avLst/>
           </a:prstGeom>
         </p:spPr>
       </p:pic>
-      <p:sp>
-        <p:nvSpPr>
-          <p:cNvPr id="5" name="Quote"/>
+      <p:pic>
+        <p:nvPicPr>
+          <p:cNvPr id="5" name="Ban icon 1" descr="preencoded.png">    </p:cNvPr>
+          <p:cNvPicPr>
+            <a:picLocks noChangeAspect="1"/>
+          </p:cNvPicPr>
+          <p:nvPr/>
+        </p:nvPicPr>
+        <p:blipFill>
+          <a:blip r:embed="rId2"/>
+          <a:stretch>
+            <a:fillRect/>
+          </a:stretch>
+        </p:blipFill>
+        <p:spPr>
+          <a:xfrm>
+            <a:off x="1554480" y="1554480"/>
+            <a:ext cx="365760" cy="365760"/>
+          </a:xfrm>
+          <a:prstGeom prst="rect">
+            <a:avLst/>
+          </a:prstGeom>
+        </p:spPr>
+      </p:pic>
+      <p:sp>
+        <p:nvSpPr>
+          <p:cNvPr id="6" name="Dont text 1"/>
           <p:cNvSpPr txBox="1"/>
           <p:nvPr/>
         </p:nvSpPr>
         <p:spPr>
           <a:xfrm>
-            <a:off x="1371600" y="1325880"/>
-            <a:ext cx="4297680" cy="1188720"/>
+            <a:off x="685800" y="2194560"/>
+            <a:ext cx="1280160" cy="1234440"/>
+          </a:xfrm>
+          <a:prstGeom prst="rect">
+            <a:avLst/>
+          </a:prstGeom>
+          <a:noFill/>
+          <a:ln/>
+        </p:spPr>
+        <p:txBody>
+          <a:bodyPr wrap="square" lIns="0" tIns="0" rIns="0" bIns="0" rtlCol="0" anchor="t"/>
+          <a:lstStyle/>
+          <a:p>
+            <a:pPr indent="0" marL="0">
+              <a:buNone/>
+            </a:pPr>
+            <a:r>
+              <a:rPr lang="en-US" sz="2000" b="1" dirty="0">
+                <a:solidFill>
+                  <a:schemeClr val="accent3"/>
+                </a:solidFill>
+              </a:rPr>
+              <a:t>Scan</a:t>
+            </a:r>
+            <a:endParaRPr lang="en-US" sz="2000" dirty="0"/>
+          </a:p>
+          <a:p>
+            <a:pPr indent="0" marL="0">
+              <a:buNone/>
+            </a:pPr>
+            <a:r>
+              <a:rPr lang="en-US" sz="1400" dirty="0">
+                <a:solidFill>
+                  <a:schemeClr val="tx1"/>
+                </a:solidFill>
+              </a:rPr>
+              <a:t>any articles in totes or bins</a:t>
+            </a:r>
+            <a:endParaRPr lang="en-US" sz="2000" dirty="0"/>
+          </a:p>
+        </p:txBody>
+      </p:sp>
+      <p:sp>
+        <p:nvSpPr>
+          <p:cNvPr id="7" name="Dont card 2"/>
+          <p:cNvSpPr/>
+          <p:nvPr/>
+        </p:nvSpPr>
+        <p:spPr>
+          <a:xfrm>
+            <a:off x="2286000" y="1325880"/>
+            <a:ext cx="1691640" cy="2194560"/>
+          </a:xfrm>
+          <a:prstGeom prst="roundRect">
+            <a:avLst>
+              <a:gd name="adj" fmla="val 5405"/>
+            </a:avLst>
+          </a:prstGeom>
+          <a:solidFill>
+            <a:srgbClr val="FBECEC"/>
+          </a:solidFill>
+          <a:ln/>
+        </p:spPr>
+      </p:sp>
+      <p:pic>
+        <p:nvPicPr>
+          <p:cNvPr id="8" name="Dont icon 2" descr="preencoded.png">    </p:cNvPr>
+          <p:cNvPicPr>
+            <a:picLocks noChangeAspect="1"/>
+          </p:cNvPicPr>
+          <p:nvPr/>
+        </p:nvPicPr>
+        <p:blipFill>
+          <a:blip r:embed="rId3"/>
+          <a:stretch>
+            <a:fillRect/>
+          </a:stretch>
+        </p:blipFill>
+        <p:spPr>
+          <a:xfrm>
+            <a:off x="2514600" y="1554480"/>
+            <a:ext cx="457200" cy="457200"/>
+          </a:xfrm>
+          <a:prstGeom prst="rect">
+            <a:avLst/>
+          </a:prstGeom>
+        </p:spPr>
+      </p:pic>
+      <p:pic>
+        <p:nvPicPr>
+          <p:cNvPr id="9" name="Ban icon 2" descr="preencoded.png">    </p:cNvPr>
+          <p:cNvPicPr>
+            <a:picLocks noChangeAspect="1"/>
+          </p:cNvPicPr>
+          <p:nvPr/>
+        </p:nvPicPr>
+        <p:blipFill>
+          <a:blip r:embed="rId4"/>
+          <a:stretch>
+            <a:fillRect/>
+          </a:stretch>
+        </p:blipFill>
+        <p:spPr>
+          <a:xfrm>
+            <a:off x="3383280" y="1554480"/>
+            <a:ext cx="365760" cy="365760"/>
+          </a:xfrm>
+          <a:prstGeom prst="rect">
+            <a:avLst/>
+          </a:prstGeom>
+        </p:spPr>
+      </p:pic>
+      <p:sp>
+        <p:nvSpPr>
+          <p:cNvPr id="10" name="Dont text 2"/>
+          <p:cNvSpPr txBox="1"/>
+          <p:nvPr/>
+        </p:nvSpPr>
+        <p:spPr>
+          <a:xfrm>
+            <a:off x="2514600" y="2194560"/>
+            <a:ext cx="1280160" cy="1234440"/>
+          </a:xfrm>
+          <a:prstGeom prst="rect">
+            <a:avLst/>
+          </a:prstGeom>
+          <a:noFill/>
+          <a:ln/>
+        </p:spPr>
+        <p:txBody>
+          <a:bodyPr wrap="square" lIns="0" tIns="0" rIns="0" bIns="0" rtlCol="0" anchor="t"/>
+          <a:lstStyle/>
+          <a:p>
+            <a:pPr indent="0" marL="0">
+              <a:buNone/>
+            </a:pPr>
+            <a:r>
+              <a:rPr lang="en-US" sz="2000" b="1" dirty="0">
+                <a:solidFill>
+                  <a:schemeClr val="accent3"/>
+                </a:solidFill>
+              </a:rPr>
+              <a:t>Move</a:t>
+            </a:r>
+            <a:endParaRPr lang="en-US" sz="2000" dirty="0"/>
+          </a:p>
+          <a:p>
+            <a:pPr indent="0" marL="0">
+              <a:buNone/>
+            </a:pPr>
+            <a:r>
+              <a:rPr lang="en-US" sz="1400" dirty="0">
+                <a:solidFill>
+                  <a:schemeClr val="tx1"/>
+                </a:solidFill>
+              </a:rPr>
+              <a:t>articles to a different bin</a:t>
+            </a:r>
+            <a:endParaRPr lang="en-US" sz="2000" dirty="0"/>
+          </a:p>
+        </p:txBody>
+      </p:sp>
+      <p:sp>
+        <p:nvSpPr>
+          <p:cNvPr id="11" name="Dont card 3"/>
+          <p:cNvSpPr/>
+          <p:nvPr/>
+        </p:nvSpPr>
+        <p:spPr>
+          <a:xfrm>
+            <a:off x="4114800" y="1325880"/>
+            <a:ext cx="1691640" cy="2194560"/>
+          </a:xfrm>
+          <a:prstGeom prst="roundRect">
+            <a:avLst>
+              <a:gd name="adj" fmla="val 5405"/>
+            </a:avLst>
+          </a:prstGeom>
+          <a:solidFill>
+            <a:srgbClr val="FBECEC"/>
+          </a:solidFill>
+          <a:ln/>
+        </p:spPr>
+      </p:sp>
+      <p:pic>
+        <p:nvPicPr>
+          <p:cNvPr id="12" name="Dont icon 3" descr="preencoded.png">    </p:cNvPr>
+          <p:cNvPicPr>
+            <a:picLocks noChangeAspect="1"/>
+          </p:cNvPicPr>
+          <p:nvPr/>
+        </p:nvPicPr>
+        <p:blipFill>
+          <a:blip r:embed="rId5"/>
+          <a:stretch>
+            <a:fillRect/>
+          </a:stretch>
+        </p:blipFill>
+        <p:spPr>
+          <a:xfrm>
+            <a:off x="4343400" y="1554480"/>
+            <a:ext cx="457200" cy="457200"/>
+          </a:xfrm>
+          <a:prstGeom prst="rect">
+            <a:avLst/>
+          </a:prstGeom>
+        </p:spPr>
+      </p:pic>
+      <p:pic>
+        <p:nvPicPr>
+          <p:cNvPr id="13" name="Ban icon 3" descr="preencoded.png">    </p:cNvPr>
+          <p:cNvPicPr>
+            <a:picLocks noChangeAspect="1"/>
+          </p:cNvPicPr>
+          <p:nvPr/>
+        </p:nvPicPr>
+        <p:blipFill>
+          <a:blip r:embed="rId6"/>
+          <a:stretch>
+            <a:fillRect/>
+          </a:stretch>
+        </p:blipFill>
+        <p:spPr>
+          <a:xfrm>
+            <a:off x="5212080" y="1554480"/>
+            <a:ext cx="365760" cy="365760"/>
+          </a:xfrm>
+          <a:prstGeom prst="rect">
+            <a:avLst/>
+          </a:prstGeom>
+        </p:spPr>
+      </p:pic>
+      <p:sp>
+        <p:nvSpPr>
+          <p:cNvPr id="14" name="Dont text 3"/>
+          <p:cNvSpPr txBox="1"/>
+          <p:nvPr/>
+        </p:nvSpPr>
+        <p:spPr>
+          <a:xfrm>
+            <a:off x="4343400" y="2194560"/>
+            <a:ext cx="1280160" cy="1234440"/>
+          </a:xfrm>
+          <a:prstGeom prst="rect">
+            <a:avLst/>
+          </a:prstGeom>
+          <a:noFill/>
+          <a:ln/>
+        </p:spPr>
+        <p:txBody>
+          <a:bodyPr wrap="square" lIns="0" tIns="0" rIns="0" bIns="0" rtlCol="0" anchor="t"/>
+          <a:lstStyle/>
+          <a:p>
+            <a:pPr indent="0" marL="0">
+              <a:buNone/>
+            </a:pPr>
+            <a:r>
+              <a:rPr lang="en-US" sz="2000" b="1" dirty="0">
+                <a:solidFill>
+                  <a:schemeClr val="accent3"/>
+                </a:solidFill>
+              </a:rPr>
+              <a:t>Remove</a:t>
+            </a:r>
+            <a:endParaRPr lang="en-US" sz="2000" dirty="0"/>
+          </a:p>
+          <a:p>
+            <a:pPr indent="0" marL="0">
+              <a:buNone/>
+            </a:pPr>
+            <a:r>
+              <a:rPr lang="en-US" sz="1400" dirty="0">
+                <a:solidFill>
+                  <a:schemeClr val="tx1"/>
+                </a:solidFill>
+              </a:rPr>
+              <a:t>any articles from bins</a:t>
+            </a:r>
+            <a:endParaRPr lang="en-US" sz="2000" dirty="0"/>
+          </a:p>
+        </p:txBody>
+      </p:sp>
+      <p:pic>
+        <p:nvPicPr>
+          <p:cNvPr id="15" name="Check icon" descr="preencoded.png">    </p:cNvPr>
+          <p:cNvPicPr>
+            <a:picLocks noChangeAspect="1"/>
+          </p:cNvPicPr>
+          <p:nvPr/>
+        </p:nvPicPr>
+        <p:blipFill>
+          <a:blip r:embed="rId7"/>
+          <a:stretch>
+            <a:fillRect/>
+          </a:stretch>
+        </p:blipFill>
+        <p:spPr>
+          <a:xfrm>
+            <a:off x="457200" y="3886200"/>
+            <a:ext cx="365760" cy="365760"/>
+          </a:xfrm>
+          <a:prstGeom prst="rect">
+            <a:avLst/>
+          </a:prstGeom>
+        </p:spPr>
+      </p:pic>
+      <p:sp>
+        <p:nvSpPr>
+          <p:cNvPr id="16" name="Do text"/>
+          <p:cNvSpPr txBox="1"/>
+          <p:nvPr/>
+        </p:nvSpPr>
+        <p:spPr>
+          <a:xfrm>
+            <a:off x="1005840" y="3776472"/>
+            <a:ext cx="4846320" cy="594360"/>
           </a:xfrm>
           <a:prstGeom prst="rect">
             <a:avLst/>
@@ -9789,164 +10495,14 @@
               <a:buNone/>
             </a:pPr>
             <a:r>
-              <a:rPr lang="en-US" sz="1800" b="1" dirty="0">
-                <a:solidFill>
-                  <a:schemeClr val="tx1"/>
-                </a:solidFill>
-              </a:rPr>
-              <a:t>Leave every bin better than you found it.</a:t>
-            </a:r>
-            <a:endParaRPr lang="en-US" sz="1800" dirty="0"/>
-          </a:p>
-          <a:p>
-            <a:pPr indent="0" marL="0">
-              <a:buNone/>
-            </a:pPr>
-            <a:r>
-              <a:rPr lang="en-US" sz="1400" dirty="0">
-                <a:solidFill>
-                  <a:schemeClr val="accent4"/>
-                </a:solidFill>
-              </a:rPr>
-              <a:t>Whenever your hands are in a bin, fix its etiquette.</a:t>
-            </a:r>
-            <a:endParaRPr lang="en-US" sz="1800" dirty="0"/>
-          </a:p>
-        </p:txBody>
-      </p:sp>
-      <p:sp>
-        <p:nvSpPr>
-          <p:cNvPr id="6" name="Stat 1"/>
-          <p:cNvSpPr txBox="1"/>
-          <p:nvPr/>
-        </p:nvSpPr>
-        <p:spPr>
-          <a:xfrm>
-            <a:off x="457200" y="2743200"/>
-            <a:ext cx="2606040" cy="1463040"/>
-          </a:xfrm>
-          <a:prstGeom prst="rect">
-            <a:avLst/>
-          </a:prstGeom>
-          <a:noFill/>
-          <a:ln/>
-        </p:spPr>
-        <p:txBody>
-          <a:bodyPr wrap="square" lIns="0" tIns="0" rIns="0" bIns="0" rtlCol="0" anchor="t"/>
-          <a:lstStyle/>
-          <a:p>
-            <a:pPr indent="0" marL="0">
-              <a:buNone/>
-            </a:pPr>
-            <a:r>
-              <a:rPr lang="en-US" sz="5400" b="1" dirty="0">
-                <a:solidFill>
-                  <a:schemeClr val="accent1"/>
-                </a:solidFill>
-              </a:rPr>
-              <a:t>15</a:t>
-            </a:r>
-            <a:endParaRPr lang="en-US" sz="5400" dirty="0"/>
-          </a:p>
-          <a:p>
-            <a:pPr indent="0" marL="0">
-              <a:buNone/>
-            </a:pPr>
-            <a:r>
-              <a:rPr lang="en-US" sz="1500" dirty="0">
-                <a:solidFill>
-                  <a:schemeClr val="accent4"/>
-                </a:solidFill>
-              </a:rPr>
-              <a:t>FFF audits per shift</a:t>
-            </a:r>
-            <a:endParaRPr lang="en-US" sz="5400" dirty="0"/>
-          </a:p>
-        </p:txBody>
-      </p:sp>
-      <p:sp>
-        <p:nvSpPr>
-          <p:cNvPr id="7" name="Stat 2"/>
-          <p:cNvSpPr txBox="1"/>
-          <p:nvPr/>
-        </p:nvSpPr>
-        <p:spPr>
-          <a:xfrm>
-            <a:off x="3246120" y="2743200"/>
-            <a:ext cx="2606040" cy="1463040"/>
-          </a:xfrm>
-          <a:prstGeom prst="rect">
-            <a:avLst/>
-          </a:prstGeom>
-          <a:noFill/>
-          <a:ln/>
-        </p:spPr>
-        <p:txBody>
-          <a:bodyPr wrap="square" lIns="0" tIns="0" rIns="0" bIns="0" rtlCol="0" anchor="t"/>
-          <a:lstStyle/>
-          <a:p>
-            <a:pPr indent="0" marL="0">
-              <a:buNone/>
-            </a:pPr>
-            <a:r>
-              <a:rPr lang="en-US" sz="5400" b="1" dirty="0">
-                <a:solidFill>
-                  <a:schemeClr val="accent1"/>
-                </a:solidFill>
-              </a:rPr>
-              <a:t>90%+</a:t>
-            </a:r>
-            <a:endParaRPr lang="en-US" sz="5400" dirty="0"/>
-          </a:p>
-          <a:p>
-            <a:pPr indent="0" marL="0">
-              <a:buNone/>
-            </a:pPr>
-            <a:r>
-              <a:rPr lang="en-US" sz="1500" dirty="0">
-                <a:solidFill>
-                  <a:schemeClr val="accent4"/>
-                </a:solidFill>
-              </a:rPr>
-              <a:t>daily compliance target</a:t>
-            </a:r>
-            <a:endParaRPr lang="en-US" sz="5400" dirty="0"/>
-          </a:p>
-        </p:txBody>
-      </p:sp>
-      <p:sp>
-        <p:nvSpPr>
-          <p:cNvPr id="8" name="Caption"/>
-          <p:cNvSpPr txBox="1"/>
-          <p:nvPr/>
-        </p:nvSpPr>
-        <p:spPr>
-          <a:xfrm>
-            <a:off x="457200" y="4343400"/>
-            <a:ext cx="5394960" cy="320040"/>
-          </a:xfrm>
-          <a:prstGeom prst="rect">
-            <a:avLst/>
-          </a:prstGeom>
-          <a:noFill/>
-          <a:ln/>
-        </p:spPr>
-        <p:txBody>
-          <a:bodyPr wrap="square" lIns="0" tIns="0" rIns="0" bIns="0" rtlCol="0" anchor="ctr"/>
-          <a:lstStyle/>
-          <a:p>
-            <a:pPr indent="0" marL="0">
-              <a:buNone/>
-            </a:pPr>
-            <a:r>
-              <a:rPr lang="en-US" sz="1200" dirty="0">
-                <a:solidFill>
-                  <a:srgbClr val="7A8795"/>
-                </a:solidFill>
-              </a:rPr>
-              <a:t>Audited by ICQA, Ops and L&amp;D, with feedback on the spot</a:t>
-            </a:r>
-            <a:endParaRPr lang="en-US" sz="1200" dirty="0"/>
+              <a:rPr lang="en-US" sz="1600" b="1" dirty="0">
+                <a:solidFill>
+                  <a:schemeClr val="accent2"/>
+                </a:solidFill>
+              </a:rPr>
+              <a:t>FFF is only about organizing what is already in each bin.</a:t>
+            </a:r>
+            <a:endParaRPr lang="en-US" sz="1600" dirty="0"/>
           </a:p>
         </p:txBody>
       </p:sp>
